--- a/presentation.pptx
+++ b/presentation.pptx
@@ -16,6 +16,7 @@
     <p:sldId id="264" r:id="rId10"/>
     <p:sldId id="265" r:id="rId11"/>
     <p:sldId id="266" r:id="rId12"/>
+    <p:sldId id="271" r:id="rId22"/>
     <p:sldId id="267" r:id="rId13"/>
     <p:sldId id="268" r:id="rId14"/>
     <p:sldId id="269" r:id="rId15"/>
@@ -2140,6 +2141,10 @@
           </a:solidFill>
           <a:ln/>
         </p:spPr>
+        <p:txBody>
+          <a:bodyPr/>
+          <a:p/>
+        </p:txBody>
       </p:sp>
       <p:sp>
         <p:nvSpPr>
@@ -2221,14 +2226,14 @@
       </p:sp>
       <p:sp>
         <p:nvSpPr>
-          <p:cNvPr id="5" name="Text 3"/>
-          <p:cNvSpPr/>
-          <p:nvPr/>
-        </p:nvSpPr>
-        <p:spPr>
-          <a:xfrm>
-            <a:off x="841248" y="4114800"/>
-            <a:ext cx="10058400" cy="365760"/>
+          <p:cNvPr id="6" name="Text 4"/>
+          <p:cNvSpPr/>
+          <p:nvPr/>
+        </p:nvSpPr>
+        <p:spPr>
+          <a:xfrm>
+            <a:off x="841248" y="5943600"/>
+            <a:ext cx="7315200" cy="365760"/>
           </a:xfrm>
           <a:prstGeom prst="rect">
             <a:avLst/>
@@ -2244,70 +2249,62 @@
               <a:buNone/>
             </a:pPr>
             <a:r>
-              <a:rPr lang="en-US" sz="1400" dirty="0">
-                <a:solidFill>
-                  <a:srgbClr val="9FB6C2"/>
+              <a:rPr lang="en-US" sz="1300" i="1" dirty="0">
+                <a:solidFill>
+                  <a:srgbClr val="7E94A0"/>
                 </a:solidFill>
                 <a:latin typeface="Calibri" pitchFamily="34" charset="0"/>
                 <a:ea typeface="Calibri" pitchFamily="34" charset="-122"/>
                 <a:cs typeface="Calibri" pitchFamily="34" charset="-120"/>
               </a:rPr>
-              <a:t>Train / validate on Fake-or-Real (FoR)   </a:t>
-            </a:r>
-            <a:pPr indent="0" marL="0">
-              <a:buNone/>
-            </a:pPr>
-            <a:r>
-              <a:rPr lang="en-US" sz="1400" b="1" dirty="0">
-                <a:solidFill>
-                  <a:srgbClr val="0E9594"/>
-                </a:solidFill>
-                <a:latin typeface="Calibri" pitchFamily="34" charset="0"/>
-                <a:ea typeface="Calibri" pitchFamily="34" charset="-122"/>
-                <a:cs typeface="Calibri" pitchFamily="34" charset="-120"/>
-              </a:rPr>
-              <a:t>·   Test on In-the-Wild (ITW)</a:t>
-            </a:r>
-            <a:endParaRPr lang="en-US" sz="1400" dirty="0"/>
-          </a:p>
-        </p:txBody>
-      </p:sp>
-      <p:sp>
-        <p:nvSpPr>
-          <p:cNvPr id="6" name="Text 4"/>
-          <p:cNvSpPr/>
-          <p:nvPr/>
-        </p:nvSpPr>
-        <p:spPr>
-          <a:xfrm>
-            <a:off x="841248" y="5943600"/>
-            <a:ext cx="7315200" cy="365760"/>
-          </a:xfrm>
-          <a:prstGeom prst="rect">
-            <a:avLst/>
-          </a:prstGeom>
-          <a:noFill/>
-          <a:ln/>
-        </p:spPr>
-        <p:txBody>
-          <a:bodyPr wrap="square" lIns="0" tIns="0" rIns="0" bIns="0" rtlCol="0" anchor="ctr"/>
-          <a:lstStyle/>
-          <a:p>
-            <a:pPr indent="0" marL="0">
-              <a:buNone/>
-            </a:pPr>
-            <a:r>
-              <a:rPr lang="en-US" sz="1300" i="1" dirty="0">
+              <a:t>Deep Learning course project</a:t>
+            </a:r>
+            <a:endParaRPr lang="en-US" sz="1300" dirty="0"/>
+          </a:p>
+        </p:txBody>
+      </p:sp>
+      <p:sp>
+        <p:nvSpPr>
+          <p:cNvPr id="7" name="TextBox 6"/>
+          <p:cNvSpPr txBox="1"/>
+          <p:nvPr/>
+        </p:nvSpPr>
+        <p:spPr>
+          <a:xfrm>
+            <a:off x="841248" y="6320000"/>
+            <a:ext cx="10058400" cy="500000"/>
+          </a:xfrm>
+          <a:prstGeom prst="rect">
+            <a:avLst/>
+          </a:prstGeom>
+          <a:noFill/>
+        </p:spPr>
+        <p:txBody>
+          <a:bodyPr wrap="none">
+            <a:spAutoFit/>
+          </a:bodyPr>
+          <a:lstStyle/>
+          <a:p>
+            <a:pPr algn="l"/>
+            <a:r>
+              <a:rPr sz="1100" b="0">
                 <a:solidFill>
                   <a:srgbClr val="7E94A0"/>
                 </a:solidFill>
-                <a:latin typeface="Calibri" pitchFamily="34" charset="0"/>
-                <a:ea typeface="Calibri" pitchFamily="34" charset="-122"/>
-                <a:cs typeface="Calibri" pitchFamily="34" charset="-120"/>
-              </a:rPr>
-              <a:t>Deep Learning course project</a:t>
-            </a:r>
-            <a:endParaRPr lang="en-US" sz="1300" dirty="0"/>
+              </a:rPr>
+              <a:t>George Nazos  MTN2519     |     Konstantinos Kaimakis  MTN2508</a:t>
+            </a:r>
+          </a:p>
+          <a:p>
+            <a:pPr algn="l"/>
+            <a:r>
+              <a:rPr sz="1000" b="0">
+                <a:solidFill>
+                  <a:srgbClr val="7E94A0"/>
+                </a:solidFill>
+              </a:rPr>
+              <a:t>MSc Artificial Intelligence  ·  NSCR Demokritos &amp; UNIPI</a:t>
+            </a:r>
           </a:p>
         </p:txBody>
       </p:sp>
@@ -2362,6 +2359,10 @@
           </a:solidFill>
           <a:ln/>
         </p:spPr>
+        <p:txBody>
+          <a:bodyPr/>
+          <a:p/>
+        </p:txBody>
       </p:sp>
       <p:sp>
         <p:nvSpPr>
@@ -2441,98 +2442,6 @@
           </a:p>
         </p:txBody>
       </p:sp>
-      <p:pic>
-        <p:nvPicPr>
-          <p:cNvPr id="5" name="Image 0" descr="/sessions/modest-trusting-fermi/mnt/outputs/slide_assets/probe_umap_20260620_170514.png">    </p:cNvPr>
-          <p:cNvPicPr>
-            <a:picLocks noChangeAspect="1"/>
-          </p:cNvPicPr>
-          <p:nvPr/>
-        </p:nvPicPr>
-        <p:blipFill>
-          <a:blip r:embed="rId1"/>
-          <a:srcRect l="0" r="0" t="0" b="0"/>
-          <a:stretch/>
-        </p:blipFill>
-        <p:spPr>
-          <a:xfrm>
-            <a:off x="1005840" y="1600200"/>
-            <a:ext cx="2743200" cy="2240280"/>
-          </a:xfrm>
-          <a:prstGeom prst="rect">
-            <a:avLst/>
-          </a:prstGeom>
-        </p:spPr>
-      </p:pic>
-      <p:pic>
-        <p:nvPicPr>
-          <p:cNvPr id="6" name="Image 1" descr="/sessions/modest-trusting-fermi/mnt/outputs/slide_assets/probe_scorehist_20260620_170514.png">    </p:cNvPr>
-          <p:cNvPicPr>
-            <a:picLocks noChangeAspect="1"/>
-          </p:cNvPicPr>
-          <p:nvPr/>
-        </p:nvPicPr>
-        <p:blipFill>
-          <a:blip r:embed="rId2"/>
-          <a:srcRect l="0" r="0" t="0" b="0"/>
-          <a:stretch/>
-        </p:blipFill>
-        <p:spPr>
-          <a:xfrm>
-            <a:off x="4023360" y="1920240"/>
-            <a:ext cx="3840480" cy="1554480"/>
-          </a:xfrm>
-          <a:prstGeom prst="rect">
-            <a:avLst/>
-          </a:prstGeom>
-        </p:spPr>
-      </p:pic>
-      <p:pic>
-        <p:nvPicPr>
-          <p:cNvPr id="7" name="Image 2" descr="/sessions/modest-trusting-fermi/mnt/outputs/slide_assets/umap_20260620_160154.png">    </p:cNvPr>
-          <p:cNvPicPr>
-            <a:picLocks noChangeAspect="1"/>
-          </p:cNvPicPr>
-          <p:nvPr/>
-        </p:nvPicPr>
-        <p:blipFill>
-          <a:blip r:embed="rId3"/>
-          <a:srcRect l="0" r="0" t="0" b="0"/>
-          <a:stretch/>
-        </p:blipFill>
-        <p:spPr>
-          <a:xfrm>
-            <a:off x="1005840" y="3977640"/>
-            <a:ext cx="2743200" cy="2240280"/>
-          </a:xfrm>
-          <a:prstGeom prst="rect">
-            <a:avLst/>
-          </a:prstGeom>
-        </p:spPr>
-      </p:pic>
-      <p:pic>
-        <p:nvPicPr>
-          <p:cNvPr id="8" name="Image 3" descr="/sessions/modest-trusting-fermi/mnt/outputs/slide_assets/scorehist_20260620_160154.png">    </p:cNvPr>
-          <p:cNvPicPr>
-            <a:picLocks noChangeAspect="1"/>
-          </p:cNvPicPr>
-          <p:nvPr/>
-        </p:nvPicPr>
-        <p:blipFill>
-          <a:blip r:embed="rId4"/>
-          <a:srcRect l="0" r="0" t="0" b="0"/>
-          <a:stretch/>
-        </p:blipFill>
-        <p:spPr>
-          <a:xfrm>
-            <a:off x="4023360" y="4297680"/>
-            <a:ext cx="3840480" cy="1554480"/>
-          </a:xfrm>
-          <a:prstGeom prst="rect">
-            <a:avLst/>
-          </a:prstGeom>
-        </p:spPr>
-      </p:pic>
       <p:sp>
         <p:nvSpPr>
           <p:cNvPr id="9" name="Text 3"/>
@@ -2771,6 +2680,102 @@
           </a:p>
         </p:txBody>
       </p:sp>
+      <p:pic>
+        <p:nvPicPr>
+          <p:cNvPr id="17" name="Picture 16" descr="image.png"/>
+          <p:cNvPicPr>
+            <a:picLocks noChangeAspect="1"/>
+          </p:cNvPicPr>
+          <p:nvPr/>
+        </p:nvPicPr>
+        <p:blipFill>
+          <a:blip r:embed="rId7"/>
+          <a:stretch>
+            <a:fillRect/>
+          </a:stretch>
+        </p:blipFill>
+        <p:spPr>
+          <a:xfrm>
+            <a:off x="1005840" y="1600200"/>
+            <a:ext cx="2743200" cy="2240280"/>
+          </a:xfrm>
+          <a:prstGeom prst="rect">
+            <a:avLst/>
+          </a:prstGeom>
+        </p:spPr>
+      </p:pic>
+      <p:pic>
+        <p:nvPicPr>
+          <p:cNvPr id="18" name="Picture 17" descr="image.png"/>
+          <p:cNvPicPr>
+            <a:picLocks noChangeAspect="1"/>
+          </p:cNvPicPr>
+          <p:nvPr/>
+        </p:nvPicPr>
+        <p:blipFill>
+          <a:blip r:embed="rId3"/>
+          <a:stretch>
+            <a:fillRect/>
+          </a:stretch>
+        </p:blipFill>
+        <p:spPr>
+          <a:xfrm>
+            <a:off x="4023360" y="1920240"/>
+            <a:ext cx="3840480" cy="1554480"/>
+          </a:xfrm>
+          <a:prstGeom prst="rect">
+            <a:avLst/>
+          </a:prstGeom>
+        </p:spPr>
+      </p:pic>
+      <p:pic>
+        <p:nvPicPr>
+          <p:cNvPr id="19" name="Picture 18" descr="image.png"/>
+          <p:cNvPicPr>
+            <a:picLocks noChangeAspect="1"/>
+          </p:cNvPicPr>
+          <p:nvPr/>
+        </p:nvPicPr>
+        <p:blipFill>
+          <a:blip r:embed="rId8"/>
+          <a:stretch>
+            <a:fillRect/>
+          </a:stretch>
+        </p:blipFill>
+        <p:spPr>
+          <a:xfrm>
+            <a:off x="1005840" y="3977640"/>
+            <a:ext cx="2743200" cy="2240280"/>
+          </a:xfrm>
+          <a:prstGeom prst="rect">
+            <a:avLst/>
+          </a:prstGeom>
+        </p:spPr>
+      </p:pic>
+      <p:pic>
+        <p:nvPicPr>
+          <p:cNvPr id="20" name="Picture 19" descr="image.png"/>
+          <p:cNvPicPr>
+            <a:picLocks noChangeAspect="1"/>
+          </p:cNvPicPr>
+          <p:nvPr/>
+        </p:nvPicPr>
+        <p:blipFill>
+          <a:blip r:embed="rId1"/>
+          <a:stretch>
+            <a:fillRect/>
+          </a:stretch>
+        </p:blipFill>
+        <p:spPr>
+          <a:xfrm>
+            <a:off x="4023360" y="4297680"/>
+            <a:ext cx="3840480" cy="1554480"/>
+          </a:xfrm>
+          <a:prstGeom prst="rect">
+            <a:avLst/>
+          </a:prstGeom>
+        </p:spPr>
+      </p:pic>
     </p:spTree>
   </p:cSld>
   <p:clrMapOvr>
@@ -2822,6 +2827,10 @@
           </a:solidFill>
           <a:ln/>
         </p:spPr>
+        <p:txBody>
+          <a:bodyPr/>
+          <a:p/>
+        </p:txBody>
       </p:sp>
       <p:sp>
         <p:nvSpPr>
@@ -2901,29 +2910,6 @@
           </a:p>
         </p:txBody>
       </p:sp>
-      <p:pic>
-        <p:nvPicPr>
-          <p:cNvPr id="5" name="Image 0" descr="/sessions/modest-trusting-fermi/mnt/outputs/slide_assets/cross_model.png">    </p:cNvPr>
-          <p:cNvPicPr>
-            <a:picLocks noChangeAspect="1"/>
-          </p:cNvPicPr>
-          <p:nvPr/>
-        </p:nvPicPr>
-        <p:blipFill>
-          <a:blip r:embed="rId1"/>
-          <a:srcRect l="0" r="0" t="0" b="0"/>
-          <a:stretch/>
-        </p:blipFill>
-        <p:spPr>
-          <a:xfrm>
-            <a:off x="731520" y="1691640"/>
-            <a:ext cx="7315200" cy="4114800"/>
-          </a:xfrm>
-          <a:prstGeom prst="rect">
-            <a:avLst/>
-          </a:prstGeom>
-        </p:spPr>
-      </p:pic>
       <p:sp>
         <p:nvSpPr>
           <p:cNvPr id="6" name="Text 3"/>
@@ -3087,6 +3073,30 @@
           </a:p>
         </p:txBody>
       </p:sp>
+      <p:pic>
+        <p:nvPicPr>
+          <p:cNvPr id="9" name="Picture 8" descr="fig_results_comparison.png"/>
+          <p:cNvPicPr>
+            <a:picLocks noChangeAspect="1"/>
+          </p:cNvPicPr>
+          <p:nvPr/>
+        </p:nvPicPr>
+        <p:blipFill>
+          <a:blip r:embed="rId4"/>
+          <a:stretch>
+            <a:fillRect/>
+          </a:stretch>
+        </p:blipFill>
+        <p:spPr>
+          <a:xfrm>
+            <a:off x="731520" y="1691640"/>
+            <a:ext cx="7315200" cy="4114800"/>
+          </a:xfrm>
+          <a:prstGeom prst="rect">
+            <a:avLst/>
+          </a:prstGeom>
+        </p:spPr>
+      </p:pic>
     </p:spTree>
   </p:cSld>
   <p:clrMapOvr>
@@ -3138,6 +3148,10 @@
           </a:solidFill>
           <a:ln/>
         </p:spPr>
+        <p:txBody>
+          <a:bodyPr/>
+          <a:p/>
+        </p:txBody>
       </p:sp>
       <p:sp>
         <p:nvSpPr>
@@ -3211,7 +3225,7 @@
                 <a:ea typeface="Trebuchet MS" pitchFamily="34" charset="-122"/>
                 <a:cs typeface="Trebuchet MS" pitchFamily="34" charset="-120"/>
               </a:rPr>
-              <a:t>A high AUC does not mean a usable detector</a:t>
+              <a:t>High AUC = good ranking — but the default threshold may need calibration</a:t>
             </a:r>
             <a:endParaRPr lang="en-US" sz="2800" dirty="0"/>
           </a:p>
@@ -3250,7 +3264,7 @@
                 <a:ea typeface="Calibri" pitchFamily="34" charset="-122"/>
                 <a:cs typeface="Calibri" pitchFamily="34" charset="-120"/>
               </a:rPr>
-              <a:t>On the imbalanced ITW set, weak models ride the 'real' majority to passable accuracy while missing most fakes. Fake-class recall exposes this.</a:t>
+              <a:t>AUC measures ranking quality (threshold-free). Low fake-recall at the default 0.5 threshold is a calibration problem, not a modelling failure — it can be fixed by tuning the threshold. A low-AUC model cannot be rescued by calibration alone.</a:t>
             </a:r>
             <a:endParaRPr lang="en-US" sz="1600" dirty="0"/>
           </a:p>
@@ -3258,682 +3272,823 @@
       </p:sp>
       <p:sp>
         <p:nvSpPr>
-          <p:cNvPr id="6" name="Shape 4"/>
+          <p:cNvPr id="21" name="Text 19"/>
+          <p:cNvSpPr/>
+          <p:nvPr/>
+        </p:nvSpPr>
+        <p:spPr>
+          <a:xfrm>
+            <a:off x="822960" y="4617720"/>
+            <a:ext cx="10515600" cy="365760"/>
+          </a:xfrm>
+          <a:prstGeom prst="rect">
+            <a:avLst/>
+          </a:prstGeom>
+          <a:noFill/>
+          <a:ln/>
+        </p:spPr>
+        <p:txBody>
+          <a:bodyPr wrap="square" lIns="0" tIns="0" rIns="0" bIns="0" rtlCol="0" anchor="ctr"/>
+          <a:lstStyle/>
+          <a:p>
+            <a:pPr indent="0" marL="0">
+              <a:buNone/>
+            </a:pPr>
+            <a:r>
+              <a:rPr lang="en-US" sz="1200" i="1" dirty="0">
+                <a:solidFill>
+                  <a:srgbClr val="6B7B85"/>
+                </a:solidFill>
+                <a:latin typeface="Calibri" pitchFamily="34" charset="0"/>
+                <a:ea typeface="Calibri" pitchFamily="34" charset="-122"/>
+                <a:cs typeface="Calibri" pitchFamily="34" charset="-120"/>
+              </a:rPr>
+              <a:t>Fraction of fake clips actually caught (ITW fake-class recall)</a:t>
+            </a:r>
+            <a:endParaRPr lang="en-US" sz="1200" dirty="0"/>
+          </a:p>
+        </p:txBody>
+      </p:sp>
+      <p:sp>
+        <p:nvSpPr>
+          <p:cNvPr id="22" name="Text 20"/>
+          <p:cNvSpPr/>
+          <p:nvPr/>
+        </p:nvSpPr>
+        <p:spPr>
+          <a:xfrm>
+            <a:off x="822960" y="5212080"/>
+            <a:ext cx="10515600" cy="457200"/>
+          </a:xfrm>
+          <a:prstGeom prst="rect">
+            <a:avLst/>
+          </a:prstGeom>
+          <a:noFill/>
+          <a:ln/>
+        </p:spPr>
+        <p:txBody>
+          <a:bodyPr wrap="square" lIns="0" tIns="0" rIns="0" bIns="0" rtlCol="0" anchor="ctr"/>
+          <a:lstStyle/>
+          <a:p>
+            <a:pPr indent="0" marL="0">
+              <a:buNone/>
+            </a:pPr>
+            <a:r>
+              <a:rPr lang="en-US" sz="1500" b="1" dirty="0">
+                <a:solidFill>
+                  <a:srgbClr val="22303A"/>
+                </a:solidFill>
+                <a:latin typeface="Trebuchet MS" pitchFamily="34" charset="0"/>
+                <a:ea typeface="Trebuchet MS" pitchFamily="34" charset="-122"/>
+                <a:cs typeface="Trebuchet MS" pitchFamily="34" charset="-120"/>
+              </a:rPr>
+              <a:t>→ CNN and WavLM probe combine high AUC with good out-of-the-box calibration. WavLM fine-tune has high AUC but collapses at threshold 0.5 under domain shift — threshold tuning would recover much of its fake-recall.</a:t>
+            </a:r>
+            <a:endParaRPr lang="en-US" sz="1500" dirty="0"/>
+          </a:p>
+        </p:txBody>
+      </p:sp>
+      <p:sp>
+        <p:nvSpPr>
+          <p:cNvPr id="23" name="Text 21"/>
+          <p:cNvSpPr/>
+          <p:nvPr/>
+        </p:nvSpPr>
+        <p:spPr>
+          <a:xfrm>
+            <a:off x="548640" y="6437376"/>
+            <a:ext cx="7315200" cy="274320"/>
+          </a:xfrm>
+          <a:prstGeom prst="rect">
+            <a:avLst/>
+          </a:prstGeom>
+          <a:noFill/>
+          <a:ln/>
+        </p:spPr>
+        <p:txBody>
+          <a:bodyPr wrap="square" lIns="0" tIns="0" rIns="0" bIns="0" rtlCol="0" anchor="ctr"/>
+          <a:lstStyle/>
+          <a:p>
+            <a:pPr indent="0" marL="0">
+              <a:buNone/>
+            </a:pPr>
+            <a:r>
+              <a:rPr lang="en-US" sz="900" dirty="0">
+                <a:solidFill>
+                  <a:srgbClr val="6B7B85"/>
+                </a:solidFill>
+                <a:latin typeface="Calibri" pitchFamily="34" charset="0"/>
+                <a:ea typeface="Calibri" pitchFamily="34" charset="-122"/>
+                <a:cs typeface="Calibri" pitchFamily="34" charset="-120"/>
+              </a:rPr>
+              <a:t>Audio Deepfake Detection — DL project</a:t>
+            </a:r>
+            <a:endParaRPr lang="en-US" sz="900" dirty="0"/>
+          </a:p>
+        </p:txBody>
+      </p:sp>
+      <p:sp>
+        <p:nvSpPr>
+          <p:cNvPr id="24" name="Text 22"/>
+          <p:cNvSpPr/>
+          <p:nvPr/>
+        </p:nvSpPr>
+        <p:spPr>
+          <a:xfrm>
+            <a:off x="11430000" y="6437376"/>
+            <a:ext cx="548640" cy="274320"/>
+          </a:xfrm>
+          <a:prstGeom prst="rect">
+            <a:avLst/>
+          </a:prstGeom>
+          <a:noFill/>
+          <a:ln/>
+        </p:spPr>
+        <p:txBody>
+          <a:bodyPr wrap="square" lIns="0" tIns="0" rIns="0" bIns="0" rtlCol="0" anchor="ctr"/>
+          <a:lstStyle/>
+          <a:p>
+            <a:pPr algn="r" indent="0" marL="0">
+              <a:buNone/>
+            </a:pPr>
+            <a:r>
+              <a:rPr lang="en-US" sz="900" dirty="0">
+                <a:solidFill>
+                  <a:srgbClr val="6B7B85"/>
+                </a:solidFill>
+                <a:latin typeface="Calibri" pitchFamily="34" charset="0"/>
+                <a:ea typeface="Calibri" pitchFamily="34" charset="-122"/>
+                <a:cs typeface="Calibri" pitchFamily="34" charset="-120"/>
+              </a:rPr>
+              <a:t>12</a:t>
+            </a:r>
+            <a:endParaRPr lang="en-US" sz="900" dirty="0"/>
+          </a:p>
+        </p:txBody>
+      </p:sp>
+      <p:sp>
+        <p:nvSpPr>
+          <p:cNvPr id="25" name="Rectangle 24"/>
           <p:cNvSpPr/>
           <p:nvPr/>
         </p:nvSpPr>
         <p:spPr>
           <a:xfrm>
             <a:off x="822960" y="2651760"/>
-            <a:ext cx="2057400" cy="1828800"/>
-          </a:xfrm>
-          <a:prstGeom prst="roundRect">
-            <a:avLst>
-              <a:gd name="adj" fmla="val 4000"/>
-            </a:avLst>
+            <a:ext cx="1700000" cy="1828800"/>
+          </a:xfrm>
+          <a:prstGeom prst="rect">
+            <a:avLst/>
           </a:prstGeom>
           <a:solidFill>
             <a:srgbClr val="F4F7F8"/>
           </a:solidFill>
-          <a:ln w="12700">
-            <a:solidFill>
-              <a:srgbClr val="DDE5E9"/>
-            </a:solidFill>
-            <a:prstDash val="solid"/>
+          <a:ln>
+            <a:noFill/>
           </a:ln>
         </p:spPr>
-      </p:sp>
-      <p:sp>
-        <p:nvSpPr>
-          <p:cNvPr id="7" name="Text 5"/>
-          <p:cNvSpPr/>
+        <p:style>
+          <a:lnRef idx="1">
+            <a:schemeClr val="accent1"/>
+          </a:lnRef>
+          <a:fillRef idx="3">
+            <a:schemeClr val="accent1"/>
+          </a:fillRef>
+          <a:effectRef idx="2">
+            <a:schemeClr val="accent1"/>
+          </a:effectRef>
+          <a:fontRef idx="minor">
+            <a:schemeClr val="lt1"/>
+          </a:fontRef>
+        </p:style>
+        <p:txBody>
+          <a:bodyPr rtlCol="0" anchor="ctr"/>
+          <a:lstStyle/>
+          <a:p>
+            <a:pPr algn="ctr"/>
+          </a:p>
+        </p:txBody>
+      </p:sp>
+      <p:sp>
+        <p:nvSpPr>
+          <p:cNvPr id="26" name="TextBox 25"/>
+          <p:cNvSpPr txBox="1"/>
           <p:nvPr/>
         </p:nvSpPr>
         <p:spPr>
           <a:xfrm>
             <a:off x="822960" y="2880360"/>
-            <a:ext cx="2057400" cy="822960"/>
-          </a:xfrm>
-          <a:prstGeom prst="rect">
-            <a:avLst/>
-          </a:prstGeom>
-          <a:noFill/>
-          <a:ln/>
-        </p:spPr>
-        <p:txBody>
-          <a:bodyPr wrap="square" lIns="0" tIns="0" rIns="0" bIns="0" rtlCol="0" anchor="ctr"/>
-          <a:lstStyle/>
-          <a:p>
-            <a:pPr algn="ctr" indent="0" marL="0">
-              <a:buNone/>
-            </a:pPr>
-            <a:r>
-              <a:rPr lang="en-US" sz="3800" b="1" dirty="0">
+            <a:ext cx="1700000" cy="822960"/>
+          </a:xfrm>
+          <a:prstGeom prst="rect">
+            <a:avLst/>
+          </a:prstGeom>
+          <a:noFill/>
+        </p:spPr>
+        <p:txBody>
+          <a:bodyPr wrap="none">
+            <a:spAutoFit/>
+          </a:bodyPr>
+          <a:lstStyle/>
+          <a:p>
+            <a:pPr algn="ctr"/>
+            <a:r>
+              <a:rPr b="1" sz="3600">
                 <a:solidFill>
                   <a:srgbClr val="0E9594"/>
                 </a:solidFill>
-                <a:latin typeface="Trebuchet MS" pitchFamily="34" charset="0"/>
-                <a:ea typeface="Trebuchet MS" pitchFamily="34" charset="-122"/>
-                <a:cs typeface="Trebuchet MS" pitchFamily="34" charset="-120"/>
               </a:rPr>
               <a:t>72%</a:t>
             </a:r>
-            <a:endParaRPr lang="en-US" sz="3800" dirty="0"/>
-          </a:p>
-        </p:txBody>
-      </p:sp>
-      <p:sp>
-        <p:nvSpPr>
-          <p:cNvPr id="8" name="Text 6"/>
-          <p:cNvSpPr/>
-          <p:nvPr/>
-        </p:nvSpPr>
-        <p:spPr>
-          <a:xfrm>
-            <a:off x="914400" y="3794760"/>
-            <a:ext cx="1874520" cy="548640"/>
-          </a:xfrm>
-          <a:prstGeom prst="rect">
-            <a:avLst/>
-          </a:prstGeom>
-          <a:noFill/>
-          <a:ln/>
-        </p:spPr>
-        <p:txBody>
-          <a:bodyPr wrap="square" lIns="0" tIns="0" rIns="0" bIns="0" rtlCol="0" anchor="ctr"/>
-          <a:lstStyle/>
-          <a:p>
-            <a:pPr algn="ctr" indent="0" marL="0">
-              <a:buNone/>
-            </a:pPr>
-            <a:r>
-              <a:rPr lang="en-US" sz="1300" dirty="0">
+          </a:p>
+        </p:txBody>
+      </p:sp>
+      <p:sp>
+        <p:nvSpPr>
+          <p:cNvPr id="27" name="TextBox 26"/>
+          <p:cNvSpPr txBox="1"/>
+          <p:nvPr/>
+        </p:nvSpPr>
+        <p:spPr>
+          <a:xfrm>
+            <a:off x="822960" y="3794760"/>
+            <a:ext cx="1700000" cy="548640"/>
+          </a:xfrm>
+          <a:prstGeom prst="rect">
+            <a:avLst/>
+          </a:prstGeom>
+          <a:noFill/>
+        </p:spPr>
+        <p:txBody>
+          <a:bodyPr wrap="none">
+            <a:spAutoFit/>
+          </a:bodyPr>
+          <a:lstStyle/>
+          <a:p>
+            <a:pPr algn="ctr"/>
+            <a:r>
+              <a:rPr b="0" sz="1300">
                 <a:solidFill>
                   <a:srgbClr val="6B7B85"/>
                 </a:solidFill>
-                <a:latin typeface="Calibri" pitchFamily="34" charset="0"/>
-                <a:ea typeface="Calibri" pitchFamily="34" charset="-122"/>
-                <a:cs typeface="Calibri" pitchFamily="34" charset="-120"/>
               </a:rPr>
               <a:t>CNN</a:t>
             </a:r>
-            <a:endParaRPr lang="en-US" sz="1300" dirty="0"/>
-          </a:p>
-        </p:txBody>
-      </p:sp>
-      <p:sp>
-        <p:nvSpPr>
-          <p:cNvPr id="9" name="Shape 7"/>
-          <p:cNvSpPr/>
-          <p:nvPr/>
-        </p:nvSpPr>
-        <p:spPr>
-          <a:xfrm>
-            <a:off x="3063240" y="2651760"/>
-            <a:ext cx="2057400" cy="1828800"/>
-          </a:xfrm>
-          <a:prstGeom prst="roundRect">
-            <a:avLst>
-              <a:gd name="adj" fmla="val 4000"/>
-            </a:avLst>
+          </a:p>
+        </p:txBody>
+      </p:sp>
+      <p:sp>
+        <p:nvSpPr>
+          <p:cNvPr id="28" name="Rectangle 27"/>
+          <p:cNvSpPr/>
+          <p:nvPr/>
+        </p:nvSpPr>
+        <p:spPr>
+          <a:xfrm>
+            <a:off x="2586080" y="2651760"/>
+            <a:ext cx="1700000" cy="1828800"/>
+          </a:xfrm>
+          <a:prstGeom prst="rect">
+            <a:avLst/>
           </a:prstGeom>
           <a:solidFill>
             <a:srgbClr val="F4F7F8"/>
           </a:solidFill>
-          <a:ln w="12700">
-            <a:solidFill>
-              <a:srgbClr val="DDE5E9"/>
-            </a:solidFill>
-            <a:prstDash val="solid"/>
+          <a:ln>
+            <a:noFill/>
           </a:ln>
         </p:spPr>
-      </p:sp>
-      <p:sp>
-        <p:nvSpPr>
-          <p:cNvPr id="10" name="Text 8"/>
-          <p:cNvSpPr/>
-          <p:nvPr/>
-        </p:nvSpPr>
-        <p:spPr>
-          <a:xfrm>
-            <a:off x="3063240" y="2880360"/>
-            <a:ext cx="2057400" cy="822960"/>
-          </a:xfrm>
-          <a:prstGeom prst="rect">
-            <a:avLst/>
-          </a:prstGeom>
-          <a:noFill/>
-          <a:ln/>
-        </p:spPr>
-        <p:txBody>
-          <a:bodyPr wrap="square" lIns="0" tIns="0" rIns="0" bIns="0" rtlCol="0" anchor="ctr"/>
-          <a:lstStyle/>
-          <a:p>
-            <a:pPr algn="ctr" indent="0" marL="0">
-              <a:buNone/>
-            </a:pPr>
-            <a:r>
-              <a:rPr lang="en-US" sz="3800" b="1" dirty="0">
-                <a:solidFill>
-                  <a:srgbClr val="3E7CB1"/>
-                </a:solidFill>
-                <a:latin typeface="Trebuchet MS" pitchFamily="34" charset="0"/>
-                <a:ea typeface="Trebuchet MS" pitchFamily="34" charset="-122"/>
-                <a:cs typeface="Trebuchet MS" pitchFamily="34" charset="-120"/>
-              </a:rPr>
-              <a:t>54%</a:t>
-            </a:r>
-            <a:endParaRPr lang="en-US" sz="3800" dirty="0"/>
-          </a:p>
-        </p:txBody>
-      </p:sp>
-      <p:sp>
-        <p:nvSpPr>
-          <p:cNvPr id="11" name="Text 9"/>
-          <p:cNvSpPr/>
-          <p:nvPr/>
-        </p:nvSpPr>
-        <p:spPr>
-          <a:xfrm>
-            <a:off x="3154680" y="3794760"/>
-            <a:ext cx="1874520" cy="548640"/>
-          </a:xfrm>
-          <a:prstGeom prst="rect">
-            <a:avLst/>
-          </a:prstGeom>
-          <a:noFill/>
-          <a:ln/>
-        </p:spPr>
-        <p:txBody>
-          <a:bodyPr wrap="square" lIns="0" tIns="0" rIns="0" bIns="0" rtlCol="0" anchor="ctr"/>
-          <a:lstStyle/>
-          <a:p>
-            <a:pPr algn="ctr" indent="0" marL="0">
-              <a:buNone/>
-            </a:pPr>
-            <a:r>
-              <a:rPr lang="en-US" sz="1300" dirty="0">
+        <p:style>
+          <a:lnRef idx="1">
+            <a:schemeClr val="accent1"/>
+          </a:lnRef>
+          <a:fillRef idx="3">
+            <a:schemeClr val="accent1"/>
+          </a:fillRef>
+          <a:effectRef idx="2">
+            <a:schemeClr val="accent1"/>
+          </a:effectRef>
+          <a:fontRef idx="minor">
+            <a:schemeClr val="lt1"/>
+          </a:fontRef>
+        </p:style>
+        <p:txBody>
+          <a:bodyPr rtlCol="0" anchor="ctr"/>
+          <a:lstStyle/>
+          <a:p>
+            <a:pPr algn="ctr"/>
+          </a:p>
+        </p:txBody>
+      </p:sp>
+      <p:sp>
+        <p:nvSpPr>
+          <p:cNvPr id="29" name="TextBox 28"/>
+          <p:cNvSpPr txBox="1"/>
+          <p:nvPr/>
+        </p:nvSpPr>
+        <p:spPr>
+          <a:xfrm>
+            <a:off x="2586080" y="2880360"/>
+            <a:ext cx="1700000" cy="822960"/>
+          </a:xfrm>
+          <a:prstGeom prst="rect">
+            <a:avLst/>
+          </a:prstGeom>
+          <a:noFill/>
+        </p:spPr>
+        <p:txBody>
+          <a:bodyPr wrap="none">
+            <a:spAutoFit/>
+          </a:bodyPr>
+          <a:lstStyle/>
+          <a:p>
+            <a:pPr algn="ctr"/>
+            <a:r>
+              <a:rPr b="1" sz="3600">
+                <a:solidFill>
+                  <a:srgbClr val="8E7CC3"/>
+                </a:solidFill>
+              </a:rPr>
+              <a:t>57%</a:t>
+            </a:r>
+          </a:p>
+        </p:txBody>
+      </p:sp>
+      <p:sp>
+        <p:nvSpPr>
+          <p:cNvPr id="30" name="TextBox 29"/>
+          <p:cNvSpPr txBox="1"/>
+          <p:nvPr/>
+        </p:nvSpPr>
+        <p:spPr>
+          <a:xfrm>
+            <a:off x="2586080" y="3794760"/>
+            <a:ext cx="1700000" cy="548640"/>
+          </a:xfrm>
+          <a:prstGeom prst="rect">
+            <a:avLst/>
+          </a:prstGeom>
+          <a:noFill/>
+        </p:spPr>
+        <p:txBody>
+          <a:bodyPr wrap="none">
+            <a:spAutoFit/>
+          </a:bodyPr>
+          <a:lstStyle/>
+          <a:p>
+            <a:pPr algn="ctr"/>
+            <a:r>
+              <a:rPr b="0" sz="1300">
                 <a:solidFill>
                   <a:srgbClr val="6B7B85"/>
                 </a:solidFill>
-                <a:latin typeface="Calibri" pitchFamily="34" charset="0"/>
-                <a:ea typeface="Calibri" pitchFamily="34" charset="-122"/>
-                <a:cs typeface="Calibri" pitchFamily="34" charset="-120"/>
-              </a:rPr>
-              <a:t>CRNN</a:t>
-            </a:r>
-            <a:endParaRPr lang="en-US" sz="1300" dirty="0"/>
-          </a:p>
-        </p:txBody>
-      </p:sp>
-      <p:sp>
-        <p:nvSpPr>
-          <p:cNvPr id="12" name="Shape 10"/>
-          <p:cNvSpPr/>
-          <p:nvPr/>
-        </p:nvSpPr>
-        <p:spPr>
-          <a:xfrm>
-            <a:off x="5303520" y="2651760"/>
-            <a:ext cx="2057400" cy="1828800"/>
-          </a:xfrm>
-          <a:prstGeom prst="roundRect">
-            <a:avLst>
-              <a:gd name="adj" fmla="val 4000"/>
-            </a:avLst>
+              </a:rPr>
+              <a:t>WavLM probe</a:t>
+            </a:r>
+          </a:p>
+        </p:txBody>
+      </p:sp>
+      <p:sp>
+        <p:nvSpPr>
+          <p:cNvPr id="31" name="Rectangle 30"/>
+          <p:cNvSpPr/>
+          <p:nvPr/>
+        </p:nvSpPr>
+        <p:spPr>
+          <a:xfrm>
+            <a:off x="4349200" y="2651760"/>
+            <a:ext cx="1700000" cy="1828800"/>
+          </a:xfrm>
+          <a:prstGeom prst="rect">
+            <a:avLst/>
           </a:prstGeom>
           <a:solidFill>
             <a:srgbClr val="F4F7F8"/>
           </a:solidFill>
-          <a:ln w="12700">
-            <a:solidFill>
-              <a:srgbClr val="DDE5E9"/>
-            </a:solidFill>
-            <a:prstDash val="solid"/>
+          <a:ln>
+            <a:noFill/>
           </a:ln>
         </p:spPr>
-      </p:sp>
-      <p:sp>
-        <p:nvSpPr>
-          <p:cNvPr id="13" name="Text 11"/>
-          <p:cNvSpPr/>
-          <p:nvPr/>
-        </p:nvSpPr>
-        <p:spPr>
-          <a:xfrm>
-            <a:off x="5303520" y="2880360"/>
-            <a:ext cx="2057400" cy="822960"/>
-          </a:xfrm>
-          <a:prstGeom prst="rect">
-            <a:avLst/>
-          </a:prstGeom>
-          <a:noFill/>
-          <a:ln/>
-        </p:spPr>
-        <p:txBody>
-          <a:bodyPr wrap="square" lIns="0" tIns="0" rIns="0" bIns="0" rtlCol="0" anchor="ctr"/>
-          <a:lstStyle/>
-          <a:p>
-            <a:pPr algn="ctr" indent="0" marL="0">
-              <a:buNone/>
-            </a:pPr>
-            <a:r>
-              <a:rPr lang="en-US" sz="3800" b="1" dirty="0">
-                <a:solidFill>
-                  <a:srgbClr val="C9971B"/>
-                </a:solidFill>
-                <a:latin typeface="Trebuchet MS" pitchFamily="34" charset="0"/>
-                <a:ea typeface="Trebuchet MS" pitchFamily="34" charset="-122"/>
-                <a:cs typeface="Trebuchet MS" pitchFamily="34" charset="-120"/>
-              </a:rPr>
-              <a:t>45%</a:t>
-            </a:r>
-            <a:endParaRPr lang="en-US" sz="3800" dirty="0"/>
-          </a:p>
-        </p:txBody>
-      </p:sp>
-      <p:sp>
-        <p:nvSpPr>
-          <p:cNvPr id="14" name="Text 12"/>
-          <p:cNvSpPr/>
-          <p:nvPr/>
-        </p:nvSpPr>
-        <p:spPr>
-          <a:xfrm>
-            <a:off x="5394960" y="3794760"/>
-            <a:ext cx="1874520" cy="548640"/>
-          </a:xfrm>
-          <a:prstGeom prst="rect">
-            <a:avLst/>
-          </a:prstGeom>
-          <a:noFill/>
-          <a:ln/>
-        </p:spPr>
-        <p:txBody>
-          <a:bodyPr wrap="square" lIns="0" tIns="0" rIns="0" bIns="0" rtlCol="0" anchor="ctr"/>
-          <a:lstStyle/>
-          <a:p>
-            <a:pPr algn="ctr" indent="0" marL="0">
-              <a:buNone/>
-            </a:pPr>
-            <a:r>
-              <a:rPr lang="en-US" sz="1300" dirty="0">
+        <p:style>
+          <a:lnRef idx="1">
+            <a:schemeClr val="accent1"/>
+          </a:lnRef>
+          <a:fillRef idx="3">
+            <a:schemeClr val="accent1"/>
+          </a:fillRef>
+          <a:effectRef idx="2">
+            <a:schemeClr val="accent1"/>
+          </a:effectRef>
+          <a:fontRef idx="minor">
+            <a:schemeClr val="lt1"/>
+          </a:fontRef>
+        </p:style>
+        <p:txBody>
+          <a:bodyPr rtlCol="0" anchor="ctr"/>
+          <a:lstStyle/>
+          <a:p>
+            <a:pPr algn="ctr"/>
+          </a:p>
+        </p:txBody>
+      </p:sp>
+      <p:sp>
+        <p:nvSpPr>
+          <p:cNvPr id="32" name="TextBox 31"/>
+          <p:cNvSpPr txBox="1"/>
+          <p:nvPr/>
+        </p:nvSpPr>
+        <p:spPr>
+          <a:xfrm>
+            <a:off x="4349200" y="2880360"/>
+            <a:ext cx="1700000" cy="822960"/>
+          </a:xfrm>
+          <a:prstGeom prst="rect">
+            <a:avLst/>
+          </a:prstGeom>
+          <a:noFill/>
+        </p:spPr>
+        <p:txBody>
+          <a:bodyPr wrap="none">
+            <a:spAutoFit/>
+          </a:bodyPr>
+          <a:lstStyle/>
+          <a:p>
+            <a:pPr algn="ctr"/>
+            <a:r>
+              <a:rPr b="1" sz="3600">
+                <a:solidFill>
+                  <a:srgbClr val="3E7CB1"/>
+                </a:solidFill>
+              </a:rPr>
+              <a:t>54%</a:t>
+            </a:r>
+          </a:p>
+        </p:txBody>
+      </p:sp>
+      <p:sp>
+        <p:nvSpPr>
+          <p:cNvPr id="33" name="TextBox 32"/>
+          <p:cNvSpPr txBox="1"/>
+          <p:nvPr/>
+        </p:nvSpPr>
+        <p:spPr>
+          <a:xfrm>
+            <a:off x="4349200" y="3794760"/>
+            <a:ext cx="1700000" cy="548640"/>
+          </a:xfrm>
+          <a:prstGeom prst="rect">
+            <a:avLst/>
+          </a:prstGeom>
+          <a:noFill/>
+        </p:spPr>
+        <p:txBody>
+          <a:bodyPr wrap="none">
+            <a:spAutoFit/>
+          </a:bodyPr>
+          <a:lstStyle/>
+          <a:p>
+            <a:pPr algn="ctr"/>
+            <a:r>
+              <a:rPr b="0" sz="1300">
                 <a:solidFill>
                   <a:srgbClr val="6B7B85"/>
                 </a:solidFill>
-                <a:latin typeface="Calibri" pitchFamily="34" charset="0"/>
-                <a:ea typeface="Calibri" pitchFamily="34" charset="-122"/>
-                <a:cs typeface="Calibri" pitchFamily="34" charset="-120"/>
-              </a:rPr>
-              <a:t>WavLM ft</a:t>
-            </a:r>
-            <a:endParaRPr lang="en-US" sz="1300" dirty="0"/>
-          </a:p>
-        </p:txBody>
-      </p:sp>
-      <p:sp>
-        <p:nvSpPr>
-          <p:cNvPr id="15" name="Shape 13"/>
-          <p:cNvSpPr/>
-          <p:nvPr/>
-        </p:nvSpPr>
-        <p:spPr>
-          <a:xfrm>
-            <a:off x="7543800" y="2651760"/>
-            <a:ext cx="2057400" cy="1828800"/>
-          </a:xfrm>
-          <a:prstGeom prst="roundRect">
-            <a:avLst>
-              <a:gd name="adj" fmla="val 4000"/>
-            </a:avLst>
+              </a:rPr>
+              <a:t>CRNN</a:t>
+            </a:r>
+          </a:p>
+        </p:txBody>
+      </p:sp>
+      <p:sp>
+        <p:nvSpPr>
+          <p:cNvPr id="34" name="Rectangle 33"/>
+          <p:cNvSpPr/>
+          <p:nvPr/>
+        </p:nvSpPr>
+        <p:spPr>
+          <a:xfrm>
+            <a:off x="6112320" y="2651760"/>
+            <a:ext cx="1700000" cy="1828800"/>
+          </a:xfrm>
+          <a:prstGeom prst="rect">
+            <a:avLst/>
           </a:prstGeom>
           <a:solidFill>
             <a:srgbClr val="F4F7F8"/>
           </a:solidFill>
-          <a:ln w="12700">
-            <a:solidFill>
-              <a:srgbClr val="DDE5E9"/>
-            </a:solidFill>
-            <a:prstDash val="solid"/>
+          <a:ln>
+            <a:noFill/>
           </a:ln>
         </p:spPr>
-      </p:sp>
-      <p:sp>
-        <p:nvSpPr>
-          <p:cNvPr id="16" name="Text 14"/>
-          <p:cNvSpPr/>
-          <p:nvPr/>
-        </p:nvSpPr>
-        <p:spPr>
-          <a:xfrm>
-            <a:off x="7543800" y="2880360"/>
-            <a:ext cx="2057400" cy="822960"/>
-          </a:xfrm>
-          <a:prstGeom prst="rect">
-            <a:avLst/>
-          </a:prstGeom>
-          <a:noFill/>
-          <a:ln/>
-        </p:spPr>
-        <p:txBody>
-          <a:bodyPr wrap="square" lIns="0" tIns="0" rIns="0" bIns="0" rtlCol="0" anchor="ctr"/>
-          <a:lstStyle/>
-          <a:p>
-            <a:pPr algn="ctr" indent="0" marL="0">
-              <a:buNone/>
-            </a:pPr>
-            <a:r>
-              <a:rPr lang="en-US" sz="3800" b="1" dirty="0">
-                <a:solidFill>
-                  <a:srgbClr val="E8674F"/>
-                </a:solidFill>
-                <a:latin typeface="Trebuchet MS" pitchFamily="34" charset="0"/>
-                <a:ea typeface="Trebuchet MS" pitchFamily="34" charset="-122"/>
-                <a:cs typeface="Trebuchet MS" pitchFamily="34" charset="-120"/>
-              </a:rPr>
-              <a:t>17%</a:t>
-            </a:r>
-            <a:endParaRPr lang="en-US" sz="3800" dirty="0"/>
-          </a:p>
-        </p:txBody>
-      </p:sp>
-      <p:sp>
-        <p:nvSpPr>
-          <p:cNvPr id="17" name="Text 15"/>
-          <p:cNvSpPr/>
-          <p:nvPr/>
-        </p:nvSpPr>
-        <p:spPr>
-          <a:xfrm>
-            <a:off x="7635240" y="3794760"/>
-            <a:ext cx="1874520" cy="548640"/>
-          </a:xfrm>
-          <a:prstGeom prst="rect">
-            <a:avLst/>
-          </a:prstGeom>
-          <a:noFill/>
-          <a:ln/>
-        </p:spPr>
-        <p:txBody>
-          <a:bodyPr wrap="square" lIns="0" tIns="0" rIns="0" bIns="0" rtlCol="0" anchor="ctr"/>
-          <a:lstStyle/>
-          <a:p>
-            <a:pPr algn="ctr" indent="0" marL="0">
-              <a:buNone/>
-            </a:pPr>
-            <a:r>
-              <a:rPr lang="en-US" sz="1300" dirty="0">
+        <p:style>
+          <a:lnRef idx="1">
+            <a:schemeClr val="accent1"/>
+          </a:lnRef>
+          <a:fillRef idx="3">
+            <a:schemeClr val="accent1"/>
+          </a:fillRef>
+          <a:effectRef idx="2">
+            <a:schemeClr val="accent1"/>
+          </a:effectRef>
+          <a:fontRef idx="minor">
+            <a:schemeClr val="lt1"/>
+          </a:fontRef>
+        </p:style>
+        <p:txBody>
+          <a:bodyPr rtlCol="0" anchor="ctr"/>
+          <a:lstStyle/>
+          <a:p>
+            <a:pPr algn="ctr"/>
+          </a:p>
+        </p:txBody>
+      </p:sp>
+      <p:sp>
+        <p:nvSpPr>
+          <p:cNvPr id="35" name="TextBox 34"/>
+          <p:cNvSpPr txBox="1"/>
+          <p:nvPr/>
+        </p:nvSpPr>
+        <p:spPr>
+          <a:xfrm>
+            <a:off x="6112320" y="2880360"/>
+            <a:ext cx="1700000" cy="822960"/>
+          </a:xfrm>
+          <a:prstGeom prst="rect">
+            <a:avLst/>
+          </a:prstGeom>
+          <a:noFill/>
+        </p:spPr>
+        <p:txBody>
+          <a:bodyPr wrap="none">
+            <a:spAutoFit/>
+          </a:bodyPr>
+          <a:lstStyle/>
+          <a:p>
+            <a:pPr algn="ctr"/>
+            <a:r>
+              <a:rPr b="1" sz="3600">
+                <a:solidFill>
+                  <a:srgbClr val="C9971B"/>
+                </a:solidFill>
+              </a:rPr>
+              <a:t>45%</a:t>
+            </a:r>
+          </a:p>
+        </p:txBody>
+      </p:sp>
+      <p:sp>
+        <p:nvSpPr>
+          <p:cNvPr id="36" name="TextBox 35"/>
+          <p:cNvSpPr txBox="1"/>
+          <p:nvPr/>
+        </p:nvSpPr>
+        <p:spPr>
+          <a:xfrm>
+            <a:off x="6112320" y="3794760"/>
+            <a:ext cx="1700000" cy="548640"/>
+          </a:xfrm>
+          <a:prstGeom prst="rect">
+            <a:avLst/>
+          </a:prstGeom>
+          <a:noFill/>
+        </p:spPr>
+        <p:txBody>
+          <a:bodyPr wrap="none">
+            <a:spAutoFit/>
+          </a:bodyPr>
+          <a:lstStyle/>
+          <a:p>
+            <a:pPr algn="ctr"/>
+            <a:r>
+              <a:rPr b="0" sz="1300">
                 <a:solidFill>
                   <a:srgbClr val="6B7B85"/>
                 </a:solidFill>
-                <a:latin typeface="Calibri" pitchFamily="34" charset="0"/>
-                <a:ea typeface="Calibri" pitchFamily="34" charset="-122"/>
-                <a:cs typeface="Calibri" pitchFamily="34" charset="-120"/>
-              </a:rPr>
-              <a:t>MLP</a:t>
-            </a:r>
-            <a:endParaRPr lang="en-US" sz="1300" dirty="0"/>
-          </a:p>
-        </p:txBody>
-      </p:sp>
-      <p:sp>
-        <p:nvSpPr>
-          <p:cNvPr id="18" name="Shape 16"/>
-          <p:cNvSpPr/>
-          <p:nvPr/>
-        </p:nvSpPr>
-        <p:spPr>
-          <a:xfrm>
-            <a:off x="9784080" y="2651760"/>
-            <a:ext cx="2057400" cy="1828800"/>
-          </a:xfrm>
-          <a:prstGeom prst="roundRect">
-            <a:avLst>
-              <a:gd name="adj" fmla="val 4000"/>
-            </a:avLst>
+              </a:rPr>
+              <a:t>WavLM ft</a:t>
+            </a:r>
+          </a:p>
+        </p:txBody>
+      </p:sp>
+      <p:sp>
+        <p:nvSpPr>
+          <p:cNvPr id="37" name="Rectangle 36"/>
+          <p:cNvSpPr/>
+          <p:nvPr/>
+        </p:nvSpPr>
+        <p:spPr>
+          <a:xfrm>
+            <a:off x="7875440" y="2651760"/>
+            <a:ext cx="1700000" cy="1828800"/>
+          </a:xfrm>
+          <a:prstGeom prst="rect">
+            <a:avLst/>
           </a:prstGeom>
           <a:solidFill>
             <a:srgbClr val="F4F7F8"/>
           </a:solidFill>
-          <a:ln w="12700">
-            <a:solidFill>
-              <a:srgbClr val="DDE5E9"/>
-            </a:solidFill>
-            <a:prstDash val="solid"/>
+          <a:ln>
+            <a:noFill/>
           </a:ln>
         </p:spPr>
-      </p:sp>
-      <p:sp>
-        <p:nvSpPr>
-          <p:cNvPr id="19" name="Text 17"/>
-          <p:cNvSpPr/>
-          <p:nvPr/>
-        </p:nvSpPr>
-        <p:spPr>
-          <a:xfrm>
-            <a:off x="9784080" y="2880360"/>
-            <a:ext cx="2057400" cy="822960"/>
-          </a:xfrm>
-          <a:prstGeom prst="rect">
-            <a:avLst/>
-          </a:prstGeom>
-          <a:noFill/>
-          <a:ln/>
-        </p:spPr>
-        <p:txBody>
-          <a:bodyPr wrap="square" lIns="0" tIns="0" rIns="0" bIns="0" rtlCol="0" anchor="ctr"/>
-          <a:lstStyle/>
-          <a:p>
-            <a:pPr algn="ctr" indent="0" marL="0">
-              <a:buNone/>
-            </a:pPr>
-            <a:r>
-              <a:rPr lang="en-US" sz="3800" b="1" dirty="0">
+        <p:style>
+          <a:lnRef idx="1">
+            <a:schemeClr val="accent1"/>
+          </a:lnRef>
+          <a:fillRef idx="3">
+            <a:schemeClr val="accent1"/>
+          </a:fillRef>
+          <a:effectRef idx="2">
+            <a:schemeClr val="accent1"/>
+          </a:effectRef>
+          <a:fontRef idx="minor">
+            <a:schemeClr val="lt1"/>
+          </a:fontRef>
+        </p:style>
+        <p:txBody>
+          <a:bodyPr rtlCol="0" anchor="ctr"/>
+          <a:lstStyle/>
+          <a:p>
+            <a:pPr algn="ctr"/>
+          </a:p>
+        </p:txBody>
+      </p:sp>
+      <p:sp>
+        <p:nvSpPr>
+          <p:cNvPr id="38" name="TextBox 37"/>
+          <p:cNvSpPr txBox="1"/>
+          <p:nvPr/>
+        </p:nvSpPr>
+        <p:spPr>
+          <a:xfrm>
+            <a:off x="7875440" y="2880360"/>
+            <a:ext cx="1700000" cy="822960"/>
+          </a:xfrm>
+          <a:prstGeom prst="rect">
+            <a:avLst/>
+          </a:prstGeom>
+          <a:noFill/>
+        </p:spPr>
+        <p:txBody>
+          <a:bodyPr wrap="none">
+            <a:spAutoFit/>
+          </a:bodyPr>
+          <a:lstStyle/>
+          <a:p>
+            <a:pPr algn="ctr"/>
+            <a:r>
+              <a:rPr b="1" sz="3600">
                 <a:solidFill>
                   <a:srgbClr val="E8674F"/>
                 </a:solidFill>
-                <a:latin typeface="Trebuchet MS" pitchFamily="34" charset="0"/>
-                <a:ea typeface="Trebuchet MS" pitchFamily="34" charset="-122"/>
-                <a:cs typeface="Trebuchet MS" pitchFamily="34" charset="-120"/>
               </a:rPr>
               <a:t>17%</a:t>
             </a:r>
-            <a:endParaRPr lang="en-US" sz="3800" dirty="0"/>
-          </a:p>
-        </p:txBody>
-      </p:sp>
-      <p:sp>
-        <p:nvSpPr>
-          <p:cNvPr id="20" name="Text 18"/>
-          <p:cNvSpPr/>
-          <p:nvPr/>
-        </p:nvSpPr>
-        <p:spPr>
-          <a:xfrm>
-            <a:off x="9875520" y="3794760"/>
-            <a:ext cx="1874520" cy="548640"/>
-          </a:xfrm>
-          <a:prstGeom prst="rect">
-            <a:avLst/>
-          </a:prstGeom>
-          <a:noFill/>
-          <a:ln/>
-        </p:spPr>
-        <p:txBody>
-          <a:bodyPr wrap="square" lIns="0" tIns="0" rIns="0" bIns="0" rtlCol="0" anchor="ctr"/>
-          <a:lstStyle/>
-          <a:p>
-            <a:pPr algn="ctr" indent="0" marL="0">
-              <a:buNone/>
-            </a:pPr>
-            <a:r>
-              <a:rPr lang="en-US" sz="1300" dirty="0">
+          </a:p>
+        </p:txBody>
+      </p:sp>
+      <p:sp>
+        <p:nvSpPr>
+          <p:cNvPr id="39" name="TextBox 38"/>
+          <p:cNvSpPr txBox="1"/>
+          <p:nvPr/>
+        </p:nvSpPr>
+        <p:spPr>
+          <a:xfrm>
+            <a:off x="7875440" y="3794760"/>
+            <a:ext cx="1700000" cy="548640"/>
+          </a:xfrm>
+          <a:prstGeom prst="rect">
+            <a:avLst/>
+          </a:prstGeom>
+          <a:noFill/>
+        </p:spPr>
+        <p:txBody>
+          <a:bodyPr wrap="none">
+            <a:spAutoFit/>
+          </a:bodyPr>
+          <a:lstStyle/>
+          <a:p>
+            <a:pPr algn="ctr"/>
+            <a:r>
+              <a:rPr b="0" sz="1300">
                 <a:solidFill>
                   <a:srgbClr val="6B7B85"/>
                 </a:solidFill>
-                <a:latin typeface="Calibri" pitchFamily="34" charset="0"/>
-                <a:ea typeface="Calibri" pitchFamily="34" charset="-122"/>
-                <a:cs typeface="Calibri" pitchFamily="34" charset="-120"/>
+              </a:rPr>
+              <a:t>MLP</a:t>
+            </a:r>
+          </a:p>
+        </p:txBody>
+      </p:sp>
+      <p:sp>
+        <p:nvSpPr>
+          <p:cNvPr id="40" name="Rectangle 39"/>
+          <p:cNvSpPr/>
+          <p:nvPr/>
+        </p:nvSpPr>
+        <p:spPr>
+          <a:xfrm>
+            <a:off x="9638560" y="2651760"/>
+            <a:ext cx="1700000" cy="1828800"/>
+          </a:xfrm>
+          <a:prstGeom prst="rect">
+            <a:avLst/>
+          </a:prstGeom>
+          <a:solidFill>
+            <a:srgbClr val="F4F7F8"/>
+          </a:solidFill>
+          <a:ln>
+            <a:noFill/>
+          </a:ln>
+        </p:spPr>
+        <p:style>
+          <a:lnRef idx="1">
+            <a:schemeClr val="accent1"/>
+          </a:lnRef>
+          <a:fillRef idx="3">
+            <a:schemeClr val="accent1"/>
+          </a:fillRef>
+          <a:effectRef idx="2">
+            <a:schemeClr val="accent1"/>
+          </a:effectRef>
+          <a:fontRef idx="minor">
+            <a:schemeClr val="lt1"/>
+          </a:fontRef>
+        </p:style>
+        <p:txBody>
+          <a:bodyPr rtlCol="0" anchor="ctr"/>
+          <a:lstStyle/>
+          <a:p>
+            <a:pPr algn="ctr"/>
+          </a:p>
+        </p:txBody>
+      </p:sp>
+      <p:sp>
+        <p:nvSpPr>
+          <p:cNvPr id="41" name="TextBox 40"/>
+          <p:cNvSpPr txBox="1"/>
+          <p:nvPr/>
+        </p:nvSpPr>
+        <p:spPr>
+          <a:xfrm>
+            <a:off x="9638560" y="2880360"/>
+            <a:ext cx="1700000" cy="822960"/>
+          </a:xfrm>
+          <a:prstGeom prst="rect">
+            <a:avLst/>
+          </a:prstGeom>
+          <a:noFill/>
+        </p:spPr>
+        <p:txBody>
+          <a:bodyPr wrap="none">
+            <a:spAutoFit/>
+          </a:bodyPr>
+          <a:lstStyle/>
+          <a:p>
+            <a:pPr algn="ctr"/>
+            <a:r>
+              <a:rPr b="1" sz="3600">
+                <a:solidFill>
+                  <a:srgbClr val="E8674F"/>
+                </a:solidFill>
+              </a:rPr>
+              <a:t>17%</a:t>
+            </a:r>
+          </a:p>
+        </p:txBody>
+      </p:sp>
+      <p:sp>
+        <p:nvSpPr>
+          <p:cNvPr id="42" name="TextBox 41"/>
+          <p:cNvSpPr txBox="1"/>
+          <p:nvPr/>
+        </p:nvSpPr>
+        <p:spPr>
+          <a:xfrm>
+            <a:off x="9638560" y="3794760"/>
+            <a:ext cx="1700000" cy="548640"/>
+          </a:xfrm>
+          <a:prstGeom prst="rect">
+            <a:avLst/>
+          </a:prstGeom>
+          <a:noFill/>
+        </p:spPr>
+        <p:txBody>
+          <a:bodyPr wrap="none">
+            <a:spAutoFit/>
+          </a:bodyPr>
+          <a:lstStyle/>
+          <a:p>
+            <a:pPr algn="ctr"/>
+            <a:r>
+              <a:rPr b="0" sz="1300">
+                <a:solidFill>
+                  <a:srgbClr val="6B7B85"/>
+                </a:solidFill>
               </a:rPr>
               <a:t>RNN</a:t>
             </a:r>
-            <a:endParaRPr lang="en-US" sz="1300" dirty="0"/>
-          </a:p>
-        </p:txBody>
-      </p:sp>
-      <p:sp>
-        <p:nvSpPr>
-          <p:cNvPr id="21" name="Text 19"/>
-          <p:cNvSpPr/>
-          <p:nvPr/>
-        </p:nvSpPr>
-        <p:spPr>
-          <a:xfrm>
-            <a:off x="822960" y="4617720"/>
-            <a:ext cx="10515600" cy="365760"/>
-          </a:xfrm>
-          <a:prstGeom prst="rect">
-            <a:avLst/>
-          </a:prstGeom>
-          <a:noFill/>
-          <a:ln/>
-        </p:spPr>
-        <p:txBody>
-          <a:bodyPr wrap="square" lIns="0" tIns="0" rIns="0" bIns="0" rtlCol="0" anchor="ctr"/>
-          <a:lstStyle/>
-          <a:p>
-            <a:pPr indent="0" marL="0">
-              <a:buNone/>
-            </a:pPr>
-            <a:r>
-              <a:rPr lang="en-US" sz="1200" i="1" dirty="0">
-                <a:solidFill>
-                  <a:srgbClr val="6B7B85"/>
-                </a:solidFill>
-                <a:latin typeface="Calibri" pitchFamily="34" charset="0"/>
-                <a:ea typeface="Calibri" pitchFamily="34" charset="-122"/>
-                <a:cs typeface="Calibri" pitchFamily="34" charset="-120"/>
-              </a:rPr>
-              <a:t>Fraction of fake clips actually caught (ITW fake-class recall)</a:t>
-            </a:r>
-            <a:endParaRPr lang="en-US" sz="1200" dirty="0"/>
-          </a:p>
-        </p:txBody>
-      </p:sp>
-      <p:sp>
-        <p:nvSpPr>
-          <p:cNvPr id="22" name="Text 20"/>
-          <p:cNvSpPr/>
-          <p:nvPr/>
-        </p:nvSpPr>
-        <p:spPr>
-          <a:xfrm>
-            <a:off x="822960" y="5212080"/>
-            <a:ext cx="10515600" cy="457200"/>
-          </a:xfrm>
-          <a:prstGeom prst="rect">
-            <a:avLst/>
-          </a:prstGeom>
-          <a:noFill/>
-          <a:ln/>
-        </p:spPr>
-        <p:txBody>
-          <a:bodyPr wrap="square" lIns="0" tIns="0" rIns="0" bIns="0" rtlCol="0" anchor="ctr"/>
-          <a:lstStyle/>
-          <a:p>
-            <a:pPr indent="0" marL="0">
-              <a:buNone/>
-            </a:pPr>
-            <a:r>
-              <a:rPr lang="en-US" sz="1500" b="1" dirty="0">
-                <a:solidFill>
-                  <a:srgbClr val="22303A"/>
-                </a:solidFill>
-                <a:latin typeface="Trebuchet MS" pitchFamily="34" charset="0"/>
-                <a:ea typeface="Trebuchet MS" pitchFamily="34" charset="-122"/>
-                <a:cs typeface="Trebuchet MS" pitchFamily="34" charset="-120"/>
-              </a:rPr>
-              <a:t>→ Only the CNN and the frozen WavLM probe are both well-ranked AND operationally effective.</a:t>
-            </a:r>
-            <a:endParaRPr lang="en-US" sz="1500" dirty="0"/>
-          </a:p>
-        </p:txBody>
-      </p:sp>
-      <p:sp>
-        <p:nvSpPr>
-          <p:cNvPr id="23" name="Text 21"/>
-          <p:cNvSpPr/>
-          <p:nvPr/>
-        </p:nvSpPr>
-        <p:spPr>
-          <a:xfrm>
-            <a:off x="548640" y="6437376"/>
-            <a:ext cx="7315200" cy="274320"/>
-          </a:xfrm>
-          <a:prstGeom prst="rect">
-            <a:avLst/>
-          </a:prstGeom>
-          <a:noFill/>
-          <a:ln/>
-        </p:spPr>
-        <p:txBody>
-          <a:bodyPr wrap="square" lIns="0" tIns="0" rIns="0" bIns="0" rtlCol="0" anchor="ctr"/>
-          <a:lstStyle/>
-          <a:p>
-            <a:pPr indent="0" marL="0">
-              <a:buNone/>
-            </a:pPr>
-            <a:r>
-              <a:rPr lang="en-US" sz="900" dirty="0">
-                <a:solidFill>
-                  <a:srgbClr val="6B7B85"/>
-                </a:solidFill>
-                <a:latin typeface="Calibri" pitchFamily="34" charset="0"/>
-                <a:ea typeface="Calibri" pitchFamily="34" charset="-122"/>
-                <a:cs typeface="Calibri" pitchFamily="34" charset="-120"/>
-              </a:rPr>
-              <a:t>Audio Deepfake Detection — DL project</a:t>
-            </a:r>
-            <a:endParaRPr lang="en-US" sz="900" dirty="0"/>
-          </a:p>
-        </p:txBody>
-      </p:sp>
-      <p:sp>
-        <p:nvSpPr>
-          <p:cNvPr id="24" name="Text 22"/>
-          <p:cNvSpPr/>
-          <p:nvPr/>
-        </p:nvSpPr>
-        <p:spPr>
-          <a:xfrm>
-            <a:off x="11430000" y="6437376"/>
-            <a:ext cx="548640" cy="274320"/>
-          </a:xfrm>
-          <a:prstGeom prst="rect">
-            <a:avLst/>
-          </a:prstGeom>
-          <a:noFill/>
-          <a:ln/>
-        </p:spPr>
-        <p:txBody>
-          <a:bodyPr wrap="square" lIns="0" tIns="0" rIns="0" bIns="0" rtlCol="0" anchor="ctr"/>
-          <a:lstStyle/>
-          <a:p>
-            <a:pPr algn="r" indent="0" marL="0">
-              <a:buNone/>
-            </a:pPr>
-            <a:r>
-              <a:rPr lang="en-US" sz="900" dirty="0">
-                <a:solidFill>
-                  <a:srgbClr val="6B7B85"/>
-                </a:solidFill>
-                <a:latin typeface="Calibri" pitchFamily="34" charset="0"/>
-                <a:ea typeface="Calibri" pitchFamily="34" charset="-122"/>
-                <a:cs typeface="Calibri" pitchFamily="34" charset="-120"/>
-              </a:rPr>
-              <a:t>12</a:t>
-            </a:r>
-            <a:endParaRPr lang="en-US" sz="900" dirty="0"/>
           </a:p>
         </p:txBody>
       </p:sp>
@@ -3988,6 +4143,10 @@
           </a:solidFill>
           <a:ln/>
         </p:spPr>
+        <p:txBody>
+          <a:bodyPr/>
+          <a:p/>
+        </p:txBody>
       </p:sp>
       <p:sp>
         <p:nvSpPr>
@@ -4067,29 +4226,6 @@
           </a:p>
         </p:txBody>
       </p:sp>
-      <p:pic>
-        <p:nvPicPr>
-          <p:cNvPr id="5" name="Image 0" descr="/sessions/modest-trusting-fermi/mnt/outputs/slide_assets/gen_gap.png">    </p:cNvPr>
-          <p:cNvPicPr>
-            <a:picLocks noChangeAspect="1"/>
-          </p:cNvPicPr>
-          <p:nvPr/>
-        </p:nvPicPr>
-        <p:blipFill>
-          <a:blip r:embed="rId1"/>
-          <a:srcRect l="0" r="0" t="0" b="0"/>
-          <a:stretch/>
-        </p:blipFill>
-        <p:spPr>
-          <a:xfrm>
-            <a:off x="731520" y="1783080"/>
-            <a:ext cx="7132320" cy="3840480"/>
-          </a:xfrm>
-          <a:prstGeom prst="rect">
-            <a:avLst/>
-          </a:prstGeom>
-        </p:spPr>
-      </p:pic>
       <p:sp>
         <p:nvSpPr>
           <p:cNvPr id="6" name="Text 3"/>
@@ -4253,6 +4389,30 @@
           </a:p>
         </p:txBody>
       </p:sp>
+      <p:pic>
+        <p:nvPicPr>
+          <p:cNvPr id="9" name="Picture 8" descr="fig_gen_gap.png"/>
+          <p:cNvPicPr>
+            <a:picLocks noChangeAspect="1"/>
+          </p:cNvPicPr>
+          <p:nvPr/>
+        </p:nvPicPr>
+        <p:blipFill>
+          <a:blip r:embed="rId4"/>
+          <a:stretch>
+            <a:fillRect/>
+          </a:stretch>
+        </p:blipFill>
+        <p:spPr>
+          <a:xfrm>
+            <a:off x="731520" y="1783080"/>
+            <a:ext cx="7132320" cy="3840480"/>
+          </a:xfrm>
+          <a:prstGeom prst="rect">
+            <a:avLst/>
+          </a:prstGeom>
+        </p:spPr>
+      </p:pic>
     </p:spTree>
   </p:cSld>
   <p:clrMapOvr>
@@ -4304,6 +4464,10 @@
           </a:solidFill>
           <a:ln/>
         </p:spPr>
+        <p:txBody>
+          <a:bodyPr/>
+          <a:p/>
+        </p:txBody>
       </p:sp>
       <p:sp>
         <p:nvSpPr>
@@ -4409,6 +4573,10 @@
             <a:prstDash val="solid"/>
           </a:ln>
         </p:spPr>
+        <p:txBody>
+          <a:bodyPr/>
+          <a:p/>
+        </p:txBody>
       </p:sp>
       <p:sp>
         <p:nvSpPr>
@@ -4429,6 +4597,10 @@
           </a:solidFill>
           <a:ln/>
         </p:spPr>
+        <p:txBody>
+          <a:bodyPr/>
+          <a:p/>
+        </p:txBody>
       </p:sp>
       <p:sp>
         <p:nvSpPr>
@@ -4534,6 +4706,10 @@
             <a:prstDash val="solid"/>
           </a:ln>
         </p:spPr>
+        <p:txBody>
+          <a:bodyPr/>
+          <a:p/>
+        </p:txBody>
       </p:sp>
       <p:sp>
         <p:nvSpPr>
@@ -4554,6 +4730,10 @@
           </a:solidFill>
           <a:ln/>
         </p:spPr>
+        <p:txBody>
+          <a:bodyPr/>
+          <a:p/>
+        </p:txBody>
       </p:sp>
       <p:sp>
         <p:nvSpPr>
@@ -4801,6 +4981,10 @@
           </a:solidFill>
           <a:ln/>
         </p:spPr>
+        <p:txBody>
+          <a:bodyPr/>
+          <a:p/>
+        </p:txBody>
       </p:sp>
       <p:sp>
         <p:nvSpPr>
@@ -5061,6 +5245,237 @@
               <a:t>15</a:t>
             </a:r>
             <a:endParaRPr lang="en-US" sz="900" dirty="0"/>
+          </a:p>
+        </p:txBody>
+      </p:sp>
+    </p:spTree>
+  </p:cSld>
+  <p:clrMapOvr>
+    <a:masterClrMapping/>
+  </p:clrMapOvr>
+</p:sld>
+</file>
+
+<file path=ppt/slides/slide16.xml><?xml version="1.0" encoding="utf-8"?>
+<p:sld xmlns:a="http://schemas.openxmlformats.org/drawingml/2006/main" xmlns:p="http://schemas.openxmlformats.org/presentationml/2006/main" xmlns:r="http://schemas.openxmlformats.org/officeDocument/2006/relationships">
+  <p:cSld>
+    <p:spTree>
+      <p:nvGrpSpPr>
+        <p:cNvPr id="1" name=""/>
+        <p:cNvGrpSpPr/>
+        <p:nvPr/>
+      </p:nvGrpSpPr>
+      <p:grpSpPr/>
+      <p:sp>
+        <p:nvSpPr>
+          <p:cNvPr id="2" name="Shape 0"/>
+          <p:cNvSpPr/>
+          <p:nvPr/>
+        </p:nvSpPr>
+        <p:spPr>
+          <a:xfrm>
+            <a:off x="548640" y="566928"/>
+            <a:ext cx="146304" cy="457200"/>
+          </a:xfrm>
+          <a:prstGeom prst="rect">
+            <a:avLst/>
+          </a:prstGeom>
+          <a:solidFill>
+            <a:srgbClr val="0E9594"/>
+          </a:solidFill>
+          <a:ln/>
+        </p:spPr>
+        <p:txBody>
+          <a:bodyPr/>
+          <a:p/>
+        </p:txBody>
+      </p:sp>
+      <p:sp>
+        <p:nvSpPr>
+          <p:cNvPr id="3" name="TextBox 2"/>
+          <p:cNvSpPr txBox="1"/>
+          <p:nvPr/>
+        </p:nvSpPr>
+        <p:spPr>
+          <a:xfrm>
+            <a:off x="822960" y="310896"/>
+            <a:ext cx="10515600" cy="292608"/>
+          </a:xfrm>
+          <a:prstGeom prst="rect">
+            <a:avLst/>
+          </a:prstGeom>
+          <a:noFill/>
+        </p:spPr>
+        <p:txBody>
+          <a:bodyPr wrap="square">
+            <a:spAutoFit/>
+          </a:bodyPr>
+          <a:lstStyle/>
+          <a:p>
+            <a:r>
+              <a:rPr b="1" sz="1200">
+                <a:solidFill>
+                  <a:srgbClr val="0E9594"/>
+                </a:solidFill>
+              </a:rPr>
+              <a:t>RESULTS · AUC VS FAKE RECALL</a:t>
+            </a:r>
+          </a:p>
+        </p:txBody>
+      </p:sp>
+      <p:sp>
+        <p:nvSpPr>
+          <p:cNvPr id="4" name="TextBox 3"/>
+          <p:cNvSpPr txBox="1"/>
+          <p:nvPr/>
+        </p:nvSpPr>
+        <p:spPr>
+          <a:xfrm>
+            <a:off x="822960" y="566928"/>
+            <a:ext cx="10789920" cy="640080"/>
+          </a:xfrm>
+          <a:prstGeom prst="rect">
+            <a:avLst/>
+          </a:prstGeom>
+          <a:noFill/>
+        </p:spPr>
+        <p:txBody>
+          <a:bodyPr wrap="square">
+            <a:spAutoFit/>
+          </a:bodyPr>
+          <a:lstStyle/>
+          <a:p>
+            <a:r>
+              <a:rPr b="1" sz="2800">
+                <a:solidFill>
+                  <a:srgbClr val="22303A"/>
+                </a:solidFill>
+              </a:rPr>
+              <a:t>Ranking quality vs calibration -- and where each model errors fall</a:t>
+            </a:r>
+          </a:p>
+        </p:txBody>
+      </p:sp>
+      <p:pic>
+        <p:nvPicPr>
+          <p:cNvPr id="5" name="Picture 4" descr="fig_auc_recall_error.png"/>
+          <p:cNvPicPr>
+            <a:picLocks noChangeAspect="1"/>
+          </p:cNvPicPr>
+          <p:nvPr/>
+        </p:nvPicPr>
+        <p:blipFill>
+          <a:blip r:embed="rId2"/>
+          <a:stretch>
+            <a:fillRect/>
+          </a:stretch>
+        </p:blipFill>
+        <p:spPr>
+          <a:xfrm>
+            <a:off x="548640" y="1500000"/>
+            <a:ext cx="11094720" cy="4572000"/>
+          </a:xfrm>
+          <a:prstGeom prst="rect">
+            <a:avLst/>
+          </a:prstGeom>
+        </p:spPr>
+      </p:pic>
+      <p:sp>
+        <p:nvSpPr>
+          <p:cNvPr id="6" name="TextBox 5"/>
+          <p:cNvSpPr txBox="1"/>
+          <p:nvPr/>
+        </p:nvSpPr>
+        <p:spPr>
+          <a:xfrm>
+            <a:off x="822960" y="6100000"/>
+            <a:ext cx="10515600" cy="300000"/>
+          </a:xfrm>
+          <a:prstGeom prst="rect">
+            <a:avLst/>
+          </a:prstGeom>
+          <a:noFill/>
+        </p:spPr>
+        <p:txBody>
+          <a:bodyPr wrap="square">
+            <a:spAutoFit/>
+          </a:bodyPr>
+          <a:lstStyle/>
+          <a:p>
+            <a:r>
+              <a:rPr b="0" sz="1000">
+                <a:solidFill>
+                  <a:srgbClr val="5C6B73"/>
+                </a:solidFill>
+              </a:rPr>
+              <a:t>High AUC + low fake-recall at threshold 0.5 = calibration problem, not a modelling failure. Only CNN and WavLM probe sit in the target zone (top-right).</a:t>
+            </a:r>
+          </a:p>
+        </p:txBody>
+      </p:sp>
+      <p:sp>
+        <p:nvSpPr>
+          <p:cNvPr id="7" name="TextBox 6"/>
+          <p:cNvSpPr txBox="1"/>
+          <p:nvPr/>
+        </p:nvSpPr>
+        <p:spPr>
+          <a:xfrm>
+            <a:off x="548640" y="6437376"/>
+            <a:ext cx="7315200" cy="274320"/>
+          </a:xfrm>
+          <a:prstGeom prst="rect">
+            <a:avLst/>
+          </a:prstGeom>
+          <a:noFill/>
+        </p:spPr>
+        <p:txBody>
+          <a:bodyPr wrap="square">
+            <a:spAutoFit/>
+          </a:bodyPr>
+          <a:lstStyle/>
+          <a:p>
+            <a:r>
+              <a:rPr b="0" sz="900">
+                <a:solidFill>
+                  <a:srgbClr val="6B7B85"/>
+                </a:solidFill>
+              </a:rPr>
+              <a:t>Audio Deepfake Detection — DL project</a:t>
+            </a:r>
+          </a:p>
+        </p:txBody>
+      </p:sp>
+      <p:sp>
+        <p:nvSpPr>
+          <p:cNvPr id="8" name="TextBox 7"/>
+          <p:cNvSpPr txBox="1"/>
+          <p:nvPr/>
+        </p:nvSpPr>
+        <p:spPr>
+          <a:xfrm>
+            <a:off x="11430000" y="6437376"/>
+            <a:ext cx="548640" cy="274320"/>
+          </a:xfrm>
+          <a:prstGeom prst="rect">
+            <a:avLst/>
+          </a:prstGeom>
+          <a:noFill/>
+        </p:spPr>
+        <p:txBody>
+          <a:bodyPr wrap="square">
+            <a:spAutoFit/>
+          </a:bodyPr>
+          <a:lstStyle/>
+          <a:p>
+            <a:r>
+              <a:rPr b="0" sz="900">
+                <a:solidFill>
+                  <a:srgbClr val="6B7B85"/>
+                </a:solidFill>
+              </a:rPr>
+              <a:t>12</a:t>
+            </a:r>
           </a:p>
         </p:txBody>
       </p:sp>
@@ -5115,6 +5530,10 @@
           </a:solidFill>
           <a:ln/>
         </p:spPr>
+        <p:txBody>
+          <a:bodyPr/>
+          <a:p/>
+        </p:txBody>
       </p:sp>
       <p:sp>
         <p:nvSpPr>
@@ -5323,6 +5742,10 @@
             <a:prstDash val="solid"/>
           </a:ln>
         </p:spPr>
+        <p:txBody>
+          <a:bodyPr/>
+          <a:p/>
+        </p:txBody>
       </p:sp>
       <p:sp>
         <p:nvSpPr>
@@ -5428,6 +5851,10 @@
             <a:prstDash val="solid"/>
           </a:ln>
         </p:spPr>
+        <p:txBody>
+          <a:bodyPr/>
+          <a:p/>
+        </p:txBody>
       </p:sp>
       <p:sp>
         <p:nvSpPr>
@@ -5636,6 +6063,10 @@
           </a:solidFill>
           <a:ln/>
         </p:spPr>
+        <p:txBody>
+          <a:bodyPr/>
+          <a:p/>
+        </p:txBody>
       </p:sp>
       <p:sp>
         <p:nvSpPr>
@@ -6514,7 +6945,7 @@
                           <a:ea typeface="Calibri" pitchFamily="34" charset="-122"/>
                           <a:cs typeface="Calibri" pitchFamily="34" charset="-120"/>
                         </a:rPr>
-                        <a:t>temporal modelling, with / without a CNN front-end</a:t>
+                        <a:t>temporal modelling, with / without a CNN block</a:t>
                       </a:r>
                       <a:endParaRPr lang="en-US" sz="1400" dirty="0">
                         <a:latin typeface="Calibri" charset="0"/>
@@ -6944,6 +7375,10 @@
           </a:solidFill>
           <a:ln/>
         </p:spPr>
+        <p:txBody>
+          <a:bodyPr/>
+          <a:p/>
+        </p:txBody>
       </p:sp>
       <p:sp>
         <p:nvSpPr>
@@ -7049,6 +7484,10 @@
             <a:prstDash val="solid"/>
           </a:ln>
         </p:spPr>
+        <p:txBody>
+          <a:bodyPr/>
+          <a:p/>
+        </p:txBody>
       </p:sp>
       <p:sp>
         <p:nvSpPr>
@@ -7069,6 +7508,10 @@
           </a:solidFill>
           <a:ln/>
         </p:spPr>
+        <p:txBody>
+          <a:bodyPr/>
+          <a:p/>
+        </p:txBody>
       </p:sp>
       <p:sp>
         <p:nvSpPr>
@@ -7174,6 +7617,10 @@
             <a:prstDash val="solid"/>
           </a:ln>
         </p:spPr>
+        <p:txBody>
+          <a:bodyPr/>
+          <a:p/>
+        </p:txBody>
       </p:sp>
       <p:sp>
         <p:nvSpPr>
@@ -7194,6 +7641,10 @@
           </a:solidFill>
           <a:ln/>
         </p:spPr>
+        <p:txBody>
+          <a:bodyPr/>
+          <a:p/>
+        </p:txBody>
       </p:sp>
       <p:sp>
         <p:nvSpPr>
@@ -7299,6 +7750,10 @@
             <a:prstDash val="solid"/>
           </a:ln>
         </p:spPr>
+        <p:txBody>
+          <a:bodyPr/>
+          <a:p/>
+        </p:txBody>
       </p:sp>
       <p:sp>
         <p:nvSpPr>
@@ -7319,6 +7774,10 @@
           </a:solidFill>
           <a:ln/>
         </p:spPr>
+        <p:txBody>
+          <a:bodyPr/>
+          <a:p/>
+        </p:txBody>
       </p:sp>
       <p:sp>
         <p:nvSpPr>
@@ -7424,6 +7883,10 @@
             <a:prstDash val="solid"/>
           </a:ln>
         </p:spPr>
+        <p:txBody>
+          <a:bodyPr/>
+          <a:p/>
+        </p:txBody>
       </p:sp>
       <p:sp>
         <p:nvSpPr>
@@ -7444,6 +7907,10 @@
           </a:solidFill>
           <a:ln/>
         </p:spPr>
+        <p:txBody>
+          <a:bodyPr/>
+          <a:p/>
+        </p:txBody>
       </p:sp>
       <p:sp>
         <p:nvSpPr>
@@ -7652,6 +8119,10 @@
           </a:solidFill>
           <a:ln/>
         </p:spPr>
+        <p:txBody>
+          <a:bodyPr/>
+          <a:p/>
+        </p:txBody>
       </p:sp>
       <p:sp>
         <p:nvSpPr>
@@ -7731,29 +8202,6 @@
           </a:p>
         </p:txBody>
       </p:sp>
-      <p:pic>
-        <p:nvPicPr>
-          <p:cNvPr id="5" name="Image 0" descr="/sessions/modest-trusting-fermi/mnt/outputs/slide_assets/mlp_eff.png">    </p:cNvPr>
-          <p:cNvPicPr>
-            <a:picLocks noChangeAspect="1"/>
-          </p:cNvPicPr>
-          <p:nvPr/>
-        </p:nvPicPr>
-        <p:blipFill>
-          <a:blip r:embed="rId1"/>
-          <a:srcRect l="0" r="0" t="0" b="0"/>
-          <a:stretch/>
-        </p:blipFill>
-        <p:spPr>
-          <a:xfrm>
-            <a:off x="731520" y="1691640"/>
-            <a:ext cx="7315200" cy="3931920"/>
-          </a:xfrm>
-          <a:prstGeom prst="rect">
-            <a:avLst/>
-          </a:prstGeom>
-        </p:spPr>
-      </p:pic>
       <p:sp>
         <p:nvSpPr>
           <p:cNvPr id="6" name="Text 3"/>
@@ -7897,6 +8345,167 @@
             </a:r>
             <a:endParaRPr lang="en-US" sz="1400" dirty="0"/>
           </a:p>
+          <a:p/>
+          <a:p>
+            <a:r>
+              <a:rPr lang="en-US" sz="800"/>
+              <a:t/>
+            </a:r>
+          </a:p>
+          <a:p>
+            <a:r>
+              <a:rPr lang="en-US" sz="950" b="1">
+                <a:solidFill>
+                  <a:srgbClr val="0E9594"/>
+                </a:solidFill>
+              </a:rPr>
+              <a:t>Baseline config</a:t>
+            </a:r>
+          </a:p>
+          <a:p>
+            <a:r>
+              <a:rPr lang="en-US" sz="900">
+                <a:solidFill>
+                  <a:srgbClr val="5C6B73"/>
+                </a:solidFill>
+              </a:rPr>
+              <a:t>Hidden layers: </a:t>
+            </a:r>
+            <a:r>
+              <a:rPr lang="en-US" sz="900">
+                <a:solidFill>
+                  <a:srgbClr val="22303A"/>
+                </a:solidFill>
+              </a:rPr>
+              <a:t>[256, 128, 64]</a:t>
+            </a:r>
+          </a:p>
+          <a:p>
+            <a:r>
+              <a:rPr lang="en-US" sz="900">
+                <a:solidFill>
+                  <a:srgbClr val="5C6B73"/>
+                </a:solidFill>
+              </a:rPr>
+              <a:t>Learning rate: </a:t>
+            </a:r>
+            <a:r>
+              <a:rPr lang="en-US" sz="900">
+                <a:solidFill>
+                  <a:srgbClr val="22303A"/>
+                </a:solidFill>
+              </a:rPr>
+              <a:t>5e-4</a:t>
+            </a:r>
+          </a:p>
+          <a:p>
+            <a:r>
+              <a:rPr lang="en-US" sz="900">
+                <a:solidFill>
+                  <a:srgbClr val="5C6B73"/>
+                </a:solidFill>
+              </a:rPr>
+              <a:t>Dropout / wd: </a:t>
+            </a:r>
+            <a:r>
+              <a:rPr lang="en-US" sz="900">
+                <a:solidFill>
+                  <a:srgbClr val="22303A"/>
+                </a:solidFill>
+              </a:rPr>
+              <a:t>0.5 / 1e-4</a:t>
+            </a:r>
+          </a:p>
+          <a:p>
+            <a:r>
+              <a:rPr lang="en-US" sz="900" b="1">
+                <a:solidFill>
+                  <a:srgbClr val="0E9594"/>
+                </a:solidFill>
+              </a:rPr>
+              <a:t>AUC 0.769  |  fake-recall 12%</a:t>
+            </a:r>
+          </a:p>
+          <a:p>
+            <a:r>
+              <a:rPr lang="en-US" sz="800"/>
+              <a:t/>
+            </a:r>
+          </a:p>
+          <a:p>
+            <a:r>
+              <a:rPr lang="en-US" sz="950" b="1">
+                <a:solidFill>
+                  <a:srgbClr val="C9971B"/>
+                </a:solidFill>
+              </a:rPr>
+              <a:t>Best config</a:t>
+            </a:r>
+          </a:p>
+          <a:p>
+            <a:r>
+              <a:rPr lang="en-US" sz="900">
+                <a:solidFill>
+                  <a:srgbClr val="5C6B73"/>
+                </a:solidFill>
+              </a:rPr>
+              <a:t>Hidden layers: </a:t>
+            </a:r>
+            <a:r>
+              <a:rPr lang="en-US" sz="900">
+                <a:solidFill>
+                  <a:srgbClr val="22303A"/>
+                </a:solidFill>
+              </a:rPr>
+              <a:t>[256, 128, 64]</a:t>
+            </a:r>
+          </a:p>
+          <a:p>
+            <a:r>
+              <a:rPr lang="en-US" sz="900">
+                <a:solidFill>
+                  <a:srgbClr val="5C6B73"/>
+                </a:solidFill>
+              </a:rPr>
+              <a:t>Learning rate: </a:t>
+            </a:r>
+            <a:r>
+              <a:rPr lang="en-US" sz="900">
+                <a:solidFill>
+                  <a:srgbClr val="22303A"/>
+                </a:solidFill>
+              </a:rPr>
+              <a:t>1e-3  ← only change</a:t>
+            </a:r>
+          </a:p>
+          <a:p>
+            <a:r>
+              <a:rPr lang="en-US" sz="900">
+                <a:solidFill>
+                  <a:srgbClr val="5C6B73"/>
+                </a:solidFill>
+              </a:rPr>
+              <a:t>Dropout / wd: </a:t>
+            </a:r>
+            <a:r>
+              <a:rPr lang="en-US" sz="900">
+                <a:solidFill>
+                  <a:srgbClr val="22303A"/>
+                </a:solidFill>
+              </a:rPr>
+              <a:t>0.5 / 1e-4</a:t>
+            </a:r>
+          </a:p>
+          <a:p>
+            <a:r>
+              <a:rPr lang="en-US" sz="900" b="1">
+                <a:solidFill>
+                  <a:srgbClr val="C9971B"/>
+                </a:solidFill>
+              </a:rPr>
+              <a:t>AUC 0.786  |  fake-recall 17%</a:t>
+            </a:r>
+          </a:p>
         </p:txBody>
       </p:sp>
       <p:sp>
@@ -7977,6 +8586,30 @@
           </a:p>
         </p:txBody>
       </p:sp>
+      <p:pic>
+        <p:nvPicPr>
+          <p:cNvPr id="10" name="Picture 9" descr="fig_mlp_hparam.png"/>
+          <p:cNvPicPr>
+            <a:picLocks noChangeAspect="1"/>
+          </p:cNvPicPr>
+          <p:nvPr/>
+        </p:nvPicPr>
+        <p:blipFill>
+          <a:blip r:embed="rId4"/>
+          <a:stretch>
+            <a:fillRect/>
+          </a:stretch>
+        </p:blipFill>
+        <p:spPr>
+          <a:xfrm>
+            <a:off x="731520" y="1691640"/>
+            <a:ext cx="7315200" cy="3931920"/>
+          </a:xfrm>
+          <a:prstGeom prst="rect">
+            <a:avLst/>
+          </a:prstGeom>
+        </p:spPr>
+      </p:pic>
     </p:spTree>
   </p:cSld>
   <p:clrMapOvr>
@@ -8028,6 +8661,10 @@
           </a:solidFill>
           <a:ln/>
         </p:spPr>
+        <p:txBody>
+          <a:bodyPr/>
+          <a:p/>
+        </p:txBody>
       </p:sp>
       <p:sp>
         <p:nvSpPr>
@@ -8107,29 +8744,6 @@
           </a:p>
         </p:txBody>
       </p:sp>
-      <p:pic>
-        <p:nvPicPr>
-          <p:cNvPr id="5" name="Image 0" descr="/sessions/modest-trusting-fermi/mnt/outputs/slide_assets/cnn_eff.png">    </p:cNvPr>
-          <p:cNvPicPr>
-            <a:picLocks noChangeAspect="1"/>
-          </p:cNvPicPr>
-          <p:nvPr/>
-        </p:nvPicPr>
-        <p:blipFill>
-          <a:blip r:embed="rId1"/>
-          <a:srcRect l="0" r="0" t="0" b="0"/>
-          <a:stretch/>
-        </p:blipFill>
-        <p:spPr>
-          <a:xfrm>
-            <a:off x="731520" y="1691640"/>
-            <a:ext cx="7315200" cy="3931920"/>
-          </a:xfrm>
-          <a:prstGeom prst="rect">
-            <a:avLst/>
-          </a:prstGeom>
-        </p:spPr>
-      </p:pic>
       <p:sp>
         <p:nvSpPr>
           <p:cNvPr id="6" name="Text 3"/>
@@ -8273,6 +8887,203 @@
             </a:r>
             <a:endParaRPr lang="en-US" sz="1400" dirty="0"/>
           </a:p>
+          <a:p/>
+          <a:p>
+            <a:r>
+              <a:rPr lang="en-US" sz="800"/>
+              <a:t/>
+            </a:r>
+          </a:p>
+          <a:p>
+            <a:r>
+              <a:rPr lang="en-US" sz="950" b="1">
+                <a:solidFill>
+                  <a:srgbClr val="0E9594"/>
+                </a:solidFill>
+              </a:rPr>
+              <a:t>Baseline config</a:t>
+            </a:r>
+          </a:p>
+          <a:p>
+            <a:r>
+              <a:rPr lang="en-US" sz="900">
+                <a:solidFill>
+                  <a:srgbClr val="5C6B73"/>
+                </a:solidFill>
+              </a:rPr>
+              <a:t>Conv depth / ch: </a:t>
+            </a:r>
+            <a:r>
+              <a:rPr lang="en-US" sz="900">
+                <a:solidFill>
+                  <a:srgbClr val="22303A"/>
+                </a:solidFill>
+              </a:rPr>
+              <a:t>3 blocks / 32 ch</a:t>
+            </a:r>
+          </a:p>
+          <a:p>
+            <a:r>
+              <a:rPr lang="en-US" sz="900">
+                <a:solidFill>
+                  <a:srgbClr val="5C6B73"/>
+                </a:solidFill>
+              </a:rPr>
+              <a:t>Learning rate: </a:t>
+            </a:r>
+            <a:r>
+              <a:rPr lang="en-US" sz="900">
+                <a:solidFill>
+                  <a:srgbClr val="22303A"/>
+                </a:solidFill>
+              </a:rPr>
+              <a:t>5e-4</a:t>
+            </a:r>
+          </a:p>
+          <a:p>
+            <a:r>
+              <a:rPr lang="en-US" sz="900">
+                <a:solidFill>
+                  <a:srgbClr val="5C6B73"/>
+                </a:solidFill>
+              </a:rPr>
+              <a:t>Dropout / wd: </a:t>
+            </a:r>
+            <a:r>
+              <a:rPr lang="en-US" sz="900">
+                <a:solidFill>
+                  <a:srgbClr val="22303A"/>
+                </a:solidFill>
+              </a:rPr>
+              <a:t>0.5 / 1e-4</a:t>
+            </a:r>
+          </a:p>
+          <a:p>
+            <a:r>
+              <a:rPr lang="en-US" sz="900">
+                <a:solidFill>
+                  <a:srgbClr val="5C6B73"/>
+                </a:solidFill>
+              </a:rPr>
+              <a:t>Note: </a:t>
+            </a:r>
+            <a:r>
+              <a:rPr lang="en-US" sz="900">
+                <a:solidFill>
+                  <a:srgbClr val="22303A"/>
+                </a:solidFill>
+              </a:rPr>
+              <a:t>dropout 0.3 beats 0.5 at this lr</a:t>
+            </a:r>
+          </a:p>
+          <a:p>
+            <a:r>
+              <a:rPr lang="en-US" sz="900" b="1">
+                <a:solidFill>
+                  <a:srgbClr val="0E9594"/>
+                </a:solidFill>
+              </a:rPr>
+              <a:t>AUC 0.681  |  fake-recall 46%</a:t>
+            </a:r>
+          </a:p>
+          <a:p>
+            <a:r>
+              <a:rPr lang="en-US" sz="800"/>
+              <a:t/>
+            </a:r>
+          </a:p>
+          <a:p>
+            <a:r>
+              <a:rPr lang="en-US" sz="950" b="1">
+                <a:solidFill>
+                  <a:srgbClr val="C9971B"/>
+                </a:solidFill>
+              </a:rPr>
+              <a:t>Best config</a:t>
+            </a:r>
+          </a:p>
+          <a:p>
+            <a:r>
+              <a:rPr lang="en-US" sz="900">
+                <a:solidFill>
+                  <a:srgbClr val="5C6B73"/>
+                </a:solidFill>
+              </a:rPr>
+              <a:t>Conv depth / ch: </a:t>
+            </a:r>
+            <a:r>
+              <a:rPr lang="en-US" sz="900">
+                <a:solidFill>
+                  <a:srgbClr val="22303A"/>
+                </a:solidFill>
+              </a:rPr>
+              <a:t>3 blocks / 32 ch</a:t>
+            </a:r>
+          </a:p>
+          <a:p>
+            <a:r>
+              <a:rPr lang="en-US" sz="900">
+                <a:solidFill>
+                  <a:srgbClr val="5C6B73"/>
+                </a:solidFill>
+              </a:rPr>
+              <a:t>Learning rate: </a:t>
+            </a:r>
+            <a:r>
+              <a:rPr lang="en-US" sz="900">
+                <a:solidFill>
+                  <a:srgbClr val="22303A"/>
+                </a:solidFill>
+              </a:rPr>
+              <a:t>1e-3  ← only change</a:t>
+            </a:r>
+          </a:p>
+          <a:p>
+            <a:r>
+              <a:rPr lang="en-US" sz="900">
+                <a:solidFill>
+                  <a:srgbClr val="5C6B73"/>
+                </a:solidFill>
+              </a:rPr>
+              <a:t>Dropout / wd: </a:t>
+            </a:r>
+            <a:r>
+              <a:rPr lang="en-US" sz="900">
+                <a:solidFill>
+                  <a:srgbClr val="22303A"/>
+                </a:solidFill>
+              </a:rPr>
+              <a:t>0.5 / 1e-4</a:t>
+            </a:r>
+          </a:p>
+          <a:p>
+            <a:r>
+              <a:rPr lang="en-US" sz="900">
+                <a:solidFill>
+                  <a:srgbClr val="5C6B73"/>
+                </a:solidFill>
+              </a:rPr>
+              <a:t>Note: </a:t>
+            </a:r>
+            <a:r>
+              <a:rPr lang="en-US" sz="900">
+                <a:solidFill>
+                  <a:srgbClr val="22303A"/>
+                </a:solidFill>
+              </a:rPr>
+              <a:t>lr×dropout interaction: lr 1e-3 needs do 0.5</a:t>
+            </a:r>
+          </a:p>
+          <a:p>
+            <a:r>
+              <a:rPr lang="en-US" sz="900" b="1">
+                <a:solidFill>
+                  <a:srgbClr val="C9971B"/>
+                </a:solidFill>
+              </a:rPr>
+              <a:t>AUC 0.870  |  fake-recall 72%</a:t>
+            </a:r>
+          </a:p>
         </p:txBody>
       </p:sp>
       <p:sp>
@@ -8353,6 +9164,30 @@
           </a:p>
         </p:txBody>
       </p:sp>
+      <p:pic>
+        <p:nvPicPr>
+          <p:cNvPr id="10" name="Picture 9" descr="fig_cnn_hparam.png"/>
+          <p:cNvPicPr>
+            <a:picLocks noChangeAspect="1"/>
+          </p:cNvPicPr>
+          <p:nvPr/>
+        </p:nvPicPr>
+        <p:blipFill>
+          <a:blip r:embed="rId4"/>
+          <a:stretch>
+            <a:fillRect/>
+          </a:stretch>
+        </p:blipFill>
+        <p:spPr>
+          <a:xfrm>
+            <a:off x="731520" y="1691640"/>
+            <a:ext cx="7315200" cy="3931920"/>
+          </a:xfrm>
+          <a:prstGeom prst="rect">
+            <a:avLst/>
+          </a:prstGeom>
+        </p:spPr>
+      </p:pic>
     </p:spTree>
   </p:cSld>
   <p:clrMapOvr>
@@ -8404,6 +9239,10 @@
           </a:solidFill>
           <a:ln/>
         </p:spPr>
+        <p:txBody>
+          <a:bodyPr/>
+          <a:p/>
+        </p:txBody>
       </p:sp>
       <p:sp>
         <p:nvSpPr>
@@ -8477,35 +9316,12 @@
                 <a:ea typeface="Trebuchet MS" pitchFamily="34" charset="-122"/>
                 <a:cs typeface="Trebuchet MS" pitchFamily="34" charset="-120"/>
               </a:rPr>
-              <a:t>Adding a CNN front-end to the recurrent path</a:t>
+              <a:t>Adding a CNN block to the recurrent path</a:t>
             </a:r>
             <a:endParaRPr lang="en-US" sz="2800" dirty="0"/>
           </a:p>
         </p:txBody>
       </p:sp>
-      <p:pic>
-        <p:nvPicPr>
-          <p:cNvPr id="5" name="Image 0" descr="/sessions/modest-trusting-fermi/mnt/outputs/slide_assets/crnn_eff.png">    </p:cNvPr>
-          <p:cNvPicPr>
-            <a:picLocks noChangeAspect="1"/>
-          </p:cNvPicPr>
-          <p:nvPr/>
-        </p:nvPicPr>
-        <p:blipFill>
-          <a:blip r:embed="rId1"/>
-          <a:srcRect l="0" r="0" t="0" b="0"/>
-          <a:stretch/>
-        </p:blipFill>
-        <p:spPr>
-          <a:xfrm>
-            <a:off x="731520" y="1691640"/>
-            <a:ext cx="7315200" cy="3931920"/>
-          </a:xfrm>
-          <a:prstGeom prst="rect">
-            <a:avLst/>
-          </a:prstGeom>
-        </p:spPr>
-      </p:pic>
       <p:sp>
         <p:nvSpPr>
           <p:cNvPr id="6" name="Text 3"/>
@@ -8582,7 +9398,7 @@
                 <a:ea typeface="Calibri" pitchFamily="34" charset="-122"/>
                 <a:cs typeface="Calibri" pitchFamily="34" charset="-120"/>
               </a:rPr>
-              <a:t>CRNN ≈ CNN (AUC ≈ 0.86): the conv front-end does the heavy lifting.</a:t>
+              <a:t>CRNN ≈ CNN (AUC ≈ 0.86): the CNN block does the heavy lifting.</a:t>
             </a:r>
             <a:endParaRPr lang="en-US" sz="1400" dirty="0"/>
           </a:p>
@@ -8649,6 +9465,167 @@
             </a:r>
             <a:endParaRPr lang="en-US" sz="1400" dirty="0"/>
           </a:p>
+          <a:p/>
+          <a:p>
+            <a:r>
+              <a:rPr lang="en-US" sz="800"/>
+              <a:t/>
+            </a:r>
+          </a:p>
+          <a:p>
+            <a:r>
+              <a:rPr lang="en-US" sz="950" b="1">
+                <a:solidFill>
+                  <a:srgbClr val="0E9594"/>
+                </a:solidFill>
+              </a:rPr>
+              <a:t>Baseline config</a:t>
+            </a:r>
+          </a:p>
+          <a:p>
+            <a:r>
+              <a:rPr lang="en-US" sz="900">
+                <a:solidFill>
+                  <a:srgbClr val="5C6B73"/>
+                </a:solidFill>
+              </a:rPr>
+              <a:t>CNN depth / ch: </a:t>
+            </a:r>
+            <a:r>
+              <a:rPr lang="en-US" sz="900">
+                <a:solidFill>
+                  <a:srgbClr val="22303A"/>
+                </a:solidFill>
+              </a:rPr>
+              <a:t>3 blocks / 32 ch</a:t>
+            </a:r>
+          </a:p>
+          <a:p>
+            <a:r>
+              <a:rPr lang="en-US" sz="900">
+                <a:solidFill>
+                  <a:srgbClr val="5C6B73"/>
+                </a:solidFill>
+              </a:rPr>
+              <a:t>BiLSTM layers / h: </a:t>
+            </a:r>
+            <a:r>
+              <a:rPr lang="en-US" sz="900">
+                <a:solidFill>
+                  <a:srgbClr val="22303A"/>
+                </a:solidFill>
+              </a:rPr>
+              <a:t>2 / 128</a:t>
+            </a:r>
+          </a:p>
+          <a:p>
+            <a:r>
+              <a:rPr lang="en-US" sz="900">
+                <a:solidFill>
+                  <a:srgbClr val="5C6B73"/>
+                </a:solidFill>
+              </a:rPr>
+              <a:t>Learning rate: </a:t>
+            </a:r>
+            <a:r>
+              <a:rPr lang="en-US" sz="900">
+                <a:solidFill>
+                  <a:srgbClr val="22303A"/>
+                </a:solidFill>
+              </a:rPr>
+              <a:t>5e-4</a:t>
+            </a:r>
+          </a:p>
+          <a:p>
+            <a:r>
+              <a:rPr lang="en-US" sz="900">
+                <a:solidFill>
+                  <a:srgbClr val="5C6B73"/>
+                </a:solidFill>
+              </a:rPr>
+              <a:t>Dropout / wd: </a:t>
+            </a:r>
+            <a:r>
+              <a:rPr lang="en-US" sz="900">
+                <a:solidFill>
+                  <a:srgbClr val="22303A"/>
+                </a:solidFill>
+              </a:rPr>
+              <a:t>0.5 / 1e-4</a:t>
+            </a:r>
+          </a:p>
+          <a:p>
+            <a:r>
+              <a:rPr lang="en-US" sz="900" b="1">
+                <a:solidFill>
+                  <a:srgbClr val="0E9594"/>
+                </a:solidFill>
+              </a:rPr>
+              <a:t>AUC 0.860  |  fake-recall 54%</a:t>
+            </a:r>
+          </a:p>
+          <a:p>
+            <a:r>
+              <a:rPr lang="en-US" sz="800"/>
+              <a:t/>
+            </a:r>
+          </a:p>
+          <a:p>
+            <a:r>
+              <a:rPr lang="en-US" sz="950" b="1">
+                <a:solidFill>
+                  <a:srgbClr val="C9971B"/>
+                </a:solidFill>
+              </a:rPr>
+              <a:t>Best config  =  Baseline</a:t>
+            </a:r>
+          </a:p>
+          <a:p>
+            <a:r>
+              <a:rPr lang="en-US" sz="900">
+                <a:solidFill>
+                  <a:srgbClr val="5C6B73"/>
+                </a:solidFill>
+              </a:rPr>
+              <a:t>Note: </a:t>
+            </a:r>
+            <a:r>
+              <a:rPr lang="en-US" sz="900">
+                <a:solidFill>
+                  <a:srgbClr val="22303A"/>
+                </a:solidFill>
+              </a:rPr>
+              <a:t>No variation improved on baseline</a:t>
+            </a:r>
+          </a:p>
+          <a:p>
+            <a:r>
+              <a:rPr lang="en-US" sz="900">
+                <a:solidFill>
+                  <a:srgbClr val="5C6B73"/>
+                </a:solidFill>
+              </a:rPr>
+              <a:t>Note: </a:t>
+            </a:r>
+            <a:r>
+              <a:rPr lang="en-US" sz="900">
+                <a:solidFill>
+                  <a:srgbClr val="22303A"/>
+                </a:solidFill>
+              </a:rPr>
+              <a:t>Baseline is already the global optimum</a:t>
+            </a:r>
+          </a:p>
+          <a:p>
+            <a:r>
+              <a:rPr lang="en-US" sz="900" b="1">
+                <a:solidFill>
+                  <a:srgbClr val="C9971B"/>
+                </a:solidFill>
+              </a:rPr>
+              <a:t>AUC 0.860  |  fake-recall 54%</a:t>
+            </a:r>
+          </a:p>
         </p:txBody>
       </p:sp>
       <p:sp>
@@ -8729,6 +9706,30 @@
           </a:p>
         </p:txBody>
       </p:sp>
+      <p:pic>
+        <p:nvPicPr>
+          <p:cNvPr id="10" name="Picture 9" descr="fig_crnn_hparam.png"/>
+          <p:cNvPicPr>
+            <a:picLocks noChangeAspect="1"/>
+          </p:cNvPicPr>
+          <p:nvPr/>
+        </p:nvPicPr>
+        <p:blipFill>
+          <a:blip r:embed="rId4"/>
+          <a:stretch>
+            <a:fillRect/>
+          </a:stretch>
+        </p:blipFill>
+        <p:spPr>
+          <a:xfrm>
+            <a:off x="731520" y="1691640"/>
+            <a:ext cx="7315200" cy="3931920"/>
+          </a:xfrm>
+          <a:prstGeom prst="rect">
+            <a:avLst/>
+          </a:prstGeom>
+        </p:spPr>
+      </p:pic>
     </p:spTree>
   </p:cSld>
   <p:clrMapOvr>
@@ -8780,6 +9781,10 @@
           </a:solidFill>
           <a:ln/>
         </p:spPr>
+        <p:txBody>
+          <a:bodyPr/>
+          <a:p/>
+        </p:txBody>
       </p:sp>
       <p:sp>
         <p:nvSpPr>
@@ -8859,29 +9864,6 @@
           </a:p>
         </p:txBody>
       </p:sp>
-      <p:pic>
-        <p:nvPicPr>
-          <p:cNvPr id="5" name="Image 0" descr="/sessions/modest-trusting-fermi/mnt/outputs/slide_assets/rnn_eff.png">    </p:cNvPr>
-          <p:cNvPicPr>
-            <a:picLocks noChangeAspect="1"/>
-          </p:cNvPicPr>
-          <p:nvPr/>
-        </p:nvPicPr>
-        <p:blipFill>
-          <a:blip r:embed="rId1"/>
-          <a:srcRect l="0" r="0" t="0" b="0"/>
-          <a:stretch/>
-        </p:blipFill>
-        <p:spPr>
-          <a:xfrm>
-            <a:off x="731520" y="1691640"/>
-            <a:ext cx="7315200" cy="3931920"/>
-          </a:xfrm>
-          <a:prstGeom prst="rect">
-            <a:avLst/>
-          </a:prstGeom>
-        </p:spPr>
-      </p:pic>
       <p:sp>
         <p:nvSpPr>
           <p:cNvPr id="6" name="Text 3"/>
@@ -9004,6 +9986,167 @@
             </a:r>
             <a:endParaRPr lang="en-US" sz="1400" dirty="0"/>
           </a:p>
+          <a:p/>
+          <a:p>
+            <a:r>
+              <a:rPr lang="en-US" sz="800"/>
+              <a:t/>
+            </a:r>
+          </a:p>
+          <a:p>
+            <a:r>
+              <a:rPr lang="en-US" sz="950" b="1">
+                <a:solidFill>
+                  <a:srgbClr val="0E9594"/>
+                </a:solidFill>
+              </a:rPr>
+              <a:t>Baseline config</a:t>
+            </a:r>
+          </a:p>
+          <a:p>
+            <a:r>
+              <a:rPr lang="en-US" sz="900">
+                <a:solidFill>
+                  <a:srgbClr val="5C6B73"/>
+                </a:solidFill>
+              </a:rPr>
+              <a:t>BiLSTM layers / h: </a:t>
+            </a:r>
+            <a:r>
+              <a:rPr lang="en-US" sz="900">
+                <a:solidFill>
+                  <a:srgbClr val="22303A"/>
+                </a:solidFill>
+              </a:rPr>
+              <a:t>2 / 128</a:t>
+            </a:r>
+          </a:p>
+          <a:p>
+            <a:r>
+              <a:rPr lang="en-US" sz="900">
+                <a:solidFill>
+                  <a:srgbClr val="5C6B73"/>
+                </a:solidFill>
+              </a:rPr>
+              <a:t>Learning rate: </a:t>
+            </a:r>
+            <a:r>
+              <a:rPr lang="en-US" sz="900">
+                <a:solidFill>
+                  <a:srgbClr val="22303A"/>
+                </a:solidFill>
+              </a:rPr>
+              <a:t>5e-4</a:t>
+            </a:r>
+          </a:p>
+          <a:p>
+            <a:r>
+              <a:rPr lang="en-US" sz="900">
+                <a:solidFill>
+                  <a:srgbClr val="5C6B73"/>
+                </a:solidFill>
+              </a:rPr>
+              <a:t>Dropout / wd: </a:t>
+            </a:r>
+            <a:r>
+              <a:rPr lang="en-US" sz="900">
+                <a:solidFill>
+                  <a:srgbClr val="22303A"/>
+                </a:solidFill>
+              </a:rPr>
+              <a:t>0.5 / 1e-4</a:t>
+            </a:r>
+          </a:p>
+          <a:p>
+            <a:r>
+              <a:rPr lang="en-US" sz="900" b="1">
+                <a:solidFill>
+                  <a:srgbClr val="0E9594"/>
+                </a:solidFill>
+              </a:rPr>
+              <a:t>AUC 0.592  |  fake-recall 12%</a:t>
+            </a:r>
+          </a:p>
+          <a:p>
+            <a:r>
+              <a:rPr lang="en-US" sz="800"/>
+              <a:t/>
+            </a:r>
+          </a:p>
+          <a:p>
+            <a:r>
+              <a:rPr lang="en-US" sz="950" b="1">
+                <a:solidFill>
+                  <a:srgbClr val="C9971B"/>
+                </a:solidFill>
+              </a:rPr>
+              <a:t>Best config</a:t>
+            </a:r>
+          </a:p>
+          <a:p>
+            <a:r>
+              <a:rPr lang="en-US" sz="900">
+                <a:solidFill>
+                  <a:srgbClr val="5C6B73"/>
+                </a:solidFill>
+              </a:rPr>
+              <a:t>BiLSTM layers / h: </a:t>
+            </a:r>
+            <a:r>
+              <a:rPr lang="en-US" sz="900">
+                <a:solidFill>
+                  <a:srgbClr val="22303A"/>
+                </a:solidFill>
+              </a:rPr>
+              <a:t>1 / 128  ← fewer layers</a:t>
+            </a:r>
+          </a:p>
+          <a:p>
+            <a:r>
+              <a:rPr lang="en-US" sz="900">
+                <a:solidFill>
+                  <a:srgbClr val="5C6B73"/>
+                </a:solidFill>
+              </a:rPr>
+              <a:t>Learning rate: </a:t>
+            </a:r>
+            <a:r>
+              <a:rPr lang="en-US" sz="900">
+                <a:solidFill>
+                  <a:srgbClr val="22303A"/>
+                </a:solidFill>
+              </a:rPr>
+              <a:t>5e-4</a:t>
+            </a:r>
+          </a:p>
+          <a:p>
+            <a:r>
+              <a:rPr lang="en-US" sz="900">
+                <a:solidFill>
+                  <a:srgbClr val="5C6B73"/>
+                </a:solidFill>
+              </a:rPr>
+              <a:t>Dropout / wd: </a:t>
+            </a:r>
+            <a:r>
+              <a:rPr lang="en-US" sz="900">
+                <a:solidFill>
+                  <a:srgbClr val="22303A"/>
+                </a:solidFill>
+              </a:rPr>
+              <a:t>0.5 / 1e-4</a:t>
+            </a:r>
+          </a:p>
+          <a:p>
+            <a:r>
+              <a:rPr lang="en-US" sz="900" b="1">
+                <a:solidFill>
+                  <a:srgbClr val="C9971B"/>
+                </a:solidFill>
+              </a:rPr>
+              <a:t>AUC 0.660  |  fake-recall 17%</a:t>
+            </a:r>
+          </a:p>
         </p:txBody>
       </p:sp>
       <p:sp>
@@ -9084,6 +10227,30 @@
           </a:p>
         </p:txBody>
       </p:sp>
+      <p:pic>
+        <p:nvPicPr>
+          <p:cNvPr id="10" name="Picture 9" descr="fig_rnn_hparam.png"/>
+          <p:cNvPicPr>
+            <a:picLocks noChangeAspect="1"/>
+          </p:cNvPicPr>
+          <p:nvPr/>
+        </p:nvPicPr>
+        <p:blipFill>
+          <a:blip r:embed="rId4"/>
+          <a:stretch>
+            <a:fillRect/>
+          </a:stretch>
+        </p:blipFill>
+        <p:spPr>
+          <a:xfrm>
+            <a:off x="731520" y="1691640"/>
+            <a:ext cx="7315200" cy="3931920"/>
+          </a:xfrm>
+          <a:prstGeom prst="rect">
+            <a:avLst/>
+          </a:prstGeom>
+        </p:spPr>
+      </p:pic>
     </p:spTree>
   </p:cSld>
   <p:clrMapOvr>
@@ -9135,6 +10302,10 @@
           </a:solidFill>
           <a:ln/>
         </p:spPr>
+        <p:txBody>
+          <a:bodyPr/>
+          <a:p/>
+        </p:txBody>
       </p:sp>
       <p:sp>
         <p:nvSpPr>
@@ -9214,29 +10385,6 @@
           </a:p>
         </p:txBody>
       </p:sp>
-      <p:pic>
-        <p:nvPicPr>
-          <p:cNvPr id="5" name="Image 0" descr="/sessions/modest-trusting-fermi/mnt/outputs/slide_assets/wavlm_layers.png">    </p:cNvPr>
-          <p:cNvPicPr>
-            <a:picLocks noChangeAspect="1"/>
-          </p:cNvPicPr>
-          <p:nvPr/>
-        </p:nvPicPr>
-        <p:blipFill>
-          <a:blip r:embed="rId1"/>
-          <a:srcRect l="0" r="0" t="0" b="0"/>
-          <a:stretch/>
-        </p:blipFill>
-        <p:spPr>
-          <a:xfrm>
-            <a:off x="731520" y="1828800"/>
-            <a:ext cx="6949440" cy="3474720"/>
-          </a:xfrm>
-          <a:prstGeom prst="rect">
-            <a:avLst/>
-          </a:prstGeom>
-        </p:spPr>
-      </p:pic>
       <p:sp>
         <p:nvSpPr>
           <p:cNvPr id="6" name="Text 3"/>
@@ -9341,6 +10489,167 @@
             </a:r>
             <a:endParaRPr lang="en-US" sz="1400" dirty="0"/>
           </a:p>
+          <a:p/>
+          <a:p>
+            <a:r>
+              <a:rPr lang="en-US" sz="800"/>
+              <a:t/>
+            </a:r>
+          </a:p>
+          <a:p>
+            <a:r>
+              <a:rPr lang="en-US" sz="950" b="1">
+                <a:solidFill>
+                  <a:srgbClr val="0E9594"/>
+                </a:solidFill>
+              </a:rPr>
+              <a:t>Frozen probe config</a:t>
+            </a:r>
+          </a:p>
+          <a:p>
+            <a:r>
+              <a:rPr lang="en-US" sz="900">
+                <a:solidFill>
+                  <a:srgbClr val="5C6B73"/>
+                </a:solidFill>
+              </a:rPr>
+              <a:t>Aggregation: </a:t>
+            </a:r>
+            <a:r>
+              <a:rPr lang="en-US" sz="900">
+                <a:solidFill>
+                  <a:srgbClr val="22303A"/>
+                </a:solidFill>
+              </a:rPr>
+              <a:t>Softmax-weighted sum, 12 layers</a:t>
+            </a:r>
+          </a:p>
+          <a:p>
+            <a:r>
+              <a:rPr lang="en-US" sz="900">
+                <a:solidFill>
+                  <a:srgbClr val="5C6B73"/>
+                </a:solidFill>
+              </a:rPr>
+              <a:t>Dominant layer: </a:t>
+            </a:r>
+            <a:r>
+              <a:rPr lang="en-US" sz="900">
+                <a:solidFill>
+                  <a:srgbClr val="22303A"/>
+                </a:solidFill>
+              </a:rPr>
+              <a:t>Layer 3 of 12  (~81% weight)</a:t>
+            </a:r>
+          </a:p>
+          <a:p>
+            <a:r>
+              <a:rPr lang="en-US" sz="900">
+                <a:solidFill>
+                  <a:srgbClr val="5C6B73"/>
+                </a:solidFill>
+              </a:rPr>
+              <a:t>Trainable params: </a:t>
+            </a:r>
+            <a:r>
+              <a:rPr lang="en-US" sz="900">
+                <a:solidFill>
+                  <a:srgbClr val="22303A"/>
+                </a:solidFill>
+              </a:rPr>
+              <a:t>~5K  (head only)</a:t>
+            </a:r>
+          </a:p>
+          <a:p>
+            <a:r>
+              <a:rPr lang="en-US" sz="900" b="1">
+                <a:solidFill>
+                  <a:srgbClr val="0E9594"/>
+                </a:solidFill>
+              </a:rPr>
+              <a:t>AUC 0.918  |  fake-recall 57%</a:t>
+            </a:r>
+          </a:p>
+          <a:p>
+            <a:r>
+              <a:rPr lang="en-US" sz="800"/>
+              <a:t/>
+            </a:r>
+          </a:p>
+          <a:p>
+            <a:r>
+              <a:rPr lang="en-US" sz="950" b="1">
+                <a:solidFill>
+                  <a:srgbClr val="C9971B"/>
+                </a:solidFill>
+              </a:rPr>
+              <a:t>Fine-tune best config</a:t>
+            </a:r>
+          </a:p>
+          <a:p>
+            <a:r>
+              <a:rPr lang="en-US" sz="900">
+                <a:solidFill>
+                  <a:srgbClr val="5C6B73"/>
+                </a:solidFill>
+              </a:rPr>
+              <a:t>Unfrozen layers: </a:t>
+            </a:r>
+            <a:r>
+              <a:rPr lang="en-US" sz="900">
+                <a:solidFill>
+                  <a:srgbClr val="22303A"/>
+                </a:solidFill>
+              </a:rPr>
+              <a:t>Top 2 transformer blocks</a:t>
+            </a:r>
+          </a:p>
+          <a:p>
+            <a:r>
+              <a:rPr lang="en-US" sz="900">
+                <a:solidFill>
+                  <a:srgbClr val="5C6B73"/>
+                </a:solidFill>
+              </a:rPr>
+              <a:t>lr backbone / head: </a:t>
+            </a:r>
+            <a:r>
+              <a:rPr lang="en-US" sz="900">
+                <a:solidFill>
+                  <a:srgbClr val="22303A"/>
+                </a:solidFill>
+              </a:rPr>
+              <a:t>1e-5 / 1e-3</a:t>
+            </a:r>
+          </a:p>
+          <a:p>
+            <a:r>
+              <a:rPr lang="en-US" sz="900">
+                <a:solidFill>
+                  <a:srgbClr val="5C6B73"/>
+                </a:solidFill>
+              </a:rPr>
+              <a:t>Batch / wd: </a:t>
+            </a:r>
+            <a:r>
+              <a:rPr lang="en-US" sz="900">
+                <a:solidFill>
+                  <a:srgbClr val="22303A"/>
+                </a:solidFill>
+              </a:rPr>
+              <a:t>32 / 0.01</a:t>
+            </a:r>
+          </a:p>
+          <a:p>
+            <a:r>
+              <a:rPr lang="en-US" sz="900" b="1">
+                <a:solidFill>
+                  <a:srgbClr val="C9971B"/>
+                </a:solidFill>
+              </a:rPr>
+              <a:t>AUC 0.865  |  fake-recall 45%  (domain shift)</a:t>
+            </a:r>
+          </a:p>
         </p:txBody>
       </p:sp>
       <p:sp>
@@ -9421,6 +10730,30 @@
           </a:p>
         </p:txBody>
       </p:sp>
+      <p:pic>
+        <p:nvPicPr>
+          <p:cNvPr id="9" name="Picture 8" descr="fig_wavlm_layers.png"/>
+          <p:cNvPicPr>
+            <a:picLocks noChangeAspect="1"/>
+          </p:cNvPicPr>
+          <p:nvPr/>
+        </p:nvPicPr>
+        <p:blipFill>
+          <a:blip r:embed="rId4"/>
+          <a:stretch>
+            <a:fillRect/>
+          </a:stretch>
+        </p:blipFill>
+        <p:spPr>
+          <a:xfrm>
+            <a:off x="731520" y="1828800"/>
+            <a:ext cx="6949440" cy="3474720"/>
+          </a:xfrm>
+          <a:prstGeom prst="rect">
+            <a:avLst/>
+          </a:prstGeom>
+        </p:spPr>
+      </p:pic>
     </p:spTree>
   </p:cSld>
   <p:clrMapOvr>

--- a/presentation.pptx
+++ b/presentation.pptx
@@ -4,6 +4,9 @@
   <p:sldMasterIdLst>
     <p:sldMasterId id="2147483648" r:id="rId1"/>
   </p:sldMasterIdLst>
+  <p:notesMasterIdLst>
+    <p:notesMasterId r:id="rId18"/>
+  </p:notesMasterIdLst>
   <p:sldIdLst>
     <p:sldId id="256" r:id="rId2"/>
     <p:sldId id="257" r:id="rId3"/>
@@ -16,17 +19,14 @@
     <p:sldId id="264" r:id="rId10"/>
     <p:sldId id="265" r:id="rId11"/>
     <p:sldId id="266" r:id="rId12"/>
-    <p:sldId id="271" r:id="rId22"/>
-    <p:sldId id="267" r:id="rId13"/>
-    <p:sldId id="268" r:id="rId14"/>
-    <p:sldId id="269" r:id="rId15"/>
-    <p:sldId id="270" r:id="rId16"/>
+    <p:sldId id="271" r:id="rId13"/>
+    <p:sldId id="267" r:id="rId14"/>
+    <p:sldId id="268" r:id="rId15"/>
+    <p:sldId id="269" r:id="rId16"/>
+    <p:sldId id="270" r:id="rId17"/>
   </p:sldIdLst>
-  <p:notesMasterIdLst>
-    <p:notesMasterId r:id="rId17"/>
-  </p:notesMasterIdLst>
-  <p:sldSz cx="12191695" cy="6858000"/>
-  <p:notesSz cx="6858000" cy="12191695"/>
+  <p:sldSz cx="12192000" cy="6858000"/>
+  <p:notesSz cx="6858000" cy="12192000"/>
   <p:defaultTextStyle>
     <a:lvl1pPr marL="0" algn="l" defTabSz="914400" rtl="0" eaLnBrk="1" latinLnBrk="0" hangingPunct="1">
       <a:defRPr sz="1800" kern="1200">
@@ -119,6 +119,11 @@
       </a:defRPr>
     </a:lvl9pPr>
   </p:defaultTextStyle>
+  <p:extLst>
+    <p:ext uri="{EFAFB233-063F-42B5-8137-9DF3F51BA10A}">
+      <p15:sldGuideLst xmlns:p15="http://schemas.microsoft.com/office/powerpoint/2012/main"/>
+    </p:ext>
+  </p:extLst>
 </p:presentation>
 </file>
 
@@ -144,234 +149,10 @@
           <a:chExt cx="0" cy="0"/>
         </a:xfrm>
       </p:grpSpPr>
-      <p:sp>
-        <p:nvSpPr>
-          <p:cNvPr id="2" name="Header Placeholder 1"/>
-          <p:cNvSpPr>
-            <a:spLocks noGrp="1"/>
-          </p:cNvSpPr>
-          <p:nvPr>
-            <p:ph type="hdr" sz="quarter"/>
-          </p:nvPr>
-        </p:nvSpPr>
-        <p:spPr>
-          <a:xfrm>
-            <a:off x="0" y="0"/>
-            <a:ext cx="2971800" cy="458788"/>
-          </a:xfrm>
-          <a:prstGeom prst="rect">
-            <a:avLst/>
-          </a:prstGeom>
-        </p:spPr>
-        <p:txBody>
-          <a:bodyPr vert="horz" lIns="91440" tIns="45720" rIns="91440" bIns="45720" rtlCol="0"/>
-          <a:lstStyle>
-            <a:lvl1pPr algn="l">
-              <a:defRPr sz="1200"/>
-            </a:lvl1pPr>
-          </a:lstStyle>
-          <a:p>
-            <a:endParaRPr lang="en-US"/>
-          </a:p>
-        </p:txBody>
-      </p:sp>
-      <p:sp>
-        <p:nvSpPr>
-          <p:cNvPr id="3" name="Date Placeholder 2"/>
-          <p:cNvSpPr>
-            <a:spLocks noGrp="1"/>
-          </p:cNvSpPr>
-          <p:nvPr>
-            <p:ph type="dt" idx="1"/>
-          </p:nvPr>
-        </p:nvSpPr>
-        <p:spPr>
-          <a:xfrm>
-            <a:off x="3884613" y="0"/>
-            <a:ext cx="2971800" cy="458788"/>
-          </a:xfrm>
-          <a:prstGeom prst="rect">
-            <a:avLst/>
-          </a:prstGeom>
-        </p:spPr>
-        <p:txBody>
-          <a:bodyPr vert="horz" lIns="91440" tIns="45720" rIns="91440" bIns="45720" rtlCol="0"/>
-          <a:lstStyle>
-            <a:lvl1pPr algn="r">
-              <a:defRPr sz="1200"/>
-            </a:lvl1pPr>
-          </a:lstStyle>
-          <a:p>
-            <a:fld id="{5282F153-3F37-0F45-9E97-73ACFA13230C}" type="datetimeFigureOut">
-              <a:rPr lang="en-US"/>
-              <a:t>7/23/19</a:t>
-            </a:fld>
-            <a:endParaRPr lang="en-US"/>
-          </a:p>
-        </p:txBody>
-      </p:sp>
-      <p:sp>
-        <p:nvSpPr>
-          <p:cNvPr id="4" name="Slide Image Placeholder 3"/>
-          <p:cNvSpPr>
-            <a:spLocks noGrp="1" noRot="1" noChangeAspect="1"/>
-          </p:cNvSpPr>
-          <p:nvPr>
-            <p:ph type="sldImg" idx="2"/>
-          </p:nvPr>
-        </p:nvSpPr>
-        <p:spPr>
-          <a:xfrm>
-            <a:off x="685800" y="1143000"/>
-            <a:ext cx="5486400" cy="3086100"/>
-          </a:xfrm>
-          <a:prstGeom prst="rect">
-            <a:avLst/>
-          </a:prstGeom>
-          <a:noFill/>
-          <a:ln w="12700">
-            <a:solidFill>
-              <a:prstClr val="black"/>
-            </a:solidFill>
-          </a:ln>
-        </p:spPr>
-        <p:txBody>
-          <a:bodyPr vert="horz" lIns="91440" tIns="45720" rIns="91440" bIns="45720" rtlCol="0" anchor="ctr"/>
-          <a:lstStyle/>
-          <a:p>
-            <a:endParaRPr lang="en-US"/>
-          </a:p>
-        </p:txBody>
-      </p:sp>
-      <p:sp>
-        <p:nvSpPr>
-          <p:cNvPr id="5" name="Notes Placeholder 4"/>
-          <p:cNvSpPr>
-            <a:spLocks noGrp="1"/>
-          </p:cNvSpPr>
-          <p:nvPr>
-            <p:ph type="body" sz="quarter" idx="3"/>
-          </p:nvPr>
-        </p:nvSpPr>
-        <p:spPr>
-          <a:xfrm>
-            <a:off x="685800" y="4400550"/>
-            <a:ext cx="5486400" cy="3600450"/>
-          </a:xfrm>
-          <a:prstGeom prst="rect">
-            <a:avLst/>
-          </a:prstGeom>
-        </p:spPr>
-        <p:txBody>
-          <a:bodyPr vert="horz" lIns="91440" tIns="45720" rIns="91440" bIns="45720" rtlCol="0"/>
-          <a:lstStyle/>
-          <a:p>
-            <a:pPr lvl="0"/>
-            <a:r>
-              <a:rPr lang="en-US"/>
-              <a:t>Click to edit Master text styles</a:t>
-            </a:r>
-          </a:p>
-          <a:p>
-            <a:pPr lvl="1"/>
-            <a:r>
-              <a:rPr lang="en-US"/>
-              <a:t>Second level</a:t>
-            </a:r>
-          </a:p>
-          <a:p>
-            <a:pPr lvl="2"/>
-            <a:r>
-              <a:rPr lang="en-US"/>
-              <a:t>Third level</a:t>
-            </a:r>
-          </a:p>
-          <a:p>
-            <a:pPr lvl="3"/>
-            <a:r>
-              <a:rPr lang="en-US"/>
-              <a:t>Fourth level</a:t>
-            </a:r>
-          </a:p>
-          <a:p>
-            <a:pPr lvl="4"/>
-            <a:r>
-              <a:rPr lang="en-US"/>
-              <a:t>Fifth level</a:t>
-            </a:r>
-          </a:p>
-        </p:txBody>
-      </p:sp>
-      <p:sp>
-        <p:nvSpPr>
-          <p:cNvPr id="6" name="Footer Placeholder 5"/>
-          <p:cNvSpPr>
-            <a:spLocks noGrp="1"/>
-          </p:cNvSpPr>
-          <p:nvPr>
-            <p:ph type="ftr" sz="quarter" idx="4"/>
-          </p:nvPr>
-        </p:nvSpPr>
-        <p:spPr>
-          <a:xfrm>
-            <a:off x="0" y="8685213"/>
-            <a:ext cx="2971800" cy="458787"/>
-          </a:xfrm>
-          <a:prstGeom prst="rect">
-            <a:avLst/>
-          </a:prstGeom>
-        </p:spPr>
-        <p:txBody>
-          <a:bodyPr vert="horz" lIns="91440" tIns="45720" rIns="91440" bIns="45720" rtlCol="0" anchor="b"/>
-          <a:lstStyle>
-            <a:lvl1pPr algn="l">
-              <a:defRPr sz="1200"/>
-            </a:lvl1pPr>
-          </a:lstStyle>
-          <a:p>
-            <a:endParaRPr lang="en-US"/>
-          </a:p>
-        </p:txBody>
-      </p:sp>
-      <p:sp>
-        <p:nvSpPr>
-          <p:cNvPr id="7" name="Slide Number Placeholder 6"/>
-          <p:cNvSpPr>
-            <a:spLocks noGrp="1"/>
-          </p:cNvSpPr>
-          <p:nvPr>
-            <p:ph type="sldNum" sz="quarter" idx="5"/>
-          </p:nvPr>
-        </p:nvSpPr>
-        <p:spPr>
-          <a:xfrm>
-            <a:off x="3884613" y="8685213"/>
-            <a:ext cx="2971800" cy="458787"/>
-          </a:xfrm>
-          <a:prstGeom prst="rect">
-            <a:avLst/>
-          </a:prstGeom>
-        </p:spPr>
-        <p:txBody>
-          <a:bodyPr vert="horz" lIns="91440" tIns="45720" rIns="91440" bIns="45720" rtlCol="0" anchor="b"/>
-          <a:lstStyle>
-            <a:lvl1pPr algn="r">
-              <a:defRPr sz="1200"/>
-            </a:lvl1pPr>
-          </a:lstStyle>
-          <a:p>
-            <a:fld id="{CE5E9CC1-C706-0F49-92D6-E571CC5EEA8F}" type="slidenum">
-              <a:rPr lang="en-US"/>
-              <a:t>‹#›</a:t>
-            </a:fld>
-            <a:endParaRPr lang="en-US"/>
-          </a:p>
-        </p:txBody>
-      </p:sp>
     </p:spTree>
     <p:extLst>
       <p:ext uri="{BB962C8B-B14F-4D97-AF65-F5344CB8AC3E}">
-        <p14:creationId xmlns:p14="http://schemas.microsoft.com/office/powerpoint/2010/main" val="1024086991"/>
+        <p14:creationId xmlns:p14="http://schemas.microsoft.com/office/powerpoint/2010/main" val="569842988"/>
       </p:ext>
     </p:extLst>
   </p:cSld>
@@ -515,10 +296,6 @@
           <a:bodyPr/>
           <a:lstStyle/>
           <a:p>
-            <a:r>
-              <a:rPr lang="en-US" dirty="0"/>
-              <a:t/>
-            </a:r>
             <a:endParaRPr lang="en-US" dirty="0"/>
           </a:p>
         </p:txBody>
@@ -603,10 +380,6 @@
           <a:bodyPr/>
           <a:lstStyle/>
           <a:p>
-            <a:r>
-              <a:rPr lang="en-US" dirty="0"/>
-              <a:t/>
-            </a:r>
             <a:endParaRPr lang="en-US" dirty="0"/>
           </a:p>
         </p:txBody>
@@ -691,10 +464,6 @@
           <a:bodyPr/>
           <a:lstStyle/>
           <a:p>
-            <a:r>
-              <a:rPr lang="en-US" dirty="0"/>
-              <a:t/>
-            </a:r>
             <a:endParaRPr lang="en-US" dirty="0"/>
           </a:p>
         </p:txBody>
@@ -779,10 +548,6 @@
           <a:bodyPr/>
           <a:lstStyle/>
           <a:p>
-            <a:r>
-              <a:rPr lang="en-US" dirty="0"/>
-              <a:t/>
-            </a:r>
             <a:endParaRPr lang="en-US" dirty="0"/>
           </a:p>
         </p:txBody>
@@ -804,7 +569,7 @@
           <a:p>
             <a:fld id="{F7021451-1387-4CA6-816F-3879F97B5CBC}" type="slidenum">
               <a:rPr lang="en-US"/>
-              <a:t>12</a:t>
+              <a:t>13</a:t>
             </a:fld>
             <a:endParaRPr lang="en-US"/>
           </a:p>
@@ -867,10 +632,6 @@
           <a:bodyPr/>
           <a:lstStyle/>
           <a:p>
-            <a:r>
-              <a:rPr lang="en-US" dirty="0"/>
-              <a:t/>
-            </a:r>
             <a:endParaRPr lang="en-US" dirty="0"/>
           </a:p>
         </p:txBody>
@@ -892,7 +653,7 @@
           <a:p>
             <a:fld id="{F7021451-1387-4CA6-816F-3879F97B5CBC}" type="slidenum">
               <a:rPr lang="en-US"/>
-              <a:t>13</a:t>
+              <a:t>14</a:t>
             </a:fld>
             <a:endParaRPr lang="en-US"/>
           </a:p>
@@ -955,10 +716,6 @@
           <a:bodyPr/>
           <a:lstStyle/>
           <a:p>
-            <a:r>
-              <a:rPr lang="en-US" dirty="0"/>
-              <a:t/>
-            </a:r>
             <a:endParaRPr lang="en-US" dirty="0"/>
           </a:p>
         </p:txBody>
@@ -980,7 +737,7 @@
           <a:p>
             <a:fld id="{F7021451-1387-4CA6-816F-3879F97B5CBC}" type="slidenum">
               <a:rPr lang="en-US"/>
-              <a:t>14</a:t>
+              <a:t>15</a:t>
             </a:fld>
             <a:endParaRPr lang="en-US"/>
           </a:p>
@@ -1043,10 +800,6 @@
           <a:bodyPr/>
           <a:lstStyle/>
           <a:p>
-            <a:r>
-              <a:rPr lang="en-US" dirty="0"/>
-              <a:t/>
-            </a:r>
             <a:endParaRPr lang="en-US" dirty="0"/>
           </a:p>
         </p:txBody>
@@ -1068,7 +821,7 @@
           <a:p>
             <a:fld id="{F7021451-1387-4CA6-816F-3879F97B5CBC}" type="slidenum">
               <a:rPr lang="en-US"/>
-              <a:t>15</a:t>
+              <a:t>16</a:t>
             </a:fld>
             <a:endParaRPr lang="en-US"/>
           </a:p>
@@ -1131,10 +884,6 @@
           <a:bodyPr/>
           <a:lstStyle/>
           <a:p>
-            <a:r>
-              <a:rPr lang="en-US" dirty="0"/>
-              <a:t/>
-            </a:r>
             <a:endParaRPr lang="en-US" dirty="0"/>
           </a:p>
         </p:txBody>
@@ -1219,10 +968,6 @@
           <a:bodyPr/>
           <a:lstStyle/>
           <a:p>
-            <a:r>
-              <a:rPr lang="en-US" dirty="0"/>
-              <a:t/>
-            </a:r>
             <a:endParaRPr lang="en-US" dirty="0"/>
           </a:p>
         </p:txBody>
@@ -1307,10 +1052,6 @@
           <a:bodyPr/>
           <a:lstStyle/>
           <a:p>
-            <a:r>
-              <a:rPr lang="en-US" dirty="0"/>
-              <a:t/>
-            </a:r>
             <a:endParaRPr lang="en-US" dirty="0"/>
           </a:p>
         </p:txBody>
@@ -1395,10 +1136,6 @@
           <a:bodyPr/>
           <a:lstStyle/>
           <a:p>
-            <a:r>
-              <a:rPr lang="en-US" dirty="0"/>
-              <a:t/>
-            </a:r>
             <a:endParaRPr lang="en-US" dirty="0"/>
           </a:p>
         </p:txBody>
@@ -1483,10 +1220,6 @@
           <a:bodyPr/>
           <a:lstStyle/>
           <a:p>
-            <a:r>
-              <a:rPr lang="en-US" dirty="0"/>
-              <a:t/>
-            </a:r>
             <a:endParaRPr lang="en-US" dirty="0"/>
           </a:p>
         </p:txBody>
@@ -1571,10 +1304,6 @@
           <a:bodyPr/>
           <a:lstStyle/>
           <a:p>
-            <a:r>
-              <a:rPr lang="en-US" dirty="0"/>
-              <a:t/>
-            </a:r>
             <a:endParaRPr lang="en-US" dirty="0"/>
           </a:p>
         </p:txBody>
@@ -1659,10 +1388,6 @@
           <a:bodyPr/>
           <a:lstStyle/>
           <a:p>
-            <a:r>
-              <a:rPr lang="en-US" dirty="0"/>
-              <a:t/>
-            </a:r>
             <a:endParaRPr lang="en-US" dirty="0"/>
           </a:p>
         </p:txBody>
@@ -1747,10 +1472,6 @@
           <a:bodyPr/>
           <a:lstStyle/>
           <a:p>
-            <a:r>
-              <a:rPr lang="en-US" dirty="0"/>
-              <a:t/>
-            </a:r>
             <a:endParaRPr lang="en-US" dirty="0"/>
           </a:p>
         </p:txBody>
@@ -1824,6 +1545,11 @@
 <file path=ppt/slideMasters/slideMaster1.xml><?xml version="1.0" encoding="utf-8"?>
 <p:sldMaster xmlns:a="http://schemas.openxmlformats.org/drawingml/2006/main" xmlns:r="http://schemas.openxmlformats.org/officeDocument/2006/relationships" xmlns:p="http://schemas.openxmlformats.org/presentationml/2006/main">
   <p:cSld>
+    <p:bg>
+      <p:bgRef idx="1001">
+        <a:schemeClr val="bg1"/>
+      </p:bgRef>
+    </p:bg>
     <p:spTree>
       <p:nvGrpSpPr>
         <p:cNvPr id="1" name=""/>
@@ -2106,6 +1832,7 @@
         <a:solidFill>
           <a:srgbClr val="0B2B3A"/>
         </a:solidFill>
+        <a:effectLst/>
       </p:bgPr>
     </p:bg>
     <p:spTree>
@@ -2143,7 +1870,10 @@
         </p:spPr>
         <p:txBody>
           <a:bodyPr/>
-          <a:p/>
+          <a:lstStyle/>
+          <a:p>
+            <a:endParaRPr/>
+          </a:p>
         </p:txBody>
       </p:sp>
       <p:sp>
@@ -2167,11 +1897,11 @@
           <a:bodyPr wrap="square" lIns="0" tIns="0" rIns="0" bIns="0" rtlCol="0" anchor="ctr"/>
           <a:lstStyle/>
           <a:p>
-            <a:pPr indent="0" marL="0">
+            <a:pPr marL="0" indent="0">
               <a:buNone/>
             </a:pPr>
             <a:r>
-              <a:rPr lang="en-US" sz="4000" b="1" spc="100" kern="0" dirty="0">
+              <a:rPr lang="en-US" sz="4000" b="1" kern="0" spc="100" dirty="0">
                 <a:solidFill>
                   <a:srgbClr val="FFFFFF"/>
                 </a:solidFill>
@@ -2206,7 +1936,7 @@
           <a:bodyPr wrap="square" lIns="0" tIns="0" rIns="0" bIns="0" rtlCol="0" anchor="ctr"/>
           <a:lstStyle/>
           <a:p>
-            <a:pPr indent="0" marL="0">
+            <a:pPr marL="0" indent="0">
               <a:buNone/>
             </a:pPr>
             <a:r>
@@ -2232,8 +1962,8 @@
         </p:nvSpPr>
         <p:spPr>
           <a:xfrm>
-            <a:off x="841248" y="5943600"/>
-            <a:ext cx="7315200" cy="365760"/>
+            <a:off x="841248" y="4328021"/>
+            <a:ext cx="7973238" cy="420129"/>
           </a:xfrm>
           <a:prstGeom prst="rect">
             <a:avLst/>
@@ -2245,21 +1975,17 @@
           <a:bodyPr wrap="square" lIns="0" tIns="0" rIns="0" bIns="0" rtlCol="0" anchor="ctr"/>
           <a:lstStyle/>
           <a:p>
-            <a:pPr indent="0" marL="0">
+            <a:pPr marL="0" indent="0">
               <a:buNone/>
             </a:pPr>
             <a:r>
-              <a:rPr lang="en-US" sz="1300" i="1" dirty="0">
-                <a:solidFill>
-                  <a:srgbClr val="7E94A0"/>
-                </a:solidFill>
-                <a:latin typeface="Calibri" pitchFamily="34" charset="0"/>
-                <a:ea typeface="Calibri" pitchFamily="34" charset="-122"/>
-                <a:cs typeface="Calibri" pitchFamily="34" charset="-120"/>
+              <a:rPr lang="en-US" dirty="0">
+                <a:solidFill>
+                  <a:schemeClr val="bg1"/>
+                </a:solidFill>
               </a:rPr>
               <a:t>Deep Learning course project</a:t>
             </a:r>
-            <a:endParaRPr lang="en-US" sz="1300" dirty="0"/>
           </a:p>
         </p:txBody>
       </p:sp>
@@ -2271,8 +1997,8 @@
         </p:nvSpPr>
         <p:spPr>
           <a:xfrm>
-            <a:off x="841248" y="6320000"/>
-            <a:ext cx="10058400" cy="500000"/>
+            <a:off x="822960" y="4715198"/>
+            <a:ext cx="10207505" cy="523220"/>
           </a:xfrm>
           <a:prstGeom prst="rect">
             <a:avLst/>
@@ -2280,30 +2006,60 @@
           <a:noFill/>
         </p:spPr>
         <p:txBody>
-          <a:bodyPr wrap="none">
+          <a:bodyPr wrap="square">
             <a:spAutoFit/>
           </a:bodyPr>
           <a:lstStyle/>
           <a:p>
-            <a:pPr algn="l"/>
-            <a:r>
-              <a:rPr sz="1100" b="0">
-                <a:solidFill>
-                  <a:srgbClr val="7E94A0"/>
-                </a:solidFill>
-              </a:rPr>
-              <a:t>George Nazos  MTN2519     |     Konstantinos Kaimakis  MTN2508</a:t>
-            </a:r>
-          </a:p>
-          <a:p>
-            <a:pPr algn="l"/>
-            <a:r>
-              <a:rPr sz="1000" b="0">
-                <a:solidFill>
-                  <a:srgbClr val="7E94A0"/>
-                </a:solidFill>
-              </a:rPr>
-              <a:t>MSc Artificial Intelligence  ·  NSCR Demokritos &amp; UNIPI</a:t>
+            <a:r>
+              <a:rPr sz="1600" b="0" dirty="0">
+                <a:solidFill>
+                  <a:schemeClr val="bg1"/>
+                </a:solidFill>
+              </a:rPr>
+              <a:t>George </a:t>
+            </a:r>
+            <a:r>
+              <a:rPr sz="1600" b="0" dirty="0" err="1">
+                <a:solidFill>
+                  <a:schemeClr val="bg1"/>
+                </a:solidFill>
+              </a:rPr>
+              <a:t>Nazos</a:t>
+            </a:r>
+            <a:r>
+              <a:rPr sz="1600" b="0" dirty="0">
+                <a:solidFill>
+                  <a:schemeClr val="bg1"/>
+                </a:solidFill>
+              </a:rPr>
+              <a:t>  MTN2519     |     Konstantinos Kaimakis  MTN2508</a:t>
+            </a:r>
+          </a:p>
+          <a:p>
+            <a:r>
+              <a:rPr sz="1200" b="0" dirty="0">
+                <a:solidFill>
+                  <a:schemeClr val="bg1"/>
+                </a:solidFill>
+              </a:rPr>
+              <a:t>MSc Artificial Intelligence  ·  NSCR </a:t>
+            </a:r>
+            <a:r>
+              <a:rPr sz="1200" b="0" dirty="0" err="1">
+                <a:solidFill>
+                  <a:schemeClr val="bg1"/>
+                </a:solidFill>
+              </a:rPr>
+              <a:t>Demokritos</a:t>
+            </a:r>
+            <a:r>
+              <a:rPr sz="1200" b="0" dirty="0">
+                <a:solidFill>
+                  <a:schemeClr val="bg1"/>
+                </a:solidFill>
+              </a:rPr>
+              <a:t> &amp; UNIPI</a:t>
             </a:r>
           </a:p>
         </p:txBody>
@@ -2324,6 +2080,7 @@
         <a:solidFill>
           <a:srgbClr val="FFFFFF"/>
         </a:solidFill>
+        <a:effectLst/>
       </p:bgPr>
     </p:bg>
     <p:spTree>
@@ -2361,7 +2118,10 @@
         </p:spPr>
         <p:txBody>
           <a:bodyPr/>
-          <a:p/>
+          <a:lstStyle/>
+          <a:p>
+            <a:endParaRPr/>
+          </a:p>
         </p:txBody>
       </p:sp>
       <p:sp>
@@ -2385,11 +2145,11 @@
           <a:bodyPr wrap="square" lIns="0" tIns="0" rIns="0" bIns="0" rtlCol="0" anchor="ctr"/>
           <a:lstStyle/>
           <a:p>
-            <a:pPr indent="0" marL="0">
+            <a:pPr marL="0" indent="0">
               <a:buNone/>
             </a:pPr>
             <a:r>
-              <a:rPr lang="en-US" sz="1200" b="1" spc="200" kern="0" dirty="0">
+              <a:rPr lang="en-US" sz="1200" b="1" kern="0" spc="200" dirty="0">
                 <a:solidFill>
                   <a:srgbClr val="0E9594"/>
                 </a:solidFill>
@@ -2424,7 +2184,7 @@
           <a:bodyPr wrap="square" lIns="0" tIns="0" rIns="0" bIns="0" rtlCol="0" anchor="ctr"/>
           <a:lstStyle/>
           <a:p>
-            <a:pPr indent="0" marL="0">
+            <a:pPr marL="0" indent="0">
               <a:buNone/>
             </a:pPr>
             <a:r>
@@ -2463,7 +2223,7 @@
           <a:bodyPr wrap="square" lIns="0" tIns="0" rIns="0" bIns="0" rtlCol="0" anchor="ctr"/>
           <a:lstStyle/>
           <a:p>
-            <a:pPr indent="0" marL="0">
+            <a:pPr marL="0" indent="0">
               <a:buNone/>
             </a:pPr>
             <a:r>
@@ -2502,7 +2262,7 @@
           <a:bodyPr wrap="square" lIns="0" tIns="0" rIns="0" bIns="0" rtlCol="0" anchor="ctr"/>
           <a:lstStyle/>
           <a:p>
-            <a:pPr indent="0" marL="0">
+            <a:pPr marL="0" indent="0">
               <a:buNone/>
             </a:pPr>
             <a:r>
@@ -2623,7 +2383,7 @@
           <a:bodyPr wrap="square" lIns="0" tIns="0" rIns="0" bIns="0" rtlCol="0" anchor="ctr"/>
           <a:lstStyle/>
           <a:p>
-            <a:pPr indent="0" marL="0">
+            <a:pPr marL="0" indent="0">
               <a:buNone/>
             </a:pPr>
             <a:r>
@@ -2662,7 +2422,7 @@
           <a:bodyPr wrap="square" lIns="0" tIns="0" rIns="0" bIns="0" rtlCol="0" anchor="ctr"/>
           <a:lstStyle/>
           <a:p>
-            <a:pPr algn="r" indent="0" marL="0">
+            <a:pPr marL="0" indent="0" algn="r">
               <a:buNone/>
             </a:pPr>
             <a:r>
@@ -2689,7 +2449,7 @@
           <p:nvPr/>
         </p:nvPicPr>
         <p:blipFill>
-          <a:blip r:embed="rId7"/>
+          <a:blip r:embed="rId3"/>
           <a:stretch>
             <a:fillRect/>
           </a:stretch>
@@ -2713,7 +2473,7 @@
           <p:nvPr/>
         </p:nvPicPr>
         <p:blipFill>
-          <a:blip r:embed="rId3"/>
+          <a:blip r:embed="rId4"/>
           <a:stretch>
             <a:fillRect/>
           </a:stretch>
@@ -2737,7 +2497,7 @@
           <p:nvPr/>
         </p:nvPicPr>
         <p:blipFill>
-          <a:blip r:embed="rId8"/>
+          <a:blip r:embed="rId5"/>
           <a:stretch>
             <a:fillRect/>
           </a:stretch>
@@ -2761,7 +2521,7 @@
           <p:nvPr/>
         </p:nvPicPr>
         <p:blipFill>
-          <a:blip r:embed="rId1"/>
+          <a:blip r:embed="rId6"/>
           <a:stretch>
             <a:fillRect/>
           </a:stretch>
@@ -2792,6 +2552,7 @@
         <a:solidFill>
           <a:srgbClr val="FFFFFF"/>
         </a:solidFill>
+        <a:effectLst/>
       </p:bgPr>
     </p:bg>
     <p:spTree>
@@ -2829,7 +2590,10 @@
         </p:spPr>
         <p:txBody>
           <a:bodyPr/>
-          <a:p/>
+          <a:lstStyle/>
+          <a:p>
+            <a:endParaRPr/>
+          </a:p>
         </p:txBody>
       </p:sp>
       <p:sp>
@@ -2853,11 +2617,11 @@
           <a:bodyPr wrap="square" lIns="0" tIns="0" rIns="0" bIns="0" rtlCol="0" anchor="ctr"/>
           <a:lstStyle/>
           <a:p>
-            <a:pPr indent="0" marL="0">
+            <a:pPr marL="0" indent="0">
               <a:buNone/>
             </a:pPr>
             <a:r>
-              <a:rPr lang="en-US" sz="1200" b="1" spc="200" kern="0" dirty="0">
+              <a:rPr lang="en-US" sz="1200" b="1" kern="0" spc="200" dirty="0">
                 <a:solidFill>
                   <a:srgbClr val="0E9594"/>
                 </a:solidFill>
@@ -2892,7 +2656,7 @@
           <a:bodyPr wrap="square" lIns="0" tIns="0" rIns="0" bIns="0" rtlCol="0" anchor="ctr"/>
           <a:lstStyle/>
           <a:p>
-            <a:pPr indent="0" marL="0">
+            <a:pPr marL="0" indent="0">
               <a:buNone/>
             </a:pPr>
             <a:r>
@@ -3016,7 +2780,7 @@
           <a:bodyPr wrap="square" lIns="0" tIns="0" rIns="0" bIns="0" rtlCol="0" anchor="ctr"/>
           <a:lstStyle/>
           <a:p>
-            <a:pPr indent="0" marL="0">
+            <a:pPr marL="0" indent="0">
               <a:buNone/>
             </a:pPr>
             <a:r>
@@ -3055,7 +2819,7 @@
           <a:bodyPr wrap="square" lIns="0" tIns="0" rIns="0" bIns="0" rtlCol="0" anchor="ctr"/>
           <a:lstStyle/>
           <a:p>
-            <a:pPr algn="r" indent="0" marL="0">
+            <a:pPr marL="0" indent="0" algn="r">
               <a:buNone/>
             </a:pPr>
             <a:r>
@@ -3082,7 +2846,7 @@
           <p:nvPr/>
         </p:nvPicPr>
         <p:blipFill>
-          <a:blip r:embed="rId4"/>
+          <a:blip r:embed="rId3"/>
           <a:stretch>
             <a:fillRect/>
           </a:stretch>
@@ -3107,12 +2871,254 @@
 
 <file path=ppt/slides/slide12.xml><?xml version="1.0" encoding="utf-8"?>
 <p:sld xmlns:a="http://schemas.openxmlformats.org/drawingml/2006/main" xmlns:r="http://schemas.openxmlformats.org/officeDocument/2006/relationships" xmlns:p="http://schemas.openxmlformats.org/presentationml/2006/main">
+  <p:cSld>
+    <p:spTree>
+      <p:nvGrpSpPr>
+        <p:cNvPr id="1" name=""/>
+        <p:cNvGrpSpPr/>
+        <p:nvPr/>
+      </p:nvGrpSpPr>
+      <p:grpSpPr>
+        <a:xfrm>
+          <a:off x="0" y="0"/>
+          <a:ext cx="0" cy="0"/>
+          <a:chOff x="0" y="0"/>
+          <a:chExt cx="0" cy="0"/>
+        </a:xfrm>
+      </p:grpSpPr>
+      <p:sp>
+        <p:nvSpPr>
+          <p:cNvPr id="2" name="Shape 0"/>
+          <p:cNvSpPr/>
+          <p:nvPr/>
+        </p:nvSpPr>
+        <p:spPr>
+          <a:xfrm>
+            <a:off x="548640" y="566928"/>
+            <a:ext cx="146304" cy="457200"/>
+          </a:xfrm>
+          <a:prstGeom prst="rect">
+            <a:avLst/>
+          </a:prstGeom>
+          <a:solidFill>
+            <a:srgbClr val="0E9594"/>
+          </a:solidFill>
+          <a:ln/>
+        </p:spPr>
+        <p:txBody>
+          <a:bodyPr/>
+          <a:lstStyle/>
+          <a:p>
+            <a:endParaRPr/>
+          </a:p>
+        </p:txBody>
+      </p:sp>
+      <p:sp>
+        <p:nvSpPr>
+          <p:cNvPr id="3" name="TextBox 2"/>
+          <p:cNvSpPr txBox="1"/>
+          <p:nvPr/>
+        </p:nvSpPr>
+        <p:spPr>
+          <a:xfrm>
+            <a:off x="822960" y="310896"/>
+            <a:ext cx="10515600" cy="292608"/>
+          </a:xfrm>
+          <a:prstGeom prst="rect">
+            <a:avLst/>
+          </a:prstGeom>
+          <a:noFill/>
+        </p:spPr>
+        <p:txBody>
+          <a:bodyPr wrap="square">
+            <a:spAutoFit/>
+          </a:bodyPr>
+          <a:lstStyle/>
+          <a:p>
+            <a:r>
+              <a:rPr sz="1200" b="1">
+                <a:solidFill>
+                  <a:srgbClr val="0E9594"/>
+                </a:solidFill>
+              </a:rPr>
+              <a:t>RESULTS · AUC VS FAKE RECALL</a:t>
+            </a:r>
+          </a:p>
+        </p:txBody>
+      </p:sp>
+      <p:sp>
+        <p:nvSpPr>
+          <p:cNvPr id="4" name="TextBox 3"/>
+          <p:cNvSpPr txBox="1"/>
+          <p:nvPr/>
+        </p:nvSpPr>
+        <p:spPr>
+          <a:xfrm>
+            <a:off x="822960" y="566928"/>
+            <a:ext cx="10789920" cy="640080"/>
+          </a:xfrm>
+          <a:prstGeom prst="rect">
+            <a:avLst/>
+          </a:prstGeom>
+          <a:noFill/>
+        </p:spPr>
+        <p:txBody>
+          <a:bodyPr wrap="square">
+            <a:spAutoFit/>
+          </a:bodyPr>
+          <a:lstStyle/>
+          <a:p>
+            <a:r>
+              <a:rPr sz="2800" b="1">
+                <a:solidFill>
+                  <a:srgbClr val="22303A"/>
+                </a:solidFill>
+              </a:rPr>
+              <a:t>Ranking quality vs calibration -- and where each model errors fall</a:t>
+            </a:r>
+          </a:p>
+        </p:txBody>
+      </p:sp>
+      <p:pic>
+        <p:nvPicPr>
+          <p:cNvPr id="5" name="Picture 4" descr="fig_auc_recall_error.png"/>
+          <p:cNvPicPr>
+            <a:picLocks noChangeAspect="1"/>
+          </p:cNvPicPr>
+          <p:nvPr/>
+        </p:nvPicPr>
+        <p:blipFill>
+          <a:blip r:embed="rId2"/>
+          <a:stretch>
+            <a:fillRect/>
+          </a:stretch>
+        </p:blipFill>
+        <p:spPr>
+          <a:xfrm>
+            <a:off x="548640" y="1500000"/>
+            <a:ext cx="11094720" cy="4572000"/>
+          </a:xfrm>
+          <a:prstGeom prst="rect">
+            <a:avLst/>
+          </a:prstGeom>
+        </p:spPr>
+      </p:pic>
+      <p:sp>
+        <p:nvSpPr>
+          <p:cNvPr id="6" name="TextBox 5"/>
+          <p:cNvSpPr txBox="1"/>
+          <p:nvPr/>
+        </p:nvSpPr>
+        <p:spPr>
+          <a:xfrm>
+            <a:off x="822960" y="6100000"/>
+            <a:ext cx="10515600" cy="300000"/>
+          </a:xfrm>
+          <a:prstGeom prst="rect">
+            <a:avLst/>
+          </a:prstGeom>
+          <a:noFill/>
+        </p:spPr>
+        <p:txBody>
+          <a:bodyPr wrap="square">
+            <a:spAutoFit/>
+          </a:bodyPr>
+          <a:lstStyle/>
+          <a:p>
+            <a:r>
+              <a:rPr sz="1000" b="0">
+                <a:solidFill>
+                  <a:srgbClr val="5C6B73"/>
+                </a:solidFill>
+              </a:rPr>
+              <a:t>High AUC + low fake-recall at threshold 0.5 = calibration problem, not a modelling failure. Only CNN and WavLM probe sit in the target zone (top-right).</a:t>
+            </a:r>
+          </a:p>
+        </p:txBody>
+      </p:sp>
+      <p:sp>
+        <p:nvSpPr>
+          <p:cNvPr id="7" name="TextBox 6"/>
+          <p:cNvSpPr txBox="1"/>
+          <p:nvPr/>
+        </p:nvSpPr>
+        <p:spPr>
+          <a:xfrm>
+            <a:off x="548640" y="6437376"/>
+            <a:ext cx="7315200" cy="274320"/>
+          </a:xfrm>
+          <a:prstGeom prst="rect">
+            <a:avLst/>
+          </a:prstGeom>
+          <a:noFill/>
+        </p:spPr>
+        <p:txBody>
+          <a:bodyPr wrap="square">
+            <a:spAutoFit/>
+          </a:bodyPr>
+          <a:lstStyle/>
+          <a:p>
+            <a:r>
+              <a:rPr sz="900" b="0">
+                <a:solidFill>
+                  <a:srgbClr val="6B7B85"/>
+                </a:solidFill>
+              </a:rPr>
+              <a:t>Audio Deepfake Detection — DL project</a:t>
+            </a:r>
+          </a:p>
+        </p:txBody>
+      </p:sp>
+      <p:sp>
+        <p:nvSpPr>
+          <p:cNvPr id="8" name="TextBox 7"/>
+          <p:cNvSpPr txBox="1"/>
+          <p:nvPr/>
+        </p:nvSpPr>
+        <p:spPr>
+          <a:xfrm>
+            <a:off x="11430000" y="6437376"/>
+            <a:ext cx="548640" cy="274320"/>
+          </a:xfrm>
+          <a:prstGeom prst="rect">
+            <a:avLst/>
+          </a:prstGeom>
+          <a:noFill/>
+        </p:spPr>
+        <p:txBody>
+          <a:bodyPr wrap="square">
+            <a:spAutoFit/>
+          </a:bodyPr>
+          <a:lstStyle/>
+          <a:p>
+            <a:r>
+              <a:rPr sz="900" b="0">
+                <a:solidFill>
+                  <a:srgbClr val="6B7B85"/>
+                </a:solidFill>
+              </a:rPr>
+              <a:t>12</a:t>
+            </a:r>
+          </a:p>
+        </p:txBody>
+      </p:sp>
+    </p:spTree>
+  </p:cSld>
+  <p:clrMapOvr>
+    <a:masterClrMapping/>
+  </p:clrMapOvr>
+</p:sld>
+</file>
+
+<file path=ppt/slides/slide13.xml><?xml version="1.0" encoding="utf-8"?>
+<p:sld xmlns:a="http://schemas.openxmlformats.org/drawingml/2006/main" xmlns:r="http://schemas.openxmlformats.org/officeDocument/2006/relationships" xmlns:p="http://schemas.openxmlformats.org/presentationml/2006/main">
   <p:cSld name="Slide 12">
     <p:bg>
       <p:bgPr>
         <a:solidFill>
           <a:srgbClr val="FFFFFF"/>
         </a:solidFill>
+        <a:effectLst/>
       </p:bgPr>
     </p:bg>
     <p:spTree>
@@ -3150,7 +3156,10 @@
         </p:spPr>
         <p:txBody>
           <a:bodyPr/>
-          <a:p/>
+          <a:lstStyle/>
+          <a:p>
+            <a:endParaRPr/>
+          </a:p>
         </p:txBody>
       </p:sp>
       <p:sp>
@@ -3174,11 +3183,11 @@
           <a:bodyPr wrap="square" lIns="0" tIns="0" rIns="0" bIns="0" rtlCol="0" anchor="ctr"/>
           <a:lstStyle/>
           <a:p>
-            <a:pPr indent="0" marL="0">
+            <a:pPr marL="0" indent="0">
               <a:buNone/>
             </a:pPr>
             <a:r>
-              <a:rPr lang="en-US" sz="1200" b="1" spc="200" kern="0" dirty="0">
+              <a:rPr lang="en-US" sz="1200" b="1" kern="0" spc="200" dirty="0">
                 <a:solidFill>
                   <a:srgbClr val="0E9594"/>
                 </a:solidFill>
@@ -3213,7 +3222,7 @@
           <a:bodyPr wrap="square" lIns="0" tIns="0" rIns="0" bIns="0" rtlCol="0" anchor="ctr"/>
           <a:lstStyle/>
           <a:p>
-            <a:pPr indent="0" marL="0">
+            <a:pPr marL="0" indent="0">
               <a:buNone/>
             </a:pPr>
             <a:r>
@@ -3252,7 +3261,7 @@
           <a:bodyPr wrap="square" lIns="0" tIns="0" rIns="0" bIns="0" rtlCol="0" anchor="t"/>
           <a:lstStyle/>
           <a:p>
-            <a:pPr indent="0" marL="0">
+            <a:pPr marL="0" indent="0">
               <a:buNone/>
             </a:pPr>
             <a:r>
@@ -3291,7 +3300,7 @@
           <a:bodyPr wrap="square" lIns="0" tIns="0" rIns="0" bIns="0" rtlCol="0" anchor="ctr"/>
           <a:lstStyle/>
           <a:p>
-            <a:pPr indent="0" marL="0">
+            <a:pPr marL="0" indent="0">
               <a:buNone/>
             </a:pPr>
             <a:r>
@@ -3330,7 +3339,7 @@
           <a:bodyPr wrap="square" lIns="0" tIns="0" rIns="0" bIns="0" rtlCol="0" anchor="ctr"/>
           <a:lstStyle/>
           <a:p>
-            <a:pPr indent="0" marL="0">
+            <a:pPr marL="0" indent="0">
               <a:buNone/>
             </a:pPr>
             <a:r>
@@ -3369,7 +3378,7 @@
           <a:bodyPr wrap="square" lIns="0" tIns="0" rIns="0" bIns="0" rtlCol="0" anchor="ctr"/>
           <a:lstStyle/>
           <a:p>
-            <a:pPr indent="0" marL="0">
+            <a:pPr marL="0" indent="0">
               <a:buNone/>
             </a:pPr>
             <a:r>
@@ -3408,7 +3417,7 @@
           <a:bodyPr wrap="square" lIns="0" tIns="0" rIns="0" bIns="0" rtlCol="0" anchor="ctr"/>
           <a:lstStyle/>
           <a:p>
-            <a:pPr algn="r" indent="0" marL="0">
+            <a:pPr marL="0" indent="0" algn="r">
               <a:buNone/>
             </a:pPr>
             <a:r>
@@ -3466,6 +3475,7 @@
           <a:lstStyle/>
           <a:p>
             <a:pPr algn="ctr"/>
+            <a:endParaRPr/>
           </a:p>
         </p:txBody>
       </p:sp>
@@ -3493,7 +3503,7 @@
           <a:p>
             <a:pPr algn="ctr"/>
             <a:r>
-              <a:rPr b="1" sz="3600">
+              <a:rPr sz="3600" b="1">
                 <a:solidFill>
                   <a:srgbClr val="0E9594"/>
                 </a:solidFill>
@@ -3527,7 +3537,7 @@
           <a:p>
             <a:pPr algn="ctr"/>
             <a:r>
-              <a:rPr b="0" sz="1300">
+              <a:rPr sz="1300" b="0">
                 <a:solidFill>
                   <a:srgbClr val="6B7B85"/>
                 </a:solidFill>
@@ -3577,6 +3587,7 @@
           <a:lstStyle/>
           <a:p>
             <a:pPr algn="ctr"/>
+            <a:endParaRPr/>
           </a:p>
         </p:txBody>
       </p:sp>
@@ -3604,7 +3615,7 @@
           <a:p>
             <a:pPr algn="ctr"/>
             <a:r>
-              <a:rPr b="1" sz="3600">
+              <a:rPr sz="3600" b="1">
                 <a:solidFill>
                   <a:srgbClr val="8E7CC3"/>
                 </a:solidFill>
@@ -3638,7 +3649,7 @@
           <a:p>
             <a:pPr algn="ctr"/>
             <a:r>
-              <a:rPr b="0" sz="1300">
+              <a:rPr sz="1300" b="0">
                 <a:solidFill>
                   <a:srgbClr val="6B7B85"/>
                 </a:solidFill>
@@ -3688,6 +3699,7 @@
           <a:lstStyle/>
           <a:p>
             <a:pPr algn="ctr"/>
+            <a:endParaRPr/>
           </a:p>
         </p:txBody>
       </p:sp>
@@ -3715,7 +3727,7 @@
           <a:p>
             <a:pPr algn="ctr"/>
             <a:r>
-              <a:rPr b="1" sz="3600">
+              <a:rPr sz="3600" b="1">
                 <a:solidFill>
                   <a:srgbClr val="3E7CB1"/>
                 </a:solidFill>
@@ -3749,7 +3761,7 @@
           <a:p>
             <a:pPr algn="ctr"/>
             <a:r>
-              <a:rPr b="0" sz="1300">
+              <a:rPr sz="1300" b="0">
                 <a:solidFill>
                   <a:srgbClr val="6B7B85"/>
                 </a:solidFill>
@@ -3799,6 +3811,7 @@
           <a:lstStyle/>
           <a:p>
             <a:pPr algn="ctr"/>
+            <a:endParaRPr/>
           </a:p>
         </p:txBody>
       </p:sp>
@@ -3826,7 +3839,7 @@
           <a:p>
             <a:pPr algn="ctr"/>
             <a:r>
-              <a:rPr b="1" sz="3600">
+              <a:rPr sz="3600" b="1">
                 <a:solidFill>
                   <a:srgbClr val="C9971B"/>
                 </a:solidFill>
@@ -3860,7 +3873,7 @@
           <a:p>
             <a:pPr algn="ctr"/>
             <a:r>
-              <a:rPr b="0" sz="1300">
+              <a:rPr sz="1300" b="0">
                 <a:solidFill>
                   <a:srgbClr val="6B7B85"/>
                 </a:solidFill>
@@ -3910,6 +3923,7 @@
           <a:lstStyle/>
           <a:p>
             <a:pPr algn="ctr"/>
+            <a:endParaRPr/>
           </a:p>
         </p:txBody>
       </p:sp>
@@ -3937,7 +3951,7 @@
           <a:p>
             <a:pPr algn="ctr"/>
             <a:r>
-              <a:rPr b="1" sz="3600">
+              <a:rPr sz="3600" b="1">
                 <a:solidFill>
                   <a:srgbClr val="E8674F"/>
                 </a:solidFill>
@@ -3971,7 +3985,7 @@
           <a:p>
             <a:pPr algn="ctr"/>
             <a:r>
-              <a:rPr b="0" sz="1300">
+              <a:rPr sz="1300" b="0">
                 <a:solidFill>
                   <a:srgbClr val="6B7B85"/>
                 </a:solidFill>
@@ -4021,6 +4035,7 @@
           <a:lstStyle/>
           <a:p>
             <a:pPr algn="ctr"/>
+            <a:endParaRPr/>
           </a:p>
         </p:txBody>
       </p:sp>
@@ -4048,7 +4063,7 @@
           <a:p>
             <a:pPr algn="ctr"/>
             <a:r>
-              <a:rPr b="1" sz="3600">
+              <a:rPr sz="3600" b="1">
                 <a:solidFill>
                   <a:srgbClr val="E8674F"/>
                 </a:solidFill>
@@ -4082,7 +4097,7 @@
           <a:p>
             <a:pPr algn="ctr"/>
             <a:r>
-              <a:rPr b="0" sz="1300">
+              <a:rPr sz="1300" b="0">
                 <a:solidFill>
                   <a:srgbClr val="6B7B85"/>
                 </a:solidFill>
@@ -4100,7 +4115,7 @@
 </p:sld>
 </file>
 
-<file path=ppt/slides/slide13.xml><?xml version="1.0" encoding="utf-8"?>
+<file path=ppt/slides/slide14.xml><?xml version="1.0" encoding="utf-8"?>
 <p:sld xmlns:a="http://schemas.openxmlformats.org/drawingml/2006/main" xmlns:r="http://schemas.openxmlformats.org/officeDocument/2006/relationships" xmlns:p="http://schemas.openxmlformats.org/presentationml/2006/main">
   <p:cSld name="Slide 13">
     <p:bg>
@@ -4108,6 +4123,7 @@
         <a:solidFill>
           <a:srgbClr val="FFFFFF"/>
         </a:solidFill>
+        <a:effectLst/>
       </p:bgPr>
     </p:bg>
     <p:spTree>
@@ -4145,7 +4161,10 @@
         </p:spPr>
         <p:txBody>
           <a:bodyPr/>
-          <a:p/>
+          <a:lstStyle/>
+          <a:p>
+            <a:endParaRPr/>
+          </a:p>
         </p:txBody>
       </p:sp>
       <p:sp>
@@ -4169,11 +4188,11 @@
           <a:bodyPr wrap="square" lIns="0" tIns="0" rIns="0" bIns="0" rtlCol="0" anchor="ctr"/>
           <a:lstStyle/>
           <a:p>
-            <a:pPr indent="0" marL="0">
+            <a:pPr marL="0" indent="0">
               <a:buNone/>
             </a:pPr>
             <a:r>
-              <a:rPr lang="en-US" sz="1200" b="1" spc="200" kern="0" dirty="0">
+              <a:rPr lang="en-US" sz="1200" b="1" kern="0" spc="200" dirty="0">
                 <a:solidFill>
                   <a:srgbClr val="0E9594"/>
                 </a:solidFill>
@@ -4208,7 +4227,7 @@
           <a:bodyPr wrap="square" lIns="0" tIns="0" rIns="0" bIns="0" rtlCol="0" anchor="ctr"/>
           <a:lstStyle/>
           <a:p>
-            <a:pPr indent="0" marL="0">
+            <a:pPr marL="0" indent="0">
               <a:buNone/>
             </a:pPr>
             <a:r>
@@ -4332,7 +4351,7 @@
           <a:bodyPr wrap="square" lIns="0" tIns="0" rIns="0" bIns="0" rtlCol="0" anchor="ctr"/>
           <a:lstStyle/>
           <a:p>
-            <a:pPr indent="0" marL="0">
+            <a:pPr marL="0" indent="0">
               <a:buNone/>
             </a:pPr>
             <a:r>
@@ -4371,7 +4390,7 @@
           <a:bodyPr wrap="square" lIns="0" tIns="0" rIns="0" bIns="0" rtlCol="0" anchor="ctr"/>
           <a:lstStyle/>
           <a:p>
-            <a:pPr algn="r" indent="0" marL="0">
+            <a:pPr marL="0" indent="0" algn="r">
               <a:buNone/>
             </a:pPr>
             <a:r>
@@ -4398,7 +4417,7 @@
           <p:nvPr/>
         </p:nvPicPr>
         <p:blipFill>
-          <a:blip r:embed="rId4"/>
+          <a:blip r:embed="rId3"/>
           <a:stretch>
             <a:fillRect/>
           </a:stretch>
@@ -4421,7 +4440,7 @@
 </p:sld>
 </file>
 
-<file path=ppt/slides/slide14.xml><?xml version="1.0" encoding="utf-8"?>
+<file path=ppt/slides/slide15.xml><?xml version="1.0" encoding="utf-8"?>
 <p:sld xmlns:a="http://schemas.openxmlformats.org/drawingml/2006/main" xmlns:r="http://schemas.openxmlformats.org/officeDocument/2006/relationships" xmlns:p="http://schemas.openxmlformats.org/presentationml/2006/main">
   <p:cSld name="Slide 14">
     <p:bg>
@@ -4429,6 +4448,7 @@
         <a:solidFill>
           <a:srgbClr val="FFFFFF"/>
         </a:solidFill>
+        <a:effectLst/>
       </p:bgPr>
     </p:bg>
     <p:spTree>
@@ -4466,7 +4486,10 @@
         </p:spPr>
         <p:txBody>
           <a:bodyPr/>
-          <a:p/>
+          <a:lstStyle/>
+          <a:p>
+            <a:endParaRPr/>
+          </a:p>
         </p:txBody>
       </p:sp>
       <p:sp>
@@ -4490,11 +4513,11 @@
           <a:bodyPr wrap="square" lIns="0" tIns="0" rIns="0" bIns="0" rtlCol="0" anchor="ctr"/>
           <a:lstStyle/>
           <a:p>
-            <a:pPr indent="0" marL="0">
+            <a:pPr marL="0" indent="0">
               <a:buNone/>
             </a:pPr>
             <a:r>
-              <a:rPr lang="en-US" sz="1200" b="1" spc="200" kern="0" dirty="0">
+              <a:rPr lang="en-US" sz="1200" b="1" kern="0" spc="200" dirty="0">
                 <a:solidFill>
                   <a:srgbClr val="0E9594"/>
                 </a:solidFill>
@@ -4529,7 +4552,7 @@
           <a:bodyPr wrap="square" lIns="0" tIns="0" rIns="0" bIns="0" rtlCol="0" anchor="ctr"/>
           <a:lstStyle/>
           <a:p>
-            <a:pPr indent="0" marL="0">
+            <a:pPr marL="0" indent="0">
               <a:buNone/>
             </a:pPr>
             <a:r>
@@ -4575,7 +4598,10 @@
         </p:spPr>
         <p:txBody>
           <a:bodyPr/>
-          <a:p/>
+          <a:lstStyle/>
+          <a:p>
+            <a:endParaRPr/>
+          </a:p>
         </p:txBody>
       </p:sp>
       <p:sp>
@@ -4599,7 +4625,10 @@
         </p:spPr>
         <p:txBody>
           <a:bodyPr/>
-          <a:p/>
+          <a:lstStyle/>
+          <a:p>
+            <a:endParaRPr/>
+          </a:p>
         </p:txBody>
       </p:sp>
       <p:sp>
@@ -4623,7 +4652,7 @@
           <a:bodyPr wrap="square" lIns="0" tIns="0" rIns="0" bIns="0" rtlCol="0" anchor="ctr"/>
           <a:lstStyle/>
           <a:p>
-            <a:pPr indent="0" marL="0">
+            <a:pPr marL="0" indent="0">
               <a:buNone/>
             </a:pPr>
             <a:r>
@@ -4662,7 +4691,7 @@
           <a:bodyPr wrap="square" lIns="0" tIns="0" rIns="0" bIns="0" rtlCol="0" anchor="t"/>
           <a:lstStyle/>
           <a:p>
-            <a:pPr indent="0" marL="0">
+            <a:pPr marL="0" indent="0">
               <a:buNone/>
             </a:pPr>
             <a:r>
@@ -4708,7 +4737,10 @@
         </p:spPr>
         <p:txBody>
           <a:bodyPr/>
-          <a:p/>
+          <a:lstStyle/>
+          <a:p>
+            <a:endParaRPr/>
+          </a:p>
         </p:txBody>
       </p:sp>
       <p:sp>
@@ -4732,7 +4764,10 @@
         </p:spPr>
         <p:txBody>
           <a:bodyPr/>
-          <a:p/>
+          <a:lstStyle/>
+          <a:p>
+            <a:endParaRPr/>
+          </a:p>
         </p:txBody>
       </p:sp>
       <p:sp>
@@ -4756,7 +4791,7 @@
           <a:bodyPr wrap="square" lIns="0" tIns="0" rIns="0" bIns="0" rtlCol="0" anchor="ctr"/>
           <a:lstStyle/>
           <a:p>
-            <a:pPr indent="0" marL="0">
+            <a:pPr marL="0" indent="0">
               <a:buNone/>
             </a:pPr>
             <a:r>
@@ -4795,7 +4830,7 @@
           <a:bodyPr wrap="square" lIns="0" tIns="0" rIns="0" bIns="0" rtlCol="0" anchor="t"/>
           <a:lstStyle/>
           <a:p>
-            <a:pPr indent="0" marL="0">
+            <a:pPr marL="0" indent="0">
               <a:buNone/>
             </a:pPr>
             <a:r>
@@ -4834,7 +4869,7 @@
           <a:bodyPr wrap="square" lIns="0" tIns="0" rIns="0" bIns="0" rtlCol="0" anchor="t"/>
           <a:lstStyle/>
           <a:p>
-            <a:pPr indent="0" marL="0">
+            <a:pPr marL="0" indent="0">
               <a:buNone/>
             </a:pPr>
             <a:r>
@@ -4873,7 +4908,7 @@
           <a:bodyPr wrap="square" lIns="0" tIns="0" rIns="0" bIns="0" rtlCol="0" anchor="ctr"/>
           <a:lstStyle/>
           <a:p>
-            <a:pPr indent="0" marL="0">
+            <a:pPr marL="0" indent="0">
               <a:buNone/>
             </a:pPr>
             <a:r>
@@ -4912,7 +4947,7 @@
           <a:bodyPr wrap="square" lIns="0" tIns="0" rIns="0" bIns="0" rtlCol="0" anchor="ctr"/>
           <a:lstStyle/>
           <a:p>
-            <a:pPr algn="r" indent="0" marL="0">
+            <a:pPr marL="0" indent="0" algn="r">
               <a:buNone/>
             </a:pPr>
             <a:r>
@@ -4938,7 +4973,7 @@
 </p:sld>
 </file>
 
-<file path=ppt/slides/slide15.xml><?xml version="1.0" encoding="utf-8"?>
+<file path=ppt/slides/slide16.xml><?xml version="1.0" encoding="utf-8"?>
 <p:sld xmlns:a="http://schemas.openxmlformats.org/drawingml/2006/main" xmlns:r="http://schemas.openxmlformats.org/officeDocument/2006/relationships" xmlns:p="http://schemas.openxmlformats.org/presentationml/2006/main">
   <p:cSld name="Slide 15">
     <p:bg>
@@ -4946,6 +4981,7 @@
         <a:solidFill>
           <a:srgbClr val="0B2B3A"/>
         </a:solidFill>
+        <a:effectLst/>
       </p:bgPr>
     </p:bg>
     <p:spTree>
@@ -4983,7 +5019,10 @@
         </p:spPr>
         <p:txBody>
           <a:bodyPr/>
-          <a:p/>
+          <a:lstStyle/>
+          <a:p>
+            <a:endParaRPr/>
+          </a:p>
         </p:txBody>
       </p:sp>
       <p:sp>
@@ -5007,7 +5046,7 @@
           <a:bodyPr wrap="square" lIns="0" tIns="0" rIns="0" bIns="0" rtlCol="0" anchor="ctr"/>
           <a:lstStyle/>
           <a:p>
-            <a:pPr indent="0" marL="0">
+            <a:pPr marL="0" indent="0">
               <a:buNone/>
             </a:pPr>
             <a:r>
@@ -5191,7 +5230,7 @@
           <a:bodyPr wrap="square" lIns="0" tIns="0" rIns="0" bIns="0" rtlCol="0" anchor="ctr"/>
           <a:lstStyle/>
           <a:p>
-            <a:pPr indent="0" marL="0">
+            <a:pPr marL="0" indent="0">
               <a:buNone/>
             </a:pPr>
             <a:r>
@@ -5230,7 +5269,7 @@
           <a:bodyPr wrap="square" lIns="0" tIns="0" rIns="0" bIns="0" rtlCol="0" anchor="ctr"/>
           <a:lstStyle/>
           <a:p>
-            <a:pPr algn="r" indent="0" marL="0">
+            <a:pPr marL="0" indent="0" algn="r">
               <a:buNone/>
             </a:pPr>
             <a:r>
@@ -5245,237 +5284,6 @@
               <a:t>15</a:t>
             </a:r>
             <a:endParaRPr lang="en-US" sz="900" dirty="0"/>
-          </a:p>
-        </p:txBody>
-      </p:sp>
-    </p:spTree>
-  </p:cSld>
-  <p:clrMapOvr>
-    <a:masterClrMapping/>
-  </p:clrMapOvr>
-</p:sld>
-</file>
-
-<file path=ppt/slides/slide16.xml><?xml version="1.0" encoding="utf-8"?>
-<p:sld xmlns:a="http://schemas.openxmlformats.org/drawingml/2006/main" xmlns:p="http://schemas.openxmlformats.org/presentationml/2006/main" xmlns:r="http://schemas.openxmlformats.org/officeDocument/2006/relationships">
-  <p:cSld>
-    <p:spTree>
-      <p:nvGrpSpPr>
-        <p:cNvPr id="1" name=""/>
-        <p:cNvGrpSpPr/>
-        <p:nvPr/>
-      </p:nvGrpSpPr>
-      <p:grpSpPr/>
-      <p:sp>
-        <p:nvSpPr>
-          <p:cNvPr id="2" name="Shape 0"/>
-          <p:cNvSpPr/>
-          <p:nvPr/>
-        </p:nvSpPr>
-        <p:spPr>
-          <a:xfrm>
-            <a:off x="548640" y="566928"/>
-            <a:ext cx="146304" cy="457200"/>
-          </a:xfrm>
-          <a:prstGeom prst="rect">
-            <a:avLst/>
-          </a:prstGeom>
-          <a:solidFill>
-            <a:srgbClr val="0E9594"/>
-          </a:solidFill>
-          <a:ln/>
-        </p:spPr>
-        <p:txBody>
-          <a:bodyPr/>
-          <a:p/>
-        </p:txBody>
-      </p:sp>
-      <p:sp>
-        <p:nvSpPr>
-          <p:cNvPr id="3" name="TextBox 2"/>
-          <p:cNvSpPr txBox="1"/>
-          <p:nvPr/>
-        </p:nvSpPr>
-        <p:spPr>
-          <a:xfrm>
-            <a:off x="822960" y="310896"/>
-            <a:ext cx="10515600" cy="292608"/>
-          </a:xfrm>
-          <a:prstGeom prst="rect">
-            <a:avLst/>
-          </a:prstGeom>
-          <a:noFill/>
-        </p:spPr>
-        <p:txBody>
-          <a:bodyPr wrap="square">
-            <a:spAutoFit/>
-          </a:bodyPr>
-          <a:lstStyle/>
-          <a:p>
-            <a:r>
-              <a:rPr b="1" sz="1200">
-                <a:solidFill>
-                  <a:srgbClr val="0E9594"/>
-                </a:solidFill>
-              </a:rPr>
-              <a:t>RESULTS · AUC VS FAKE RECALL</a:t>
-            </a:r>
-          </a:p>
-        </p:txBody>
-      </p:sp>
-      <p:sp>
-        <p:nvSpPr>
-          <p:cNvPr id="4" name="TextBox 3"/>
-          <p:cNvSpPr txBox="1"/>
-          <p:nvPr/>
-        </p:nvSpPr>
-        <p:spPr>
-          <a:xfrm>
-            <a:off x="822960" y="566928"/>
-            <a:ext cx="10789920" cy="640080"/>
-          </a:xfrm>
-          <a:prstGeom prst="rect">
-            <a:avLst/>
-          </a:prstGeom>
-          <a:noFill/>
-        </p:spPr>
-        <p:txBody>
-          <a:bodyPr wrap="square">
-            <a:spAutoFit/>
-          </a:bodyPr>
-          <a:lstStyle/>
-          <a:p>
-            <a:r>
-              <a:rPr b="1" sz="2800">
-                <a:solidFill>
-                  <a:srgbClr val="22303A"/>
-                </a:solidFill>
-              </a:rPr>
-              <a:t>Ranking quality vs calibration -- and where each model errors fall</a:t>
-            </a:r>
-          </a:p>
-        </p:txBody>
-      </p:sp>
-      <p:pic>
-        <p:nvPicPr>
-          <p:cNvPr id="5" name="Picture 4" descr="fig_auc_recall_error.png"/>
-          <p:cNvPicPr>
-            <a:picLocks noChangeAspect="1"/>
-          </p:cNvPicPr>
-          <p:nvPr/>
-        </p:nvPicPr>
-        <p:blipFill>
-          <a:blip r:embed="rId2"/>
-          <a:stretch>
-            <a:fillRect/>
-          </a:stretch>
-        </p:blipFill>
-        <p:spPr>
-          <a:xfrm>
-            <a:off x="548640" y="1500000"/>
-            <a:ext cx="11094720" cy="4572000"/>
-          </a:xfrm>
-          <a:prstGeom prst="rect">
-            <a:avLst/>
-          </a:prstGeom>
-        </p:spPr>
-      </p:pic>
-      <p:sp>
-        <p:nvSpPr>
-          <p:cNvPr id="6" name="TextBox 5"/>
-          <p:cNvSpPr txBox="1"/>
-          <p:nvPr/>
-        </p:nvSpPr>
-        <p:spPr>
-          <a:xfrm>
-            <a:off x="822960" y="6100000"/>
-            <a:ext cx="10515600" cy="300000"/>
-          </a:xfrm>
-          <a:prstGeom prst="rect">
-            <a:avLst/>
-          </a:prstGeom>
-          <a:noFill/>
-        </p:spPr>
-        <p:txBody>
-          <a:bodyPr wrap="square">
-            <a:spAutoFit/>
-          </a:bodyPr>
-          <a:lstStyle/>
-          <a:p>
-            <a:r>
-              <a:rPr b="0" sz="1000">
-                <a:solidFill>
-                  <a:srgbClr val="5C6B73"/>
-                </a:solidFill>
-              </a:rPr>
-              <a:t>High AUC + low fake-recall at threshold 0.5 = calibration problem, not a modelling failure. Only CNN and WavLM probe sit in the target zone (top-right).</a:t>
-            </a:r>
-          </a:p>
-        </p:txBody>
-      </p:sp>
-      <p:sp>
-        <p:nvSpPr>
-          <p:cNvPr id="7" name="TextBox 6"/>
-          <p:cNvSpPr txBox="1"/>
-          <p:nvPr/>
-        </p:nvSpPr>
-        <p:spPr>
-          <a:xfrm>
-            <a:off x="548640" y="6437376"/>
-            <a:ext cx="7315200" cy="274320"/>
-          </a:xfrm>
-          <a:prstGeom prst="rect">
-            <a:avLst/>
-          </a:prstGeom>
-          <a:noFill/>
-        </p:spPr>
-        <p:txBody>
-          <a:bodyPr wrap="square">
-            <a:spAutoFit/>
-          </a:bodyPr>
-          <a:lstStyle/>
-          <a:p>
-            <a:r>
-              <a:rPr b="0" sz="900">
-                <a:solidFill>
-                  <a:srgbClr val="6B7B85"/>
-                </a:solidFill>
-              </a:rPr>
-              <a:t>Audio Deepfake Detection — DL project</a:t>
-            </a:r>
-          </a:p>
-        </p:txBody>
-      </p:sp>
-      <p:sp>
-        <p:nvSpPr>
-          <p:cNvPr id="8" name="TextBox 7"/>
-          <p:cNvSpPr txBox="1"/>
-          <p:nvPr/>
-        </p:nvSpPr>
-        <p:spPr>
-          <a:xfrm>
-            <a:off x="11430000" y="6437376"/>
-            <a:ext cx="548640" cy="274320"/>
-          </a:xfrm>
-          <a:prstGeom prst="rect">
-            <a:avLst/>
-          </a:prstGeom>
-          <a:noFill/>
-        </p:spPr>
-        <p:txBody>
-          <a:bodyPr wrap="square">
-            <a:spAutoFit/>
-          </a:bodyPr>
-          <a:lstStyle/>
-          <a:p>
-            <a:r>
-              <a:rPr b="0" sz="900">
-                <a:solidFill>
-                  <a:srgbClr val="6B7B85"/>
-                </a:solidFill>
-              </a:rPr>
-              <a:t>12</a:t>
-            </a:r>
           </a:p>
         </p:txBody>
       </p:sp>
@@ -5495,6 +5303,7 @@
         <a:solidFill>
           <a:srgbClr val="FFFFFF"/>
         </a:solidFill>
+        <a:effectLst/>
       </p:bgPr>
     </p:bg>
     <p:spTree>
@@ -5532,7 +5341,10 @@
         </p:spPr>
         <p:txBody>
           <a:bodyPr/>
-          <a:p/>
+          <a:lstStyle/>
+          <a:p>
+            <a:endParaRPr/>
+          </a:p>
         </p:txBody>
       </p:sp>
       <p:sp>
@@ -5556,11 +5368,11 @@
           <a:bodyPr wrap="square" lIns="0" tIns="0" rIns="0" bIns="0" rtlCol="0" anchor="ctr"/>
           <a:lstStyle/>
           <a:p>
-            <a:pPr indent="0" marL="0">
+            <a:pPr marL="0" indent="0">
               <a:buNone/>
             </a:pPr>
             <a:r>
-              <a:rPr lang="en-US" sz="1200" b="1" spc="200" kern="0" dirty="0">
+              <a:rPr lang="en-US" sz="1200" b="1" kern="0" spc="200" dirty="0">
                 <a:solidFill>
                   <a:srgbClr val="0E9594"/>
                 </a:solidFill>
@@ -5595,7 +5407,7 @@
           <a:bodyPr wrap="square" lIns="0" tIns="0" rIns="0" bIns="0" rtlCol="0" anchor="ctr"/>
           <a:lstStyle/>
           <a:p>
-            <a:pPr indent="0" marL="0">
+            <a:pPr marL="0" indent="0">
               <a:buNone/>
             </a:pPr>
             <a:r>
@@ -5671,7 +5483,62 @@
                 <a:ea typeface="Calibri" pitchFamily="34" charset="-122"/>
                 <a:cs typeface="Calibri" pitchFamily="34" charset="-120"/>
               </a:rPr>
-              <a:t>The hard part is not in-domain accuracy — it is generalising to unseen generators and recording conditions.</a:t>
+              <a:t>The hard part is not in-domain </a:t>
+            </a:r>
+            <a:r>
+              <a:rPr lang="en-US" sz="1600" dirty="0" smtClean="0">
+                <a:solidFill>
+                  <a:srgbClr val="22303A"/>
+                </a:solidFill>
+                <a:latin typeface="Calibri" pitchFamily="34" charset="0"/>
+                <a:ea typeface="Calibri" pitchFamily="34" charset="-122"/>
+                <a:cs typeface="Calibri" pitchFamily="34" charset="-120"/>
+              </a:rPr>
+              <a:t>accuracy</a:t>
+            </a:r>
+            <a:r>
+              <a:rPr lang="en-US" sz="1600" dirty="0" smtClean="0">
+                <a:solidFill>
+                  <a:srgbClr val="22303A"/>
+                </a:solidFill>
+                <a:latin typeface="Calibri" pitchFamily="34" charset="0"/>
+                <a:ea typeface="Calibri" pitchFamily="34" charset="-122"/>
+                <a:cs typeface="Calibri" pitchFamily="34" charset="-120"/>
+              </a:rPr>
+              <a:t>,</a:t>
+            </a:r>
+            <a:r>
+              <a:rPr lang="en-US" sz="1600" dirty="0" smtClean="0">
+                <a:solidFill>
+                  <a:srgbClr val="22303A"/>
+                </a:solidFill>
+                <a:latin typeface="Calibri" pitchFamily="34" charset="0"/>
+                <a:ea typeface="Calibri" pitchFamily="34" charset="-122"/>
+                <a:cs typeface="Calibri" pitchFamily="34" charset="-120"/>
+              </a:rPr>
+              <a:t> </a:t>
+            </a:r>
+            <a:r>
+              <a:rPr lang="en-US" sz="1600" dirty="0">
+                <a:solidFill>
+                  <a:srgbClr val="22303A"/>
+                </a:solidFill>
+                <a:latin typeface="Calibri" pitchFamily="34" charset="0"/>
+                <a:ea typeface="Calibri" pitchFamily="34" charset="-122"/>
+                <a:cs typeface="Calibri" pitchFamily="34" charset="-120"/>
+              </a:rPr>
+              <a:t>it is generalising to unseen </a:t>
+            </a:r>
+            <a:r>
+              <a:rPr lang="en-US" sz="1600" dirty="0" smtClean="0">
+                <a:solidFill>
+                  <a:srgbClr val="22303A"/>
+                </a:solidFill>
+                <a:latin typeface="Calibri" pitchFamily="34" charset="0"/>
+                <a:ea typeface="Calibri" pitchFamily="34" charset="-122"/>
+                <a:cs typeface="Calibri" pitchFamily="34" charset="-120"/>
+              </a:rPr>
+              <a:t>generators data.</a:t>
             </a:r>
             <a:endParaRPr lang="en-US" sz="1600" dirty="0"/>
           </a:p>
@@ -5692,7 +5559,51 @@
                 <a:ea typeface="Calibri" pitchFamily="34" charset="-122"/>
                 <a:cs typeface="Calibri" pitchFamily="34" charset="-120"/>
               </a:rPr>
-              <a:t>So we train on one corpus (FoR) and test on a completely independent one (ITW): an honest stress test.</a:t>
+              <a:t>So we train on one </a:t>
+            </a:r>
+            <a:r>
+              <a:rPr lang="en-US" sz="1600" dirty="0" smtClean="0">
+                <a:solidFill>
+                  <a:srgbClr val="22303A"/>
+                </a:solidFill>
+                <a:latin typeface="Calibri" pitchFamily="34" charset="0"/>
+                <a:ea typeface="Calibri" pitchFamily="34" charset="-122"/>
+                <a:cs typeface="Calibri" pitchFamily="34" charset="-120"/>
+              </a:rPr>
+              <a:t>data set (</a:t>
+            </a:r>
+            <a:r>
+              <a:rPr lang="en-US" sz="1600" dirty="0" err="1" smtClean="0">
+                <a:solidFill>
+                  <a:srgbClr val="22303A"/>
+                </a:solidFill>
+                <a:latin typeface="Calibri" pitchFamily="34" charset="0"/>
+                <a:ea typeface="Calibri" pitchFamily="34" charset="-122"/>
+                <a:cs typeface="Calibri" pitchFamily="34" charset="-120"/>
+              </a:rPr>
+              <a:t>FoR</a:t>
+            </a:r>
+            <a:r>
+              <a:rPr lang="en-US" sz="1600" dirty="0">
+                <a:solidFill>
+                  <a:srgbClr val="22303A"/>
+                </a:solidFill>
+                <a:latin typeface="Calibri" pitchFamily="34" charset="0"/>
+                <a:ea typeface="Calibri" pitchFamily="34" charset="-122"/>
+                <a:cs typeface="Calibri" pitchFamily="34" charset="-120"/>
+              </a:rPr>
+              <a:t>) and test on a completely independent one (</a:t>
+            </a:r>
+            <a:r>
+              <a:rPr lang="en-US" sz="1600" dirty="0" smtClean="0">
+                <a:solidFill>
+                  <a:srgbClr val="22303A"/>
+                </a:solidFill>
+                <a:latin typeface="Calibri" pitchFamily="34" charset="0"/>
+                <a:ea typeface="Calibri" pitchFamily="34" charset="-122"/>
+                <a:cs typeface="Calibri" pitchFamily="34" charset="-120"/>
+              </a:rPr>
+              <a:t>ITW).</a:t>
             </a:r>
             <a:endParaRPr lang="en-US" sz="1600" dirty="0"/>
           </a:p>
@@ -5710,7 +5621,51 @@
                 <a:ea typeface="Calibri" pitchFamily="34" charset="-122"/>
                 <a:cs typeface="Calibri" pitchFamily="34" charset="-120"/>
               </a:rPr>
-              <a:t>The test set is class-imbalanced — accuracy alone is misleading; catching fakes is what matters.</a:t>
+              <a:t>The test set is </a:t>
+            </a:r>
+            <a:r>
+              <a:rPr lang="en-US" sz="1600" dirty="0" smtClean="0">
+                <a:solidFill>
+                  <a:srgbClr val="22303A"/>
+                </a:solidFill>
+                <a:latin typeface="Calibri" pitchFamily="34" charset="0"/>
+                <a:ea typeface="Calibri" pitchFamily="34" charset="-122"/>
+                <a:cs typeface="Calibri" pitchFamily="34" charset="-120"/>
+              </a:rPr>
+              <a:t>class-imbalanced, </a:t>
+            </a:r>
+            <a:r>
+              <a:rPr lang="en-US" sz="1600" dirty="0">
+                <a:solidFill>
+                  <a:srgbClr val="22303A"/>
+                </a:solidFill>
+                <a:latin typeface="Calibri" pitchFamily="34" charset="0"/>
+                <a:ea typeface="Calibri" pitchFamily="34" charset="-122"/>
+                <a:cs typeface="Calibri" pitchFamily="34" charset="-120"/>
+              </a:rPr>
+              <a:t>accuracy alone is </a:t>
+            </a:r>
+            <a:r>
+              <a:rPr lang="en-US" sz="1600" dirty="0" smtClean="0">
+                <a:solidFill>
+                  <a:srgbClr val="22303A"/>
+                </a:solidFill>
+                <a:latin typeface="Calibri" pitchFamily="34" charset="0"/>
+                <a:ea typeface="Calibri" pitchFamily="34" charset="-122"/>
+                <a:cs typeface="Calibri" pitchFamily="34" charset="-120"/>
+              </a:rPr>
+              <a:t>misleading so </a:t>
+            </a:r>
+            <a:r>
+              <a:rPr lang="en-US" sz="1600" dirty="0">
+                <a:solidFill>
+                  <a:srgbClr val="22303A"/>
+                </a:solidFill>
+                <a:latin typeface="Calibri" pitchFamily="34" charset="0"/>
+                <a:ea typeface="Calibri" pitchFamily="34" charset="-122"/>
+                <a:cs typeface="Calibri" pitchFamily="34" charset="-120"/>
+              </a:rPr>
+              <a:t>catching fakes is what matters.</a:t>
             </a:r>
             <a:endParaRPr lang="en-US" sz="1600" dirty="0"/>
           </a:p>
@@ -5744,7 +5699,10 @@
         </p:spPr>
         <p:txBody>
           <a:bodyPr/>
-          <a:p/>
+          <a:lstStyle/>
+          <a:p>
+            <a:endParaRPr/>
+          </a:p>
         </p:txBody>
       </p:sp>
       <p:sp>
@@ -5768,7 +5726,7 @@
           <a:bodyPr wrap="square" lIns="0" tIns="0" rIns="0" bIns="0" rtlCol="0" anchor="ctr"/>
           <a:lstStyle/>
           <a:p>
-            <a:pPr algn="ctr" indent="0" marL="0">
+            <a:pPr marL="0" indent="0" algn="ctr">
               <a:buNone/>
             </a:pPr>
             <a:r>
@@ -5807,7 +5765,7 @@
           <a:bodyPr wrap="square" lIns="0" tIns="0" rIns="0" bIns="0" rtlCol="0" anchor="ctr"/>
           <a:lstStyle/>
           <a:p>
-            <a:pPr algn="ctr" indent="0" marL="0">
+            <a:pPr marL="0" indent="0" algn="ctr">
               <a:buNone/>
             </a:pPr>
             <a:r>
@@ -5853,7 +5811,10 @@
         </p:spPr>
         <p:txBody>
           <a:bodyPr/>
-          <a:p/>
+          <a:lstStyle/>
+          <a:p>
+            <a:endParaRPr/>
+          </a:p>
         </p:txBody>
       </p:sp>
       <p:sp>
@@ -5877,7 +5838,7 @@
           <a:bodyPr wrap="square" lIns="0" tIns="0" rIns="0" bIns="0" rtlCol="0" anchor="ctr"/>
           <a:lstStyle/>
           <a:p>
-            <a:pPr algn="ctr" indent="0" marL="0">
+            <a:pPr marL="0" indent="0" algn="ctr">
               <a:buNone/>
             </a:pPr>
             <a:r>
@@ -5916,7 +5877,7 @@
           <a:bodyPr wrap="square" lIns="0" tIns="0" rIns="0" bIns="0" rtlCol="0" anchor="ctr"/>
           <a:lstStyle/>
           <a:p>
-            <a:pPr algn="ctr" indent="0" marL="0">
+            <a:pPr marL="0" indent="0" algn="ctr">
               <a:buNone/>
             </a:pPr>
             <a:r>
@@ -5955,7 +5916,7 @@
           <a:bodyPr wrap="square" lIns="0" tIns="0" rIns="0" bIns="0" rtlCol="0" anchor="ctr"/>
           <a:lstStyle/>
           <a:p>
-            <a:pPr indent="0" marL="0">
+            <a:pPr marL="0" indent="0">
               <a:buNone/>
             </a:pPr>
             <a:r>
@@ -5994,7 +5955,7 @@
           <a:bodyPr wrap="square" lIns="0" tIns="0" rIns="0" bIns="0" rtlCol="0" anchor="ctr"/>
           <a:lstStyle/>
           <a:p>
-            <a:pPr algn="r" indent="0" marL="0">
+            <a:pPr marL="0" indent="0" algn="r">
               <a:buNone/>
             </a:pPr>
             <a:r>
@@ -6028,6 +5989,7 @@
         <a:solidFill>
           <a:srgbClr val="FFFFFF"/>
         </a:solidFill>
+        <a:effectLst/>
       </p:bgPr>
     </p:bg>
     <p:spTree>
@@ -6065,7 +6027,10 @@
         </p:spPr>
         <p:txBody>
           <a:bodyPr/>
-          <a:p/>
+          <a:lstStyle/>
+          <a:p>
+            <a:endParaRPr/>
+          </a:p>
         </p:txBody>
       </p:sp>
       <p:sp>
@@ -6089,11 +6054,11 @@
           <a:bodyPr wrap="square" lIns="0" tIns="0" rIns="0" bIns="0" rtlCol="0" anchor="ctr"/>
           <a:lstStyle/>
           <a:p>
-            <a:pPr indent="0" marL="0">
+            <a:pPr marL="0" indent="0">
               <a:buNone/>
             </a:pPr>
             <a:r>
-              <a:rPr lang="en-US" sz="1200" b="1" spc="200" kern="0" dirty="0">
+              <a:rPr lang="en-US" sz="1200" b="1" kern="0" spc="200" dirty="0">
                 <a:solidFill>
                   <a:srgbClr val="0E9594"/>
                 </a:solidFill>
@@ -6128,7 +6093,7 @@
           <a:bodyPr wrap="square" lIns="0" tIns="0" rIns="0" bIns="0" rtlCol="0" anchor="ctr"/>
           <a:lstStyle/>
           <a:p>
-            <a:pPr indent="0" marL="0">
+            <a:pPr marL="0" indent="0">
               <a:buNone/>
             </a:pPr>
             <a:r>
@@ -6140,7 +6105,18 @@
                 <a:ea typeface="Trebuchet MS" pitchFamily="34" charset="-122"/>
                 <a:cs typeface="Trebuchet MS" pitchFamily="34" charset="-120"/>
               </a:rPr>
-              <a:t>Four architecture families, increasing learned representation</a:t>
+              <a:t>Four architecture </a:t>
+            </a:r>
+            <a:r>
+              <a:rPr lang="en-US" sz="2800" b="1" dirty="0" smtClean="0">
+                <a:solidFill>
+                  <a:srgbClr val="22303A"/>
+                </a:solidFill>
+                <a:latin typeface="Trebuchet MS" pitchFamily="34" charset="0"/>
+                <a:ea typeface="Trebuchet MS" pitchFamily="34" charset="-122"/>
+                <a:cs typeface="Trebuchet MS" pitchFamily="34" charset="-120"/>
+              </a:rPr>
+              <a:t>families</a:t>
             </a:r>
             <a:endParaRPr lang="en-US" sz="2800" dirty="0"/>
           </a:p>
@@ -6148,21 +6124,21 @@
       </p:sp>
       <p:graphicFrame>
         <p:nvGraphicFramePr>
-          <p:cNvPr id="4" name="Table 0"/>
+          <p:cNvPr id="5" name="Table 0"/>
           <p:cNvGraphicFramePr>
             <a:graphicFrameLocks noGrp="1"/>
           </p:cNvGraphicFramePr>
           <p:nvPr>
             <p:extLst>
               <p:ext uri="{D42A27DB-BD31-4B8C-83A1-F6EECF244321}">
-                <p14:modId xmlns:p14="http://schemas.microsoft.com/office/powerpoint/2010/main" val="1579011935"/>
+                <p14:modId xmlns:p14="http://schemas.microsoft.com/office/powerpoint/2010/main" val="696012842"/>
               </p:ext>
             </p:extLst>
           </p:nvPr>
         </p:nvGraphicFramePr>
         <p:xfrm>
           <a:off x="822960" y="1737360"/>
-          <a:ext cx="10515600" cy="914400"/>
+          <a:ext cx="10515600" cy="3200400"/>
         </p:xfrm>
         <a:graphic>
           <a:graphicData uri="http://schemas.openxmlformats.org/drawingml/2006/table">
@@ -6179,7 +6155,7 @@
                     <a:bodyPr/>
                     <a:lstStyle/>
                     <a:p>
-                      <a:pPr algn="l" indent="0" marL="0">
+                      <a:pPr marL="0" indent="0" algn="l">
                         <a:buNone/>
                       </a:pPr>
                       <a:r>
@@ -6200,7 +6176,7 @@
                       </a:endParaRPr>
                     </a:p>
                   </a:txBody>
-                  <a:tcPr marL="91440" marR="91440" marT="45720" marB="45720" anchor="ctr">
+                  <a:tcPr anchor="ctr">
                     <a:lnL w="6350" cap="flat" cmpd="sng" algn="ctr">
                       <a:solidFill>
                         <a:srgbClr val="D8E0E4"/>
@@ -6247,7 +6223,7 @@
                     <a:bodyPr/>
                     <a:lstStyle/>
                     <a:p>
-                      <a:pPr algn="l" indent="0" marL="0">
+                      <a:pPr marL="0" indent="0" algn="l">
                         <a:buNone/>
                       </a:pPr>
                       <a:r>
@@ -6268,7 +6244,7 @@
                       </a:endParaRPr>
                     </a:p>
                   </a:txBody>
-                  <a:tcPr marL="91440" marR="91440" marT="45720" marB="45720" anchor="ctr">
+                  <a:tcPr anchor="ctr">
                     <a:lnL w="6350" cap="flat" cmpd="sng" algn="ctr">
                       <a:solidFill>
                         <a:srgbClr val="D8E0E4"/>
@@ -6315,7 +6291,7 @@
                     <a:bodyPr/>
                     <a:lstStyle/>
                     <a:p>
-                      <a:pPr algn="l" indent="0" marL="0">
+                      <a:pPr marL="0" indent="0" algn="l">
                         <a:buNone/>
                       </a:pPr>
                       <a:r>
@@ -6336,7 +6312,7 @@
                       </a:endParaRPr>
                     </a:p>
                   </a:txBody>
-                  <a:tcPr marL="91440" marR="91440" marT="45720" marB="45720" anchor="ctr">
+                  <a:tcPr anchor="ctr">
                     <a:lnL w="6350" cap="flat" cmpd="sng" algn="ctr">
                       <a:solidFill>
                         <a:srgbClr val="D8E0E4"/>
@@ -6385,7 +6361,7 @@
                     <a:bodyPr/>
                     <a:lstStyle/>
                     <a:p>
-                      <a:pPr algn="l" indent="0" marL="0">
+                      <a:pPr marL="0" indent="0" algn="l">
                         <a:buNone/>
                       </a:pPr>
                       <a:r>
@@ -6406,7 +6382,7 @@
                       </a:endParaRPr>
                     </a:p>
                   </a:txBody>
-                  <a:tcPr marL="91440" marR="91440" marT="45720" marB="45720" anchor="ctr">
+                  <a:tcPr anchor="ctr">
                     <a:lnL w="6350" cap="flat" cmpd="sng" algn="ctr">
                       <a:solidFill>
                         <a:srgbClr val="D8E0E4"/>
@@ -6453,7 +6429,7 @@
                     <a:bodyPr/>
                     <a:lstStyle/>
                     <a:p>
-                      <a:pPr algn="l" indent="0" marL="0">
+                      <a:pPr marL="0" indent="0" algn="l">
                         <a:buNone/>
                       </a:pPr>
                       <a:r>
@@ -6474,7 +6450,7 @@
                       </a:endParaRPr>
                     </a:p>
                   </a:txBody>
-                  <a:tcPr marL="91440" marR="91440" marT="45720" marB="45720" anchor="ctr">
+                  <a:tcPr anchor="ctr">
                     <a:lnL w="6350" cap="flat" cmpd="sng" algn="ctr">
                       <a:solidFill>
                         <a:srgbClr val="D8E0E4"/>
@@ -6521,7 +6497,7 @@
                     <a:bodyPr/>
                     <a:lstStyle/>
                     <a:p>
-                      <a:pPr algn="l" indent="0" marL="0">
+                      <a:pPr marL="0" indent="0" algn="l">
                         <a:buNone/>
                       </a:pPr>
                       <a:r>
@@ -6542,7 +6518,7 @@
                       </a:endParaRPr>
                     </a:p>
                   </a:txBody>
-                  <a:tcPr marL="91440" marR="91440" marT="45720" marB="45720" anchor="ctr">
+                  <a:tcPr anchor="ctr">
                     <a:lnL w="6350" cap="flat" cmpd="sng" algn="ctr">
                       <a:solidFill>
                         <a:srgbClr val="D8E0E4"/>
@@ -6591,7 +6567,7 @@
                     <a:bodyPr/>
                     <a:lstStyle/>
                     <a:p>
-                      <a:pPr algn="l" indent="0" marL="0">
+                      <a:pPr marL="0" indent="0" algn="l">
                         <a:buNone/>
                       </a:pPr>
                       <a:r>
@@ -6612,7 +6588,7 @@
                       </a:endParaRPr>
                     </a:p>
                   </a:txBody>
-                  <a:tcPr marL="91440" marR="91440" marT="45720" marB="45720" anchor="ctr">
+                  <a:tcPr anchor="ctr">
                     <a:lnL w="6350" cap="flat" cmpd="sng" algn="ctr">
                       <a:solidFill>
                         <a:srgbClr val="D8E0E4"/>
@@ -6659,7 +6635,7 @@
                     <a:bodyPr/>
                     <a:lstStyle/>
                     <a:p>
-                      <a:pPr algn="l" indent="0" marL="0">
+                      <a:pPr marL="0" indent="0" algn="l">
                         <a:buNone/>
                       </a:pPr>
                       <a:r>
@@ -6680,7 +6656,7 @@
                       </a:endParaRPr>
                     </a:p>
                   </a:txBody>
-                  <a:tcPr marL="91440" marR="91440" marT="45720" marB="45720" anchor="ctr">
+                  <a:tcPr anchor="ctr">
                     <a:lnL w="6350" cap="flat" cmpd="sng" algn="ctr">
                       <a:solidFill>
                         <a:srgbClr val="D8E0E4"/>
@@ -6727,7 +6703,7 @@
                     <a:bodyPr/>
                     <a:lstStyle/>
                     <a:p>
-                      <a:pPr algn="l" indent="0" marL="0">
+                      <a:pPr marL="0" indent="0" algn="l">
                         <a:buNone/>
                       </a:pPr>
                       <a:r>
@@ -6748,7 +6724,7 @@
                       </a:endParaRPr>
                     </a:p>
                   </a:txBody>
-                  <a:tcPr marL="91440" marR="91440" marT="45720" marB="45720" anchor="ctr">
+                  <a:tcPr anchor="ctr">
                     <a:lnL w="6350" cap="flat" cmpd="sng" algn="ctr">
                       <a:solidFill>
                         <a:srgbClr val="D8E0E4"/>
@@ -6797,7 +6773,7 @@
                     <a:bodyPr/>
                     <a:lstStyle/>
                     <a:p>
-                      <a:pPr algn="l" indent="0" marL="0">
+                      <a:pPr marL="0" indent="0" algn="l">
                         <a:buNone/>
                       </a:pPr>
                       <a:r>
@@ -6818,7 +6794,7 @@
                       </a:endParaRPr>
                     </a:p>
                   </a:txBody>
-                  <a:tcPr marL="91440" marR="91440" marT="45720" marB="45720" anchor="ctr">
+                  <a:tcPr anchor="ctr">
                     <a:lnL w="6350" cap="flat" cmpd="sng" algn="ctr">
                       <a:solidFill>
                         <a:srgbClr val="D8E0E4"/>
@@ -6865,11 +6841,11 @@
                     <a:bodyPr/>
                     <a:lstStyle/>
                     <a:p>
-                      <a:pPr algn="l" indent="0" marL="0">
+                      <a:pPr marL="0" indent="0" algn="l">
                         <a:buNone/>
                       </a:pPr>
                       <a:r>
-                        <a:rPr lang="en-US" sz="1400" dirty="0">
+                        <a:rPr lang="en-US" sz="1400" dirty="0" err="1" smtClean="0">
                           <a:solidFill>
                             <a:srgbClr val="22303A"/>
                           </a:solidFill>
@@ -6877,7 +6853,18 @@
                           <a:ea typeface="Calibri" pitchFamily="34" charset="-122"/>
                           <a:cs typeface="Calibri" pitchFamily="34" charset="-120"/>
                         </a:rPr>
-                        <a:t>mel-spectrogram (time series)</a:t>
+                        <a:t>mel</a:t>
+                      </a:r>
+                      <a:r>
+                        <a:rPr lang="en-US" sz="1400" dirty="0" smtClean="0">
+                          <a:solidFill>
+                            <a:srgbClr val="22303A"/>
+                          </a:solidFill>
+                          <a:latin typeface="Calibri" pitchFamily="34" charset="0"/>
+                          <a:ea typeface="Calibri" pitchFamily="34" charset="-122"/>
+                          <a:cs typeface="Calibri" pitchFamily="34" charset="-120"/>
+                        </a:rPr>
+                        <a:t>-spectrogram</a:t>
                       </a:r>
                       <a:endParaRPr lang="en-US" sz="1400" dirty="0">
                         <a:latin typeface="Calibri" charset="0"/>
@@ -6886,7 +6873,7 @@
                       </a:endParaRPr>
                     </a:p>
                   </a:txBody>
-                  <a:tcPr marL="91440" marR="91440" marT="45720" marB="45720" anchor="ctr">
+                  <a:tcPr anchor="ctr">
                     <a:lnL w="6350" cap="flat" cmpd="sng" algn="ctr">
                       <a:solidFill>
                         <a:srgbClr val="D8E0E4"/>
@@ -6933,7 +6920,7 @@
                     <a:bodyPr/>
                     <a:lstStyle/>
                     <a:p>
-                      <a:pPr algn="l" indent="0" marL="0">
+                      <a:pPr marL="0" indent="0" algn="l">
                         <a:buNone/>
                       </a:pPr>
                       <a:r>
@@ -6954,7 +6941,7 @@
                       </a:endParaRPr>
                     </a:p>
                   </a:txBody>
-                  <a:tcPr marL="91440" marR="91440" marT="45720" marB="45720" anchor="ctr">
+                  <a:tcPr anchor="ctr">
                     <a:lnL w="6350" cap="flat" cmpd="sng" algn="ctr">
                       <a:solidFill>
                         <a:srgbClr val="D8E0E4"/>
@@ -7003,7 +6990,7 @@
                     <a:bodyPr/>
                     <a:lstStyle/>
                     <a:p>
-                      <a:pPr algn="l" indent="0" marL="0">
+                      <a:pPr marL="0" indent="0" algn="l">
                         <a:buNone/>
                       </a:pPr>
                       <a:r>
@@ -7024,7 +7011,7 @@
                       </a:endParaRPr>
                     </a:p>
                   </a:txBody>
-                  <a:tcPr marL="91440" marR="91440" marT="45720" marB="45720" anchor="ctr">
+                  <a:tcPr anchor="ctr">
                     <a:lnL w="6350" cap="flat" cmpd="sng" algn="ctr">
                       <a:solidFill>
                         <a:srgbClr val="D8E0E4"/>
@@ -7071,7 +7058,7 @@
                     <a:bodyPr/>
                     <a:lstStyle/>
                     <a:p>
-                      <a:pPr algn="l" indent="0" marL="0">
+                      <a:pPr marL="0" indent="0" algn="l">
                         <a:buNone/>
                       </a:pPr>
                       <a:r>
@@ -7092,7 +7079,7 @@
                       </a:endParaRPr>
                     </a:p>
                   </a:txBody>
-                  <a:tcPr marL="91440" marR="91440" marT="45720" marB="45720" anchor="ctr">
+                  <a:tcPr anchor="ctr">
                     <a:lnL w="6350" cap="flat" cmpd="sng" algn="ctr">
                       <a:solidFill>
                         <a:srgbClr val="D8E0E4"/>
@@ -7139,7 +7126,7 @@
                     <a:bodyPr/>
                     <a:lstStyle/>
                     <a:p>
-                      <a:pPr algn="l" indent="0" marL="0">
+                      <a:pPr marL="0" indent="0" algn="l">
                         <a:buNone/>
                       </a:pPr>
                       <a:r>
@@ -7160,7 +7147,7 @@
                       </a:endParaRPr>
                     </a:p>
                   </a:txBody>
-                  <a:tcPr marL="91440" marR="91440" marT="45720" marB="45720" anchor="ctr">
+                  <a:tcPr anchor="ctr">
                     <a:lnL w="6350" cap="flat" cmpd="sng" algn="ctr">
                       <a:solidFill>
                         <a:srgbClr val="D8E0E4"/>
@@ -7228,7 +7215,7 @@
           <a:bodyPr wrap="square" lIns="0" tIns="0" rIns="0" bIns="0" rtlCol="0" anchor="ctr"/>
           <a:lstStyle/>
           <a:p>
-            <a:pPr indent="0" marL="0">
+            <a:pPr marL="0" indent="0">
               <a:buNone/>
             </a:pPr>
             <a:r>
@@ -7240,38 +7227,23 @@
                 <a:ea typeface="Calibri" pitchFamily="34" charset="-122"/>
                 <a:cs typeface="Calibri" pitchFamily="34" charset="-120"/>
               </a:rPr>
-              <a:t>Families 1–3: focused one-axis sweeps (capacity, LR, regularisation) with interpretation.  Family 4: an analysis of how to use a pretrained backbone.</a:t>
-            </a:r>
-            <a:endParaRPr lang="en-US" sz="1300" dirty="0"/>
-          </a:p>
-        </p:txBody>
-      </p:sp>
-      <p:sp>
-        <p:nvSpPr>
-          <p:cNvPr id="7" name="Text 4"/>
-          <p:cNvSpPr/>
-          <p:nvPr/>
-        </p:nvSpPr>
-        <p:spPr>
-          <a:xfrm>
-            <a:off x="548640" y="6437376"/>
-            <a:ext cx="7315200" cy="274320"/>
-          </a:xfrm>
-          <a:prstGeom prst="rect">
-            <a:avLst/>
-          </a:prstGeom>
-          <a:noFill/>
-          <a:ln/>
-        </p:spPr>
-        <p:txBody>
-          <a:bodyPr wrap="square" lIns="0" tIns="0" rIns="0" bIns="0" rtlCol="0" anchor="ctr"/>
-          <a:lstStyle/>
-          <a:p>
-            <a:pPr indent="0" marL="0">
+              <a:t>Families 1–3: focused one-axis sweeps (capacity, LR, regularisation) with interpretation.  </a:t>
+            </a:r>
+            <a:endParaRPr lang="en-US" sz="1300" i="1" dirty="0" smtClean="0">
+              <a:solidFill>
+                <a:srgbClr val="6B7B85"/>
+              </a:solidFill>
+              <a:latin typeface="Calibri" pitchFamily="34" charset="0"/>
+              <a:ea typeface="Calibri" pitchFamily="34" charset="-122"/>
+              <a:cs typeface="Calibri" pitchFamily="34" charset="-120"/>
+            </a:endParaRPr>
+          </a:p>
+          <a:p>
+            <a:pPr marL="0" indent="0">
               <a:buNone/>
             </a:pPr>
             <a:r>
-              <a:rPr lang="en-US" sz="900" dirty="0">
+              <a:rPr lang="en-US" sz="1300" i="1" dirty="0" smtClean="0">
                 <a:solidFill>
                   <a:srgbClr val="6B7B85"/>
                 </a:solidFill>
@@ -7279,6 +7251,56 @@
                 <a:ea typeface="Calibri" pitchFamily="34" charset="-122"/>
                 <a:cs typeface="Calibri" pitchFamily="34" charset="-120"/>
               </a:rPr>
+              <a:t>Family </a:t>
+            </a:r>
+            <a:r>
+              <a:rPr lang="en-US" sz="1300" i="1" dirty="0">
+                <a:solidFill>
+                  <a:srgbClr val="6B7B85"/>
+                </a:solidFill>
+                <a:latin typeface="Calibri" pitchFamily="34" charset="0"/>
+                <a:ea typeface="Calibri" pitchFamily="34" charset="-122"/>
+                <a:cs typeface="Calibri" pitchFamily="34" charset="-120"/>
+              </a:rPr>
+              <a:t>4: an analysis of how to use a pretrained backbone.</a:t>
+            </a:r>
+            <a:endParaRPr lang="en-US" sz="1300" dirty="0"/>
+          </a:p>
+        </p:txBody>
+      </p:sp>
+      <p:sp>
+        <p:nvSpPr>
+          <p:cNvPr id="7" name="Text 4"/>
+          <p:cNvSpPr/>
+          <p:nvPr/>
+        </p:nvSpPr>
+        <p:spPr>
+          <a:xfrm>
+            <a:off x="548640" y="6437376"/>
+            <a:ext cx="7315200" cy="274320"/>
+          </a:xfrm>
+          <a:prstGeom prst="rect">
+            <a:avLst/>
+          </a:prstGeom>
+          <a:noFill/>
+          <a:ln/>
+        </p:spPr>
+        <p:txBody>
+          <a:bodyPr wrap="square" lIns="0" tIns="0" rIns="0" bIns="0" rtlCol="0" anchor="ctr"/>
+          <a:lstStyle/>
+          <a:p>
+            <a:pPr marL="0" indent="0">
+              <a:buNone/>
+            </a:pPr>
+            <a:r>
+              <a:rPr lang="en-US" sz="900" dirty="0">
+                <a:solidFill>
+                  <a:srgbClr val="6B7B85"/>
+                </a:solidFill>
+                <a:latin typeface="Calibri" pitchFamily="34" charset="0"/>
+                <a:ea typeface="Calibri" pitchFamily="34" charset="-122"/>
+                <a:cs typeface="Calibri" pitchFamily="34" charset="-120"/>
+              </a:rPr>
               <a:t>Audio Deepfake Detection — DL project</a:t>
             </a:r>
             <a:endParaRPr lang="en-US" sz="900" dirty="0"/>
@@ -7306,7 +7328,7 @@
           <a:bodyPr wrap="square" lIns="0" tIns="0" rIns="0" bIns="0" rtlCol="0" anchor="ctr"/>
           <a:lstStyle/>
           <a:p>
-            <a:pPr algn="r" indent="0" marL="0">
+            <a:pPr marL="0" indent="0" algn="r">
               <a:buNone/>
             </a:pPr>
             <a:r>
@@ -7340,6 +7362,7 @@
         <a:solidFill>
           <a:srgbClr val="FFFFFF"/>
         </a:solidFill>
+        <a:effectLst/>
       </p:bgPr>
     </p:bg>
     <p:spTree>
@@ -7377,7 +7400,10 @@
         </p:spPr>
         <p:txBody>
           <a:bodyPr/>
-          <a:p/>
+          <a:lstStyle/>
+          <a:p>
+            <a:endParaRPr/>
+          </a:p>
         </p:txBody>
       </p:sp>
       <p:sp>
@@ -7401,11 +7427,11 @@
           <a:bodyPr wrap="square" lIns="0" tIns="0" rIns="0" bIns="0" rtlCol="0" anchor="ctr"/>
           <a:lstStyle/>
           <a:p>
-            <a:pPr indent="0" marL="0">
+            <a:pPr marL="0" indent="0">
               <a:buNone/>
             </a:pPr>
             <a:r>
-              <a:rPr lang="en-US" sz="1200" b="1" spc="200" kern="0" dirty="0">
+              <a:rPr lang="en-US" sz="1200" b="1" kern="0" spc="200" dirty="0">
                 <a:solidFill>
                   <a:srgbClr val="0E9594"/>
                 </a:solidFill>
@@ -7440,7 +7466,7 @@
           <a:bodyPr wrap="square" lIns="0" tIns="0" rIns="0" bIns="0" rtlCol="0" anchor="ctr"/>
           <a:lstStyle/>
           <a:p>
-            <a:pPr indent="0" marL="0">
+            <a:pPr marL="0" indent="0">
               <a:buNone/>
             </a:pPr>
             <a:r>
@@ -7486,7 +7512,10 @@
         </p:spPr>
         <p:txBody>
           <a:bodyPr/>
-          <a:p/>
+          <a:lstStyle/>
+          <a:p>
+            <a:endParaRPr/>
+          </a:p>
         </p:txBody>
       </p:sp>
       <p:sp>
@@ -7510,7 +7539,10 @@
         </p:spPr>
         <p:txBody>
           <a:bodyPr/>
-          <a:p/>
+          <a:lstStyle/>
+          <a:p>
+            <a:endParaRPr/>
+          </a:p>
         </p:txBody>
       </p:sp>
       <p:sp>
@@ -7534,7 +7566,7 @@
           <a:bodyPr wrap="square" lIns="0" tIns="0" rIns="0" bIns="0" rtlCol="0" anchor="ctr"/>
           <a:lstStyle/>
           <a:p>
-            <a:pPr indent="0" marL="0">
+            <a:pPr marL="0" indent="0">
               <a:buNone/>
             </a:pPr>
             <a:r>
@@ -7573,7 +7605,7 @@
           <a:bodyPr wrap="square" lIns="0" tIns="0" rIns="0" bIns="0" rtlCol="0" anchor="t"/>
           <a:lstStyle/>
           <a:p>
-            <a:pPr indent="0" marL="0">
+            <a:pPr marL="0" indent="0">
               <a:buNone/>
             </a:pPr>
             <a:r>
@@ -7585,7 +7617,78 @@
                 <a:ea typeface="Calibri" pitchFamily="34" charset="-122"/>
                 <a:cs typeface="Calibri" pitchFamily="34" charset="-120"/>
               </a:rPr>
-              <a:t>FoR (for-norm) for train + validation (in-domain); In-the-Wild for test only — an independent corpus, so results measure true generalisation.</a:t>
+              <a:t>FoR (for-norm) for train + validation (in-domain</a:t>
+            </a:r>
+            <a:r>
+              <a:rPr lang="en-US" sz="1250" dirty="0" smtClean="0">
+                <a:solidFill>
+                  <a:srgbClr val="3A4750"/>
+                </a:solidFill>
+                <a:latin typeface="Calibri" pitchFamily="34" charset="0"/>
+                <a:ea typeface="Calibri" pitchFamily="34" charset="-122"/>
+                <a:cs typeface="Calibri" pitchFamily="34" charset="-120"/>
+              </a:rPr>
+              <a:t>)</a:t>
+            </a:r>
+          </a:p>
+          <a:p>
+            <a:pPr marL="0" indent="0">
+              <a:buNone/>
+            </a:pPr>
+            <a:r>
+              <a:rPr lang="en-US" sz="1250" dirty="0" smtClean="0">
+                <a:solidFill>
+                  <a:srgbClr val="3A4750"/>
+                </a:solidFill>
+                <a:latin typeface="Calibri" pitchFamily="34" charset="0"/>
+                <a:ea typeface="Calibri" pitchFamily="34" charset="-122"/>
+                <a:cs typeface="Calibri" pitchFamily="34" charset="-120"/>
+              </a:rPr>
+              <a:t>In-the-Wild </a:t>
+            </a:r>
+            <a:r>
+              <a:rPr lang="en-US" sz="1250" dirty="0">
+                <a:solidFill>
+                  <a:srgbClr val="3A4750"/>
+                </a:solidFill>
+                <a:latin typeface="Calibri" pitchFamily="34" charset="0"/>
+                <a:ea typeface="Calibri" pitchFamily="34" charset="-122"/>
+                <a:cs typeface="Calibri" pitchFamily="34" charset="-120"/>
+              </a:rPr>
+              <a:t>for test </a:t>
+            </a:r>
+            <a:r>
+              <a:rPr lang="en-US" sz="1250" dirty="0" smtClean="0">
+                <a:solidFill>
+                  <a:srgbClr val="3A4750"/>
+                </a:solidFill>
+                <a:latin typeface="Calibri" pitchFamily="34" charset="0"/>
+                <a:ea typeface="Calibri" pitchFamily="34" charset="-122"/>
+                <a:cs typeface="Calibri" pitchFamily="34" charset="-120"/>
+              </a:rPr>
+              <a:t>only, so results measure true </a:t>
+            </a:r>
+            <a:r>
+              <a:rPr lang="en-US" sz="1250" dirty="0" err="1" smtClean="0">
+                <a:solidFill>
+                  <a:srgbClr val="3A4750"/>
+                </a:solidFill>
+                <a:latin typeface="Calibri" pitchFamily="34" charset="0"/>
+                <a:ea typeface="Calibri" pitchFamily="34" charset="-122"/>
+                <a:cs typeface="Calibri" pitchFamily="34" charset="-120"/>
+              </a:rPr>
+              <a:t>generalisation</a:t>
+            </a:r>
+            <a:r>
+              <a:rPr lang="en-US" sz="1250" dirty="0" smtClean="0">
+                <a:solidFill>
+                  <a:srgbClr val="3A4750"/>
+                </a:solidFill>
+                <a:latin typeface="Calibri" pitchFamily="34" charset="0"/>
+                <a:ea typeface="Calibri" pitchFamily="34" charset="-122"/>
+                <a:cs typeface="Calibri" pitchFamily="34" charset="-120"/>
+              </a:rPr>
+              <a:t>.</a:t>
             </a:r>
             <a:endParaRPr lang="en-US" sz="1250" dirty="0"/>
           </a:p>
@@ -7619,7 +7722,10 @@
         </p:spPr>
         <p:txBody>
           <a:bodyPr/>
-          <a:p/>
+          <a:lstStyle/>
+          <a:p>
+            <a:endParaRPr/>
+          </a:p>
         </p:txBody>
       </p:sp>
       <p:sp>
@@ -7643,7 +7749,10 @@
         </p:spPr>
         <p:txBody>
           <a:bodyPr/>
-          <a:p/>
+          <a:lstStyle/>
+          <a:p>
+            <a:endParaRPr/>
+          </a:p>
         </p:txBody>
       </p:sp>
       <p:sp>
@@ -7667,7 +7776,7 @@
           <a:bodyPr wrap="square" lIns="0" tIns="0" rIns="0" bIns="0" rtlCol="0" anchor="ctr"/>
           <a:lstStyle/>
           <a:p>
-            <a:pPr indent="0" marL="0">
+            <a:pPr marL="0" indent="0">
               <a:buNone/>
             </a:pPr>
             <a:r>
@@ -7706,7 +7815,7 @@
           <a:bodyPr wrap="square" lIns="0" tIns="0" rIns="0" bIns="0" rtlCol="0" anchor="t"/>
           <a:lstStyle/>
           <a:p>
-            <a:pPr indent="0" marL="0">
+            <a:pPr marL="0" indent="0">
               <a:buNone/>
             </a:pPr>
             <a:r>
@@ -7752,7 +7861,10 @@
         </p:spPr>
         <p:txBody>
           <a:bodyPr/>
-          <a:p/>
+          <a:lstStyle/>
+          <a:p>
+            <a:endParaRPr/>
+          </a:p>
         </p:txBody>
       </p:sp>
       <p:sp>
@@ -7776,7 +7888,10 @@
         </p:spPr>
         <p:txBody>
           <a:bodyPr/>
-          <a:p/>
+          <a:lstStyle/>
+          <a:p>
+            <a:endParaRPr/>
+          </a:p>
         </p:txBody>
       </p:sp>
       <p:sp>
@@ -7800,7 +7915,7 @@
           <a:bodyPr wrap="square" lIns="0" tIns="0" rIns="0" bIns="0" rtlCol="0" anchor="ctr"/>
           <a:lstStyle/>
           <a:p>
-            <a:pPr indent="0" marL="0">
+            <a:pPr marL="0" indent="0">
               <a:buNone/>
             </a:pPr>
             <a:r>
@@ -7839,7 +7954,7 @@
           <a:bodyPr wrap="square" lIns="0" tIns="0" rIns="0" bIns="0" rtlCol="0" anchor="t"/>
           <a:lstStyle/>
           <a:p>
-            <a:pPr indent="0" marL="0">
+            <a:pPr marL="0" indent="0">
               <a:buNone/>
             </a:pPr>
             <a:r>
@@ -7851,7 +7966,51 @@
                 <a:ea typeface="Calibri" pitchFamily="34" charset="-122"/>
                 <a:cs typeface="Calibri" pitchFamily="34" charset="-120"/>
               </a:rPr>
-              <a:t>16 kHz mono; fixed-duration crop/pad. Feature scalers fit on clean training data only. Noise augmentation applied to the train split only.</a:t>
+              <a:t>16 kHz mono; fixed-duration crop/pad. Feature scalers fit on clean training data only. </a:t>
+            </a:r>
+            <a:r>
+              <a:rPr lang="en-US" sz="1250" dirty="0" smtClean="0">
+                <a:solidFill>
+                  <a:srgbClr val="3A4750"/>
+                </a:solidFill>
+                <a:latin typeface="Calibri" pitchFamily="34" charset="0"/>
+                <a:ea typeface="Calibri" pitchFamily="34" charset="-122"/>
+                <a:cs typeface="Calibri" pitchFamily="34" charset="-120"/>
+              </a:rPr>
+              <a:t>For the </a:t>
+            </a:r>
+            <a:r>
+              <a:rPr lang="en-US" sz="1250" dirty="0" err="1" smtClean="0">
+                <a:solidFill>
+                  <a:srgbClr val="3A4750"/>
+                </a:solidFill>
+                <a:latin typeface="Calibri" pitchFamily="34" charset="0"/>
+                <a:ea typeface="Calibri" pitchFamily="34" charset="-122"/>
+                <a:cs typeface="Calibri" pitchFamily="34" charset="-120"/>
+              </a:rPr>
+              <a:t>WavLM</a:t>
+            </a:r>
+            <a:r>
+              <a:rPr lang="en-US" sz="1250" dirty="0" smtClean="0">
+                <a:solidFill>
+                  <a:srgbClr val="3A4750"/>
+                </a:solidFill>
+                <a:latin typeface="Calibri" pitchFamily="34" charset="0"/>
+                <a:ea typeface="Calibri" pitchFamily="34" charset="-122"/>
+                <a:cs typeface="Calibri" pitchFamily="34" charset="-120"/>
+              </a:rPr>
+              <a:t> fine tuning, noise augmentation was </a:t>
+            </a:r>
+            <a:r>
+              <a:rPr lang="en-US" sz="1250" dirty="0">
+                <a:solidFill>
+                  <a:srgbClr val="3A4750"/>
+                </a:solidFill>
+                <a:latin typeface="Calibri" pitchFamily="34" charset="0"/>
+                <a:ea typeface="Calibri" pitchFamily="34" charset="-122"/>
+                <a:cs typeface="Calibri" pitchFamily="34" charset="-120"/>
+              </a:rPr>
+              <a:t>applied to the train split only.</a:t>
             </a:r>
             <a:endParaRPr lang="en-US" sz="1250" dirty="0"/>
           </a:p>
@@ -7885,7 +8044,10 @@
         </p:spPr>
         <p:txBody>
           <a:bodyPr/>
-          <a:p/>
+          <a:lstStyle/>
+          <a:p>
+            <a:endParaRPr/>
+          </a:p>
         </p:txBody>
       </p:sp>
       <p:sp>
@@ -7909,7 +8071,10 @@
         </p:spPr>
         <p:txBody>
           <a:bodyPr/>
-          <a:p/>
+          <a:lstStyle/>
+          <a:p>
+            <a:endParaRPr/>
+          </a:p>
         </p:txBody>
       </p:sp>
       <p:sp>
@@ -7933,7 +8098,7 @@
           <a:bodyPr wrap="square" lIns="0" tIns="0" rIns="0" bIns="0" rtlCol="0" anchor="ctr"/>
           <a:lstStyle/>
           <a:p>
-            <a:pPr indent="0" marL="0">
+            <a:pPr marL="0" indent="0">
               <a:buNone/>
             </a:pPr>
             <a:r>
@@ -7972,7 +8137,7 @@
           <a:bodyPr wrap="square" lIns="0" tIns="0" rIns="0" bIns="0" rtlCol="0" anchor="t"/>
           <a:lstStyle/>
           <a:p>
-            <a:pPr indent="0" marL="0">
+            <a:pPr marL="0" indent="0">
               <a:buNone/>
             </a:pPr>
             <a:r>
@@ -7984,45 +8149,56 @@
                 <a:ea typeface="Calibri" pitchFamily="34" charset="-122"/>
                 <a:cs typeface="Calibri" pitchFamily="34" charset="-120"/>
               </a:rPr>
-              <a:t>AUC-ROC (primary, threshold-free), accuracy, macro-F1, per-class P/R/F1. EER noted as follow-up (per-sample scores not retained).</a:t>
-            </a:r>
-            <a:endParaRPr lang="en-US" sz="1250" dirty="0"/>
-          </a:p>
-        </p:txBody>
-      </p:sp>
-      <p:sp>
-        <p:nvSpPr>
-          <p:cNvPr id="21" name="Text 19"/>
-          <p:cNvSpPr/>
-          <p:nvPr/>
-        </p:nvSpPr>
-        <p:spPr>
-          <a:xfrm>
-            <a:off x="548640" y="6437376"/>
-            <a:ext cx="7315200" cy="274320"/>
-          </a:xfrm>
-          <a:prstGeom prst="rect">
-            <a:avLst/>
-          </a:prstGeom>
-          <a:noFill/>
-          <a:ln/>
-        </p:spPr>
-        <p:txBody>
-          <a:bodyPr wrap="square" lIns="0" tIns="0" rIns="0" bIns="0" rtlCol="0" anchor="ctr"/>
-          <a:lstStyle/>
-          <a:p>
-            <a:pPr indent="0" marL="0">
-              <a:buNone/>
-            </a:pPr>
-            <a:r>
-              <a:rPr lang="en-US" sz="900" dirty="0">
-                <a:solidFill>
-                  <a:srgbClr val="6B7B85"/>
+              <a:t>AUC-ROC (primary, threshold-free), accuracy, macro-F1, per-class P/R/F1</a:t>
+            </a:r>
+            <a:r>
+              <a:rPr lang="en-US" sz="1250" dirty="0" smtClean="0">
+                <a:solidFill>
+                  <a:srgbClr val="3A4750"/>
                 </a:solidFill>
                 <a:latin typeface="Calibri" pitchFamily="34" charset="0"/>
                 <a:ea typeface="Calibri" pitchFamily="34" charset="-122"/>
                 <a:cs typeface="Calibri" pitchFamily="34" charset="-120"/>
               </a:rPr>
+              <a:t>.</a:t>
+            </a:r>
+            <a:endParaRPr lang="en-US" sz="1250" dirty="0"/>
+          </a:p>
+        </p:txBody>
+      </p:sp>
+      <p:sp>
+        <p:nvSpPr>
+          <p:cNvPr id="21" name="Text 19"/>
+          <p:cNvSpPr/>
+          <p:nvPr/>
+        </p:nvSpPr>
+        <p:spPr>
+          <a:xfrm>
+            <a:off x="548640" y="6437376"/>
+            <a:ext cx="7315200" cy="274320"/>
+          </a:xfrm>
+          <a:prstGeom prst="rect">
+            <a:avLst/>
+          </a:prstGeom>
+          <a:noFill/>
+          <a:ln/>
+        </p:spPr>
+        <p:txBody>
+          <a:bodyPr wrap="square" lIns="0" tIns="0" rIns="0" bIns="0" rtlCol="0" anchor="ctr"/>
+          <a:lstStyle/>
+          <a:p>
+            <a:pPr marL="0" indent="0">
+              <a:buNone/>
+            </a:pPr>
+            <a:r>
+              <a:rPr lang="en-US" sz="900" dirty="0">
+                <a:solidFill>
+                  <a:srgbClr val="6B7B85"/>
+                </a:solidFill>
+                <a:latin typeface="Calibri" pitchFamily="34" charset="0"/>
+                <a:ea typeface="Calibri" pitchFamily="34" charset="-122"/>
+                <a:cs typeface="Calibri" pitchFamily="34" charset="-120"/>
+              </a:rPr>
               <a:t>Audio Deepfake Detection — DL project</a:t>
             </a:r>
             <a:endParaRPr lang="en-US" sz="900" dirty="0"/>
@@ -8050,7 +8226,7 @@
           <a:bodyPr wrap="square" lIns="0" tIns="0" rIns="0" bIns="0" rtlCol="0" anchor="ctr"/>
           <a:lstStyle/>
           <a:p>
-            <a:pPr algn="r" indent="0" marL="0">
+            <a:pPr marL="0" indent="0" algn="r">
               <a:buNone/>
             </a:pPr>
             <a:r>
@@ -8084,6 +8260,7 @@
         <a:solidFill>
           <a:srgbClr val="FFFFFF"/>
         </a:solidFill>
+        <a:effectLst/>
       </p:bgPr>
     </p:bg>
     <p:spTree>
@@ -8121,7 +8298,10 @@
         </p:spPr>
         <p:txBody>
           <a:bodyPr/>
-          <a:p/>
+          <a:lstStyle/>
+          <a:p>
+            <a:endParaRPr/>
+          </a:p>
         </p:txBody>
       </p:sp>
       <p:sp>
@@ -8145,11 +8325,11 @@
           <a:bodyPr wrap="square" lIns="0" tIns="0" rIns="0" bIns="0" rtlCol="0" anchor="ctr"/>
           <a:lstStyle/>
           <a:p>
-            <a:pPr indent="0" marL="0">
+            <a:pPr marL="0" indent="0">
               <a:buNone/>
             </a:pPr>
             <a:r>
-              <a:rPr lang="en-US" sz="1200" b="1" spc="200" kern="0" dirty="0">
+              <a:rPr lang="en-US" sz="1200" b="1" kern="0" spc="200" dirty="0">
                 <a:solidFill>
                   <a:srgbClr val="0E9594"/>
                 </a:solidFill>
@@ -8184,7 +8364,7 @@
           <a:bodyPr wrap="square" lIns="0" tIns="0" rIns="0" bIns="0" rtlCol="0" anchor="ctr"/>
           <a:lstStyle/>
           <a:p>
-            <a:pPr indent="0" marL="0">
+            <a:pPr marL="0" indent="0">
               <a:buNone/>
             </a:pPr>
             <a:r>
@@ -8223,7 +8403,7 @@
           <a:bodyPr wrap="square" lIns="0" tIns="0" rIns="0" bIns="0" rtlCol="0" anchor="ctr"/>
           <a:lstStyle/>
           <a:p>
-            <a:pPr algn="ctr" indent="0" marL="0">
+            <a:pPr marL="0" indent="0" algn="ctr">
               <a:buNone/>
             </a:pPr>
             <a:r>
@@ -8278,7 +8458,29 @@
                 <a:ea typeface="Calibri" pitchFamily="34" charset="-122"/>
                 <a:cs typeface="Calibri" pitchFamily="34" charset="-120"/>
               </a:rPr>
-              <a:t>Best AUC ≈ 0.79 — above chance but the weakest learned model.</a:t>
+              <a:t>Best AUC ≈ 0.79 </a:t>
+            </a:r>
+            <a:r>
+              <a:rPr lang="en-US" sz="1400" dirty="0" smtClean="0">
+                <a:solidFill>
+                  <a:srgbClr val="22303A"/>
+                </a:solidFill>
+                <a:latin typeface="Calibri" pitchFamily="34" charset="0"/>
+                <a:ea typeface="Calibri" pitchFamily="34" charset="-122"/>
+                <a:cs typeface="Calibri" pitchFamily="34" charset="-120"/>
+              </a:rPr>
+              <a:t>above </a:t>
+            </a:r>
+            <a:r>
+              <a:rPr lang="en-US" sz="1400" dirty="0">
+                <a:solidFill>
+                  <a:srgbClr val="22303A"/>
+                </a:solidFill>
+                <a:latin typeface="Calibri" pitchFamily="34" charset="0"/>
+                <a:ea typeface="Calibri" pitchFamily="34" charset="-122"/>
+                <a:cs typeface="Calibri" pitchFamily="34" charset="-120"/>
+              </a:rPr>
+              <a:t>chance but the weakest learned model.</a:t>
             </a:r>
             <a:endParaRPr lang="en-US" sz="1400" dirty="0"/>
           </a:p>
@@ -8320,7 +8522,29 @@
                 <a:ea typeface="Calibri" pitchFamily="34" charset="-122"/>
                 <a:cs typeface="Calibri" pitchFamily="34" charset="-120"/>
               </a:rPr>
-              <a:t>Learning rate dominates; 1e-3 wins on this low-dim feature space.</a:t>
+              <a:t>Learning </a:t>
+            </a:r>
+            <a:r>
+              <a:rPr lang="en-US" sz="1400" dirty="0" smtClean="0">
+                <a:solidFill>
+                  <a:srgbClr val="22303A"/>
+                </a:solidFill>
+                <a:latin typeface="Calibri" pitchFamily="34" charset="0"/>
+                <a:ea typeface="Calibri" pitchFamily="34" charset="-122"/>
+                <a:cs typeface="Calibri" pitchFamily="34" charset="-120"/>
+              </a:rPr>
+              <a:t>rate: </a:t>
+            </a:r>
+            <a:r>
+              <a:rPr lang="en-US" sz="1400" dirty="0">
+                <a:solidFill>
+                  <a:srgbClr val="22303A"/>
+                </a:solidFill>
+                <a:latin typeface="Calibri" pitchFamily="34" charset="0"/>
+                <a:ea typeface="Calibri" pitchFamily="34" charset="-122"/>
+                <a:cs typeface="Calibri" pitchFamily="34" charset="-120"/>
+              </a:rPr>
+              <a:t>1e-3 wins on this low-dim feature space.</a:t>
             </a:r>
             <a:endParaRPr lang="en-US" sz="1400" dirty="0"/>
           </a:p>
@@ -8345,26 +8569,38 @@
             </a:r>
             <a:endParaRPr lang="en-US" sz="1400" dirty="0"/>
           </a:p>
-          <a:p/>
-          <a:p>
-            <a:r>
-              <a:rPr lang="en-US" sz="800"/>
-              <a:t/>
-            </a:r>
-          </a:p>
-          <a:p>
-            <a:r>
-              <a:rPr lang="en-US" sz="950" b="1">
+          <a:p>
+            <a:endParaRPr lang="en-US" sz="1400" dirty="0"/>
+          </a:p>
+          <a:p>
+            <a:endParaRPr lang="en-US" sz="1400" dirty="0"/>
+          </a:p>
+          <a:p>
+            <a:r>
+              <a:rPr lang="en-US" sz="950" b="1" dirty="0">
                 <a:solidFill>
                   <a:srgbClr val="0E9594"/>
                 </a:solidFill>
               </a:rPr>
-              <a:t>Baseline config</a:t>
-            </a:r>
-          </a:p>
-          <a:p>
-            <a:r>
-              <a:rPr lang="en-US" sz="900">
+              <a:t>Baseline </a:t>
+            </a:r>
+            <a:r>
+              <a:rPr lang="en-US" sz="950" b="1" dirty="0" err="1">
+                <a:solidFill>
+                  <a:srgbClr val="0E9594"/>
+                </a:solidFill>
+              </a:rPr>
+              <a:t>config</a:t>
+            </a:r>
+            <a:endParaRPr lang="en-US" sz="950" b="1" dirty="0">
+              <a:solidFill>
+                <a:srgbClr val="0E9594"/>
+              </a:solidFill>
+            </a:endParaRPr>
+          </a:p>
+          <a:p>
+            <a:r>
+              <a:rPr lang="en-US" sz="900" dirty="0">
                 <a:solidFill>
                   <a:srgbClr val="5C6B73"/>
                 </a:solidFill>
@@ -8372,7 +8608,7 @@
               <a:t>Hidden layers: </a:t>
             </a:r>
             <a:r>
-              <a:rPr lang="en-US" sz="900">
+              <a:rPr lang="en-US" sz="900" dirty="0">
                 <a:solidFill>
                   <a:srgbClr val="22303A"/>
                 </a:solidFill>
@@ -8382,7 +8618,7 @@
           </a:p>
           <a:p>
             <a:r>
-              <a:rPr lang="en-US" sz="900">
+              <a:rPr lang="en-US" sz="900" dirty="0">
                 <a:solidFill>
                   <a:srgbClr val="5C6B73"/>
                 </a:solidFill>
@@ -8390,7 +8626,7 @@
               <a:t>Learning rate: </a:t>
             </a:r>
             <a:r>
-              <a:rPr lang="en-US" sz="900">
+              <a:rPr lang="en-US" sz="900" dirty="0">
                 <a:solidFill>
                   <a:srgbClr val="22303A"/>
                 </a:solidFill>
@@ -8400,15 +8636,31 @@
           </a:p>
           <a:p>
             <a:r>
-              <a:rPr lang="en-US" sz="900">
+              <a:rPr lang="en-US" sz="900" dirty="0">
                 <a:solidFill>
                   <a:srgbClr val="5C6B73"/>
                 </a:solidFill>
               </a:rPr>
-              <a:t>Dropout / wd: </a:t>
-            </a:r>
-            <a:r>
-              <a:rPr lang="en-US" sz="900">
+              <a:t>Dropout / </a:t>
+            </a:r>
+            <a:r>
+              <a:rPr lang="en-US" sz="900" dirty="0" err="1">
+                <a:solidFill>
+                  <a:srgbClr val="5C6B73"/>
+                </a:solidFill>
+              </a:rPr>
+              <a:t>wd</a:t>
+            </a:r>
+            <a:r>
+              <a:rPr lang="en-US" sz="900" dirty="0">
+                <a:solidFill>
+                  <a:srgbClr val="5C6B73"/>
+                </a:solidFill>
+              </a:rPr>
+              <a:t>: </a:t>
+            </a:r>
+            <a:r>
+              <a:rPr lang="en-US" sz="900" dirty="0">
                 <a:solidFill>
                   <a:srgbClr val="22303A"/>
                 </a:solidFill>
@@ -8418,7 +8670,7 @@
           </a:p>
           <a:p>
             <a:r>
-              <a:rPr lang="en-US" sz="900" b="1">
+              <a:rPr lang="en-US" sz="900" b="1" dirty="0">
                 <a:solidFill>
                   <a:srgbClr val="0E9594"/>
                 </a:solidFill>
@@ -8427,24 +8679,38 @@
             </a:r>
           </a:p>
           <a:p>
-            <a:r>
-              <a:rPr lang="en-US" sz="800"/>
-              <a:t/>
-            </a:r>
-          </a:p>
-          <a:p>
-            <a:r>
-              <a:rPr lang="en-US" sz="950" b="1">
+            <a:endParaRPr lang="en-US" sz="900" b="1" dirty="0">
+              <a:solidFill>
+                <a:srgbClr val="0E9594"/>
+              </a:solidFill>
+            </a:endParaRPr>
+          </a:p>
+          <a:p>
+            <a:r>
+              <a:rPr lang="en-US" sz="950" b="1" dirty="0">
                 <a:solidFill>
                   <a:srgbClr val="C9971B"/>
                 </a:solidFill>
               </a:rPr>
-              <a:t>Best config</a:t>
-            </a:r>
-          </a:p>
-          <a:p>
-            <a:r>
-              <a:rPr lang="en-US" sz="900">
+              <a:t>Best </a:t>
+            </a:r>
+            <a:r>
+              <a:rPr lang="en-US" sz="950" b="1" dirty="0" err="1">
+                <a:solidFill>
+                  <a:srgbClr val="C9971B"/>
+                </a:solidFill>
+              </a:rPr>
+              <a:t>config</a:t>
+            </a:r>
+            <a:endParaRPr lang="en-US" sz="950" b="1" dirty="0">
+              <a:solidFill>
+                <a:srgbClr val="C9971B"/>
+              </a:solidFill>
+            </a:endParaRPr>
+          </a:p>
+          <a:p>
+            <a:r>
+              <a:rPr lang="en-US" sz="900" dirty="0">
                 <a:solidFill>
                   <a:srgbClr val="5C6B73"/>
                 </a:solidFill>
@@ -8452,7 +8718,7 @@
               <a:t>Hidden layers: </a:t>
             </a:r>
             <a:r>
-              <a:rPr lang="en-US" sz="900">
+              <a:rPr lang="en-US" sz="900" dirty="0">
                 <a:solidFill>
                   <a:srgbClr val="22303A"/>
                 </a:solidFill>
@@ -8462,7 +8728,7 @@
           </a:p>
           <a:p>
             <a:r>
-              <a:rPr lang="en-US" sz="900">
+              <a:rPr lang="en-US" sz="900" dirty="0">
                 <a:solidFill>
                   <a:srgbClr val="5C6B73"/>
                 </a:solidFill>
@@ -8470,7 +8736,7 @@
               <a:t>Learning rate: </a:t>
             </a:r>
             <a:r>
-              <a:rPr lang="en-US" sz="900">
+              <a:rPr lang="en-US" sz="900" dirty="0">
                 <a:solidFill>
                   <a:srgbClr val="22303A"/>
                 </a:solidFill>
@@ -8480,15 +8746,31 @@
           </a:p>
           <a:p>
             <a:r>
-              <a:rPr lang="en-US" sz="900">
+              <a:rPr lang="en-US" sz="900" dirty="0">
                 <a:solidFill>
                   <a:srgbClr val="5C6B73"/>
                 </a:solidFill>
               </a:rPr>
-              <a:t>Dropout / wd: </a:t>
-            </a:r>
-            <a:r>
-              <a:rPr lang="en-US" sz="900">
+              <a:t>Dropout / </a:t>
+            </a:r>
+            <a:r>
+              <a:rPr lang="en-US" sz="900" dirty="0" err="1">
+                <a:solidFill>
+                  <a:srgbClr val="5C6B73"/>
+                </a:solidFill>
+              </a:rPr>
+              <a:t>wd</a:t>
+            </a:r>
+            <a:r>
+              <a:rPr lang="en-US" sz="900" dirty="0">
+                <a:solidFill>
+                  <a:srgbClr val="5C6B73"/>
+                </a:solidFill>
+              </a:rPr>
+              <a:t>: </a:t>
+            </a:r>
+            <a:r>
+              <a:rPr lang="en-US" sz="900" dirty="0">
                 <a:solidFill>
                   <a:srgbClr val="22303A"/>
                 </a:solidFill>
@@ -8498,7 +8780,7 @@
           </a:p>
           <a:p>
             <a:r>
-              <a:rPr lang="en-US" sz="900" b="1">
+              <a:rPr lang="en-US" sz="900" b="1" dirty="0">
                 <a:solidFill>
                   <a:srgbClr val="C9971B"/>
                 </a:solidFill>
@@ -8529,7 +8811,7 @@
           <a:bodyPr wrap="square" lIns="0" tIns="0" rIns="0" bIns="0" rtlCol="0" anchor="ctr"/>
           <a:lstStyle/>
           <a:p>
-            <a:pPr indent="0" marL="0">
+            <a:pPr marL="0" indent="0">
               <a:buNone/>
             </a:pPr>
             <a:r>
@@ -8568,7 +8850,7 @@
           <a:bodyPr wrap="square" lIns="0" tIns="0" rIns="0" bIns="0" rtlCol="0" anchor="ctr"/>
           <a:lstStyle/>
           <a:p>
-            <a:pPr algn="r" indent="0" marL="0">
+            <a:pPr marL="0" indent="0" algn="r">
               <a:buNone/>
             </a:pPr>
             <a:r>
@@ -8595,7 +8877,7 @@
           <p:nvPr/>
         </p:nvPicPr>
         <p:blipFill>
-          <a:blip r:embed="rId4"/>
+          <a:blip r:embed="rId3"/>
           <a:stretch>
             <a:fillRect/>
           </a:stretch>
@@ -8626,6 +8908,7 @@
         <a:solidFill>
           <a:srgbClr val="FFFFFF"/>
         </a:solidFill>
+        <a:effectLst/>
       </p:bgPr>
     </p:bg>
     <p:spTree>
@@ -8663,7 +8946,10 @@
         </p:spPr>
         <p:txBody>
           <a:bodyPr/>
-          <a:p/>
+          <a:lstStyle/>
+          <a:p>
+            <a:endParaRPr/>
+          </a:p>
         </p:txBody>
       </p:sp>
       <p:sp>
@@ -8687,11 +8973,11 @@
           <a:bodyPr wrap="square" lIns="0" tIns="0" rIns="0" bIns="0" rtlCol="0" anchor="ctr"/>
           <a:lstStyle/>
           <a:p>
-            <a:pPr indent="0" marL="0">
+            <a:pPr marL="0" indent="0">
               <a:buNone/>
             </a:pPr>
             <a:r>
-              <a:rPr lang="en-US" sz="1200" b="1" spc="200" kern="0" dirty="0">
+              <a:rPr lang="en-US" sz="1200" b="1" kern="0" spc="200" dirty="0">
                 <a:solidFill>
                   <a:srgbClr val="0E9594"/>
                 </a:solidFill>
@@ -8726,7 +9012,7 @@
           <a:bodyPr wrap="square" lIns="0" tIns="0" rIns="0" bIns="0" rtlCol="0" anchor="ctr"/>
           <a:lstStyle/>
           <a:p>
-            <a:pPr indent="0" marL="0">
+            <a:pPr marL="0" indent="0">
               <a:buNone/>
             </a:pPr>
             <a:r>
@@ -8765,7 +9051,7 @@
           <a:bodyPr wrap="square" lIns="0" tIns="0" rIns="0" bIns="0" rtlCol="0" anchor="ctr"/>
           <a:lstStyle/>
           <a:p>
-            <a:pPr algn="ctr" indent="0" marL="0">
+            <a:pPr marL="0" indent="0" algn="ctr">
               <a:buNone/>
             </a:pPr>
             <a:r>
@@ -8887,12 +9173,11 @@
             </a:r>
             <a:endParaRPr lang="en-US" sz="1400" dirty="0"/>
           </a:p>
-          <a:p/>
-          <a:p>
-            <a:r>
-              <a:rPr lang="en-US" sz="800"/>
-              <a:t/>
-            </a:r>
+          <a:p>
+            <a:endParaRPr lang="en-US" sz="1400" dirty="0"/>
+          </a:p>
+          <a:p>
+            <a:endParaRPr lang="en-US" sz="1400" dirty="0"/>
           </a:p>
           <a:p>
             <a:r>
@@ -8987,10 +9272,11 @@
             </a:r>
           </a:p>
           <a:p>
-            <a:r>
-              <a:rPr lang="en-US" sz="800"/>
-              <a:t/>
-            </a:r>
+            <a:endParaRPr lang="en-US" sz="900" b="1">
+              <a:solidFill>
+                <a:srgbClr val="0E9594"/>
+              </a:solidFill>
+            </a:endParaRPr>
           </a:p>
           <a:p>
             <a:r>
@@ -9107,7 +9393,7 @@
           <a:bodyPr wrap="square" lIns="0" tIns="0" rIns="0" bIns="0" rtlCol="0" anchor="ctr"/>
           <a:lstStyle/>
           <a:p>
-            <a:pPr indent="0" marL="0">
+            <a:pPr marL="0" indent="0">
               <a:buNone/>
             </a:pPr>
             <a:r>
@@ -9146,7 +9432,7 @@
           <a:bodyPr wrap="square" lIns="0" tIns="0" rIns="0" bIns="0" rtlCol="0" anchor="ctr"/>
           <a:lstStyle/>
           <a:p>
-            <a:pPr algn="r" indent="0" marL="0">
+            <a:pPr marL="0" indent="0" algn="r">
               <a:buNone/>
             </a:pPr>
             <a:r>
@@ -9173,7 +9459,7 @@
           <p:nvPr/>
         </p:nvPicPr>
         <p:blipFill>
-          <a:blip r:embed="rId4"/>
+          <a:blip r:embed="rId3"/>
           <a:stretch>
             <a:fillRect/>
           </a:stretch>
@@ -9204,6 +9490,7 @@
         <a:solidFill>
           <a:srgbClr val="FFFFFF"/>
         </a:solidFill>
+        <a:effectLst/>
       </p:bgPr>
     </p:bg>
     <p:spTree>
@@ -9241,7 +9528,10 @@
         </p:spPr>
         <p:txBody>
           <a:bodyPr/>
-          <a:p/>
+          <a:lstStyle/>
+          <a:p>
+            <a:endParaRPr/>
+          </a:p>
         </p:txBody>
       </p:sp>
       <p:sp>
@@ -9265,11 +9555,11 @@
           <a:bodyPr wrap="square" lIns="0" tIns="0" rIns="0" bIns="0" rtlCol="0" anchor="ctr"/>
           <a:lstStyle/>
           <a:p>
-            <a:pPr indent="0" marL="0">
+            <a:pPr marL="0" indent="0">
               <a:buNone/>
             </a:pPr>
             <a:r>
-              <a:rPr lang="en-US" sz="1200" b="1" spc="200" kern="0" dirty="0">
+              <a:rPr lang="en-US" sz="1200" b="1" kern="0" spc="200" dirty="0">
                 <a:solidFill>
                   <a:srgbClr val="0E9594"/>
                 </a:solidFill>
@@ -9304,7 +9594,7 @@
           <a:bodyPr wrap="square" lIns="0" tIns="0" rIns="0" bIns="0" rtlCol="0" anchor="ctr"/>
           <a:lstStyle/>
           <a:p>
-            <a:pPr indent="0" marL="0">
+            <a:pPr marL="0" indent="0">
               <a:buNone/>
             </a:pPr>
             <a:r>
@@ -9343,7 +9633,7 @@
           <a:bodyPr wrap="square" lIns="0" tIns="0" rIns="0" bIns="0" rtlCol="0" anchor="ctr"/>
           <a:lstStyle/>
           <a:p>
-            <a:pPr algn="ctr" indent="0" marL="0">
+            <a:pPr marL="0" indent="0" algn="ctr">
               <a:buNone/>
             </a:pPr>
             <a:r>
@@ -9465,12 +9755,11 @@
             </a:r>
             <a:endParaRPr lang="en-US" sz="1400" dirty="0"/>
           </a:p>
-          <a:p/>
-          <a:p>
-            <a:r>
-              <a:rPr lang="en-US" sz="800"/>
-              <a:t/>
-            </a:r>
+          <a:p>
+            <a:endParaRPr lang="en-US" sz="1400" dirty="0"/>
+          </a:p>
+          <a:p>
+            <a:endParaRPr lang="en-US" sz="1400" dirty="0"/>
           </a:p>
           <a:p>
             <a:r>
@@ -9565,10 +9854,11 @@
             </a:r>
           </a:p>
           <a:p>
-            <a:r>
-              <a:rPr lang="en-US" sz="800"/>
-              <a:t/>
-            </a:r>
+            <a:endParaRPr lang="en-US" sz="900" b="1">
+              <a:solidFill>
+                <a:srgbClr val="0E9594"/>
+              </a:solidFill>
+            </a:endParaRPr>
           </a:p>
           <a:p>
             <a:r>
@@ -9649,7 +9939,7 @@
           <a:bodyPr wrap="square" lIns="0" tIns="0" rIns="0" bIns="0" rtlCol="0" anchor="ctr"/>
           <a:lstStyle/>
           <a:p>
-            <a:pPr indent="0" marL="0">
+            <a:pPr marL="0" indent="0">
               <a:buNone/>
             </a:pPr>
             <a:r>
@@ -9688,7 +9978,7 @@
           <a:bodyPr wrap="square" lIns="0" tIns="0" rIns="0" bIns="0" rtlCol="0" anchor="ctr"/>
           <a:lstStyle/>
           <a:p>
-            <a:pPr algn="r" indent="0" marL="0">
+            <a:pPr marL="0" indent="0" algn="r">
               <a:buNone/>
             </a:pPr>
             <a:r>
@@ -9715,7 +10005,7 @@
           <p:nvPr/>
         </p:nvPicPr>
         <p:blipFill>
-          <a:blip r:embed="rId4"/>
+          <a:blip r:embed="rId3"/>
           <a:stretch>
             <a:fillRect/>
           </a:stretch>
@@ -9746,6 +10036,7 @@
         <a:solidFill>
           <a:srgbClr val="FFFFFF"/>
         </a:solidFill>
+        <a:effectLst/>
       </p:bgPr>
     </p:bg>
     <p:spTree>
@@ -9783,7 +10074,10 @@
         </p:spPr>
         <p:txBody>
           <a:bodyPr/>
-          <a:p/>
+          <a:lstStyle/>
+          <a:p>
+            <a:endParaRPr/>
+          </a:p>
         </p:txBody>
       </p:sp>
       <p:sp>
@@ -9807,11 +10101,11 @@
           <a:bodyPr wrap="square" lIns="0" tIns="0" rIns="0" bIns="0" rtlCol="0" anchor="ctr"/>
           <a:lstStyle/>
           <a:p>
-            <a:pPr indent="0" marL="0">
+            <a:pPr marL="0" indent="0">
               <a:buNone/>
             </a:pPr>
             <a:r>
-              <a:rPr lang="en-US" sz="1200" b="1" spc="200" kern="0" dirty="0">
+              <a:rPr lang="en-US" sz="1200" b="1" kern="0" spc="200" dirty="0">
                 <a:solidFill>
                   <a:srgbClr val="0E9594"/>
                 </a:solidFill>
@@ -9846,7 +10140,7 @@
           <a:bodyPr wrap="square" lIns="0" tIns="0" rIns="0" bIns="0" rtlCol="0" anchor="ctr"/>
           <a:lstStyle/>
           <a:p>
-            <a:pPr indent="0" marL="0">
+            <a:pPr marL="0" indent="0">
               <a:buNone/>
             </a:pPr>
             <a:r>
@@ -9885,7 +10179,7 @@
           <a:bodyPr wrap="square" lIns="0" tIns="0" rIns="0" bIns="0" rtlCol="0" anchor="ctr"/>
           <a:lstStyle/>
           <a:p>
-            <a:pPr algn="ctr" indent="0" marL="0">
+            <a:pPr marL="0" indent="0" algn="ctr">
               <a:buNone/>
             </a:pPr>
             <a:r>
@@ -9986,12 +10280,11 @@
             </a:r>
             <a:endParaRPr lang="en-US" sz="1400" dirty="0"/>
           </a:p>
-          <a:p/>
-          <a:p>
-            <a:r>
-              <a:rPr lang="en-US" sz="800"/>
-              <a:t/>
-            </a:r>
+          <a:p>
+            <a:endParaRPr lang="en-US" sz="1400" dirty="0"/>
+          </a:p>
+          <a:p>
+            <a:endParaRPr lang="en-US" sz="1400" dirty="0"/>
           </a:p>
           <a:p>
             <a:r>
@@ -10068,10 +10361,11 @@
             </a:r>
           </a:p>
           <a:p>
-            <a:r>
-              <a:rPr lang="en-US" sz="800"/>
-              <a:t/>
-            </a:r>
+            <a:endParaRPr lang="en-US" sz="900" b="1">
+              <a:solidFill>
+                <a:srgbClr val="0E9594"/>
+              </a:solidFill>
+            </a:endParaRPr>
           </a:p>
           <a:p>
             <a:r>
@@ -10170,7 +10464,7 @@
           <a:bodyPr wrap="square" lIns="0" tIns="0" rIns="0" bIns="0" rtlCol="0" anchor="ctr"/>
           <a:lstStyle/>
           <a:p>
-            <a:pPr indent="0" marL="0">
+            <a:pPr marL="0" indent="0">
               <a:buNone/>
             </a:pPr>
             <a:r>
@@ -10209,7 +10503,7 @@
           <a:bodyPr wrap="square" lIns="0" tIns="0" rIns="0" bIns="0" rtlCol="0" anchor="ctr"/>
           <a:lstStyle/>
           <a:p>
-            <a:pPr algn="r" indent="0" marL="0">
+            <a:pPr marL="0" indent="0" algn="r">
               <a:buNone/>
             </a:pPr>
             <a:r>
@@ -10236,7 +10530,7 @@
           <p:nvPr/>
         </p:nvPicPr>
         <p:blipFill>
-          <a:blip r:embed="rId4"/>
+          <a:blip r:embed="rId3"/>
           <a:stretch>
             <a:fillRect/>
           </a:stretch>
@@ -10267,6 +10561,7 @@
         <a:solidFill>
           <a:srgbClr val="FFFFFF"/>
         </a:solidFill>
+        <a:effectLst/>
       </p:bgPr>
     </p:bg>
     <p:spTree>
@@ -10304,7 +10599,10 @@
         </p:spPr>
         <p:txBody>
           <a:bodyPr/>
-          <a:p/>
+          <a:lstStyle/>
+          <a:p>
+            <a:endParaRPr/>
+          </a:p>
         </p:txBody>
       </p:sp>
       <p:sp>
@@ -10328,11 +10626,11 @@
           <a:bodyPr wrap="square" lIns="0" tIns="0" rIns="0" bIns="0" rtlCol="0" anchor="ctr"/>
           <a:lstStyle/>
           <a:p>
-            <a:pPr indent="0" marL="0">
+            <a:pPr marL="0" indent="0">
               <a:buNone/>
             </a:pPr>
             <a:r>
-              <a:rPr lang="en-US" sz="1200" b="1" spc="200" kern="0" dirty="0">
+              <a:rPr lang="en-US" sz="1200" b="1" kern="0" spc="200" dirty="0">
                 <a:solidFill>
                   <a:srgbClr val="0E9594"/>
                 </a:solidFill>
@@ -10367,7 +10665,7 @@
           <a:bodyPr wrap="square" lIns="0" tIns="0" rIns="0" bIns="0" rtlCol="0" anchor="ctr"/>
           <a:lstStyle/>
           <a:p>
-            <a:pPr indent="0" marL="0">
+            <a:pPr marL="0" indent="0">
               <a:buNone/>
             </a:pPr>
             <a:r>
@@ -10489,12 +10787,11 @@
             </a:r>
             <a:endParaRPr lang="en-US" sz="1400" dirty="0"/>
           </a:p>
-          <a:p/>
-          <a:p>
-            <a:r>
-              <a:rPr lang="en-US" sz="800"/>
-              <a:t/>
-            </a:r>
+          <a:p>
+            <a:endParaRPr lang="en-US" sz="1400" dirty="0"/>
+          </a:p>
+          <a:p>
+            <a:endParaRPr lang="en-US" sz="1400" dirty="0"/>
           </a:p>
           <a:p>
             <a:r>
@@ -10571,10 +10868,11 @@
             </a:r>
           </a:p>
           <a:p>
-            <a:r>
-              <a:rPr lang="en-US" sz="800"/>
-              <a:t/>
-            </a:r>
+            <a:endParaRPr lang="en-US" sz="900" b="1">
+              <a:solidFill>
+                <a:srgbClr val="0E9594"/>
+              </a:solidFill>
+            </a:endParaRPr>
           </a:p>
           <a:p>
             <a:r>
@@ -10673,7 +10971,7 @@
           <a:bodyPr wrap="square" lIns="0" tIns="0" rIns="0" bIns="0" rtlCol="0" anchor="ctr"/>
           <a:lstStyle/>
           <a:p>
-            <a:pPr indent="0" marL="0">
+            <a:pPr marL="0" indent="0">
               <a:buNone/>
             </a:pPr>
             <a:r>
@@ -10712,7 +11010,7 @@
           <a:bodyPr wrap="square" lIns="0" tIns="0" rIns="0" bIns="0" rtlCol="0" anchor="ctr"/>
           <a:lstStyle/>
           <a:p>
-            <a:pPr algn="r" indent="0" marL="0">
+            <a:pPr marL="0" indent="0" algn="r">
               <a:buNone/>
             </a:pPr>
             <a:r>
@@ -10739,7 +11037,7 @@
           <p:nvPr/>
         </p:nvPicPr>
         <p:blipFill>
-          <a:blip r:embed="rId4"/>
+          <a:blip r:embed="rId3"/>
           <a:stretch>
             <a:fillRect/>
           </a:stretch>
@@ -11055,4 +11353,265 @@
     </a:ext>
   </a:extLst>
 </a:theme>
+</file>
+
+<file path=ppt/theme/theme2.xml><?xml version="1.0" encoding="utf-8"?>
+<a:theme xmlns:a="http://schemas.openxmlformats.org/drawingml/2006/main" name="Office Theme">
+  <a:themeElements>
+    <a:clrScheme name="Office">
+      <a:dk1>
+        <a:sysClr val="windowText" lastClr="000000"/>
+      </a:dk1>
+      <a:lt1>
+        <a:sysClr val="window" lastClr="FFFFFF"/>
+      </a:lt1>
+      <a:dk2>
+        <a:srgbClr val="44546A"/>
+      </a:dk2>
+      <a:lt2>
+        <a:srgbClr val="E7E6E6"/>
+      </a:lt2>
+      <a:accent1>
+        <a:srgbClr val="5B9BD5"/>
+      </a:accent1>
+      <a:accent2>
+        <a:srgbClr val="ED7D31"/>
+      </a:accent2>
+      <a:accent3>
+        <a:srgbClr val="A5A5A5"/>
+      </a:accent3>
+      <a:accent4>
+        <a:srgbClr val="FFC000"/>
+      </a:accent4>
+      <a:accent5>
+        <a:srgbClr val="4472C4"/>
+      </a:accent5>
+      <a:accent6>
+        <a:srgbClr val="70AD47"/>
+      </a:accent6>
+      <a:hlink>
+        <a:srgbClr val="0563C1"/>
+      </a:hlink>
+      <a:folHlink>
+        <a:srgbClr val="954F72"/>
+      </a:folHlink>
+    </a:clrScheme>
+    <a:fontScheme name="Office">
+      <a:majorFont>
+        <a:latin typeface="Calibri Light" panose="020F0302020204030204"/>
+        <a:ea typeface=""/>
+        <a:cs typeface=""/>
+        <a:font script="Jpan" typeface="ＭＳ Ｐゴシック"/>
+        <a:font script="Hang" typeface="맑은 고딕"/>
+        <a:font script="Hans" typeface="宋体"/>
+        <a:font script="Hant" typeface="新細明體"/>
+        <a:font script="Arab" typeface="Times New Roman"/>
+        <a:font script="Hebr" typeface="Times New Roman"/>
+        <a:font script="Thai" typeface="Angsana New"/>
+        <a:font script="Ethi" typeface="Nyala"/>
+        <a:font script="Beng" typeface="Vrinda"/>
+        <a:font script="Gujr" typeface="Shruti"/>
+        <a:font script="Khmr" typeface="MoolBoran"/>
+        <a:font script="Knda" typeface="Tunga"/>
+        <a:font script="Guru" typeface="Raavi"/>
+        <a:font script="Cans" typeface="Euphemia"/>
+        <a:font script="Cher" typeface="Plantagenet Cherokee"/>
+        <a:font script="Yiii" typeface="Microsoft Yi Baiti"/>
+        <a:font script="Tibt" typeface="Microsoft Himalaya"/>
+        <a:font script="Thaa" typeface="MV Boli"/>
+        <a:font script="Deva" typeface="Mangal"/>
+        <a:font script="Telu" typeface="Gautami"/>
+        <a:font script="Taml" typeface="Latha"/>
+        <a:font script="Syrc" typeface="Estrangelo Edessa"/>
+        <a:font script="Orya" typeface="Kalinga"/>
+        <a:font script="Mlym" typeface="Kartika"/>
+        <a:font script="Laoo" typeface="DokChampa"/>
+        <a:font script="Sinh" typeface="Iskoola Pota"/>
+        <a:font script="Mong" typeface="Mongolian Baiti"/>
+        <a:font script="Viet" typeface="Times New Roman"/>
+        <a:font script="Uigh" typeface="Microsoft Uighur"/>
+        <a:font script="Geor" typeface="Sylfaen"/>
+      </a:majorFont>
+      <a:minorFont>
+        <a:latin typeface="Calibri" panose="020F0502020204030204"/>
+        <a:ea typeface=""/>
+        <a:cs typeface=""/>
+        <a:font script="Jpan" typeface="ＭＳ Ｐゴシック"/>
+        <a:font script="Hang" typeface="맑은 고딕"/>
+        <a:font script="Hans" typeface="宋体"/>
+        <a:font script="Hant" typeface="新細明體"/>
+        <a:font script="Arab" typeface="Arial"/>
+        <a:font script="Hebr" typeface="Arial"/>
+        <a:font script="Thai" typeface="Cordia New"/>
+        <a:font script="Ethi" typeface="Nyala"/>
+        <a:font script="Beng" typeface="Vrinda"/>
+        <a:font script="Gujr" typeface="Shruti"/>
+        <a:font script="Khmr" typeface="DaunPenh"/>
+        <a:font script="Knda" typeface="Tunga"/>
+        <a:font script="Guru" typeface="Raavi"/>
+        <a:font script="Cans" typeface="Euphemia"/>
+        <a:font script="Cher" typeface="Plantagenet Cherokee"/>
+        <a:font script="Yiii" typeface="Microsoft Yi Baiti"/>
+        <a:font script="Tibt" typeface="Microsoft Himalaya"/>
+        <a:font script="Thaa" typeface="MV Boli"/>
+        <a:font script="Deva" typeface="Mangal"/>
+        <a:font script="Telu" typeface="Gautami"/>
+        <a:font script="Taml" typeface="Latha"/>
+        <a:font script="Syrc" typeface="Estrangelo Edessa"/>
+        <a:font script="Orya" typeface="Kalinga"/>
+        <a:font script="Mlym" typeface="Kartika"/>
+        <a:font script="Laoo" typeface="DokChampa"/>
+        <a:font script="Sinh" typeface="Iskoola Pota"/>
+        <a:font script="Mong" typeface="Mongolian Baiti"/>
+        <a:font script="Viet" typeface="Arial"/>
+        <a:font script="Uigh" typeface="Microsoft Uighur"/>
+        <a:font script="Geor" typeface="Sylfaen"/>
+      </a:minorFont>
+    </a:fontScheme>
+    <a:fmtScheme name="Office">
+      <a:fillStyleLst>
+        <a:solidFill>
+          <a:schemeClr val="phClr"/>
+        </a:solidFill>
+        <a:gradFill rotWithShape="1">
+          <a:gsLst>
+            <a:gs pos="0">
+              <a:schemeClr val="phClr">
+                <a:lumMod val="110000"/>
+                <a:satMod val="105000"/>
+                <a:tint val="67000"/>
+              </a:schemeClr>
+            </a:gs>
+            <a:gs pos="50000">
+              <a:schemeClr val="phClr">
+                <a:lumMod val="105000"/>
+                <a:satMod val="103000"/>
+                <a:tint val="73000"/>
+              </a:schemeClr>
+            </a:gs>
+            <a:gs pos="100000">
+              <a:schemeClr val="phClr">
+                <a:lumMod val="105000"/>
+                <a:satMod val="109000"/>
+                <a:tint val="81000"/>
+              </a:schemeClr>
+            </a:gs>
+          </a:gsLst>
+          <a:lin ang="5400000" scaled="0"/>
+        </a:gradFill>
+        <a:gradFill rotWithShape="1">
+          <a:gsLst>
+            <a:gs pos="0">
+              <a:schemeClr val="phClr">
+                <a:satMod val="103000"/>
+                <a:lumMod val="102000"/>
+                <a:tint val="94000"/>
+              </a:schemeClr>
+            </a:gs>
+            <a:gs pos="50000">
+              <a:schemeClr val="phClr">
+                <a:satMod val="110000"/>
+                <a:lumMod val="100000"/>
+                <a:shade val="100000"/>
+              </a:schemeClr>
+            </a:gs>
+            <a:gs pos="100000">
+              <a:schemeClr val="phClr">
+                <a:lumMod val="99000"/>
+                <a:satMod val="120000"/>
+                <a:shade val="78000"/>
+              </a:schemeClr>
+            </a:gs>
+          </a:gsLst>
+          <a:lin ang="5400000" scaled="0"/>
+        </a:gradFill>
+      </a:fillStyleLst>
+      <a:lnStyleLst>
+        <a:ln w="6350" cap="flat" cmpd="sng" algn="ctr">
+          <a:solidFill>
+            <a:schemeClr val="phClr"/>
+          </a:solidFill>
+          <a:prstDash val="solid"/>
+          <a:miter lim="800000"/>
+        </a:ln>
+        <a:ln w="12700" cap="flat" cmpd="sng" algn="ctr">
+          <a:solidFill>
+            <a:schemeClr val="phClr"/>
+          </a:solidFill>
+          <a:prstDash val="solid"/>
+          <a:miter lim="800000"/>
+        </a:ln>
+        <a:ln w="19050" cap="flat" cmpd="sng" algn="ctr">
+          <a:solidFill>
+            <a:schemeClr val="phClr"/>
+          </a:solidFill>
+          <a:prstDash val="solid"/>
+          <a:miter lim="800000"/>
+        </a:ln>
+      </a:lnStyleLst>
+      <a:effectStyleLst>
+        <a:effectStyle>
+          <a:effectLst/>
+        </a:effectStyle>
+        <a:effectStyle>
+          <a:effectLst/>
+        </a:effectStyle>
+        <a:effectStyle>
+          <a:effectLst>
+            <a:outerShdw blurRad="57150" dist="19050" dir="5400000" algn="ctr" rotWithShape="0">
+              <a:srgbClr val="000000">
+                <a:alpha val="63000"/>
+              </a:srgbClr>
+            </a:outerShdw>
+          </a:effectLst>
+        </a:effectStyle>
+      </a:effectStyleLst>
+      <a:bgFillStyleLst>
+        <a:solidFill>
+          <a:schemeClr val="phClr"/>
+        </a:solidFill>
+        <a:solidFill>
+          <a:schemeClr val="phClr">
+            <a:tint val="95000"/>
+            <a:satMod val="170000"/>
+          </a:schemeClr>
+        </a:solidFill>
+        <a:gradFill rotWithShape="1">
+          <a:gsLst>
+            <a:gs pos="0">
+              <a:schemeClr val="phClr">
+                <a:tint val="93000"/>
+                <a:satMod val="150000"/>
+                <a:shade val="98000"/>
+                <a:lumMod val="102000"/>
+              </a:schemeClr>
+            </a:gs>
+            <a:gs pos="50000">
+              <a:schemeClr val="phClr">
+                <a:tint val="98000"/>
+                <a:satMod val="130000"/>
+                <a:shade val="90000"/>
+                <a:lumMod val="103000"/>
+              </a:schemeClr>
+            </a:gs>
+            <a:gs pos="100000">
+              <a:schemeClr val="phClr">
+                <a:shade val="63000"/>
+                <a:satMod val="120000"/>
+              </a:schemeClr>
+            </a:gs>
+          </a:gsLst>
+          <a:lin ang="5400000" scaled="0"/>
+        </a:gradFill>
+      </a:bgFillStyleLst>
+    </a:fmtScheme>
+  </a:themeElements>
+  <a:objectDefaults/>
+  <a:extraClrSchemeLst/>
+  <a:extLst>
+    <a:ext uri="{05A4C25C-085E-4340-85A3-A5531E510DB2}">
+      <thm15:themeFamily xmlns:thm15="http://schemas.microsoft.com/office/thememl/2012/main" name="Office Theme" id="{62F939B6-93AF-4DB8-9C6B-D6C7DFDC589F}" vid="{4A3C46E8-61CC-4603-A589-7422A47A8E4A}"/>
+    </a:ext>
+  </a:extLst>
+</a:theme>
 </file>
--- a/presentation.pptx
+++ b/presentation.pptx
@@ -2210,7 +2210,7 @@
         </p:nvSpPr>
         <p:spPr>
           <a:xfrm>
-            <a:off x="1005840" y="1371600"/>
+            <a:off x="1005840" y="1225296"/>
             <a:ext cx="6858000" cy="274320"/>
           </a:xfrm>
           <a:prstGeom prst="rect">
@@ -2235,7 +2235,18 @@
                 <a:ea typeface="Trebuchet MS" pitchFamily="34" charset="-122"/>
                 <a:cs typeface="Trebuchet MS" pitchFamily="34" charset="-120"/>
               </a:rPr>
-              <a:t>FROZEN PROBE</a:t>
+              <a:t>FROZEN </a:t>
+            </a:r>
+            <a:r>
+              <a:rPr lang="en-US" sz="1200" b="1" dirty="0" smtClean="0">
+                <a:solidFill>
+                  <a:srgbClr val="0E9594"/>
+                </a:solidFill>
+                <a:latin typeface="Trebuchet MS" pitchFamily="34" charset="0"/>
+                <a:ea typeface="Trebuchet MS" pitchFamily="34" charset="-122"/>
+                <a:cs typeface="Trebuchet MS" pitchFamily="34" charset="-120"/>
+              </a:rPr>
+              <a:t>backbone</a:t>
             </a:r>
             <a:endParaRPr lang="en-US" sz="1200" dirty="0"/>
           </a:p>
@@ -2456,7 +2467,7 @@
         </p:blipFill>
         <p:spPr>
           <a:xfrm>
-            <a:off x="1005840" y="1600200"/>
+            <a:off x="1005840" y="1482605"/>
             <a:ext cx="2743200" cy="2240280"/>
           </a:xfrm>
           <a:prstGeom prst="rect">
@@ -2480,7 +2491,7 @@
         </p:blipFill>
         <p:spPr>
           <a:xfrm>
-            <a:off x="4023360" y="1920240"/>
+            <a:off x="4023360" y="1802645"/>
             <a:ext cx="3840480" cy="1554480"/>
           </a:xfrm>
           <a:prstGeom prst="rect">
@@ -2711,7 +2722,51 @@
                 <a:ea typeface="Calibri" pitchFamily="34" charset="-122"/>
                 <a:cs typeface="Calibri" pitchFamily="34" charset="-120"/>
               </a:rPr>
-              <a:t>By AUC: WavLM probe (0.92) &gt; CNN (0.87) ≈ CRNN (0.86) &gt; WavLM ft (0.86) &gt; MLP (0.79) &gt; RNN (0.66).</a:t>
+              <a:t>By AUC: </a:t>
+            </a:r>
+            <a:r>
+              <a:rPr lang="en-US" sz="1400" dirty="0" err="1">
+                <a:solidFill>
+                  <a:srgbClr val="22303A"/>
+                </a:solidFill>
+                <a:latin typeface="Calibri" pitchFamily="34" charset="0"/>
+                <a:ea typeface="Calibri" pitchFamily="34" charset="-122"/>
+                <a:cs typeface="Calibri" pitchFamily="34" charset="-120"/>
+              </a:rPr>
+              <a:t>WavLM</a:t>
+            </a:r>
+            <a:r>
+              <a:rPr lang="en-US" sz="1400" dirty="0">
+                <a:solidFill>
+                  <a:srgbClr val="22303A"/>
+                </a:solidFill>
+                <a:latin typeface="Calibri" pitchFamily="34" charset="0"/>
+                <a:ea typeface="Calibri" pitchFamily="34" charset="-122"/>
+                <a:cs typeface="Calibri" pitchFamily="34" charset="-120"/>
+              </a:rPr>
+              <a:t> </a:t>
+            </a:r>
+            <a:r>
+              <a:rPr lang="en-US" sz="1400" dirty="0" smtClean="0">
+                <a:solidFill>
+                  <a:srgbClr val="22303A"/>
+                </a:solidFill>
+                <a:latin typeface="Calibri" pitchFamily="34" charset="0"/>
+                <a:ea typeface="Calibri" pitchFamily="34" charset="-122"/>
+                <a:cs typeface="Calibri" pitchFamily="34" charset="-120"/>
+              </a:rPr>
+              <a:t>backbone </a:t>
+            </a:r>
+            <a:r>
+              <a:rPr lang="en-US" sz="1400" dirty="0">
+                <a:solidFill>
+                  <a:srgbClr val="22303A"/>
+                </a:solidFill>
+                <a:latin typeface="Calibri" pitchFamily="34" charset="0"/>
+                <a:ea typeface="Calibri" pitchFamily="34" charset="-122"/>
+                <a:cs typeface="Calibri" pitchFamily="34" charset="-120"/>
+              </a:rPr>
+              <a:t>(0.92) &gt; CNN (0.87) ≈ CRNN (0.86) &gt; WavLM ft (0.86) &gt; MLP (0.79) &gt; RNN (0.66).</a:t>
             </a:r>
             <a:endParaRPr lang="en-US" sz="1400" dirty="0"/>
           </a:p>
@@ -2753,7 +2808,29 @@
                 <a:ea typeface="Calibri" pitchFamily="34" charset="-122"/>
                 <a:cs typeface="Calibri" pitchFamily="34" charset="-120"/>
               </a:rPr>
-              <a:t>But AUC is only half the story — see fake recall next.</a:t>
+              <a:t>But AUC is only half the </a:t>
+            </a:r>
+            <a:r>
+              <a:rPr lang="en-US" sz="1400" dirty="0" smtClean="0">
+                <a:solidFill>
+                  <a:srgbClr val="22303A"/>
+                </a:solidFill>
+                <a:latin typeface="Calibri" pitchFamily="34" charset="0"/>
+                <a:ea typeface="Calibri" pitchFamily="34" charset="-122"/>
+                <a:cs typeface="Calibri" pitchFamily="34" charset="-120"/>
+              </a:rPr>
+              <a:t>story </a:t>
+            </a:r>
+            <a:r>
+              <a:rPr lang="en-US" sz="1400" dirty="0">
+                <a:solidFill>
+                  <a:srgbClr val="22303A"/>
+                </a:solidFill>
+                <a:latin typeface="Calibri" pitchFamily="34" charset="0"/>
+                <a:ea typeface="Calibri" pitchFamily="34" charset="-122"/>
+                <a:cs typeface="Calibri" pitchFamily="34" charset="-120"/>
+              </a:rPr>
+              <a:t>see fake recall next.</a:t>
             </a:r>
             <a:endParaRPr lang="en-US" sz="1400" dirty="0"/>
           </a:p>
@@ -3012,7 +3089,7 @@
         <p:spPr>
           <a:xfrm>
             <a:off x="822960" y="6100000"/>
-            <a:ext cx="10515600" cy="300000"/>
+            <a:ext cx="10515600" cy="246221"/>
           </a:xfrm>
           <a:prstGeom prst="rect">
             <a:avLst/>
@@ -3026,12 +3103,52 @@
           <a:lstStyle/>
           <a:p>
             <a:r>
-              <a:rPr sz="1000" b="0">
+              <a:rPr sz="1000" b="0" dirty="0">
                 <a:solidFill>
                   <a:srgbClr val="5C6B73"/>
                 </a:solidFill>
               </a:rPr>
-              <a:t>High AUC + low fake-recall at threshold 0.5 = calibration problem, not a modelling failure. Only CNN and WavLM probe sit in the target zone (top-right).</a:t>
+              <a:t>High AUC + low fake-recall at threshold 0.5 = calibration problem, not a modelling failure. Only CNN and </a:t>
+            </a:r>
+            <a:r>
+              <a:rPr sz="1000" b="0" dirty="0" err="1">
+                <a:solidFill>
+                  <a:srgbClr val="5C6B73"/>
+                </a:solidFill>
+              </a:rPr>
+              <a:t>WavLM</a:t>
+            </a:r>
+            <a:r>
+              <a:rPr sz="1000" b="0" dirty="0">
+                <a:solidFill>
+                  <a:srgbClr val="5C6B73"/>
+                </a:solidFill>
+              </a:rPr>
+              <a:t> </a:t>
+            </a:r>
+            <a:r>
+              <a:rPr lang="en-US" sz="1000" b="0" dirty="0" smtClean="0">
+                <a:solidFill>
+                  <a:srgbClr val="5C6B73"/>
+                </a:solidFill>
+              </a:rPr>
+              <a:t>backbone</a:t>
+            </a:r>
+            <a:r>
+              <a:rPr sz="1000" b="0" dirty="0" smtClean="0">
+                <a:solidFill>
+                  <a:srgbClr val="5C6B73"/>
+                </a:solidFill>
+              </a:rPr>
+              <a:t> </a:t>
+            </a:r>
+            <a:r>
+              <a:rPr sz="1000" b="0" dirty="0">
+                <a:solidFill>
+                  <a:srgbClr val="5C6B73"/>
+                </a:solidFill>
+              </a:rPr>
+              <a:t>sit in the target zone (top-right).</a:t>
             </a:r>
           </a:p>
         </p:txBody>
@@ -3234,116 +3351,10 @@
                 <a:ea typeface="Trebuchet MS" pitchFamily="34" charset="-122"/>
                 <a:cs typeface="Trebuchet MS" pitchFamily="34" charset="-120"/>
               </a:rPr>
-              <a:t>High AUC = good ranking — but the default threshold may need calibration</a:t>
-            </a:r>
-            <a:endParaRPr lang="en-US" sz="2800" dirty="0"/>
-          </a:p>
-        </p:txBody>
-      </p:sp>
-      <p:sp>
-        <p:nvSpPr>
-          <p:cNvPr id="5" name="Text 3"/>
-          <p:cNvSpPr/>
-          <p:nvPr/>
-        </p:nvSpPr>
-        <p:spPr>
-          <a:xfrm>
-            <a:off x="822960" y="1554480"/>
-            <a:ext cx="10515600" cy="731520"/>
-          </a:xfrm>
-          <a:prstGeom prst="rect">
-            <a:avLst/>
-          </a:prstGeom>
-          <a:noFill/>
-          <a:ln/>
-        </p:spPr>
-        <p:txBody>
-          <a:bodyPr wrap="square" lIns="0" tIns="0" rIns="0" bIns="0" rtlCol="0" anchor="t"/>
-          <a:lstStyle/>
-          <a:p>
-            <a:pPr marL="0" indent="0">
-              <a:buNone/>
-            </a:pPr>
-            <a:r>
-              <a:rPr lang="en-US" sz="1600" dirty="0">
-                <a:solidFill>
-                  <a:srgbClr val="22303A"/>
-                </a:solidFill>
-                <a:latin typeface="Calibri" pitchFamily="34" charset="0"/>
-                <a:ea typeface="Calibri" pitchFamily="34" charset="-122"/>
-                <a:cs typeface="Calibri" pitchFamily="34" charset="-120"/>
-              </a:rPr>
-              <a:t>AUC measures ranking quality (threshold-free). Low fake-recall at the default 0.5 threshold is a calibration problem, not a modelling failure — it can be fixed by tuning the threshold. A low-AUC model cannot be rescued by calibration alone.</a:t>
-            </a:r>
-            <a:endParaRPr lang="en-US" sz="1600" dirty="0"/>
-          </a:p>
-        </p:txBody>
-      </p:sp>
-      <p:sp>
-        <p:nvSpPr>
-          <p:cNvPr id="21" name="Text 19"/>
-          <p:cNvSpPr/>
-          <p:nvPr/>
-        </p:nvSpPr>
-        <p:spPr>
-          <a:xfrm>
-            <a:off x="822960" y="4617720"/>
-            <a:ext cx="10515600" cy="365760"/>
-          </a:xfrm>
-          <a:prstGeom prst="rect">
-            <a:avLst/>
-          </a:prstGeom>
-          <a:noFill/>
-          <a:ln/>
-        </p:spPr>
-        <p:txBody>
-          <a:bodyPr wrap="square" lIns="0" tIns="0" rIns="0" bIns="0" rtlCol="0" anchor="ctr"/>
-          <a:lstStyle/>
-          <a:p>
-            <a:pPr marL="0" indent="0">
-              <a:buNone/>
-            </a:pPr>
-            <a:r>
-              <a:rPr lang="en-US" sz="1200" i="1" dirty="0">
-                <a:solidFill>
-                  <a:srgbClr val="6B7B85"/>
-                </a:solidFill>
-                <a:latin typeface="Calibri" pitchFamily="34" charset="0"/>
-                <a:ea typeface="Calibri" pitchFamily="34" charset="-122"/>
-                <a:cs typeface="Calibri" pitchFamily="34" charset="-120"/>
-              </a:rPr>
-              <a:t>Fraction of fake clips actually caught (ITW fake-class recall)</a:t>
-            </a:r>
-            <a:endParaRPr lang="en-US" sz="1200" dirty="0"/>
-          </a:p>
-        </p:txBody>
-      </p:sp>
-      <p:sp>
-        <p:nvSpPr>
-          <p:cNvPr id="22" name="Text 20"/>
-          <p:cNvSpPr/>
-          <p:nvPr/>
-        </p:nvSpPr>
-        <p:spPr>
-          <a:xfrm>
-            <a:off x="822960" y="5212080"/>
-            <a:ext cx="10515600" cy="457200"/>
-          </a:xfrm>
-          <a:prstGeom prst="rect">
-            <a:avLst/>
-          </a:prstGeom>
-          <a:noFill/>
-          <a:ln/>
-        </p:spPr>
-        <p:txBody>
-          <a:bodyPr wrap="square" lIns="0" tIns="0" rIns="0" bIns="0" rtlCol="0" anchor="ctr"/>
-          <a:lstStyle/>
-          <a:p>
-            <a:pPr marL="0" indent="0">
-              <a:buNone/>
-            </a:pPr>
-            <a:r>
-              <a:rPr lang="en-US" sz="1500" b="1" dirty="0">
+              <a:t>High AUC = good </a:t>
+            </a:r>
+            <a:r>
+              <a:rPr lang="en-US" sz="2800" b="1" dirty="0" smtClean="0">
                 <a:solidFill>
                   <a:srgbClr val="22303A"/>
                 </a:solidFill>
@@ -3351,7 +3362,256 @@
                 <a:ea typeface="Trebuchet MS" pitchFamily="34" charset="-122"/>
                 <a:cs typeface="Trebuchet MS" pitchFamily="34" charset="-120"/>
               </a:rPr>
-              <a:t>→ CNN and WavLM probe combine high AUC with good out-of-the-box calibration. WavLM fine-tune has high AUC but collapses at threshold 0.5 under domain shift — threshold tuning would recover much of its fake-recall.</a:t>
+              <a:t>ranking </a:t>
+            </a:r>
+            <a:r>
+              <a:rPr lang="en-US" sz="2800" b="1" dirty="0">
+                <a:solidFill>
+                  <a:srgbClr val="22303A"/>
+                </a:solidFill>
+                <a:latin typeface="Trebuchet MS" pitchFamily="34" charset="0"/>
+                <a:ea typeface="Trebuchet MS" pitchFamily="34" charset="-122"/>
+                <a:cs typeface="Trebuchet MS" pitchFamily="34" charset="-120"/>
+              </a:rPr>
+              <a:t>but the default threshold may need calibration</a:t>
+            </a:r>
+            <a:endParaRPr lang="en-US" sz="2800" dirty="0"/>
+          </a:p>
+        </p:txBody>
+      </p:sp>
+      <p:sp>
+        <p:nvSpPr>
+          <p:cNvPr id="5" name="Text 3"/>
+          <p:cNvSpPr/>
+          <p:nvPr/>
+        </p:nvSpPr>
+        <p:spPr>
+          <a:xfrm>
+            <a:off x="822960" y="1554480"/>
+            <a:ext cx="10515600" cy="731520"/>
+          </a:xfrm>
+          <a:prstGeom prst="rect">
+            <a:avLst/>
+          </a:prstGeom>
+          <a:noFill/>
+          <a:ln/>
+        </p:spPr>
+        <p:txBody>
+          <a:bodyPr wrap="square" lIns="0" tIns="0" rIns="0" bIns="0" rtlCol="0" anchor="t"/>
+          <a:lstStyle/>
+          <a:p>
+            <a:pPr marL="0" indent="0">
+              <a:buNone/>
+            </a:pPr>
+            <a:r>
+              <a:rPr lang="en-US" sz="1600" dirty="0">
+                <a:solidFill>
+                  <a:srgbClr val="22303A"/>
+                </a:solidFill>
+                <a:latin typeface="Calibri" pitchFamily="34" charset="0"/>
+                <a:ea typeface="Calibri" pitchFamily="34" charset="-122"/>
+                <a:cs typeface="Calibri" pitchFamily="34" charset="-120"/>
+              </a:rPr>
+              <a:t>AUC measures ranking quality (threshold-free). Low fake-recall at the default 0.5 threshold is a calibration problem, not a modelling </a:t>
+            </a:r>
+            <a:r>
+              <a:rPr lang="en-US" sz="1600" dirty="0" smtClean="0">
+                <a:solidFill>
+                  <a:srgbClr val="22303A"/>
+                </a:solidFill>
+                <a:latin typeface="Calibri" pitchFamily="34" charset="0"/>
+                <a:ea typeface="Calibri" pitchFamily="34" charset="-122"/>
+                <a:cs typeface="Calibri" pitchFamily="34" charset="-120"/>
+              </a:rPr>
+              <a:t>failure, </a:t>
+            </a:r>
+            <a:r>
+              <a:rPr lang="en-US" sz="1600" dirty="0">
+                <a:solidFill>
+                  <a:srgbClr val="22303A"/>
+                </a:solidFill>
+                <a:latin typeface="Calibri" pitchFamily="34" charset="0"/>
+                <a:ea typeface="Calibri" pitchFamily="34" charset="-122"/>
+                <a:cs typeface="Calibri" pitchFamily="34" charset="-120"/>
+              </a:rPr>
+              <a:t>it can be fixed by tuning the threshold. </a:t>
+            </a:r>
+            <a:endParaRPr lang="en-US" sz="1600" dirty="0"/>
+          </a:p>
+        </p:txBody>
+      </p:sp>
+      <p:sp>
+        <p:nvSpPr>
+          <p:cNvPr id="21" name="Text 19"/>
+          <p:cNvSpPr/>
+          <p:nvPr/>
+        </p:nvSpPr>
+        <p:spPr>
+          <a:xfrm>
+            <a:off x="822960" y="4617720"/>
+            <a:ext cx="10515600" cy="365760"/>
+          </a:xfrm>
+          <a:prstGeom prst="rect">
+            <a:avLst/>
+          </a:prstGeom>
+          <a:noFill/>
+          <a:ln/>
+        </p:spPr>
+        <p:txBody>
+          <a:bodyPr wrap="square" lIns="0" tIns="0" rIns="0" bIns="0" rtlCol="0" anchor="ctr"/>
+          <a:lstStyle/>
+          <a:p>
+            <a:pPr marL="0" indent="0">
+              <a:buNone/>
+            </a:pPr>
+            <a:r>
+              <a:rPr lang="en-US" sz="1200" i="1" dirty="0">
+                <a:solidFill>
+                  <a:srgbClr val="6B7B85"/>
+                </a:solidFill>
+                <a:latin typeface="Calibri" pitchFamily="34" charset="0"/>
+                <a:ea typeface="Calibri" pitchFamily="34" charset="-122"/>
+                <a:cs typeface="Calibri" pitchFamily="34" charset="-120"/>
+              </a:rPr>
+              <a:t>Fraction of fake clips actually caught (ITW fake-class recall)</a:t>
+            </a:r>
+            <a:endParaRPr lang="en-US" sz="1200" dirty="0"/>
+          </a:p>
+        </p:txBody>
+      </p:sp>
+      <p:sp>
+        <p:nvSpPr>
+          <p:cNvPr id="22" name="Text 20"/>
+          <p:cNvSpPr/>
+          <p:nvPr/>
+        </p:nvSpPr>
+        <p:spPr>
+          <a:xfrm>
+            <a:off x="822960" y="5212080"/>
+            <a:ext cx="10515600" cy="457200"/>
+          </a:xfrm>
+          <a:prstGeom prst="rect">
+            <a:avLst/>
+          </a:prstGeom>
+          <a:noFill/>
+          <a:ln/>
+        </p:spPr>
+        <p:txBody>
+          <a:bodyPr wrap="square" lIns="0" tIns="0" rIns="0" bIns="0" rtlCol="0" anchor="ctr"/>
+          <a:lstStyle/>
+          <a:p>
+            <a:pPr marL="0" indent="0">
+              <a:buNone/>
+            </a:pPr>
+            <a:r>
+              <a:rPr lang="en-US" sz="1500" b="1" dirty="0" smtClean="0">
+                <a:solidFill>
+                  <a:srgbClr val="22303A"/>
+                </a:solidFill>
+                <a:latin typeface="Trebuchet MS" pitchFamily="34" charset="0"/>
+                <a:ea typeface="Trebuchet MS" pitchFamily="34" charset="-122"/>
+                <a:cs typeface="Trebuchet MS" pitchFamily="34" charset="-120"/>
+              </a:rPr>
+              <a:t>CNN </a:t>
+            </a:r>
+            <a:r>
+              <a:rPr lang="en-US" sz="1500" b="1" dirty="0">
+                <a:solidFill>
+                  <a:srgbClr val="22303A"/>
+                </a:solidFill>
+                <a:latin typeface="Trebuchet MS" pitchFamily="34" charset="0"/>
+                <a:ea typeface="Trebuchet MS" pitchFamily="34" charset="-122"/>
+                <a:cs typeface="Trebuchet MS" pitchFamily="34" charset="-120"/>
+              </a:rPr>
+              <a:t>and </a:t>
+            </a:r>
+            <a:r>
+              <a:rPr lang="en-US" sz="1500" b="1" dirty="0" err="1">
+                <a:solidFill>
+                  <a:srgbClr val="22303A"/>
+                </a:solidFill>
+                <a:latin typeface="Trebuchet MS" pitchFamily="34" charset="0"/>
+                <a:ea typeface="Trebuchet MS" pitchFamily="34" charset="-122"/>
+                <a:cs typeface="Trebuchet MS" pitchFamily="34" charset="-120"/>
+              </a:rPr>
+              <a:t>WavLM</a:t>
+            </a:r>
+            <a:r>
+              <a:rPr lang="en-US" sz="1500" b="1" dirty="0">
+                <a:solidFill>
+                  <a:srgbClr val="22303A"/>
+                </a:solidFill>
+                <a:latin typeface="Trebuchet MS" pitchFamily="34" charset="0"/>
+                <a:ea typeface="Trebuchet MS" pitchFamily="34" charset="-122"/>
+                <a:cs typeface="Trebuchet MS" pitchFamily="34" charset="-120"/>
+              </a:rPr>
+              <a:t> </a:t>
+            </a:r>
+            <a:r>
+              <a:rPr lang="en-US" sz="1500" b="1" dirty="0" smtClean="0">
+                <a:solidFill>
+                  <a:srgbClr val="22303A"/>
+                </a:solidFill>
+                <a:latin typeface="Trebuchet MS" pitchFamily="34" charset="0"/>
+                <a:ea typeface="Trebuchet MS" pitchFamily="34" charset="-122"/>
+                <a:cs typeface="Trebuchet MS" pitchFamily="34" charset="-120"/>
+              </a:rPr>
+              <a:t>backbone </a:t>
+            </a:r>
+            <a:r>
+              <a:rPr lang="en-US" sz="1500" b="1" dirty="0">
+                <a:solidFill>
+                  <a:srgbClr val="22303A"/>
+                </a:solidFill>
+                <a:latin typeface="Trebuchet MS" pitchFamily="34" charset="0"/>
+                <a:ea typeface="Trebuchet MS" pitchFamily="34" charset="-122"/>
+                <a:cs typeface="Trebuchet MS" pitchFamily="34" charset="-120"/>
+              </a:rPr>
+              <a:t>combine high AUC with good out-of-the-box calibration. WavLM fine-tune has high AUC but collapses at threshold 0.5 under domain shift </a:t>
+            </a:r>
+            <a:r>
+              <a:rPr lang="en-US" sz="1500" b="1" dirty="0" smtClean="0">
+                <a:solidFill>
+                  <a:srgbClr val="22303A"/>
+                </a:solidFill>
+                <a:latin typeface="Trebuchet MS" pitchFamily="34" charset="0"/>
+                <a:ea typeface="Trebuchet MS" pitchFamily="34" charset="-122"/>
+                <a:cs typeface="Trebuchet MS" pitchFamily="34" charset="-120"/>
+              </a:rPr>
+              <a:t>.</a:t>
+            </a:r>
+            <a:r>
+              <a:rPr lang="en-US" sz="1500" b="1" dirty="0">
+                <a:solidFill>
+                  <a:srgbClr val="22303A"/>
+                </a:solidFill>
+                <a:latin typeface="Trebuchet MS" pitchFamily="34" charset="0"/>
+                <a:ea typeface="Trebuchet MS" pitchFamily="34" charset="-122"/>
+                <a:cs typeface="Trebuchet MS" pitchFamily="34" charset="-120"/>
+              </a:rPr>
+              <a:t>T</a:t>
+            </a:r>
+            <a:r>
+              <a:rPr lang="en-US" sz="1500" b="1" dirty="0" smtClean="0">
+                <a:solidFill>
+                  <a:srgbClr val="22303A"/>
+                </a:solidFill>
+                <a:latin typeface="Trebuchet MS" pitchFamily="34" charset="0"/>
+                <a:ea typeface="Trebuchet MS" pitchFamily="34" charset="-122"/>
+                <a:cs typeface="Trebuchet MS" pitchFamily="34" charset="-120"/>
+              </a:rPr>
+              <a:t>hreshold </a:t>
+            </a:r>
+            <a:r>
+              <a:rPr lang="en-US" sz="1500" b="1" dirty="0">
+                <a:solidFill>
+                  <a:srgbClr val="22303A"/>
+                </a:solidFill>
+                <a:latin typeface="Trebuchet MS" pitchFamily="34" charset="0"/>
+                <a:ea typeface="Trebuchet MS" pitchFamily="34" charset="-122"/>
+                <a:cs typeface="Trebuchet MS" pitchFamily="34" charset="-120"/>
+              </a:rPr>
+              <a:t>tuning would recover much of its fake-recall.</a:t>
             </a:r>
             <a:endParaRPr lang="en-US" sz="1500" dirty="0"/>
           </a:p>
@@ -3633,8 +3893,8 @@
         </p:nvSpPr>
         <p:spPr>
           <a:xfrm>
-            <a:off x="2586080" y="3794760"/>
-            <a:ext cx="1700000" cy="548640"/>
+            <a:off x="2738869" y="3794760"/>
+            <a:ext cx="1394421" cy="292388"/>
           </a:xfrm>
           <a:prstGeom prst="rect">
             <a:avLst/>
@@ -3649,13 +3909,34 @@
           <a:p>
             <a:pPr algn="ctr"/>
             <a:r>
-              <a:rPr sz="1300" b="0">
+              <a:rPr sz="1300" b="0" dirty="0" err="1">
                 <a:solidFill>
                   <a:srgbClr val="6B7B85"/>
                 </a:solidFill>
               </a:rPr>
-              <a:t>WavLM probe</a:t>
-            </a:r>
+              <a:t>WavLM</a:t>
+            </a:r>
+            <a:r>
+              <a:rPr sz="1300" b="0" dirty="0">
+                <a:solidFill>
+                  <a:srgbClr val="6B7B85"/>
+                </a:solidFill>
+              </a:rPr>
+              <a:t> </a:t>
+            </a:r>
+            <a:r>
+              <a:rPr lang="en-US" sz="1300" b="0" dirty="0" smtClean="0">
+                <a:solidFill>
+                  <a:srgbClr val="6B7B85"/>
+                </a:solidFill>
+              </a:rPr>
+              <a:t>backbone</a:t>
+            </a:r>
+            <a:endParaRPr sz="1300" b="0" dirty="0">
+              <a:solidFill>
+                <a:srgbClr val="6B7B85"/>
+              </a:solidFill>
+            </a:endParaRPr>
           </a:p>
         </p:txBody>
       </p:sp>
@@ -4303,7 +4584,29 @@
                 <a:ea typeface="Calibri" pitchFamily="34" charset="-122"/>
                 <a:cs typeface="Calibri" pitchFamily="34" charset="-120"/>
               </a:rPr>
-              <a:t>Frozen probe transfers best — smallest gap, highest ITW.</a:t>
+              <a:t>Frozen </a:t>
+            </a:r>
+            <a:r>
+              <a:rPr lang="en-US" sz="1400" dirty="0" smtClean="0">
+                <a:solidFill>
+                  <a:srgbClr val="22303A"/>
+                </a:solidFill>
+                <a:latin typeface="Calibri" pitchFamily="34" charset="0"/>
+                <a:ea typeface="Calibri" pitchFamily="34" charset="-122"/>
+                <a:cs typeface="Calibri" pitchFamily="34" charset="-120"/>
+              </a:rPr>
+              <a:t>backbone </a:t>
+            </a:r>
+            <a:r>
+              <a:rPr lang="en-US" sz="1400" dirty="0">
+                <a:solidFill>
+                  <a:srgbClr val="22303A"/>
+                </a:solidFill>
+                <a:latin typeface="Calibri" pitchFamily="34" charset="0"/>
+                <a:ea typeface="Calibri" pitchFamily="34" charset="-122"/>
+                <a:cs typeface="Calibri" pitchFamily="34" charset="-120"/>
+              </a:rPr>
+              <a:t>transfers best — smallest gap, highest ITW.</a:t>
             </a:r>
             <a:endParaRPr lang="en-US" sz="1400" dirty="0"/>
           </a:p>
@@ -5494,29 +5797,7 @@
                 <a:ea typeface="Calibri" pitchFamily="34" charset="-122"/>
                 <a:cs typeface="Calibri" pitchFamily="34" charset="-120"/>
               </a:rPr>
-              <a:t>accuracy</a:t>
-            </a:r>
-            <a:r>
-              <a:rPr lang="en-US" sz="1600" dirty="0" smtClean="0">
-                <a:solidFill>
-                  <a:srgbClr val="22303A"/>
-                </a:solidFill>
-                <a:latin typeface="Calibri" pitchFamily="34" charset="0"/>
-                <a:ea typeface="Calibri" pitchFamily="34" charset="-122"/>
-                <a:cs typeface="Calibri" pitchFamily="34" charset="-120"/>
-              </a:rPr>
-              <a:t>,</a:t>
-            </a:r>
-            <a:r>
-              <a:rPr lang="en-US" sz="1600" dirty="0" smtClean="0">
-                <a:solidFill>
-                  <a:srgbClr val="22303A"/>
-                </a:solidFill>
-                <a:latin typeface="Calibri" pitchFamily="34" charset="0"/>
-                <a:ea typeface="Calibri" pitchFamily="34" charset="-122"/>
-                <a:cs typeface="Calibri" pitchFamily="34" charset="-120"/>
-              </a:rPr>
-              <a:t> </a:t>
+              <a:t>accuracy, </a:t>
             </a:r>
             <a:r>
               <a:rPr lang="en-US" sz="1600" dirty="0">
@@ -7138,7 +7419,29 @@
                           <a:ea typeface="Calibri" pitchFamily="34" charset="-122"/>
                           <a:cs typeface="Calibri" pitchFamily="34" charset="-120"/>
                         </a:rPr>
-                        <a:t>self-supervised transformer: frozen probe vs fine-tune</a:t>
+                        <a:t>self-supervised transformer: frozen </a:t>
+                      </a:r>
+                      <a:r>
+                        <a:rPr lang="en-US" sz="1400" dirty="0" smtClean="0">
+                          <a:solidFill>
+                            <a:srgbClr val="22303A"/>
+                          </a:solidFill>
+                          <a:latin typeface="Calibri" pitchFamily="34" charset="0"/>
+                          <a:ea typeface="Calibri" pitchFamily="34" charset="-122"/>
+                          <a:cs typeface="Calibri" pitchFamily="34" charset="-120"/>
+                        </a:rPr>
+                        <a:t>backbone </a:t>
+                      </a:r>
+                      <a:r>
+                        <a:rPr lang="en-US" sz="1400" dirty="0">
+                          <a:solidFill>
+                            <a:srgbClr val="22303A"/>
+                          </a:solidFill>
+                          <a:latin typeface="Calibri" pitchFamily="34" charset="0"/>
+                          <a:ea typeface="Calibri" pitchFamily="34" charset="-122"/>
+                          <a:cs typeface="Calibri" pitchFamily="34" charset="-120"/>
+                        </a:rPr>
+                        <a:t>vs fine-tune</a:t>
                       </a:r>
                       <a:endParaRPr lang="en-US" sz="1400" dirty="0">
                         <a:latin typeface="Calibri" charset="0"/>
@@ -8376,7 +8679,18 @@
                 <a:ea typeface="Trebuchet MS" pitchFamily="34" charset="-122"/>
                 <a:cs typeface="Trebuchet MS" pitchFamily="34" charset="-120"/>
               </a:rPr>
-              <a:t>Hand-crafted features set a hard ceiling</a:t>
+              <a:t>Hand-crafted </a:t>
+            </a:r>
+            <a:r>
+              <a:rPr lang="en-US" sz="2800" b="1" dirty="0" smtClean="0">
+                <a:solidFill>
+                  <a:srgbClr val="22303A"/>
+                </a:solidFill>
+                <a:latin typeface="Trebuchet MS" pitchFamily="34" charset="0"/>
+                <a:ea typeface="Trebuchet MS" pitchFamily="34" charset="-122"/>
+                <a:cs typeface="Trebuchet MS" pitchFamily="34" charset="-120"/>
+              </a:rPr>
+              <a:t>features</a:t>
             </a:r>
             <a:endParaRPr lang="en-US" sz="2800" dirty="0"/>
           </a:p>
@@ -9024,7 +9338,18 @@
                 <a:ea typeface="Trebuchet MS" pitchFamily="34" charset="-122"/>
                 <a:cs typeface="Trebuchet MS" pitchFamily="34" charset="-120"/>
               </a:rPr>
-              <a:t>Learned spectral features — the strongest from-scratch model</a:t>
+              <a:t>Learned spectral </a:t>
+            </a:r>
+            <a:r>
+              <a:rPr lang="en-US" sz="2800" b="1" dirty="0" smtClean="0">
+                <a:solidFill>
+                  <a:srgbClr val="22303A"/>
+                </a:solidFill>
+                <a:latin typeface="Trebuchet MS" pitchFamily="34" charset="0"/>
+                <a:ea typeface="Trebuchet MS" pitchFamily="34" charset="-122"/>
+                <a:cs typeface="Trebuchet MS" pitchFamily="34" charset="-120"/>
+              </a:rPr>
+              <a:t>features</a:t>
             </a:r>
             <a:endParaRPr lang="en-US" sz="2800" dirty="0"/>
           </a:p>
@@ -9106,7 +9431,29 @@
                 <a:ea typeface="Calibri" pitchFamily="34" charset="-122"/>
                 <a:cs typeface="Calibri" pitchFamily="34" charset="-120"/>
               </a:rPr>
-              <a:t>Best AUC ≈ 0.87 / acc ≈ 0.83, and the best fake recall (~72%).</a:t>
+              <a:t>Best AUC ≈ 0.87 / acc ≈ 0.83, and the best fake recall </a:t>
+            </a:r>
+            <a:r>
+              <a:rPr lang="en-US" sz="1400" dirty="0">
+                <a:solidFill>
+                  <a:srgbClr val="22303A"/>
+                </a:solidFill>
+                <a:latin typeface="Calibri" pitchFamily="34" charset="0"/>
+                <a:ea typeface="Calibri" pitchFamily="34" charset="-122"/>
+                <a:cs typeface="Calibri" pitchFamily="34" charset="-120"/>
+              </a:rPr>
+              <a:t>≈ 72</a:t>
+            </a:r>
+            <a:r>
+              <a:rPr lang="en-US" sz="1400" dirty="0" smtClean="0">
+                <a:solidFill>
+                  <a:srgbClr val="22303A"/>
+                </a:solidFill>
+                <a:latin typeface="Calibri" pitchFamily="34" charset="0"/>
+                <a:ea typeface="Calibri" pitchFamily="34" charset="-122"/>
+                <a:cs typeface="Calibri" pitchFamily="34" charset="-120"/>
+              </a:rPr>
+              <a:t>%.</a:t>
             </a:r>
             <a:endParaRPr lang="en-US" sz="1400" dirty="0"/>
           </a:p>
@@ -9181,98 +9528,22 @@
           </a:p>
           <a:p>
             <a:r>
-              <a:rPr lang="en-US" sz="950" b="1">
+              <a:rPr lang="en-US" sz="950" b="1" dirty="0">
                 <a:solidFill>
                   <a:srgbClr val="0E9594"/>
                 </a:solidFill>
               </a:rPr>
-              <a:t>Baseline config</a:t>
-            </a:r>
-          </a:p>
-          <a:p>
-            <a:r>
-              <a:rPr lang="en-US" sz="900">
-                <a:solidFill>
-                  <a:srgbClr val="5C6B73"/>
-                </a:solidFill>
-              </a:rPr>
-              <a:t>Conv depth / ch: </a:t>
-            </a:r>
-            <a:r>
-              <a:rPr lang="en-US" sz="900">
-                <a:solidFill>
-                  <a:srgbClr val="22303A"/>
-                </a:solidFill>
-              </a:rPr>
-              <a:t>3 blocks / 32 ch</a:t>
-            </a:r>
-          </a:p>
-          <a:p>
-            <a:r>
-              <a:rPr lang="en-US" sz="900">
-                <a:solidFill>
-                  <a:srgbClr val="5C6B73"/>
-                </a:solidFill>
-              </a:rPr>
-              <a:t>Learning rate: </a:t>
-            </a:r>
-            <a:r>
-              <a:rPr lang="en-US" sz="900">
-                <a:solidFill>
-                  <a:srgbClr val="22303A"/>
-                </a:solidFill>
-              </a:rPr>
-              <a:t>5e-4</a:t>
-            </a:r>
-          </a:p>
-          <a:p>
-            <a:r>
-              <a:rPr lang="en-US" sz="900">
-                <a:solidFill>
-                  <a:srgbClr val="5C6B73"/>
-                </a:solidFill>
-              </a:rPr>
-              <a:t>Dropout / wd: </a:t>
-            </a:r>
-            <a:r>
-              <a:rPr lang="en-US" sz="900">
-                <a:solidFill>
-                  <a:srgbClr val="22303A"/>
-                </a:solidFill>
-              </a:rPr>
-              <a:t>0.5 / 1e-4</a:t>
-            </a:r>
-          </a:p>
-          <a:p>
-            <a:r>
-              <a:rPr lang="en-US" sz="900">
-                <a:solidFill>
-                  <a:srgbClr val="5C6B73"/>
-                </a:solidFill>
-              </a:rPr>
-              <a:t>Note: </a:t>
-            </a:r>
-            <a:r>
-              <a:rPr lang="en-US" sz="900">
-                <a:solidFill>
-                  <a:srgbClr val="22303A"/>
-                </a:solidFill>
-              </a:rPr>
-              <a:t>dropout 0.3 beats 0.5 at this lr</a:t>
-            </a:r>
-          </a:p>
-          <a:p>
-            <a:r>
-              <a:rPr lang="en-US" sz="900" b="1">
+              <a:t>Baseline </a:t>
+            </a:r>
+            <a:r>
+              <a:rPr lang="en-US" sz="950" b="1" dirty="0" err="1">
                 <a:solidFill>
                   <a:srgbClr val="0E9594"/>
                 </a:solidFill>
               </a:rPr>
-              <a:t>AUC 0.681  |  fake-recall 46%</a:t>
-            </a:r>
-          </a:p>
-          <a:p>
-            <a:endParaRPr lang="en-US" sz="900" b="1">
+              <a:t>config</a:t>
+            </a:r>
+            <a:endParaRPr lang="en-US" sz="950" b="1" dirty="0">
               <a:solidFill>
                 <a:srgbClr val="0E9594"/>
               </a:solidFill>
@@ -9280,43 +9551,232 @@
           </a:p>
           <a:p>
             <a:r>
-              <a:rPr lang="en-US" sz="950" b="1">
+              <a:rPr lang="en-US" sz="900" dirty="0">
+                <a:solidFill>
+                  <a:srgbClr val="5C6B73"/>
+                </a:solidFill>
+              </a:rPr>
+              <a:t>Conv depth / </a:t>
+            </a:r>
+            <a:r>
+              <a:rPr lang="en-US" sz="900" dirty="0" err="1">
+                <a:solidFill>
+                  <a:srgbClr val="5C6B73"/>
+                </a:solidFill>
+              </a:rPr>
+              <a:t>ch</a:t>
+            </a:r>
+            <a:r>
+              <a:rPr lang="en-US" sz="900" dirty="0">
+                <a:solidFill>
+                  <a:srgbClr val="5C6B73"/>
+                </a:solidFill>
+              </a:rPr>
+              <a:t>: </a:t>
+            </a:r>
+            <a:r>
+              <a:rPr lang="en-US" sz="900" dirty="0">
+                <a:solidFill>
+                  <a:srgbClr val="22303A"/>
+                </a:solidFill>
+              </a:rPr>
+              <a:t>3 blocks / 32 </a:t>
+            </a:r>
+            <a:r>
+              <a:rPr lang="en-US" sz="900" dirty="0" err="1">
+                <a:solidFill>
+                  <a:srgbClr val="22303A"/>
+                </a:solidFill>
+              </a:rPr>
+              <a:t>ch</a:t>
+            </a:r>
+            <a:endParaRPr lang="en-US" sz="900" dirty="0">
+              <a:solidFill>
+                <a:srgbClr val="22303A"/>
+              </a:solidFill>
+            </a:endParaRPr>
+          </a:p>
+          <a:p>
+            <a:r>
+              <a:rPr lang="en-US" sz="900" dirty="0">
+                <a:solidFill>
+                  <a:srgbClr val="5C6B73"/>
+                </a:solidFill>
+              </a:rPr>
+              <a:t>Learning rate: </a:t>
+            </a:r>
+            <a:r>
+              <a:rPr lang="en-US" sz="900" dirty="0">
+                <a:solidFill>
+                  <a:srgbClr val="22303A"/>
+                </a:solidFill>
+              </a:rPr>
+              <a:t>5e-4</a:t>
+            </a:r>
+          </a:p>
+          <a:p>
+            <a:r>
+              <a:rPr lang="en-US" sz="900" dirty="0">
+                <a:solidFill>
+                  <a:srgbClr val="5C6B73"/>
+                </a:solidFill>
+              </a:rPr>
+              <a:t>Dropout / </a:t>
+            </a:r>
+            <a:r>
+              <a:rPr lang="en-US" sz="900" dirty="0" err="1">
+                <a:solidFill>
+                  <a:srgbClr val="5C6B73"/>
+                </a:solidFill>
+              </a:rPr>
+              <a:t>wd</a:t>
+            </a:r>
+            <a:r>
+              <a:rPr lang="en-US" sz="900" dirty="0">
+                <a:solidFill>
+                  <a:srgbClr val="5C6B73"/>
+                </a:solidFill>
+              </a:rPr>
+              <a:t>: </a:t>
+            </a:r>
+            <a:r>
+              <a:rPr lang="en-US" sz="900" dirty="0">
+                <a:solidFill>
+                  <a:srgbClr val="22303A"/>
+                </a:solidFill>
+              </a:rPr>
+              <a:t>0.5 / 1e-4</a:t>
+            </a:r>
+          </a:p>
+          <a:p>
+            <a:r>
+              <a:rPr lang="en-US" sz="900" dirty="0">
+                <a:solidFill>
+                  <a:srgbClr val="5C6B73"/>
+                </a:solidFill>
+              </a:rPr>
+              <a:t>Note: </a:t>
+            </a:r>
+            <a:r>
+              <a:rPr lang="en-US" sz="900" dirty="0">
+                <a:solidFill>
+                  <a:srgbClr val="22303A"/>
+                </a:solidFill>
+              </a:rPr>
+              <a:t>dropout 0.3 beats 0.5 at this </a:t>
+            </a:r>
+            <a:r>
+              <a:rPr lang="en-US" sz="900" dirty="0" err="1">
+                <a:solidFill>
+                  <a:srgbClr val="22303A"/>
+                </a:solidFill>
+              </a:rPr>
+              <a:t>lr</a:t>
+            </a:r>
+            <a:endParaRPr lang="en-US" sz="900" dirty="0">
+              <a:solidFill>
+                <a:srgbClr val="22303A"/>
+              </a:solidFill>
+            </a:endParaRPr>
+          </a:p>
+          <a:p>
+            <a:r>
+              <a:rPr lang="en-US" sz="900" b="1" dirty="0">
+                <a:solidFill>
+                  <a:srgbClr val="0E9594"/>
+                </a:solidFill>
+              </a:rPr>
+              <a:t>AUC 0.681  |  fake-recall 46%</a:t>
+            </a:r>
+          </a:p>
+          <a:p>
+            <a:endParaRPr lang="en-US" sz="900" b="1" dirty="0">
+              <a:solidFill>
+                <a:srgbClr val="0E9594"/>
+              </a:solidFill>
+            </a:endParaRPr>
+          </a:p>
+          <a:p>
+            <a:r>
+              <a:rPr lang="en-US" sz="950" b="1" dirty="0">
                 <a:solidFill>
                   <a:srgbClr val="C9971B"/>
                 </a:solidFill>
               </a:rPr>
-              <a:t>Best config</a:t>
-            </a:r>
-          </a:p>
-          <a:p>
-            <a:r>
-              <a:rPr lang="en-US" sz="900">
+              <a:t>Best </a:t>
+            </a:r>
+            <a:r>
+              <a:rPr lang="en-US" sz="950" b="1" dirty="0" err="1">
+                <a:solidFill>
+                  <a:srgbClr val="C9971B"/>
+                </a:solidFill>
+              </a:rPr>
+              <a:t>config</a:t>
+            </a:r>
+            <a:endParaRPr lang="en-US" sz="950" b="1" dirty="0">
+              <a:solidFill>
+                <a:srgbClr val="C9971B"/>
+              </a:solidFill>
+            </a:endParaRPr>
+          </a:p>
+          <a:p>
+            <a:r>
+              <a:rPr lang="en-US" sz="900" dirty="0">
                 <a:solidFill>
                   <a:srgbClr val="5C6B73"/>
                 </a:solidFill>
               </a:rPr>
-              <a:t>Conv depth / ch: </a:t>
-            </a:r>
-            <a:r>
-              <a:rPr lang="en-US" sz="900">
-                <a:solidFill>
-                  <a:srgbClr val="22303A"/>
-                </a:solidFill>
-              </a:rPr>
-              <a:t>3 blocks / 32 ch</a:t>
-            </a:r>
-          </a:p>
-          <a:p>
-            <a:r>
-              <a:rPr lang="en-US" sz="900">
+              <a:t>Conv depth / </a:t>
+            </a:r>
+            <a:r>
+              <a:rPr lang="en-US" sz="900" dirty="0" err="1">
                 <a:solidFill>
                   <a:srgbClr val="5C6B73"/>
                 </a:solidFill>
               </a:rPr>
+              <a:t>ch</a:t>
+            </a:r>
+            <a:r>
+              <a:rPr lang="en-US" sz="900" dirty="0">
+                <a:solidFill>
+                  <a:srgbClr val="5C6B73"/>
+                </a:solidFill>
+              </a:rPr>
+              <a:t>: </a:t>
+            </a:r>
+            <a:r>
+              <a:rPr lang="en-US" sz="900" dirty="0">
+                <a:solidFill>
+                  <a:srgbClr val="22303A"/>
+                </a:solidFill>
+              </a:rPr>
+              <a:t>3 blocks / 32 </a:t>
+            </a:r>
+            <a:r>
+              <a:rPr lang="en-US" sz="900" dirty="0" err="1">
+                <a:solidFill>
+                  <a:srgbClr val="22303A"/>
+                </a:solidFill>
+              </a:rPr>
+              <a:t>ch</a:t>
+            </a:r>
+            <a:endParaRPr lang="en-US" sz="900" dirty="0">
+              <a:solidFill>
+                <a:srgbClr val="22303A"/>
+              </a:solidFill>
+            </a:endParaRPr>
+          </a:p>
+          <a:p>
+            <a:r>
+              <a:rPr lang="en-US" sz="900" dirty="0">
+                <a:solidFill>
+                  <a:srgbClr val="5C6B73"/>
+                </a:solidFill>
+              </a:rPr>
               <a:t>Learning rate: </a:t>
             </a:r>
             <a:r>
-              <a:rPr lang="en-US" sz="900">
+              <a:rPr lang="en-US" sz="900" dirty="0">
                 <a:solidFill>
                   <a:srgbClr val="22303A"/>
                 </a:solidFill>
@@ -9326,15 +9786,31 @@
           </a:p>
           <a:p>
             <a:r>
-              <a:rPr lang="en-US" sz="900">
+              <a:rPr lang="en-US" sz="900" dirty="0">
                 <a:solidFill>
                   <a:srgbClr val="5C6B73"/>
                 </a:solidFill>
               </a:rPr>
-              <a:t>Dropout / wd: </a:t>
-            </a:r>
-            <a:r>
-              <a:rPr lang="en-US" sz="900">
+              <a:t>Dropout / </a:t>
+            </a:r>
+            <a:r>
+              <a:rPr lang="en-US" sz="900" dirty="0" err="1">
+                <a:solidFill>
+                  <a:srgbClr val="5C6B73"/>
+                </a:solidFill>
+              </a:rPr>
+              <a:t>wd</a:t>
+            </a:r>
+            <a:r>
+              <a:rPr lang="en-US" sz="900" dirty="0">
+                <a:solidFill>
+                  <a:srgbClr val="5C6B73"/>
+                </a:solidFill>
+              </a:rPr>
+              <a:t>: </a:t>
+            </a:r>
+            <a:r>
+              <a:rPr lang="en-US" sz="900" dirty="0">
                 <a:solidFill>
                   <a:srgbClr val="22303A"/>
                 </a:solidFill>
@@ -9344,7 +9820,7 @@
           </a:p>
           <a:p>
             <a:r>
-              <a:rPr lang="en-US" sz="900">
+              <a:rPr lang="en-US" sz="900" dirty="0">
                 <a:solidFill>
                   <a:srgbClr val="5C6B73"/>
                 </a:solidFill>
@@ -9352,17 +9828,41 @@
               <a:t>Note: </a:t>
             </a:r>
             <a:r>
-              <a:rPr lang="en-US" sz="900">
-                <a:solidFill>
-                  <a:srgbClr val="22303A"/>
-                </a:solidFill>
-              </a:rPr>
-              <a:t>lr×dropout interaction: lr 1e-3 needs do 0.5</a:t>
-            </a:r>
-          </a:p>
-          <a:p>
-            <a:r>
-              <a:rPr lang="en-US" sz="900" b="1">
+              <a:rPr lang="en-US" sz="900" dirty="0" err="1">
+                <a:solidFill>
+                  <a:srgbClr val="22303A"/>
+                </a:solidFill>
+              </a:rPr>
+              <a:t>lr×dropout</a:t>
+            </a:r>
+            <a:r>
+              <a:rPr lang="en-US" sz="900" dirty="0">
+                <a:solidFill>
+                  <a:srgbClr val="22303A"/>
+                </a:solidFill>
+              </a:rPr>
+              <a:t> interaction: </a:t>
+            </a:r>
+            <a:r>
+              <a:rPr lang="en-US" sz="900" dirty="0" err="1">
+                <a:solidFill>
+                  <a:srgbClr val="22303A"/>
+                </a:solidFill>
+              </a:rPr>
+              <a:t>lr</a:t>
+            </a:r>
+            <a:r>
+              <a:rPr lang="en-US" sz="900" dirty="0">
+                <a:solidFill>
+                  <a:srgbClr val="22303A"/>
+                </a:solidFill>
+              </a:rPr>
+              <a:t> 1e-3 needs do 0.5</a:t>
+            </a:r>
+          </a:p>
+          <a:p>
+            <a:r>
+              <a:rPr lang="en-US" sz="900" b="1" dirty="0">
                 <a:solidFill>
                   <a:srgbClr val="C9971B"/>
                 </a:solidFill>
@@ -9598,7 +10098,7 @@
               <a:buNone/>
             </a:pPr>
             <a:r>
-              <a:rPr lang="en-US" sz="2800" b="1" dirty="0">
+              <a:rPr lang="en-US" sz="2800" b="1" dirty="0" smtClean="0">
                 <a:solidFill>
                   <a:srgbClr val="22303A"/>
                 </a:solidFill>
@@ -9606,7 +10106,7 @@
                 <a:ea typeface="Trebuchet MS" pitchFamily="34" charset="-122"/>
                 <a:cs typeface="Trebuchet MS" pitchFamily="34" charset="-120"/>
               </a:rPr>
-              <a:t>Adding a CNN block to the recurrent path</a:t>
+              <a:t>Combining CNN &amp; RNN architectures</a:t>
             </a:r>
             <a:endParaRPr lang="en-US" sz="2800" dirty="0"/>
           </a:p>
@@ -9763,98 +10263,22 @@
           </a:p>
           <a:p>
             <a:r>
-              <a:rPr lang="en-US" sz="950" b="1">
+              <a:rPr lang="en-US" sz="950" b="1" dirty="0">
                 <a:solidFill>
                   <a:srgbClr val="0E9594"/>
                 </a:solidFill>
               </a:rPr>
-              <a:t>Baseline config</a:t>
-            </a:r>
-          </a:p>
-          <a:p>
-            <a:r>
-              <a:rPr lang="en-US" sz="900">
-                <a:solidFill>
-                  <a:srgbClr val="5C6B73"/>
-                </a:solidFill>
-              </a:rPr>
-              <a:t>CNN depth / ch: </a:t>
-            </a:r>
-            <a:r>
-              <a:rPr lang="en-US" sz="900">
-                <a:solidFill>
-                  <a:srgbClr val="22303A"/>
-                </a:solidFill>
-              </a:rPr>
-              <a:t>3 blocks / 32 ch</a:t>
-            </a:r>
-          </a:p>
-          <a:p>
-            <a:r>
-              <a:rPr lang="en-US" sz="900">
-                <a:solidFill>
-                  <a:srgbClr val="5C6B73"/>
-                </a:solidFill>
-              </a:rPr>
-              <a:t>BiLSTM layers / h: </a:t>
-            </a:r>
-            <a:r>
-              <a:rPr lang="en-US" sz="900">
-                <a:solidFill>
-                  <a:srgbClr val="22303A"/>
-                </a:solidFill>
-              </a:rPr>
-              <a:t>2 / 128</a:t>
-            </a:r>
-          </a:p>
-          <a:p>
-            <a:r>
-              <a:rPr lang="en-US" sz="900">
-                <a:solidFill>
-                  <a:srgbClr val="5C6B73"/>
-                </a:solidFill>
-              </a:rPr>
-              <a:t>Learning rate: </a:t>
-            </a:r>
-            <a:r>
-              <a:rPr lang="en-US" sz="900">
-                <a:solidFill>
-                  <a:srgbClr val="22303A"/>
-                </a:solidFill>
-              </a:rPr>
-              <a:t>5e-4</a:t>
-            </a:r>
-          </a:p>
-          <a:p>
-            <a:r>
-              <a:rPr lang="en-US" sz="900">
-                <a:solidFill>
-                  <a:srgbClr val="5C6B73"/>
-                </a:solidFill>
-              </a:rPr>
-              <a:t>Dropout / wd: </a:t>
-            </a:r>
-            <a:r>
-              <a:rPr lang="en-US" sz="900">
-                <a:solidFill>
-                  <a:srgbClr val="22303A"/>
-                </a:solidFill>
-              </a:rPr>
-              <a:t>0.5 / 1e-4</a:t>
-            </a:r>
-          </a:p>
-          <a:p>
-            <a:r>
-              <a:rPr lang="en-US" sz="900" b="1">
+              <a:t>Baseline </a:t>
+            </a:r>
+            <a:r>
+              <a:rPr lang="en-US" sz="950" b="1" dirty="0" err="1">
                 <a:solidFill>
                   <a:srgbClr val="0E9594"/>
                 </a:solidFill>
               </a:rPr>
-              <a:t>AUC 0.860  |  fake-recall 54%</a:t>
-            </a:r>
-          </a:p>
-          <a:p>
-            <a:endParaRPr lang="en-US" sz="900" b="1">
+              <a:t>config</a:t>
+            </a:r>
+            <a:endParaRPr lang="en-US" sz="950" b="1" dirty="0">
               <a:solidFill>
                 <a:srgbClr val="0E9594"/>
               </a:solidFill>
@@ -9862,53 +10286,214 @@
           </a:p>
           <a:p>
             <a:r>
-              <a:rPr lang="en-US" sz="950" b="1">
+              <a:rPr lang="en-US" sz="900" dirty="0">
+                <a:solidFill>
+                  <a:srgbClr val="5C6B73"/>
+                </a:solidFill>
+              </a:rPr>
+              <a:t>CNN depth / </a:t>
+            </a:r>
+            <a:r>
+              <a:rPr lang="en-US" sz="900" dirty="0" err="1">
+                <a:solidFill>
+                  <a:srgbClr val="5C6B73"/>
+                </a:solidFill>
+              </a:rPr>
+              <a:t>ch</a:t>
+            </a:r>
+            <a:r>
+              <a:rPr lang="en-US" sz="900" dirty="0">
+                <a:solidFill>
+                  <a:srgbClr val="5C6B73"/>
+                </a:solidFill>
+              </a:rPr>
+              <a:t>: </a:t>
+            </a:r>
+            <a:r>
+              <a:rPr lang="en-US" sz="900" dirty="0">
+                <a:solidFill>
+                  <a:srgbClr val="22303A"/>
+                </a:solidFill>
+              </a:rPr>
+              <a:t>3 blocks / 32 </a:t>
+            </a:r>
+            <a:r>
+              <a:rPr lang="en-US" sz="900" dirty="0" err="1">
+                <a:solidFill>
+                  <a:srgbClr val="22303A"/>
+                </a:solidFill>
+              </a:rPr>
+              <a:t>ch</a:t>
+            </a:r>
+            <a:endParaRPr lang="en-US" sz="900" dirty="0">
+              <a:solidFill>
+                <a:srgbClr val="22303A"/>
+              </a:solidFill>
+            </a:endParaRPr>
+          </a:p>
+          <a:p>
+            <a:r>
+              <a:rPr lang="en-US" sz="900" dirty="0" err="1">
+                <a:solidFill>
+                  <a:srgbClr val="5C6B73"/>
+                </a:solidFill>
+              </a:rPr>
+              <a:t>BiLSTM</a:t>
+            </a:r>
+            <a:r>
+              <a:rPr lang="en-US" sz="900" dirty="0">
+                <a:solidFill>
+                  <a:srgbClr val="5C6B73"/>
+                </a:solidFill>
+              </a:rPr>
+              <a:t> layers / h: </a:t>
+            </a:r>
+            <a:r>
+              <a:rPr lang="en-US" sz="900" dirty="0">
+                <a:solidFill>
+                  <a:srgbClr val="22303A"/>
+                </a:solidFill>
+              </a:rPr>
+              <a:t>2 / 128</a:t>
+            </a:r>
+          </a:p>
+          <a:p>
+            <a:r>
+              <a:rPr lang="en-US" sz="900" dirty="0">
+                <a:solidFill>
+                  <a:srgbClr val="5C6B73"/>
+                </a:solidFill>
+              </a:rPr>
+              <a:t>Learning rate: </a:t>
+            </a:r>
+            <a:r>
+              <a:rPr lang="en-US" sz="900" dirty="0">
+                <a:solidFill>
+                  <a:srgbClr val="22303A"/>
+                </a:solidFill>
+              </a:rPr>
+              <a:t>5e-4</a:t>
+            </a:r>
+          </a:p>
+          <a:p>
+            <a:r>
+              <a:rPr lang="en-US" sz="900" dirty="0">
+                <a:solidFill>
+                  <a:srgbClr val="5C6B73"/>
+                </a:solidFill>
+              </a:rPr>
+              <a:t>Dropout / </a:t>
+            </a:r>
+            <a:r>
+              <a:rPr lang="en-US" sz="900" dirty="0" err="1">
+                <a:solidFill>
+                  <a:srgbClr val="5C6B73"/>
+                </a:solidFill>
+              </a:rPr>
+              <a:t>wd</a:t>
+            </a:r>
+            <a:r>
+              <a:rPr lang="en-US" sz="900" dirty="0">
+                <a:solidFill>
+                  <a:srgbClr val="5C6B73"/>
+                </a:solidFill>
+              </a:rPr>
+              <a:t>: </a:t>
+            </a:r>
+            <a:r>
+              <a:rPr lang="en-US" sz="900" dirty="0">
+                <a:solidFill>
+                  <a:srgbClr val="22303A"/>
+                </a:solidFill>
+              </a:rPr>
+              <a:t>0.5 / 1e-4</a:t>
+            </a:r>
+          </a:p>
+          <a:p>
+            <a:r>
+              <a:rPr lang="en-US" sz="900" b="1" dirty="0">
+                <a:solidFill>
+                  <a:srgbClr val="0E9594"/>
+                </a:solidFill>
+              </a:rPr>
+              <a:t>AUC 0.860  |  fake-recall 54%</a:t>
+            </a:r>
+          </a:p>
+          <a:p>
+            <a:endParaRPr lang="en-US" sz="900" b="1" dirty="0">
+              <a:solidFill>
+                <a:srgbClr val="0E9594"/>
+              </a:solidFill>
+            </a:endParaRPr>
+          </a:p>
+          <a:p>
+            <a:r>
+              <a:rPr lang="en-US" sz="950" b="1" dirty="0">
                 <a:solidFill>
                   <a:srgbClr val="C9971B"/>
                 </a:solidFill>
               </a:rPr>
-              <a:t>Best config  =  Baseline</a:t>
-            </a:r>
-          </a:p>
-          <a:p>
-            <a:r>
-              <a:rPr lang="en-US" sz="900">
+              <a:t>Best </a:t>
+            </a:r>
+            <a:r>
+              <a:rPr lang="en-US" sz="950" b="1" dirty="0" err="1">
+                <a:solidFill>
+                  <a:srgbClr val="C9971B"/>
+                </a:solidFill>
+              </a:rPr>
+              <a:t>config</a:t>
+            </a:r>
+            <a:r>
+              <a:rPr lang="en-US" sz="950" b="1" dirty="0">
+                <a:solidFill>
+                  <a:srgbClr val="C9971B"/>
+                </a:solidFill>
+              </a:rPr>
+              <a:t>  =  Baseline</a:t>
+            </a:r>
+          </a:p>
+          <a:p>
+            <a:r>
+              <a:rPr lang="en-US" sz="900" dirty="0" smtClean="0">
                 <a:solidFill>
                   <a:srgbClr val="5C6B73"/>
                 </a:solidFill>
               </a:rPr>
-              <a:t>Note: </a:t>
-            </a:r>
-            <a:r>
-              <a:rPr lang="en-US" sz="900">
-                <a:solidFill>
-                  <a:srgbClr val="22303A"/>
-                </a:solidFill>
-              </a:rPr>
-              <a:t>No variation improved on baseline</a:t>
-            </a:r>
-          </a:p>
-          <a:p>
-            <a:r>
-              <a:rPr lang="en-US" sz="900">
+              <a:t>Note</a:t>
+            </a:r>
+            <a:r>
+              <a:rPr lang="en-US" sz="900" dirty="0">
                 <a:solidFill>
                   <a:srgbClr val="5C6B73"/>
                 </a:solidFill>
               </a:rPr>
-              <a:t>Note: </a:t>
-            </a:r>
-            <a:r>
-              <a:rPr lang="en-US" sz="900">
-                <a:solidFill>
-                  <a:srgbClr val="22303A"/>
-                </a:solidFill>
-              </a:rPr>
-              <a:t>Baseline is already the global optimum</a:t>
-            </a:r>
-          </a:p>
-          <a:p>
-            <a:r>
-              <a:rPr lang="en-US" sz="900" b="1">
+              <a:t>: </a:t>
+            </a:r>
+            <a:r>
+              <a:rPr lang="en-US" sz="900" dirty="0">
+                <a:solidFill>
+                  <a:srgbClr val="22303A"/>
+                </a:solidFill>
+              </a:rPr>
+              <a:t>Baseline is </a:t>
+            </a:r>
+            <a:r>
+              <a:rPr lang="en-US" sz="900" dirty="0" smtClean="0">
+                <a:solidFill>
+                  <a:srgbClr val="22303A"/>
+                </a:solidFill>
+              </a:rPr>
+              <a:t>the optimum</a:t>
+            </a:r>
+            <a:endParaRPr lang="en-US" sz="900" dirty="0">
+              <a:solidFill>
+                <a:srgbClr val="22303A"/>
+              </a:solidFill>
+            </a:endParaRPr>
+          </a:p>
+          <a:p>
+            <a:r>
+              <a:rPr lang="en-US" sz="900" b="1" dirty="0">
                 <a:solidFill>
                   <a:srgbClr val="C9971B"/>
                 </a:solidFill>
@@ -10720,7 +11305,29 @@
                 <a:ea typeface="Calibri" pitchFamily="34" charset="-122"/>
                 <a:cs typeface="Calibri" pitchFamily="34" charset="-120"/>
               </a:rPr>
-              <a:t>Frozen probe = weighted sum over hidden layers + linear head.</a:t>
+              <a:t>Frozen </a:t>
+            </a:r>
+            <a:r>
+              <a:rPr lang="en-US" sz="1400" dirty="0" smtClean="0">
+                <a:solidFill>
+                  <a:srgbClr val="22303A"/>
+                </a:solidFill>
+                <a:latin typeface="Calibri" pitchFamily="34" charset="0"/>
+                <a:ea typeface="Calibri" pitchFamily="34" charset="-122"/>
+                <a:cs typeface="Calibri" pitchFamily="34" charset="-120"/>
+              </a:rPr>
+              <a:t>backbone </a:t>
+            </a:r>
+            <a:r>
+              <a:rPr lang="en-US" sz="1400" dirty="0">
+                <a:solidFill>
+                  <a:srgbClr val="22303A"/>
+                </a:solidFill>
+                <a:latin typeface="Calibri" pitchFamily="34" charset="0"/>
+                <a:ea typeface="Calibri" pitchFamily="34" charset="-122"/>
+                <a:cs typeface="Calibri" pitchFamily="34" charset="-120"/>
+              </a:rPr>
+              <a:t>= weighted sum over hidden layers + linear head.</a:t>
             </a:r>
             <a:endParaRPr lang="en-US" sz="1400" dirty="0"/>
           </a:p>
@@ -10741,7 +11348,29 @@
                 <a:ea typeface="Calibri" pitchFamily="34" charset="-122"/>
                 <a:cs typeface="Calibri" pitchFamily="34" charset="-120"/>
               </a:rPr>
-              <a:t>~81% of weight on layer 3 of 12; the top layer is nearly ignored.</a:t>
+              <a:t>~81% of weight on layer 3 of </a:t>
+            </a:r>
+            <a:r>
+              <a:rPr lang="en-US" sz="1400" dirty="0" smtClean="0">
+                <a:solidFill>
+                  <a:srgbClr val="22303A"/>
+                </a:solidFill>
+                <a:latin typeface="Calibri" pitchFamily="34" charset="0"/>
+                <a:ea typeface="Calibri" pitchFamily="34" charset="-122"/>
+                <a:cs typeface="Calibri" pitchFamily="34" charset="-120"/>
+              </a:rPr>
+              <a:t>12, </a:t>
+            </a:r>
+            <a:r>
+              <a:rPr lang="en-US" sz="1400" dirty="0">
+                <a:solidFill>
+                  <a:srgbClr val="22303A"/>
+                </a:solidFill>
+                <a:latin typeface="Calibri" pitchFamily="34" charset="0"/>
+                <a:ea typeface="Calibri" pitchFamily="34" charset="-122"/>
+                <a:cs typeface="Calibri" pitchFamily="34" charset="-120"/>
+              </a:rPr>
+              <a:t>the top layer is nearly ignored.</a:t>
             </a:r>
             <a:endParaRPr lang="en-US" sz="1400" dirty="0"/>
           </a:p>
@@ -10795,80 +11424,30 @@
           </a:p>
           <a:p>
             <a:r>
-              <a:rPr lang="en-US" sz="950" b="1">
+              <a:rPr lang="en-US" sz="950" b="1" dirty="0">
                 <a:solidFill>
                   <a:srgbClr val="0E9594"/>
                 </a:solidFill>
               </a:rPr>
-              <a:t>Frozen probe config</a:t>
-            </a:r>
-          </a:p>
-          <a:p>
-            <a:r>
-              <a:rPr lang="en-US" sz="900">
-                <a:solidFill>
-                  <a:srgbClr val="5C6B73"/>
-                </a:solidFill>
-              </a:rPr>
-              <a:t>Aggregation: </a:t>
-            </a:r>
-            <a:r>
-              <a:rPr lang="en-US" sz="900">
-                <a:solidFill>
-                  <a:srgbClr val="22303A"/>
-                </a:solidFill>
-              </a:rPr>
-              <a:t>Softmax-weighted sum, 12 layers</a:t>
-            </a:r>
-          </a:p>
-          <a:p>
-            <a:r>
-              <a:rPr lang="en-US" sz="900">
-                <a:solidFill>
-                  <a:srgbClr val="5C6B73"/>
-                </a:solidFill>
-              </a:rPr>
-              <a:t>Dominant layer: </a:t>
-            </a:r>
-            <a:r>
-              <a:rPr lang="en-US" sz="900">
-                <a:solidFill>
-                  <a:srgbClr val="22303A"/>
-                </a:solidFill>
-              </a:rPr>
-              <a:t>Layer 3 of 12  (~81% weight)</a:t>
-            </a:r>
-          </a:p>
-          <a:p>
-            <a:r>
-              <a:rPr lang="en-US" sz="900">
-                <a:solidFill>
-                  <a:srgbClr val="5C6B73"/>
-                </a:solidFill>
-              </a:rPr>
-              <a:t>Trainable params: </a:t>
-            </a:r>
-            <a:r>
-              <a:rPr lang="en-US" sz="900">
-                <a:solidFill>
-                  <a:srgbClr val="22303A"/>
-                </a:solidFill>
-              </a:rPr>
-              <a:t>~5K  (head only)</a:t>
-            </a:r>
-          </a:p>
-          <a:p>
-            <a:r>
-              <a:rPr lang="en-US" sz="900" b="1">
+              <a:t>Frozen </a:t>
+            </a:r>
+            <a:r>
+              <a:rPr lang="en-US" sz="950" b="1" dirty="0" smtClean="0">
                 <a:solidFill>
                   <a:srgbClr val="0E9594"/>
                 </a:solidFill>
               </a:rPr>
-              <a:t>AUC 0.918  |  fake-recall 57%</a:t>
-            </a:r>
-          </a:p>
-          <a:p>
-            <a:endParaRPr lang="en-US" sz="900" b="1">
+              <a:t>backbone </a:t>
+            </a:r>
+            <a:r>
+              <a:rPr lang="en-US" sz="950" b="1" dirty="0" err="1">
+                <a:solidFill>
+                  <a:srgbClr val="0E9594"/>
+                </a:solidFill>
+              </a:rPr>
+              <a:t>config</a:t>
+            </a:r>
+            <a:endParaRPr lang="en-US" sz="950" b="1" dirty="0">
               <a:solidFill>
                 <a:srgbClr val="0E9594"/>
               </a:solidFill>
@@ -10876,17 +11455,125 @@
           </a:p>
           <a:p>
             <a:r>
-              <a:rPr lang="en-US" sz="950" b="1">
+              <a:rPr lang="en-US" sz="900" dirty="0">
+                <a:solidFill>
+                  <a:srgbClr val="5C6B73"/>
+                </a:solidFill>
+              </a:rPr>
+              <a:t>Aggregation: </a:t>
+            </a:r>
+            <a:r>
+              <a:rPr lang="en-US" sz="900" dirty="0" err="1">
+                <a:solidFill>
+                  <a:srgbClr val="22303A"/>
+                </a:solidFill>
+              </a:rPr>
+              <a:t>Softmax</a:t>
+            </a:r>
+            <a:r>
+              <a:rPr lang="en-US" sz="900" dirty="0">
+                <a:solidFill>
+                  <a:srgbClr val="22303A"/>
+                </a:solidFill>
+              </a:rPr>
+              <a:t>-weighted sum, 12 layers</a:t>
+            </a:r>
+          </a:p>
+          <a:p>
+            <a:r>
+              <a:rPr lang="en-US" sz="900" dirty="0">
+                <a:solidFill>
+                  <a:srgbClr val="5C6B73"/>
+                </a:solidFill>
+              </a:rPr>
+              <a:t>Dominant layer: </a:t>
+            </a:r>
+            <a:r>
+              <a:rPr lang="en-US" sz="900" dirty="0">
+                <a:solidFill>
+                  <a:srgbClr val="22303A"/>
+                </a:solidFill>
+              </a:rPr>
+              <a:t>Layer 3 of 12  (~81% weight)</a:t>
+            </a:r>
+          </a:p>
+          <a:p>
+            <a:r>
+              <a:rPr lang="en-US" sz="900" dirty="0">
+                <a:solidFill>
+                  <a:srgbClr val="5C6B73"/>
+                </a:solidFill>
+              </a:rPr>
+              <a:t>Trainable </a:t>
+            </a:r>
+            <a:r>
+              <a:rPr lang="en-US" sz="900" dirty="0" err="1">
+                <a:solidFill>
+                  <a:srgbClr val="5C6B73"/>
+                </a:solidFill>
+              </a:rPr>
+              <a:t>params</a:t>
+            </a:r>
+            <a:r>
+              <a:rPr lang="en-US" sz="900" dirty="0">
+                <a:solidFill>
+                  <a:srgbClr val="5C6B73"/>
+                </a:solidFill>
+              </a:rPr>
+              <a:t>: </a:t>
+            </a:r>
+            <a:r>
+              <a:rPr lang="en-US" sz="900" dirty="0">
+                <a:solidFill>
+                  <a:srgbClr val="22303A"/>
+                </a:solidFill>
+              </a:rPr>
+              <a:t>~5K  (head only)</a:t>
+            </a:r>
+          </a:p>
+          <a:p>
+            <a:r>
+              <a:rPr lang="en-US" sz="900" b="1" dirty="0">
+                <a:solidFill>
+                  <a:srgbClr val="0E9594"/>
+                </a:solidFill>
+              </a:rPr>
+              <a:t>AUC 0.918  |  fake-recall 57%</a:t>
+            </a:r>
+          </a:p>
+          <a:p>
+            <a:endParaRPr lang="en-US" sz="900" b="1" dirty="0">
+              <a:solidFill>
+                <a:srgbClr val="0E9594"/>
+              </a:solidFill>
+            </a:endParaRPr>
+          </a:p>
+          <a:p>
+            <a:r>
+              <a:rPr lang="en-US" sz="950" b="1" dirty="0">
                 <a:solidFill>
                   <a:srgbClr val="C9971B"/>
                 </a:solidFill>
               </a:rPr>
-              <a:t>Fine-tune best config</a:t>
-            </a:r>
-          </a:p>
-          <a:p>
-            <a:r>
-              <a:rPr lang="en-US" sz="900">
+              <a:t>Fine-tune best </a:t>
+            </a:r>
+            <a:r>
+              <a:rPr lang="en-US" sz="950" b="1" dirty="0" err="1">
+                <a:solidFill>
+                  <a:srgbClr val="C9971B"/>
+                </a:solidFill>
+              </a:rPr>
+              <a:t>config</a:t>
+            </a:r>
+            <a:endParaRPr lang="en-US" sz="950" b="1" dirty="0">
+              <a:solidFill>
+                <a:srgbClr val="C9971B"/>
+              </a:solidFill>
+            </a:endParaRPr>
+          </a:p>
+          <a:p>
+            <a:r>
+              <a:rPr lang="en-US" sz="900" dirty="0">
                 <a:solidFill>
                   <a:srgbClr val="5C6B73"/>
                 </a:solidFill>
@@ -10894,7 +11581,7 @@
               <a:t>Unfrozen layers: </a:t>
             </a:r>
             <a:r>
-              <a:rPr lang="en-US" sz="900">
+              <a:rPr lang="en-US" sz="900" dirty="0">
                 <a:solidFill>
                   <a:srgbClr val="22303A"/>
                 </a:solidFill>
@@ -10904,15 +11591,23 @@
           </a:p>
           <a:p>
             <a:r>
-              <a:rPr lang="en-US" sz="900">
+              <a:rPr lang="en-US" sz="900" dirty="0" err="1">
                 <a:solidFill>
                   <a:srgbClr val="5C6B73"/>
                 </a:solidFill>
               </a:rPr>
-              <a:t>lr backbone / head: </a:t>
-            </a:r>
-            <a:r>
-              <a:rPr lang="en-US" sz="900">
+              <a:t>lr</a:t>
+            </a:r>
+            <a:r>
+              <a:rPr lang="en-US" sz="900" dirty="0">
+                <a:solidFill>
+                  <a:srgbClr val="5C6B73"/>
+                </a:solidFill>
+              </a:rPr>
+              <a:t> backbone / head: </a:t>
+            </a:r>
+            <a:r>
+              <a:rPr lang="en-US" sz="900" dirty="0">
                 <a:solidFill>
                   <a:srgbClr val="22303A"/>
                 </a:solidFill>
@@ -10922,15 +11617,31 @@
           </a:p>
           <a:p>
             <a:r>
-              <a:rPr lang="en-US" sz="900">
+              <a:rPr lang="en-US" sz="900" dirty="0">
                 <a:solidFill>
                   <a:srgbClr val="5C6B73"/>
                 </a:solidFill>
               </a:rPr>
-              <a:t>Batch / wd: </a:t>
-            </a:r>
-            <a:r>
-              <a:rPr lang="en-US" sz="900">
+              <a:t>Batch / </a:t>
+            </a:r>
+            <a:r>
+              <a:rPr lang="en-US" sz="900" dirty="0" err="1">
+                <a:solidFill>
+                  <a:srgbClr val="5C6B73"/>
+                </a:solidFill>
+              </a:rPr>
+              <a:t>wd</a:t>
+            </a:r>
+            <a:r>
+              <a:rPr lang="en-US" sz="900" dirty="0">
+                <a:solidFill>
+                  <a:srgbClr val="5C6B73"/>
+                </a:solidFill>
+              </a:rPr>
+              <a:t>: </a:t>
+            </a:r>
+            <a:r>
+              <a:rPr lang="en-US" sz="900" dirty="0">
                 <a:solidFill>
                   <a:srgbClr val="22303A"/>
                 </a:solidFill>
@@ -10940,7 +11651,7 @@
           </a:p>
           <a:p>
             <a:r>
-              <a:rPr lang="en-US" sz="900" b="1">
+              <a:rPr lang="en-US" sz="900" b="1" dirty="0">
                 <a:solidFill>
                   <a:srgbClr val="C9971B"/>
                 </a:solidFill>

--- a/presentation.pptx
+++ b/presentation.pptx
@@ -14,8 +14,8 @@
     <p:sldId id="259" r:id="rId5"/>
     <p:sldId id="260" r:id="rId6"/>
     <p:sldId id="261" r:id="rId7"/>
-    <p:sldId id="262" r:id="rId8"/>
-    <p:sldId id="263" r:id="rId9"/>
+    <p:sldId id="263" r:id="rId8"/>
+    <p:sldId id="262" r:id="rId9"/>
     <p:sldId id="264" r:id="rId10"/>
     <p:sldId id="265" r:id="rId11"/>
     <p:sldId id="266" r:id="rId12"/>
@@ -1909,7 +1909,18 @@
                 <a:ea typeface="Trebuchet MS" pitchFamily="34" charset="-122"/>
                 <a:cs typeface="Trebuchet MS" pitchFamily="34" charset="-120"/>
               </a:rPr>
-              <a:t>AUDIO DEEPFAKE DETECTION</a:t>
+              <a:t>AUDIO DEEPFAKE </a:t>
+            </a:r>
+            <a:r>
+              <a:rPr lang="en-US" sz="4000" b="1" kern="0" spc="100" dirty="0" smtClean="0">
+                <a:solidFill>
+                  <a:srgbClr val="FFFFFF"/>
+                </a:solidFill>
+                <a:latin typeface="Trebuchet MS" pitchFamily="34" charset="0"/>
+                <a:ea typeface="Trebuchet MS" pitchFamily="34" charset="-122"/>
+                <a:cs typeface="Trebuchet MS" pitchFamily="34" charset="-120"/>
+              </a:rPr>
+              <a:t>DETECTION IN SPEECH</a:t>
             </a:r>
             <a:endParaRPr lang="en-US" sz="4000" dirty="0"/>
           </a:p>
@@ -1940,6 +1951,17 @@
               <a:buNone/>
             </a:pPr>
             <a:r>
+              <a:rPr lang="en-US" sz="1800" dirty="0" smtClean="0">
+                <a:solidFill>
+                  <a:srgbClr val="CADCFC"/>
+                </a:solidFill>
+                <a:latin typeface="Calibri" pitchFamily="34" charset="0"/>
+                <a:ea typeface="Calibri" pitchFamily="34" charset="-122"/>
+                <a:cs typeface="Calibri" pitchFamily="34" charset="-120"/>
+              </a:rPr>
+              <a:t>A comparison </a:t>
+            </a:r>
+            <a:r>
               <a:rPr lang="en-US" sz="1800" dirty="0">
                 <a:solidFill>
                   <a:srgbClr val="CADCFC"/>
@@ -1948,7 +1970,18 @@
                 <a:ea typeface="Calibri" pitchFamily="34" charset="-122"/>
                 <a:cs typeface="Calibri" pitchFamily="34" charset="-120"/>
               </a:rPr>
-              <a:t>A systematic comparison of deep-learning architectures for real-vs-fake speech, with cross-dataset evaluation</a:t>
+              <a:t>of deep-learning architectures for real-vs-fake speech, with cross-dataset </a:t>
+            </a:r>
+            <a:r>
+              <a:rPr lang="en-US" sz="1800" dirty="0" smtClean="0">
+                <a:solidFill>
+                  <a:srgbClr val="CADCFC"/>
+                </a:solidFill>
+                <a:latin typeface="Calibri" pitchFamily="34" charset="0"/>
+                <a:ea typeface="Calibri" pitchFamily="34" charset="-122"/>
+                <a:cs typeface="Calibri" pitchFamily="34" charset="-120"/>
+              </a:rPr>
+              <a:t>evaluation.</a:t>
             </a:r>
             <a:endParaRPr lang="en-US" sz="1800" dirty="0"/>
           </a:p>
@@ -1979,13 +2012,58 @@
               <a:buNone/>
             </a:pPr>
             <a:r>
+              <a:rPr lang="en-US" dirty="0" smtClean="0">
+                <a:solidFill>
+                  <a:schemeClr val="bg1"/>
+                </a:solidFill>
+              </a:rPr>
+              <a:t>2</a:t>
+            </a:r>
+            <a:r>
+              <a:rPr lang="en-US" baseline="30000" dirty="0" smtClean="0">
+                <a:solidFill>
+                  <a:schemeClr val="bg1"/>
+                </a:solidFill>
+              </a:rPr>
+              <a:t>nd</a:t>
+            </a:r>
+            <a:r>
+              <a:rPr lang="en-US" dirty="0" smtClean="0">
+                <a:solidFill>
+                  <a:schemeClr val="bg1"/>
+                </a:solidFill>
+              </a:rPr>
+              <a:t> Semester Deep </a:t>
+            </a:r>
+            <a:r>
               <a:rPr lang="en-US" dirty="0">
                 <a:solidFill>
                   <a:schemeClr val="bg1"/>
                 </a:solidFill>
               </a:rPr>
-              <a:t>Deep Learning course project</a:t>
-            </a:r>
+              <a:t>Learning </a:t>
+            </a:r>
+            <a:r>
+              <a:rPr lang="en-US" dirty="0">
+                <a:solidFill>
+                  <a:schemeClr val="bg1"/>
+                </a:solidFill>
+              </a:rPr>
+              <a:t>P</a:t>
+            </a:r>
+            <a:r>
+              <a:rPr lang="en-US" dirty="0" smtClean="0">
+                <a:solidFill>
+                  <a:schemeClr val="bg1"/>
+                </a:solidFill>
+              </a:rPr>
+              <a:t>roject</a:t>
+            </a:r>
+            <a:endParaRPr lang="en-US" dirty="0">
+              <a:solidFill>
+                <a:schemeClr val="bg1"/>
+              </a:solidFill>
+            </a:endParaRPr>
           </a:p>
         </p:txBody>
       </p:sp>
@@ -5722,7 +5800,18 @@
                 <a:ea typeface="Trebuchet MS" pitchFamily="34" charset="-122"/>
                 <a:cs typeface="Trebuchet MS" pitchFamily="34" charset="-120"/>
               </a:rPr>
-              <a:t>Why this problem, and why it's hard</a:t>
+              <a:t>Why this </a:t>
+            </a:r>
+            <a:r>
+              <a:rPr lang="en-US" sz="2800" b="1" dirty="0" smtClean="0">
+                <a:solidFill>
+                  <a:srgbClr val="22303A"/>
+                </a:solidFill>
+                <a:latin typeface="Trebuchet MS" pitchFamily="34" charset="0"/>
+                <a:ea typeface="Trebuchet MS" pitchFamily="34" charset="-122"/>
+                <a:cs typeface="Trebuchet MS" pitchFamily="34" charset="-120"/>
+              </a:rPr>
+              <a:t>problem?</a:t>
             </a:r>
             <a:endParaRPr lang="en-US" sz="2800" dirty="0"/>
           </a:p>
@@ -6412,7 +6501,7 @@
           <p:nvPr>
             <p:extLst>
               <p:ext uri="{D42A27DB-BD31-4B8C-83A1-F6EECF244321}">
-                <p14:modId xmlns:p14="http://schemas.microsoft.com/office/powerpoint/2010/main" val="696012842"/>
+                <p14:modId xmlns:p14="http://schemas.microsoft.com/office/powerpoint/2010/main" val="2285160874"/>
               </p:ext>
             </p:extLst>
           </p:nvPr>
@@ -6710,8 +6799,22 @@
                     <a:bodyPr/>
                     <a:lstStyle/>
                     <a:p>
-                      <a:pPr marL="0" indent="0" algn="l">
+                      <a:pPr marL="0" marR="0" lvl="0" indent="0" algn="l" defTabSz="914400" rtl="0" eaLnBrk="1" fontAlgn="auto" latinLnBrk="0" hangingPunct="1">
+                        <a:lnSpc>
+                          <a:spcPct val="100000"/>
+                        </a:lnSpc>
+                        <a:spcBef>
+                          <a:spcPts val="0"/>
+                        </a:spcBef>
+                        <a:spcAft>
+                          <a:spcPts val="0"/>
+                        </a:spcAft>
+                        <a:buClrTx/>
+                        <a:buSzTx/>
+                        <a:buFontTx/>
                         <a:buNone/>
+                        <a:tabLst/>
+                        <a:defRPr/>
                       </a:pPr>
                       <a:r>
                         <a:rPr lang="en-US" sz="1400" dirty="0">
@@ -6722,7 +6825,40 @@
                           <a:ea typeface="Calibri" pitchFamily="34" charset="-122"/>
                           <a:cs typeface="Calibri" pitchFamily="34" charset="-120"/>
                         </a:rPr>
-                        <a:t>hand-crafted features (MFCC, chroma, contrast, ZCR)</a:t>
+                        <a:t>hand-crafted features (MFCC, chroma, </a:t>
+                      </a:r>
+                      <a:r>
+                        <a:rPr lang="en-US" sz="1400" dirty="0" smtClean="0">
+                          <a:solidFill>
+                            <a:srgbClr val="22303A"/>
+                          </a:solidFill>
+                          <a:latin typeface="Calibri" pitchFamily="34" charset="0"/>
+                          <a:ea typeface="Calibri" pitchFamily="34" charset="-122"/>
+                          <a:cs typeface="Calibri" pitchFamily="34" charset="-120"/>
+                        </a:rPr>
+                        <a:t>contrast, N_MFCC:20, N_FTT:128, HOP:256,</a:t>
+                      </a:r>
+                      <a:r>
+                        <a:rPr lang="en-US" sz="1400" baseline="0" dirty="0" smtClean="0">
+                          <a:solidFill>
+                            <a:srgbClr val="22303A"/>
+                          </a:solidFill>
+                          <a:latin typeface="Calibri" pitchFamily="34" charset="0"/>
+                          <a:ea typeface="Calibri" pitchFamily="34" charset="-122"/>
+                          <a:cs typeface="Calibri" pitchFamily="34" charset="-120"/>
+                        </a:rPr>
+                        <a:t> N_MEL:128</a:t>
+                      </a:r>
+                      <a:r>
+                        <a:rPr lang="en-US" sz="1400" dirty="0" smtClean="0">
+                          <a:solidFill>
+                            <a:srgbClr val="22303A"/>
+                          </a:solidFill>
+                          <a:latin typeface="Calibri" pitchFamily="34" charset="0"/>
+                          <a:ea typeface="Calibri" pitchFamily="34" charset="-122"/>
+                          <a:cs typeface="Calibri" pitchFamily="34" charset="-120"/>
+                        </a:rPr>
+                        <a:t>)</a:t>
                       </a:r>
                       <a:endParaRPr lang="en-US" sz="1400" dirty="0">
                         <a:latin typeface="Calibri" charset="0"/>
@@ -6920,7 +7056,7 @@
                         <a:buNone/>
                       </a:pPr>
                       <a:r>
-                        <a:rPr lang="en-US" sz="1400" dirty="0">
+                        <a:rPr lang="en-US" sz="1400" dirty="0" err="1" smtClean="0">
                           <a:solidFill>
                             <a:srgbClr val="22303A"/>
                           </a:solidFill>
@@ -6928,7 +7064,51 @@
                           <a:ea typeface="Calibri" pitchFamily="34" charset="-122"/>
                           <a:cs typeface="Calibri" pitchFamily="34" charset="-120"/>
                         </a:rPr>
-                        <a:t>mel-spectrogram</a:t>
+                        <a:t>mel</a:t>
+                      </a:r>
+                      <a:r>
+                        <a:rPr lang="en-US" sz="1400" dirty="0" smtClean="0">
+                          <a:solidFill>
+                            <a:srgbClr val="22303A"/>
+                          </a:solidFill>
+                          <a:latin typeface="Calibri" pitchFamily="34" charset="0"/>
+                          <a:ea typeface="Calibri" pitchFamily="34" charset="-122"/>
+                          <a:cs typeface="Calibri" pitchFamily="34" charset="-120"/>
+                        </a:rPr>
+                        <a:t>-spectrogram (SR:16kHz,</a:t>
+                      </a:r>
+                      <a:r>
+                        <a:rPr lang="en-US" sz="1400" baseline="0" dirty="0" smtClean="0">
+                          <a:solidFill>
+                            <a:srgbClr val="22303A"/>
+                          </a:solidFill>
+                          <a:latin typeface="Calibri" pitchFamily="34" charset="0"/>
+                          <a:ea typeface="Calibri" pitchFamily="34" charset="-122"/>
+                          <a:cs typeface="Calibri" pitchFamily="34" charset="-120"/>
+                        </a:rPr>
+                        <a:t> </a:t>
+                      </a:r>
+                      <a:r>
+                        <a:rPr lang="en-US" sz="1400" baseline="0" dirty="0" err="1" smtClean="0">
+                          <a:solidFill>
+                            <a:srgbClr val="22303A"/>
+                          </a:solidFill>
+                          <a:latin typeface="Calibri" pitchFamily="34" charset="0"/>
+                          <a:ea typeface="Calibri" pitchFamily="34" charset="-122"/>
+                          <a:cs typeface="Calibri" pitchFamily="34" charset="-120"/>
+                        </a:rPr>
+                        <a:t>max_dur</a:t>
+                      </a:r>
+                      <a:r>
+                        <a:rPr lang="en-US" sz="1400" baseline="0" dirty="0" smtClean="0">
+                          <a:solidFill>
+                            <a:srgbClr val="22303A"/>
+                          </a:solidFill>
+                          <a:latin typeface="Calibri" pitchFamily="34" charset="0"/>
+                          <a:ea typeface="Calibri" pitchFamily="34" charset="-122"/>
+                          <a:cs typeface="Calibri" pitchFamily="34" charset="-120"/>
+                        </a:rPr>
+                        <a:t>: 8.5s, N_FFT:1024 HOP:256, N_MELS:128)</a:t>
                       </a:r>
                       <a:endParaRPr lang="en-US" sz="1400" dirty="0">
                         <a:latin typeface="Calibri" charset="0"/>
@@ -7419,7 +7599,51 @@
                           <a:ea typeface="Calibri" pitchFamily="34" charset="-122"/>
                           <a:cs typeface="Calibri" pitchFamily="34" charset="-120"/>
                         </a:rPr>
-                        <a:t>self-supervised transformer: frozen </a:t>
+                        <a:t>self-supervised </a:t>
+                      </a:r>
+                      <a:r>
+                        <a:rPr lang="en-US" sz="1400" dirty="0" smtClean="0">
+                          <a:solidFill>
+                            <a:srgbClr val="22303A"/>
+                          </a:solidFill>
+                          <a:latin typeface="Calibri" pitchFamily="34" charset="0"/>
+                          <a:ea typeface="Calibri" pitchFamily="34" charset="-122"/>
+                          <a:cs typeface="Calibri" pitchFamily="34" charset="-120"/>
+                        </a:rPr>
+                        <a:t>transformer with</a:t>
+                      </a:r>
+                      <a:r>
+                        <a:rPr lang="en-US" sz="1400" baseline="0" dirty="0" smtClean="0">
+                          <a:solidFill>
+                            <a:srgbClr val="22303A"/>
+                          </a:solidFill>
+                          <a:latin typeface="Calibri" pitchFamily="34" charset="0"/>
+                          <a:ea typeface="Calibri" pitchFamily="34" charset="-122"/>
+                          <a:cs typeface="Calibri" pitchFamily="34" charset="-120"/>
+                        </a:rPr>
+                        <a:t> a classification head</a:t>
+                      </a:r>
+                      <a:r>
+                        <a:rPr lang="en-US" sz="1400" dirty="0" smtClean="0">
+                          <a:solidFill>
+                            <a:srgbClr val="22303A"/>
+                          </a:solidFill>
+                          <a:latin typeface="Calibri" pitchFamily="34" charset="0"/>
+                          <a:ea typeface="Calibri" pitchFamily="34" charset="-122"/>
+                          <a:cs typeface="Calibri" pitchFamily="34" charset="-120"/>
+                        </a:rPr>
+                        <a:t>: </a:t>
+                      </a:r>
+                      <a:r>
+                        <a:rPr lang="en-US" sz="1400" dirty="0">
+                          <a:solidFill>
+                            <a:srgbClr val="22303A"/>
+                          </a:solidFill>
+                          <a:latin typeface="Calibri" pitchFamily="34" charset="0"/>
+                          <a:ea typeface="Calibri" pitchFamily="34" charset="-122"/>
+                          <a:cs typeface="Calibri" pitchFamily="34" charset="-120"/>
+                        </a:rPr>
+                        <a:t>frozen </a:t>
                       </a:r>
                       <a:r>
                         <a:rPr lang="en-US" sz="1400" dirty="0" smtClean="0">
@@ -7530,7 +7754,29 @@
                 <a:ea typeface="Calibri" pitchFamily="34" charset="-122"/>
                 <a:cs typeface="Calibri" pitchFamily="34" charset="-120"/>
               </a:rPr>
-              <a:t>Families 1–3: focused one-axis sweeps (capacity, LR, regularisation) with interpretation.  </a:t>
+              <a:t>Families 1–3: focused one-axis sweeps (capacity, LR, </a:t>
+            </a:r>
+            <a:r>
+              <a:rPr lang="en-US" sz="1300" i="1" dirty="0" err="1">
+                <a:solidFill>
+                  <a:srgbClr val="6B7B85"/>
+                </a:solidFill>
+                <a:latin typeface="Calibri" pitchFamily="34" charset="0"/>
+                <a:ea typeface="Calibri" pitchFamily="34" charset="-122"/>
+                <a:cs typeface="Calibri" pitchFamily="34" charset="-120"/>
+              </a:rPr>
+              <a:t>regularisation</a:t>
+            </a:r>
+            <a:r>
+              <a:rPr lang="en-US" sz="1300" i="1" dirty="0" smtClean="0">
+                <a:solidFill>
+                  <a:srgbClr val="6B7B85"/>
+                </a:solidFill>
+                <a:latin typeface="Calibri" pitchFamily="34" charset="0"/>
+                <a:ea typeface="Calibri" pitchFamily="34" charset="-122"/>
+                <a:cs typeface="Calibri" pitchFamily="34" charset="-120"/>
+              </a:rPr>
+              <a:t>).  </a:t>
             </a:r>
             <a:endParaRPr lang="en-US" sz="1300" i="1" dirty="0" smtClean="0">
               <a:solidFill>
@@ -7781,7 +8027,29 @@
                 <a:ea typeface="Trebuchet MS" pitchFamily="34" charset="-122"/>
                 <a:cs typeface="Trebuchet MS" pitchFamily="34" charset="-120"/>
               </a:rPr>
-              <a:t>Cross-dataset protocol, leakage control, metrics</a:t>
+              <a:t>Cross-dataset </a:t>
+            </a:r>
+            <a:r>
+              <a:rPr lang="en-US" sz="2800" b="1" dirty="0" smtClean="0">
+                <a:solidFill>
+                  <a:srgbClr val="22303A"/>
+                </a:solidFill>
+                <a:latin typeface="Trebuchet MS" pitchFamily="34" charset="0"/>
+                <a:ea typeface="Trebuchet MS" pitchFamily="34" charset="-122"/>
+                <a:cs typeface="Trebuchet MS" pitchFamily="34" charset="-120"/>
+              </a:rPr>
+              <a:t>evaluation, </a:t>
+            </a:r>
+            <a:r>
+              <a:rPr lang="en-US" sz="2800" b="1" dirty="0">
+                <a:solidFill>
+                  <a:srgbClr val="22303A"/>
+                </a:solidFill>
+                <a:latin typeface="Trebuchet MS" pitchFamily="34" charset="0"/>
+                <a:ea typeface="Trebuchet MS" pitchFamily="34" charset="-122"/>
+                <a:cs typeface="Trebuchet MS" pitchFamily="34" charset="-120"/>
+              </a:rPr>
+              <a:t>leakage control, metrics</a:t>
             </a:r>
             <a:endParaRPr lang="en-US" sz="2800" dirty="0"/>
           </a:p>
@@ -7920,7 +8188,7 @@
                 <a:ea typeface="Calibri" pitchFamily="34" charset="-122"/>
                 <a:cs typeface="Calibri" pitchFamily="34" charset="-120"/>
               </a:rPr>
-              <a:t>FoR (for-norm) for train + validation (in-domain</a:t>
+              <a:t>FoR (for-norm) for </a:t>
             </a:r>
             <a:r>
               <a:rPr lang="en-US" sz="1250" dirty="0" smtClean="0">
@@ -7931,8 +8199,38 @@
                 <a:ea typeface="Calibri" pitchFamily="34" charset="-122"/>
                 <a:cs typeface="Calibri" pitchFamily="34" charset="-120"/>
               </a:rPr>
-              <a:t>)</a:t>
-            </a:r>
+              <a:t>train (53.868 samples) </a:t>
+            </a:r>
+            <a:r>
+              <a:rPr lang="en-US" sz="1250" dirty="0">
+                <a:solidFill>
+                  <a:srgbClr val="3A4750"/>
+                </a:solidFill>
+                <a:latin typeface="Calibri" pitchFamily="34" charset="0"/>
+                <a:ea typeface="Calibri" pitchFamily="34" charset="-122"/>
+                <a:cs typeface="Calibri" pitchFamily="34" charset="-120"/>
+              </a:rPr>
+              <a:t>+ validation </a:t>
+            </a:r>
+            <a:r>
+              <a:rPr lang="en-US" sz="1250" dirty="0" smtClean="0">
+                <a:solidFill>
+                  <a:srgbClr val="3A4750"/>
+                </a:solidFill>
+                <a:latin typeface="Calibri" pitchFamily="34" charset="0"/>
+                <a:ea typeface="Calibri" pitchFamily="34" charset="-122"/>
+                <a:cs typeface="Calibri" pitchFamily="34" charset="-120"/>
+              </a:rPr>
+              <a:t>(4.634 samples).</a:t>
+            </a:r>
+            <a:endParaRPr lang="en-US" sz="1250" dirty="0" smtClean="0">
+              <a:solidFill>
+                <a:srgbClr val="3A4750"/>
+              </a:solidFill>
+              <a:latin typeface="Calibri" pitchFamily="34" charset="0"/>
+              <a:ea typeface="Calibri" pitchFamily="34" charset="-122"/>
+              <a:cs typeface="Calibri" pitchFamily="34" charset="-120"/>
+            </a:endParaRPr>
           </a:p>
           <a:p>
             <a:pPr marL="0" indent="0">
@@ -7947,29 +8245,7 @@
                 <a:ea typeface="Calibri" pitchFamily="34" charset="-122"/>
                 <a:cs typeface="Calibri" pitchFamily="34" charset="-120"/>
               </a:rPr>
-              <a:t>In-the-Wild </a:t>
-            </a:r>
-            <a:r>
-              <a:rPr lang="en-US" sz="1250" dirty="0">
-                <a:solidFill>
-                  <a:srgbClr val="3A4750"/>
-                </a:solidFill>
-                <a:latin typeface="Calibri" pitchFamily="34" charset="0"/>
-                <a:ea typeface="Calibri" pitchFamily="34" charset="-122"/>
-                <a:cs typeface="Calibri" pitchFamily="34" charset="-120"/>
-              </a:rPr>
-              <a:t>for test </a:t>
-            </a:r>
-            <a:r>
-              <a:rPr lang="en-US" sz="1250" dirty="0" smtClean="0">
-                <a:solidFill>
-                  <a:srgbClr val="3A4750"/>
-                </a:solidFill>
-                <a:latin typeface="Calibri" pitchFamily="34" charset="0"/>
-                <a:ea typeface="Calibri" pitchFamily="34" charset="-122"/>
-                <a:cs typeface="Calibri" pitchFamily="34" charset="-120"/>
-              </a:rPr>
-              <a:t>only, so results measure true </a:t>
+              <a:t>In-the-Wild (31.779 samples) for test only, so results measure true </a:t>
             </a:r>
             <a:r>
               <a:rPr lang="en-US" sz="1250" dirty="0" err="1" smtClean="0">
@@ -8269,7 +8545,51 @@
                 <a:ea typeface="Calibri" pitchFamily="34" charset="-122"/>
                 <a:cs typeface="Calibri" pitchFamily="34" charset="-120"/>
               </a:rPr>
-              <a:t>16 kHz mono; fixed-duration crop/pad. Feature scalers fit on clean training data only. </a:t>
+              <a:t>16 kHz </a:t>
+            </a:r>
+            <a:r>
+              <a:rPr lang="en-US" sz="1250" dirty="0" smtClean="0">
+                <a:solidFill>
+                  <a:srgbClr val="3A4750"/>
+                </a:solidFill>
+                <a:latin typeface="Calibri" pitchFamily="34" charset="0"/>
+                <a:ea typeface="Calibri" pitchFamily="34" charset="-122"/>
+                <a:cs typeface="Calibri" pitchFamily="34" charset="-120"/>
+              </a:rPr>
+              <a:t>mono, </a:t>
+            </a:r>
+            <a:r>
+              <a:rPr lang="en-US" sz="1250" dirty="0">
+                <a:solidFill>
+                  <a:srgbClr val="3A4750"/>
+                </a:solidFill>
+                <a:latin typeface="Calibri" pitchFamily="34" charset="0"/>
+                <a:ea typeface="Calibri" pitchFamily="34" charset="-122"/>
+                <a:cs typeface="Calibri" pitchFamily="34" charset="-120"/>
+              </a:rPr>
+              <a:t>fixed-duration </a:t>
+            </a:r>
+            <a:r>
+              <a:rPr lang="en-US" sz="1250" dirty="0" smtClean="0">
+                <a:solidFill>
+                  <a:srgbClr val="3A4750"/>
+                </a:solidFill>
+                <a:latin typeface="Calibri" pitchFamily="34" charset="0"/>
+                <a:ea typeface="Calibri" pitchFamily="34" charset="-122"/>
+                <a:cs typeface="Calibri" pitchFamily="34" charset="-120"/>
+              </a:rPr>
+              <a:t>crop/pad</a:t>
+            </a:r>
+            <a:r>
+              <a:rPr lang="en-US" sz="1250" dirty="0">
+                <a:solidFill>
+                  <a:srgbClr val="3A4750"/>
+                </a:solidFill>
+                <a:latin typeface="Calibri" pitchFamily="34" charset="0"/>
+                <a:ea typeface="Calibri" pitchFamily="34" charset="-122"/>
+                <a:cs typeface="Calibri" pitchFamily="34" charset="-120"/>
+              </a:rPr>
+              <a:t>. Feature scalers fit on clean training data only. </a:t>
             </a:r>
             <a:r>
               <a:rPr lang="en-US" sz="1250" dirty="0" smtClean="0">
@@ -8452,7 +8772,29 @@
                 <a:ea typeface="Calibri" pitchFamily="34" charset="-122"/>
                 <a:cs typeface="Calibri" pitchFamily="34" charset="-120"/>
               </a:rPr>
-              <a:t>AUC-ROC (primary, threshold-free), accuracy, macro-F1, per-class P/R/F1</a:t>
+              <a:t>AUC-ROC (</a:t>
+            </a:r>
+            <a:r>
+              <a:rPr lang="en-US" sz="1250" dirty="0" smtClean="0">
+                <a:solidFill>
+                  <a:srgbClr val="3A4750"/>
+                </a:solidFill>
+                <a:latin typeface="Calibri" pitchFamily="34" charset="0"/>
+                <a:ea typeface="Calibri" pitchFamily="34" charset="-122"/>
+                <a:cs typeface="Calibri" pitchFamily="34" charset="-120"/>
+              </a:rPr>
+              <a:t>primary), </a:t>
+            </a:r>
+            <a:r>
+              <a:rPr lang="en-US" sz="1250" dirty="0">
+                <a:solidFill>
+                  <a:srgbClr val="3A4750"/>
+                </a:solidFill>
+                <a:latin typeface="Calibri" pitchFamily="34" charset="0"/>
+                <a:ea typeface="Calibri" pitchFamily="34" charset="-122"/>
+                <a:cs typeface="Calibri" pitchFamily="34" charset="-120"/>
+              </a:rPr>
+              <a:t>accuracy, macro-F1, per-class P/R/F1</a:t>
             </a:r>
             <a:r>
               <a:rPr lang="en-US" sz="1250" dirty="0" smtClean="0">
@@ -8698,45 +9040,6 @@
       </p:sp>
       <p:sp>
         <p:nvSpPr>
-          <p:cNvPr id="6" name="Text 3"/>
-          <p:cNvSpPr/>
-          <p:nvPr/>
-        </p:nvSpPr>
-        <p:spPr>
-          <a:xfrm>
-            <a:off x="731520" y="5641848"/>
-            <a:ext cx="7315200" cy="320040"/>
-          </a:xfrm>
-          <a:prstGeom prst="rect">
-            <a:avLst/>
-          </a:prstGeom>
-          <a:noFill/>
-          <a:ln/>
-        </p:spPr>
-        <p:txBody>
-          <a:bodyPr wrap="square" lIns="0" tIns="0" rIns="0" bIns="0" rtlCol="0" anchor="ctr"/>
-          <a:lstStyle/>
-          <a:p>
-            <a:pPr marL="0" indent="0" algn="ctr">
-              <a:buNone/>
-            </a:pPr>
-            <a:r>
-              <a:rPr lang="en-US" sz="1100" i="1" dirty="0">
-                <a:solidFill>
-                  <a:srgbClr val="6B7B85"/>
-                </a:solidFill>
-                <a:latin typeface="Calibri" pitchFamily="34" charset="0"/>
-                <a:ea typeface="Calibri" pitchFamily="34" charset="-122"/>
-                <a:cs typeface="Calibri" pitchFamily="34" charset="-120"/>
-              </a:rPr>
-              <a:t>Each panel varies one hyperparameter, others fixed at baseline</a:t>
-            </a:r>
-            <a:endParaRPr lang="en-US" sz="1100" dirty="0"/>
-          </a:p>
-        </p:txBody>
-      </p:sp>
-      <p:sp>
-        <p:nvSpPr>
           <p:cNvPr id="7" name="Text 4"/>
           <p:cNvSpPr/>
           <p:nvPr/>
@@ -8891,7 +9194,7 @@
           </a:p>
           <a:p>
             <a:r>
-              <a:rPr lang="en-US" sz="950" b="1" dirty="0">
+              <a:rPr lang="en-US" sz="1050" b="1" dirty="0">
                 <a:solidFill>
                   <a:srgbClr val="0E9594"/>
                 </a:solidFill>
@@ -8899,14 +9202,14 @@
               <a:t>Baseline </a:t>
             </a:r>
             <a:r>
-              <a:rPr lang="en-US" sz="950" b="1" dirty="0" err="1">
+              <a:rPr lang="en-US" sz="1050" b="1" dirty="0" err="1">
                 <a:solidFill>
                   <a:srgbClr val="0E9594"/>
                 </a:solidFill>
               </a:rPr>
               <a:t>config</a:t>
             </a:r>
-            <a:endParaRPr lang="en-US" sz="950" b="1" dirty="0">
+            <a:endParaRPr lang="en-US" sz="1050" b="1" dirty="0">
               <a:solidFill>
                 <a:srgbClr val="0E9594"/>
               </a:solidFill>
@@ -8914,7 +9217,7 @@
           </a:p>
           <a:p>
             <a:r>
-              <a:rPr lang="en-US" sz="900" dirty="0">
+              <a:rPr lang="en-US" sz="1050" dirty="0">
                 <a:solidFill>
                   <a:srgbClr val="5C6B73"/>
                 </a:solidFill>
@@ -8922,7 +9225,7 @@
               <a:t>Hidden layers: </a:t>
             </a:r>
             <a:r>
-              <a:rPr lang="en-US" sz="900" dirty="0">
+              <a:rPr lang="en-US" sz="1050" dirty="0">
                 <a:solidFill>
                   <a:srgbClr val="22303A"/>
                 </a:solidFill>
@@ -8932,7 +9235,7 @@
           </a:p>
           <a:p>
             <a:r>
-              <a:rPr lang="en-US" sz="900" dirty="0">
+              <a:rPr lang="en-US" sz="1050" dirty="0">
                 <a:solidFill>
                   <a:srgbClr val="5C6B73"/>
                 </a:solidFill>
@@ -8940,7 +9243,7 @@
               <a:t>Learning rate: </a:t>
             </a:r>
             <a:r>
-              <a:rPr lang="en-US" sz="900" dirty="0">
+              <a:rPr lang="en-US" sz="1050" dirty="0">
                 <a:solidFill>
                   <a:srgbClr val="22303A"/>
                 </a:solidFill>
@@ -8950,7 +9253,7 @@
           </a:p>
           <a:p>
             <a:r>
-              <a:rPr lang="en-US" sz="900" dirty="0">
+              <a:rPr lang="en-US" sz="1050" dirty="0">
                 <a:solidFill>
                   <a:srgbClr val="5C6B73"/>
                 </a:solidFill>
@@ -8958,7 +9261,7 @@
               <a:t>Dropout / </a:t>
             </a:r>
             <a:r>
-              <a:rPr lang="en-US" sz="900" dirty="0" err="1">
+              <a:rPr lang="en-US" sz="1050" dirty="0" err="1">
                 <a:solidFill>
                   <a:srgbClr val="5C6B73"/>
                 </a:solidFill>
@@ -8966,7 +9269,7 @@
               <a:t>wd</a:t>
             </a:r>
             <a:r>
-              <a:rPr lang="en-US" sz="900" dirty="0">
+              <a:rPr lang="en-US" sz="1050" dirty="0">
                 <a:solidFill>
                   <a:srgbClr val="5C6B73"/>
                 </a:solidFill>
@@ -8974,7 +9277,7 @@
               <a:t>: </a:t>
             </a:r>
             <a:r>
-              <a:rPr lang="en-US" sz="900" dirty="0">
+              <a:rPr lang="en-US" sz="1050" dirty="0">
                 <a:solidFill>
                   <a:srgbClr val="22303A"/>
                 </a:solidFill>
@@ -8984,7 +9287,7 @@
           </a:p>
           <a:p>
             <a:r>
-              <a:rPr lang="en-US" sz="900" b="1" dirty="0">
+              <a:rPr lang="en-US" sz="1050" b="1" dirty="0">
                 <a:solidFill>
                   <a:srgbClr val="0E9594"/>
                 </a:solidFill>
@@ -8993,7 +9296,7 @@
             </a:r>
           </a:p>
           <a:p>
-            <a:endParaRPr lang="en-US" sz="900" b="1" dirty="0">
+            <a:endParaRPr lang="en-US" sz="1050" b="1" dirty="0">
               <a:solidFill>
                 <a:srgbClr val="0E9594"/>
               </a:solidFill>
@@ -9001,7 +9304,7 @@
           </a:p>
           <a:p>
             <a:r>
-              <a:rPr lang="en-US" sz="950" b="1" dirty="0">
+              <a:rPr lang="en-US" sz="1050" b="1" dirty="0">
                 <a:solidFill>
                   <a:srgbClr val="C9971B"/>
                 </a:solidFill>
@@ -9009,14 +9312,14 @@
               <a:t>Best </a:t>
             </a:r>
             <a:r>
-              <a:rPr lang="en-US" sz="950" b="1" dirty="0" err="1">
+              <a:rPr lang="en-US" sz="1050" b="1" dirty="0" err="1">
                 <a:solidFill>
                   <a:srgbClr val="C9971B"/>
                 </a:solidFill>
               </a:rPr>
               <a:t>config</a:t>
             </a:r>
-            <a:endParaRPr lang="en-US" sz="950" b="1" dirty="0">
+            <a:endParaRPr lang="en-US" sz="1050" b="1" dirty="0">
               <a:solidFill>
                 <a:srgbClr val="C9971B"/>
               </a:solidFill>
@@ -9024,7 +9327,7 @@
           </a:p>
           <a:p>
             <a:r>
-              <a:rPr lang="en-US" sz="900" dirty="0">
+              <a:rPr lang="en-US" sz="1050" dirty="0">
                 <a:solidFill>
                   <a:srgbClr val="5C6B73"/>
                 </a:solidFill>
@@ -9032,7 +9335,7 @@
               <a:t>Hidden layers: </a:t>
             </a:r>
             <a:r>
-              <a:rPr lang="en-US" sz="900" dirty="0">
+              <a:rPr lang="en-US" sz="1050" dirty="0">
                 <a:solidFill>
                   <a:srgbClr val="22303A"/>
                 </a:solidFill>
@@ -9042,7 +9345,7 @@
           </a:p>
           <a:p>
             <a:r>
-              <a:rPr lang="en-US" sz="900" dirty="0">
+              <a:rPr lang="en-US" sz="1050" b="1" dirty="0">
                 <a:solidFill>
                   <a:srgbClr val="5C6B73"/>
                 </a:solidFill>
@@ -9050,17 +9353,22 @@
               <a:t>Learning rate: </a:t>
             </a:r>
             <a:r>
-              <a:rPr lang="en-US" sz="900" dirty="0">
-                <a:solidFill>
-                  <a:srgbClr val="22303A"/>
-                </a:solidFill>
-              </a:rPr>
-              <a:t>1e-3  ← only change</a:t>
-            </a:r>
-          </a:p>
-          <a:p>
-            <a:r>
-              <a:rPr lang="en-US" sz="900" dirty="0">
+              <a:rPr lang="en-US" sz="1050" b="1" dirty="0" smtClean="0">
+                <a:solidFill>
+                  <a:srgbClr val="22303A"/>
+                </a:solidFill>
+              </a:rPr>
+              <a:t>1e-3</a:t>
+            </a:r>
+            <a:endParaRPr lang="en-US" sz="1050" b="1" dirty="0">
+              <a:solidFill>
+                <a:srgbClr val="22303A"/>
+              </a:solidFill>
+            </a:endParaRPr>
+          </a:p>
+          <a:p>
+            <a:r>
+              <a:rPr lang="en-US" sz="1050" dirty="0">
                 <a:solidFill>
                   <a:srgbClr val="5C6B73"/>
                 </a:solidFill>
@@ -9068,7 +9376,7 @@
               <a:t>Dropout / </a:t>
             </a:r>
             <a:r>
-              <a:rPr lang="en-US" sz="900" dirty="0" err="1">
+              <a:rPr lang="en-US" sz="1050" dirty="0" err="1">
                 <a:solidFill>
                   <a:srgbClr val="5C6B73"/>
                 </a:solidFill>
@@ -9076,7 +9384,7 @@
               <a:t>wd</a:t>
             </a:r>
             <a:r>
-              <a:rPr lang="en-US" sz="900" dirty="0">
+              <a:rPr lang="en-US" sz="1050" dirty="0">
                 <a:solidFill>
                   <a:srgbClr val="5C6B73"/>
                 </a:solidFill>
@@ -9084,7 +9392,7 @@
               <a:t>: </a:t>
             </a:r>
             <a:r>
-              <a:rPr lang="en-US" sz="900" dirty="0">
+              <a:rPr lang="en-US" sz="1050" dirty="0">
                 <a:solidFill>
                   <a:srgbClr val="22303A"/>
                 </a:solidFill>
@@ -9094,7 +9402,7 @@
           </a:p>
           <a:p>
             <a:r>
-              <a:rPr lang="en-US" sz="900" b="1" dirty="0">
+              <a:rPr lang="en-US" sz="1050" b="1" dirty="0">
                 <a:solidFill>
                   <a:srgbClr val="C9971B"/>
                 </a:solidFill>
@@ -9198,8 +9506,8 @@
         </p:blipFill>
         <p:spPr>
           <a:xfrm>
-            <a:off x="731520" y="1691640"/>
-            <a:ext cx="7315200" cy="3931920"/>
+            <a:off x="293458" y="1435608"/>
+            <a:ext cx="7825563" cy="4206240"/>
           </a:xfrm>
           <a:prstGeom prst="rect">
             <a:avLst/>
@@ -9357,45 +9665,6 @@
       </p:sp>
       <p:sp>
         <p:nvSpPr>
-          <p:cNvPr id="6" name="Text 3"/>
-          <p:cNvSpPr/>
-          <p:nvPr/>
-        </p:nvSpPr>
-        <p:spPr>
-          <a:xfrm>
-            <a:off x="731520" y="5641848"/>
-            <a:ext cx="7315200" cy="320040"/>
-          </a:xfrm>
-          <a:prstGeom prst="rect">
-            <a:avLst/>
-          </a:prstGeom>
-          <a:noFill/>
-          <a:ln/>
-        </p:spPr>
-        <p:txBody>
-          <a:bodyPr wrap="square" lIns="0" tIns="0" rIns="0" bIns="0" rtlCol="0" anchor="ctr"/>
-          <a:lstStyle/>
-          <a:p>
-            <a:pPr marL="0" indent="0" algn="ctr">
-              <a:buNone/>
-            </a:pPr>
-            <a:r>
-              <a:rPr lang="en-US" sz="1100" i="1" dirty="0">
-                <a:solidFill>
-                  <a:srgbClr val="6B7B85"/>
-                </a:solidFill>
-                <a:latin typeface="Calibri" pitchFamily="34" charset="0"/>
-                <a:ea typeface="Calibri" pitchFamily="34" charset="-122"/>
-                <a:cs typeface="Calibri" pitchFamily="34" charset="-120"/>
-              </a:rPr>
-              <a:t>One-axis sweeps around the baseline config</a:t>
-            </a:r>
-            <a:endParaRPr lang="en-US" sz="1100" dirty="0"/>
-          </a:p>
-        </p:txBody>
-      </p:sp>
-      <p:sp>
-        <p:nvSpPr>
           <p:cNvPr id="7" name="Text 4"/>
           <p:cNvSpPr/>
           <p:nvPr/>
@@ -9495,40 +9764,27 @@
                 <a:ea typeface="Calibri" pitchFamily="34" charset="-122"/>
                 <a:cs typeface="Calibri" pitchFamily="34" charset="-120"/>
               </a:rPr>
-              <a:t>Width: 32 channels ideal; 64 adds nothing.</a:t>
+              <a:t>Width: 32 channels ideal; 64 adds nothing</a:t>
+            </a:r>
+            <a:r>
+              <a:rPr lang="en-US" sz="1400" dirty="0" smtClean="0">
+                <a:solidFill>
+                  <a:srgbClr val="22303A"/>
+                </a:solidFill>
+                <a:latin typeface="Calibri" pitchFamily="34" charset="0"/>
+                <a:ea typeface="Calibri" pitchFamily="34" charset="-122"/>
+                <a:cs typeface="Calibri" pitchFamily="34" charset="-120"/>
+              </a:rPr>
+              <a:t>.</a:t>
             </a:r>
             <a:endParaRPr lang="en-US" sz="1400" dirty="0"/>
           </a:p>
           <a:p>
-            <a:pPr marL="342900" indent="-342900">
-              <a:spcAft>
-                <a:spcPts val="900"/>
-              </a:spcAft>
-              <a:buSzPct val="100000"/>
-              <a:buChar char="•"/>
-            </a:pPr>
-            <a:r>
-              <a:rPr lang="en-US" sz="1400" dirty="0">
-                <a:solidFill>
-                  <a:srgbClr val="22303A"/>
-                </a:solidFill>
-                <a:latin typeface="Calibri" pitchFamily="34" charset="0"/>
-                <a:ea typeface="Calibri" pitchFamily="34" charset="-122"/>
-                <a:cs typeface="Calibri" pitchFamily="34" charset="-120"/>
-              </a:rPr>
-              <a:t>Weight decay 1e-3 is catastrophic — erases the cue; 1e-4 is right.</a:t>
-            </a:r>
             <a:endParaRPr lang="en-US" sz="1400" dirty="0"/>
           </a:p>
           <a:p>
-            <a:endParaRPr lang="en-US" sz="1400" dirty="0"/>
-          </a:p>
-          <a:p>
-            <a:endParaRPr lang="en-US" sz="1400" dirty="0"/>
-          </a:p>
-          <a:p>
-            <a:r>
-              <a:rPr lang="en-US" sz="950" b="1" dirty="0">
+            <a:r>
+              <a:rPr lang="en-US" sz="1050" b="1" dirty="0">
                 <a:solidFill>
                   <a:srgbClr val="0E9594"/>
                 </a:solidFill>
@@ -9536,14 +9792,14 @@
               <a:t>Baseline </a:t>
             </a:r>
             <a:r>
-              <a:rPr lang="en-US" sz="950" b="1" dirty="0" err="1">
+              <a:rPr lang="en-US" sz="1050" b="1" dirty="0" err="1">
                 <a:solidFill>
                   <a:srgbClr val="0E9594"/>
                 </a:solidFill>
               </a:rPr>
               <a:t>config</a:t>
             </a:r>
-            <a:endParaRPr lang="en-US" sz="950" b="1" dirty="0">
+            <a:endParaRPr lang="en-US" sz="1050" b="1" dirty="0">
               <a:solidFill>
                 <a:srgbClr val="0E9594"/>
               </a:solidFill>
@@ -9551,7 +9807,7 @@
           </a:p>
           <a:p>
             <a:r>
-              <a:rPr lang="en-US" sz="900" dirty="0">
+              <a:rPr lang="en-US" sz="1050" dirty="0">
                 <a:solidFill>
                   <a:srgbClr val="5C6B73"/>
                 </a:solidFill>
@@ -9559,7 +9815,7 @@
               <a:t>Conv depth / </a:t>
             </a:r>
             <a:r>
-              <a:rPr lang="en-US" sz="900" dirty="0" err="1">
+              <a:rPr lang="en-US" sz="1050" dirty="0" err="1">
                 <a:solidFill>
                   <a:srgbClr val="5C6B73"/>
                 </a:solidFill>
@@ -9567,7 +9823,7 @@
               <a:t>ch</a:t>
             </a:r>
             <a:r>
-              <a:rPr lang="en-US" sz="900" dirty="0">
+              <a:rPr lang="en-US" sz="1050" dirty="0">
                 <a:solidFill>
                   <a:srgbClr val="5C6B73"/>
                 </a:solidFill>
@@ -9575,7 +9831,7 @@
               <a:t>: </a:t>
             </a:r>
             <a:r>
-              <a:rPr lang="en-US" sz="900" dirty="0">
+              <a:rPr lang="en-US" sz="1050" dirty="0">
                 <a:solidFill>
                   <a:srgbClr val="22303A"/>
                 </a:solidFill>
@@ -9583,14 +9839,14 @@
               <a:t>3 blocks / 32 </a:t>
             </a:r>
             <a:r>
-              <a:rPr lang="en-US" sz="900" dirty="0" err="1">
+              <a:rPr lang="en-US" sz="1050" dirty="0" err="1">
                 <a:solidFill>
                   <a:srgbClr val="22303A"/>
                 </a:solidFill>
               </a:rPr>
               <a:t>ch</a:t>
             </a:r>
-            <a:endParaRPr lang="en-US" sz="900" dirty="0">
+            <a:endParaRPr lang="en-US" sz="1050" dirty="0">
               <a:solidFill>
                 <a:srgbClr val="22303A"/>
               </a:solidFill>
@@ -9598,7 +9854,7 @@
           </a:p>
           <a:p>
             <a:r>
-              <a:rPr lang="en-US" sz="900" dirty="0">
+              <a:rPr lang="en-US" sz="1050" dirty="0">
                 <a:solidFill>
                   <a:srgbClr val="5C6B73"/>
                 </a:solidFill>
@@ -9606,7 +9862,7 @@
               <a:t>Learning rate: </a:t>
             </a:r>
             <a:r>
-              <a:rPr lang="en-US" sz="900" dirty="0">
+              <a:rPr lang="en-US" sz="1050" dirty="0">
                 <a:solidFill>
                   <a:srgbClr val="22303A"/>
                 </a:solidFill>
@@ -9616,7 +9872,7 @@
           </a:p>
           <a:p>
             <a:r>
-              <a:rPr lang="en-US" sz="900" dirty="0">
+              <a:rPr lang="en-US" sz="1050" dirty="0">
                 <a:solidFill>
                   <a:srgbClr val="5C6B73"/>
                 </a:solidFill>
@@ -9624,7 +9880,7 @@
               <a:t>Dropout / </a:t>
             </a:r>
             <a:r>
-              <a:rPr lang="en-US" sz="900" dirty="0" err="1">
+              <a:rPr lang="en-US" sz="1050" dirty="0" err="1">
                 <a:solidFill>
                   <a:srgbClr val="5C6B73"/>
                 </a:solidFill>
@@ -9632,7 +9888,7 @@
               <a:t>wd</a:t>
             </a:r>
             <a:r>
-              <a:rPr lang="en-US" sz="900" dirty="0">
+              <a:rPr lang="en-US" sz="1050" dirty="0">
                 <a:solidFill>
                   <a:srgbClr val="5C6B73"/>
                 </a:solidFill>
@@ -9640,7 +9896,7 @@
               <a:t>: </a:t>
             </a:r>
             <a:r>
-              <a:rPr lang="en-US" sz="900" dirty="0">
+              <a:rPr lang="en-US" sz="1050" dirty="0">
                 <a:solidFill>
                   <a:srgbClr val="22303A"/>
                 </a:solidFill>
@@ -9650,7 +9906,7 @@
           </a:p>
           <a:p>
             <a:r>
-              <a:rPr lang="en-US" sz="900" dirty="0">
+              <a:rPr lang="en-US" sz="1050" dirty="0">
                 <a:solidFill>
                   <a:srgbClr val="5C6B73"/>
                 </a:solidFill>
@@ -9658,7 +9914,7 @@
               <a:t>Note: </a:t>
             </a:r>
             <a:r>
-              <a:rPr lang="en-US" sz="900" dirty="0">
+              <a:rPr lang="en-US" sz="1050" dirty="0">
                 <a:solidFill>
                   <a:srgbClr val="22303A"/>
                 </a:solidFill>
@@ -9666,14 +9922,14 @@
               <a:t>dropout 0.3 beats 0.5 at this </a:t>
             </a:r>
             <a:r>
-              <a:rPr lang="en-US" sz="900" dirty="0" err="1">
+              <a:rPr lang="en-US" sz="1050" dirty="0" err="1">
                 <a:solidFill>
                   <a:srgbClr val="22303A"/>
                 </a:solidFill>
               </a:rPr>
               <a:t>lr</a:t>
             </a:r>
-            <a:endParaRPr lang="en-US" sz="900" dirty="0">
+            <a:endParaRPr lang="en-US" sz="1050" dirty="0">
               <a:solidFill>
                 <a:srgbClr val="22303A"/>
               </a:solidFill>
@@ -9681,7 +9937,7 @@
           </a:p>
           <a:p>
             <a:r>
-              <a:rPr lang="en-US" sz="900" b="1" dirty="0">
+              <a:rPr lang="en-US" sz="1050" b="1" dirty="0">
                 <a:solidFill>
                   <a:srgbClr val="0E9594"/>
                 </a:solidFill>
@@ -9690,7 +9946,7 @@
             </a:r>
           </a:p>
           <a:p>
-            <a:endParaRPr lang="en-US" sz="900" b="1" dirty="0">
+            <a:endParaRPr lang="en-US" sz="1050" b="1" dirty="0">
               <a:solidFill>
                 <a:srgbClr val="0E9594"/>
               </a:solidFill>
@@ -9698,7 +9954,7 @@
           </a:p>
           <a:p>
             <a:r>
-              <a:rPr lang="en-US" sz="950" b="1" dirty="0">
+              <a:rPr lang="en-US" sz="1050" b="1" dirty="0">
                 <a:solidFill>
                   <a:srgbClr val="C9971B"/>
                 </a:solidFill>
@@ -9706,14 +9962,14 @@
               <a:t>Best </a:t>
             </a:r>
             <a:r>
-              <a:rPr lang="en-US" sz="950" b="1" dirty="0" err="1">
+              <a:rPr lang="en-US" sz="1050" b="1" dirty="0" err="1">
                 <a:solidFill>
                   <a:srgbClr val="C9971B"/>
                 </a:solidFill>
               </a:rPr>
               <a:t>config</a:t>
             </a:r>
-            <a:endParaRPr lang="en-US" sz="950" b="1" dirty="0">
+            <a:endParaRPr lang="en-US" sz="1050" b="1" dirty="0">
               <a:solidFill>
                 <a:srgbClr val="C9971B"/>
               </a:solidFill>
@@ -9721,7 +9977,7 @@
           </a:p>
           <a:p>
             <a:r>
-              <a:rPr lang="en-US" sz="900" dirty="0">
+              <a:rPr lang="en-US" sz="1050" dirty="0">
                 <a:solidFill>
                   <a:srgbClr val="5C6B73"/>
                 </a:solidFill>
@@ -9729,7 +9985,7 @@
               <a:t>Conv depth / </a:t>
             </a:r>
             <a:r>
-              <a:rPr lang="en-US" sz="900" dirty="0" err="1">
+              <a:rPr lang="en-US" sz="1050" dirty="0" err="1">
                 <a:solidFill>
                   <a:srgbClr val="5C6B73"/>
                 </a:solidFill>
@@ -9737,7 +9993,7 @@
               <a:t>ch</a:t>
             </a:r>
             <a:r>
-              <a:rPr lang="en-US" sz="900" dirty="0">
+              <a:rPr lang="en-US" sz="1050" dirty="0">
                 <a:solidFill>
                   <a:srgbClr val="5C6B73"/>
                 </a:solidFill>
@@ -9745,7 +10001,7 @@
               <a:t>: </a:t>
             </a:r>
             <a:r>
-              <a:rPr lang="en-US" sz="900" dirty="0">
+              <a:rPr lang="en-US" sz="1050" dirty="0">
                 <a:solidFill>
                   <a:srgbClr val="22303A"/>
                 </a:solidFill>
@@ -9753,14 +10009,14 @@
               <a:t>3 blocks / 32 </a:t>
             </a:r>
             <a:r>
-              <a:rPr lang="en-US" sz="900" dirty="0" err="1">
+              <a:rPr lang="en-US" sz="1050" dirty="0" err="1">
                 <a:solidFill>
                   <a:srgbClr val="22303A"/>
                 </a:solidFill>
               </a:rPr>
               <a:t>ch</a:t>
             </a:r>
-            <a:endParaRPr lang="en-US" sz="900" dirty="0">
+            <a:endParaRPr lang="en-US" sz="1050" dirty="0">
               <a:solidFill>
                 <a:srgbClr val="22303A"/>
               </a:solidFill>
@@ -9768,7 +10024,7 @@
           </a:p>
           <a:p>
             <a:r>
-              <a:rPr lang="en-US" sz="900" dirty="0">
+              <a:rPr lang="en-US" sz="1050" b="1" dirty="0">
                 <a:solidFill>
                   <a:srgbClr val="5C6B73"/>
                 </a:solidFill>
@@ -9776,17 +10032,22 @@
               <a:t>Learning rate: </a:t>
             </a:r>
             <a:r>
-              <a:rPr lang="en-US" sz="900" dirty="0">
-                <a:solidFill>
-                  <a:srgbClr val="22303A"/>
-                </a:solidFill>
-              </a:rPr>
-              <a:t>1e-3  ← only change</a:t>
-            </a:r>
-          </a:p>
-          <a:p>
-            <a:r>
-              <a:rPr lang="en-US" sz="900" dirty="0">
+              <a:rPr lang="en-US" sz="1050" b="1" dirty="0" smtClean="0">
+                <a:solidFill>
+                  <a:srgbClr val="22303A"/>
+                </a:solidFill>
+              </a:rPr>
+              <a:t>1e-3</a:t>
+            </a:r>
+            <a:endParaRPr lang="en-US" sz="1050" b="1" dirty="0">
+              <a:solidFill>
+                <a:srgbClr val="22303A"/>
+              </a:solidFill>
+            </a:endParaRPr>
+          </a:p>
+          <a:p>
+            <a:r>
+              <a:rPr lang="en-US" sz="1050" dirty="0">
                 <a:solidFill>
                   <a:srgbClr val="5C6B73"/>
                 </a:solidFill>
@@ -9794,7 +10055,7 @@
               <a:t>Dropout / </a:t>
             </a:r>
             <a:r>
-              <a:rPr lang="en-US" sz="900" dirty="0" err="1">
+              <a:rPr lang="en-US" sz="1050" dirty="0" err="1">
                 <a:solidFill>
                   <a:srgbClr val="5C6B73"/>
                 </a:solidFill>
@@ -9802,7 +10063,7 @@
               <a:t>wd</a:t>
             </a:r>
             <a:r>
-              <a:rPr lang="en-US" sz="900" dirty="0">
+              <a:rPr lang="en-US" sz="1050" dirty="0">
                 <a:solidFill>
                   <a:srgbClr val="5C6B73"/>
                 </a:solidFill>
@@ -9810,7 +10071,7 @@
               <a:t>: </a:t>
             </a:r>
             <a:r>
-              <a:rPr lang="en-US" sz="900" dirty="0">
+              <a:rPr lang="en-US" sz="1050" dirty="0">
                 <a:solidFill>
                   <a:srgbClr val="22303A"/>
                 </a:solidFill>
@@ -9820,7 +10081,7 @@
           </a:p>
           <a:p>
             <a:r>
-              <a:rPr lang="en-US" sz="900" dirty="0">
+              <a:rPr lang="en-US" sz="1050" dirty="0">
                 <a:solidFill>
                   <a:srgbClr val="5C6B73"/>
                 </a:solidFill>
@@ -9828,7 +10089,7 @@
               <a:t>Note: </a:t>
             </a:r>
             <a:r>
-              <a:rPr lang="en-US" sz="900" dirty="0" err="1">
+              <a:rPr lang="en-US" sz="1050" dirty="0" err="1">
                 <a:solidFill>
                   <a:srgbClr val="22303A"/>
                 </a:solidFill>
@@ -9836,7 +10097,7 @@
               <a:t>lr×dropout</a:t>
             </a:r>
             <a:r>
-              <a:rPr lang="en-US" sz="900" dirty="0">
+              <a:rPr lang="en-US" sz="1050" dirty="0">
                 <a:solidFill>
                   <a:srgbClr val="22303A"/>
                 </a:solidFill>
@@ -9844,7 +10105,7 @@
               <a:t> interaction: </a:t>
             </a:r>
             <a:r>
-              <a:rPr lang="en-US" sz="900" dirty="0" err="1">
+              <a:rPr lang="en-US" sz="1050" dirty="0" err="1">
                 <a:solidFill>
                   <a:srgbClr val="22303A"/>
                 </a:solidFill>
@@ -9852,7 +10113,7 @@
               <a:t>lr</a:t>
             </a:r>
             <a:r>
-              <a:rPr lang="en-US" sz="900" dirty="0">
+              <a:rPr lang="en-US" sz="1050" dirty="0">
                 <a:solidFill>
                   <a:srgbClr val="22303A"/>
                 </a:solidFill>
@@ -9862,7 +10123,7 @@
           </a:p>
           <a:p>
             <a:r>
-              <a:rPr lang="en-US" sz="900" b="1" dirty="0">
+              <a:rPr lang="en-US" sz="1050" b="1" dirty="0">
                 <a:solidFill>
                   <a:srgbClr val="C9971B"/>
                 </a:solidFill>
@@ -9966,8 +10227,8 @@
         </p:blipFill>
         <p:spPr>
           <a:xfrm>
-            <a:off x="731520" y="1691640"/>
-            <a:ext cx="7315200" cy="3931920"/>
+            <a:off x="192075" y="1344167"/>
+            <a:ext cx="8028329" cy="4315227"/>
           </a:xfrm>
           <a:prstGeom prst="rect">
             <a:avLst/>
@@ -9983,6 +10244,647 @@
 </file>
 
 <file path=ppt/slides/slide7.xml><?xml version="1.0" encoding="utf-8"?>
+<p:sld xmlns:a="http://schemas.openxmlformats.org/drawingml/2006/main" xmlns:r="http://schemas.openxmlformats.org/officeDocument/2006/relationships" xmlns:p="http://schemas.openxmlformats.org/presentationml/2006/main">
+  <p:cSld name="Slide 8">
+    <p:bg>
+      <p:bgPr>
+        <a:solidFill>
+          <a:srgbClr val="FFFFFF"/>
+        </a:solidFill>
+        <a:effectLst/>
+      </p:bgPr>
+    </p:bg>
+    <p:spTree>
+      <p:nvGrpSpPr>
+        <p:cNvPr id="1" name=""/>
+        <p:cNvGrpSpPr/>
+        <p:nvPr/>
+      </p:nvGrpSpPr>
+      <p:grpSpPr>
+        <a:xfrm>
+          <a:off x="0" y="0"/>
+          <a:ext cx="0" cy="0"/>
+          <a:chOff x="0" y="0"/>
+          <a:chExt cx="0" cy="0"/>
+        </a:xfrm>
+      </p:grpSpPr>
+      <p:sp>
+        <p:nvSpPr>
+          <p:cNvPr id="2" name="Shape 0"/>
+          <p:cNvSpPr/>
+          <p:nvPr/>
+        </p:nvSpPr>
+        <p:spPr>
+          <a:xfrm>
+            <a:off x="548640" y="566928"/>
+            <a:ext cx="146304" cy="457200"/>
+          </a:xfrm>
+          <a:prstGeom prst="rect">
+            <a:avLst/>
+          </a:prstGeom>
+          <a:solidFill>
+            <a:srgbClr val="0E9594"/>
+          </a:solidFill>
+          <a:ln/>
+        </p:spPr>
+        <p:txBody>
+          <a:bodyPr/>
+          <a:lstStyle/>
+          <a:p>
+            <a:endParaRPr/>
+          </a:p>
+        </p:txBody>
+      </p:sp>
+      <p:sp>
+        <p:nvSpPr>
+          <p:cNvPr id="3" name="Text 1"/>
+          <p:cNvSpPr/>
+          <p:nvPr/>
+        </p:nvSpPr>
+        <p:spPr>
+          <a:xfrm>
+            <a:off x="822960" y="310896"/>
+            <a:ext cx="10515600" cy="292608"/>
+          </a:xfrm>
+          <a:prstGeom prst="rect">
+            <a:avLst/>
+          </a:prstGeom>
+          <a:noFill/>
+          <a:ln/>
+        </p:spPr>
+        <p:txBody>
+          <a:bodyPr wrap="square" lIns="0" tIns="0" rIns="0" bIns="0" rtlCol="0" anchor="ctr"/>
+          <a:lstStyle/>
+          <a:p>
+            <a:pPr marL="0" indent="0">
+              <a:buNone/>
+            </a:pPr>
+            <a:r>
+              <a:rPr lang="en-US" sz="1200" b="1" kern="0" spc="200" dirty="0">
+                <a:solidFill>
+                  <a:srgbClr val="0E9594"/>
+                </a:solidFill>
+                <a:latin typeface="Trebuchet MS" pitchFamily="34" charset="0"/>
+                <a:ea typeface="Trebuchet MS" pitchFamily="34" charset="-122"/>
+                <a:cs typeface="Trebuchet MS" pitchFamily="34" charset="-120"/>
+              </a:rPr>
+              <a:t>ARCHITECTURE 3 · RNN</a:t>
+            </a:r>
+            <a:endParaRPr lang="en-US" sz="1200" dirty="0"/>
+          </a:p>
+        </p:txBody>
+      </p:sp>
+      <p:sp>
+        <p:nvSpPr>
+          <p:cNvPr id="4" name="Text 2"/>
+          <p:cNvSpPr/>
+          <p:nvPr/>
+        </p:nvSpPr>
+        <p:spPr>
+          <a:xfrm>
+            <a:off x="822960" y="566928"/>
+            <a:ext cx="10789920" cy="640080"/>
+          </a:xfrm>
+          <a:prstGeom prst="rect">
+            <a:avLst/>
+          </a:prstGeom>
+          <a:noFill/>
+          <a:ln/>
+        </p:spPr>
+        <p:txBody>
+          <a:bodyPr wrap="square" lIns="0" tIns="0" rIns="0" bIns="0" rtlCol="0" anchor="ctr"/>
+          <a:lstStyle/>
+          <a:p>
+            <a:pPr marL="0" indent="0">
+              <a:buNone/>
+            </a:pPr>
+            <a:r>
+              <a:rPr lang="en-US" sz="2800" b="1" dirty="0">
+                <a:solidFill>
+                  <a:srgbClr val="22303A"/>
+                </a:solidFill>
+                <a:latin typeface="Trebuchet MS" pitchFamily="34" charset="0"/>
+                <a:ea typeface="Trebuchet MS" pitchFamily="34" charset="-122"/>
+                <a:cs typeface="Trebuchet MS" pitchFamily="34" charset="-120"/>
+              </a:rPr>
+              <a:t>Pure </a:t>
+            </a:r>
+            <a:r>
+              <a:rPr lang="en-US" sz="2800" b="1" dirty="0" err="1" smtClean="0">
+                <a:solidFill>
+                  <a:srgbClr val="22303A"/>
+                </a:solidFill>
+                <a:latin typeface="Trebuchet MS" pitchFamily="34" charset="0"/>
+                <a:ea typeface="Trebuchet MS" pitchFamily="34" charset="-122"/>
+                <a:cs typeface="Trebuchet MS" pitchFamily="34" charset="-120"/>
+              </a:rPr>
+              <a:t>BiLSTM</a:t>
+            </a:r>
+            <a:endParaRPr lang="en-US" sz="2800" dirty="0"/>
+          </a:p>
+        </p:txBody>
+      </p:sp>
+      <p:sp>
+        <p:nvSpPr>
+          <p:cNvPr id="6" name="Text 3"/>
+          <p:cNvSpPr/>
+          <p:nvPr/>
+        </p:nvSpPr>
+        <p:spPr>
+          <a:xfrm>
+            <a:off x="731520" y="5641848"/>
+            <a:ext cx="7315200" cy="320040"/>
+          </a:xfrm>
+          <a:prstGeom prst="rect">
+            <a:avLst/>
+          </a:prstGeom>
+          <a:noFill/>
+          <a:ln/>
+        </p:spPr>
+        <p:txBody>
+          <a:bodyPr wrap="square" lIns="0" tIns="0" rIns="0" bIns="0" rtlCol="0" anchor="ctr"/>
+          <a:lstStyle/>
+          <a:p>
+            <a:pPr marL="0" indent="0" algn="ctr">
+              <a:buNone/>
+            </a:pPr>
+            <a:r>
+              <a:rPr lang="en-US" sz="1100" i="1" dirty="0">
+                <a:solidFill>
+                  <a:srgbClr val="6B7B85"/>
+                </a:solidFill>
+                <a:latin typeface="Calibri" pitchFamily="34" charset="0"/>
+                <a:ea typeface="Calibri" pitchFamily="34" charset="-122"/>
+                <a:cs typeface="Calibri" pitchFamily="34" charset="-120"/>
+              </a:rPr>
+              <a:t>One-axis sweeps around the baseline config</a:t>
+            </a:r>
+            <a:endParaRPr lang="en-US" sz="1100" dirty="0"/>
+          </a:p>
+        </p:txBody>
+      </p:sp>
+      <p:sp>
+        <p:nvSpPr>
+          <p:cNvPr id="7" name="Text 4"/>
+          <p:cNvSpPr/>
+          <p:nvPr/>
+        </p:nvSpPr>
+        <p:spPr>
+          <a:xfrm>
+            <a:off x="8321040" y="1691640"/>
+            <a:ext cx="3413455" cy="4206240"/>
+          </a:xfrm>
+          <a:prstGeom prst="rect">
+            <a:avLst/>
+          </a:prstGeom>
+          <a:noFill/>
+          <a:ln/>
+        </p:spPr>
+        <p:txBody>
+          <a:bodyPr wrap="square" rtlCol="0" anchor="t"/>
+          <a:lstStyle/>
+          <a:p>
+            <a:pPr marL="342900" indent="-342900">
+              <a:spcAft>
+                <a:spcPts val="900"/>
+              </a:spcAft>
+              <a:buSzPct val="100000"/>
+              <a:buChar char="•"/>
+            </a:pPr>
+            <a:r>
+              <a:rPr lang="en-US" sz="1400" dirty="0">
+                <a:solidFill>
+                  <a:srgbClr val="22303A"/>
+                </a:solidFill>
+                <a:latin typeface="Calibri" pitchFamily="34" charset="0"/>
+                <a:ea typeface="Calibri" pitchFamily="34" charset="-122"/>
+                <a:cs typeface="Calibri" pitchFamily="34" charset="-120"/>
+              </a:rPr>
+              <a:t>Pure BiLSTM tops out at AUC ≈ </a:t>
+            </a:r>
+            <a:r>
+              <a:rPr lang="en-US" sz="1400" dirty="0" smtClean="0">
+                <a:solidFill>
+                  <a:srgbClr val="22303A"/>
+                </a:solidFill>
+                <a:latin typeface="Calibri" pitchFamily="34" charset="0"/>
+                <a:ea typeface="Calibri" pitchFamily="34" charset="-122"/>
+                <a:cs typeface="Calibri" pitchFamily="34" charset="-120"/>
+              </a:rPr>
+              <a:t>0.66 </a:t>
+            </a:r>
+            <a:r>
+              <a:rPr lang="en-US" sz="1400" dirty="0">
+                <a:solidFill>
+                  <a:srgbClr val="22303A"/>
+                </a:solidFill>
+                <a:latin typeface="Calibri" pitchFamily="34" charset="0"/>
+                <a:ea typeface="Calibri" pitchFamily="34" charset="-122"/>
+                <a:cs typeface="Calibri" pitchFamily="34" charset="-120"/>
+              </a:rPr>
+              <a:t>barely above the MLP.</a:t>
+            </a:r>
+            <a:endParaRPr lang="en-US" sz="1400" dirty="0"/>
+          </a:p>
+          <a:p>
+            <a:pPr marL="342900" indent="-342900">
+              <a:spcAft>
+                <a:spcPts val="900"/>
+              </a:spcAft>
+              <a:buSzPct val="100000"/>
+              <a:buChar char="•"/>
+            </a:pPr>
+            <a:r>
+              <a:rPr lang="en-US" sz="1400" dirty="0">
+                <a:solidFill>
+                  <a:srgbClr val="22303A"/>
+                </a:solidFill>
+                <a:latin typeface="Calibri" pitchFamily="34" charset="0"/>
+                <a:ea typeface="Calibri" pitchFamily="34" charset="-122"/>
+                <a:cs typeface="Calibri" pitchFamily="34" charset="-120"/>
+              </a:rPr>
+              <a:t>More layers / wider hidden does not </a:t>
+            </a:r>
+            <a:r>
+              <a:rPr lang="en-US" sz="1400" dirty="0" smtClean="0">
+                <a:solidFill>
+                  <a:srgbClr val="22303A"/>
+                </a:solidFill>
+                <a:latin typeface="Calibri" pitchFamily="34" charset="0"/>
+                <a:ea typeface="Calibri" pitchFamily="34" charset="-122"/>
+                <a:cs typeface="Calibri" pitchFamily="34" charset="-120"/>
+              </a:rPr>
+              <a:t>help: it is bottlenecked by representation, not temporal capacity.</a:t>
+            </a:r>
+            <a:endParaRPr lang="en-US" sz="1400" dirty="0" smtClean="0"/>
+          </a:p>
+          <a:p>
+            <a:endParaRPr lang="en-US" sz="1400" dirty="0" smtClean="0"/>
+          </a:p>
+          <a:p>
+            <a:endParaRPr lang="en-US" sz="1400" dirty="0"/>
+          </a:p>
+          <a:p>
+            <a:endParaRPr lang="en-US" sz="1400" dirty="0" smtClean="0"/>
+          </a:p>
+          <a:p>
+            <a:endParaRPr lang="en-US" sz="1400" dirty="0"/>
+          </a:p>
+          <a:p>
+            <a:r>
+              <a:rPr lang="en-US" sz="1050" b="1" dirty="0">
+                <a:solidFill>
+                  <a:srgbClr val="0E9594"/>
+                </a:solidFill>
+              </a:rPr>
+              <a:t>Baseline </a:t>
+            </a:r>
+            <a:r>
+              <a:rPr lang="en-US" sz="1050" b="1" dirty="0" err="1">
+                <a:solidFill>
+                  <a:srgbClr val="0E9594"/>
+                </a:solidFill>
+              </a:rPr>
+              <a:t>config</a:t>
+            </a:r>
+            <a:endParaRPr lang="en-US" sz="1050" b="1" dirty="0">
+              <a:solidFill>
+                <a:srgbClr val="0E9594"/>
+              </a:solidFill>
+            </a:endParaRPr>
+          </a:p>
+          <a:p>
+            <a:r>
+              <a:rPr lang="en-US" sz="1050" dirty="0" err="1">
+                <a:solidFill>
+                  <a:srgbClr val="5C6B73"/>
+                </a:solidFill>
+              </a:rPr>
+              <a:t>BiLSTM</a:t>
+            </a:r>
+            <a:r>
+              <a:rPr lang="en-US" sz="1050" dirty="0">
+                <a:solidFill>
+                  <a:srgbClr val="5C6B73"/>
+                </a:solidFill>
+              </a:rPr>
+              <a:t> layers / h: </a:t>
+            </a:r>
+            <a:r>
+              <a:rPr lang="en-US" sz="1050" dirty="0">
+                <a:solidFill>
+                  <a:srgbClr val="22303A"/>
+                </a:solidFill>
+              </a:rPr>
+              <a:t>2 / 128</a:t>
+            </a:r>
+          </a:p>
+          <a:p>
+            <a:r>
+              <a:rPr lang="en-US" sz="1050" dirty="0">
+                <a:solidFill>
+                  <a:srgbClr val="5C6B73"/>
+                </a:solidFill>
+              </a:rPr>
+              <a:t>Learning rate: </a:t>
+            </a:r>
+            <a:r>
+              <a:rPr lang="en-US" sz="1050" dirty="0">
+                <a:solidFill>
+                  <a:srgbClr val="22303A"/>
+                </a:solidFill>
+              </a:rPr>
+              <a:t>5e-4</a:t>
+            </a:r>
+          </a:p>
+          <a:p>
+            <a:r>
+              <a:rPr lang="en-US" sz="1050" dirty="0">
+                <a:solidFill>
+                  <a:srgbClr val="5C6B73"/>
+                </a:solidFill>
+              </a:rPr>
+              <a:t>Dropout / </a:t>
+            </a:r>
+            <a:r>
+              <a:rPr lang="en-US" sz="1050" dirty="0" err="1">
+                <a:solidFill>
+                  <a:srgbClr val="5C6B73"/>
+                </a:solidFill>
+              </a:rPr>
+              <a:t>wd</a:t>
+            </a:r>
+            <a:r>
+              <a:rPr lang="en-US" sz="1050" dirty="0">
+                <a:solidFill>
+                  <a:srgbClr val="5C6B73"/>
+                </a:solidFill>
+              </a:rPr>
+              <a:t>: </a:t>
+            </a:r>
+            <a:r>
+              <a:rPr lang="en-US" sz="1050" dirty="0">
+                <a:solidFill>
+                  <a:srgbClr val="22303A"/>
+                </a:solidFill>
+              </a:rPr>
+              <a:t>0.5 / 1e-4</a:t>
+            </a:r>
+          </a:p>
+          <a:p>
+            <a:r>
+              <a:rPr lang="en-US" sz="1050" b="1" dirty="0">
+                <a:solidFill>
+                  <a:srgbClr val="0E9594"/>
+                </a:solidFill>
+              </a:rPr>
+              <a:t>AUC 0.592  |  fake-recall 12%</a:t>
+            </a:r>
+          </a:p>
+          <a:p>
+            <a:endParaRPr lang="en-US" sz="1050" b="1" dirty="0">
+              <a:solidFill>
+                <a:srgbClr val="0E9594"/>
+              </a:solidFill>
+            </a:endParaRPr>
+          </a:p>
+          <a:p>
+            <a:r>
+              <a:rPr lang="en-US" sz="1050" b="1" dirty="0">
+                <a:solidFill>
+                  <a:srgbClr val="C9971B"/>
+                </a:solidFill>
+              </a:rPr>
+              <a:t>Best </a:t>
+            </a:r>
+            <a:r>
+              <a:rPr lang="en-US" sz="1050" b="1" dirty="0" err="1">
+                <a:solidFill>
+                  <a:srgbClr val="C9971B"/>
+                </a:solidFill>
+              </a:rPr>
+              <a:t>config</a:t>
+            </a:r>
+            <a:endParaRPr lang="en-US" sz="1050" b="1" dirty="0">
+              <a:solidFill>
+                <a:srgbClr val="C9971B"/>
+              </a:solidFill>
+            </a:endParaRPr>
+          </a:p>
+          <a:p>
+            <a:r>
+              <a:rPr lang="en-US" sz="1050" dirty="0" err="1">
+                <a:solidFill>
+                  <a:srgbClr val="5C6B73"/>
+                </a:solidFill>
+              </a:rPr>
+              <a:t>BiLSTM</a:t>
+            </a:r>
+            <a:r>
+              <a:rPr lang="en-US" sz="1050" dirty="0">
+                <a:solidFill>
+                  <a:srgbClr val="5C6B73"/>
+                </a:solidFill>
+              </a:rPr>
+              <a:t> layers / h: </a:t>
+            </a:r>
+            <a:r>
+              <a:rPr lang="en-US" sz="1050" dirty="0">
+                <a:solidFill>
+                  <a:srgbClr val="22303A"/>
+                </a:solidFill>
+              </a:rPr>
+              <a:t>1 </a:t>
+            </a:r>
+            <a:r>
+              <a:rPr lang="en-US" sz="1050" dirty="0" smtClean="0">
+                <a:solidFill>
+                  <a:srgbClr val="22303A"/>
+                </a:solidFill>
+              </a:rPr>
+              <a:t>/ 128 </a:t>
+            </a:r>
+            <a:endParaRPr lang="en-US" sz="1050" dirty="0">
+              <a:solidFill>
+                <a:srgbClr val="22303A"/>
+              </a:solidFill>
+            </a:endParaRPr>
+          </a:p>
+          <a:p>
+            <a:r>
+              <a:rPr lang="en-US" sz="1050" dirty="0">
+                <a:solidFill>
+                  <a:srgbClr val="5C6B73"/>
+                </a:solidFill>
+              </a:rPr>
+              <a:t>Learning rate: </a:t>
+            </a:r>
+            <a:r>
+              <a:rPr lang="en-US" sz="1050" dirty="0">
+                <a:solidFill>
+                  <a:srgbClr val="22303A"/>
+                </a:solidFill>
+              </a:rPr>
+              <a:t>5e-4</a:t>
+            </a:r>
+          </a:p>
+          <a:p>
+            <a:r>
+              <a:rPr lang="en-US" sz="1050" dirty="0">
+                <a:solidFill>
+                  <a:srgbClr val="5C6B73"/>
+                </a:solidFill>
+              </a:rPr>
+              <a:t>Dropout / </a:t>
+            </a:r>
+            <a:r>
+              <a:rPr lang="en-US" sz="1050" dirty="0" err="1">
+                <a:solidFill>
+                  <a:srgbClr val="5C6B73"/>
+                </a:solidFill>
+              </a:rPr>
+              <a:t>wd</a:t>
+            </a:r>
+            <a:r>
+              <a:rPr lang="en-US" sz="1050" dirty="0">
+                <a:solidFill>
+                  <a:srgbClr val="5C6B73"/>
+                </a:solidFill>
+              </a:rPr>
+              <a:t>: </a:t>
+            </a:r>
+            <a:r>
+              <a:rPr lang="en-US" sz="1050" dirty="0">
+                <a:solidFill>
+                  <a:srgbClr val="22303A"/>
+                </a:solidFill>
+              </a:rPr>
+              <a:t>0.5 / 1e-4</a:t>
+            </a:r>
+          </a:p>
+          <a:p>
+            <a:r>
+              <a:rPr lang="en-US" sz="1050" b="1" dirty="0">
+                <a:solidFill>
+                  <a:srgbClr val="C9971B"/>
+                </a:solidFill>
+              </a:rPr>
+              <a:t>AUC 0.660  |  fake-recall 17%</a:t>
+            </a:r>
+          </a:p>
+        </p:txBody>
+      </p:sp>
+      <p:sp>
+        <p:nvSpPr>
+          <p:cNvPr id="8" name="Text 5"/>
+          <p:cNvSpPr/>
+          <p:nvPr/>
+        </p:nvSpPr>
+        <p:spPr>
+          <a:xfrm>
+            <a:off x="548640" y="6437376"/>
+            <a:ext cx="7315200" cy="274320"/>
+          </a:xfrm>
+          <a:prstGeom prst="rect">
+            <a:avLst/>
+          </a:prstGeom>
+          <a:noFill/>
+          <a:ln/>
+        </p:spPr>
+        <p:txBody>
+          <a:bodyPr wrap="square" lIns="0" tIns="0" rIns="0" bIns="0" rtlCol="0" anchor="ctr"/>
+          <a:lstStyle/>
+          <a:p>
+            <a:pPr marL="0" indent="0">
+              <a:buNone/>
+            </a:pPr>
+            <a:r>
+              <a:rPr lang="en-US" sz="900" dirty="0">
+                <a:solidFill>
+                  <a:srgbClr val="6B7B85"/>
+                </a:solidFill>
+                <a:latin typeface="Calibri" pitchFamily="34" charset="0"/>
+                <a:ea typeface="Calibri" pitchFamily="34" charset="-122"/>
+                <a:cs typeface="Calibri" pitchFamily="34" charset="-120"/>
+              </a:rPr>
+              <a:t>Audio Deepfake Detection — DL project</a:t>
+            </a:r>
+            <a:endParaRPr lang="en-US" sz="900" dirty="0"/>
+          </a:p>
+        </p:txBody>
+      </p:sp>
+      <p:sp>
+        <p:nvSpPr>
+          <p:cNvPr id="9" name="Text 6"/>
+          <p:cNvSpPr/>
+          <p:nvPr/>
+        </p:nvSpPr>
+        <p:spPr>
+          <a:xfrm>
+            <a:off x="11430000" y="6437376"/>
+            <a:ext cx="548640" cy="274320"/>
+          </a:xfrm>
+          <a:prstGeom prst="rect">
+            <a:avLst/>
+          </a:prstGeom>
+          <a:noFill/>
+          <a:ln/>
+        </p:spPr>
+        <p:txBody>
+          <a:bodyPr wrap="square" lIns="0" tIns="0" rIns="0" bIns="0" rtlCol="0" anchor="ctr"/>
+          <a:lstStyle/>
+          <a:p>
+            <a:pPr marL="0" indent="0" algn="r">
+              <a:buNone/>
+            </a:pPr>
+            <a:r>
+              <a:rPr lang="en-US" sz="900" dirty="0">
+                <a:solidFill>
+                  <a:srgbClr val="6B7B85"/>
+                </a:solidFill>
+                <a:latin typeface="Calibri" pitchFamily="34" charset="0"/>
+                <a:ea typeface="Calibri" pitchFamily="34" charset="-122"/>
+                <a:cs typeface="Calibri" pitchFamily="34" charset="-120"/>
+              </a:rPr>
+              <a:t>8</a:t>
+            </a:r>
+            <a:endParaRPr lang="en-US" sz="900" dirty="0"/>
+          </a:p>
+        </p:txBody>
+      </p:sp>
+      <p:pic>
+        <p:nvPicPr>
+          <p:cNvPr id="10" name="Picture 9" descr="fig_rnn_hparam.png"/>
+          <p:cNvPicPr>
+            <a:picLocks noChangeAspect="1"/>
+          </p:cNvPicPr>
+          <p:nvPr/>
+        </p:nvPicPr>
+        <p:blipFill>
+          <a:blip r:embed="rId3"/>
+          <a:stretch>
+            <a:fillRect/>
+          </a:stretch>
+        </p:blipFill>
+        <p:spPr>
+          <a:xfrm>
+            <a:off x="731520" y="1691640"/>
+            <a:ext cx="7315200" cy="3931920"/>
+          </a:xfrm>
+          <a:prstGeom prst="rect">
+            <a:avLst/>
+          </a:prstGeom>
+        </p:spPr>
+      </p:pic>
+    </p:spTree>
+  </p:cSld>
+  <p:clrMapOvr>
+    <a:masterClrMapping/>
+  </p:clrMapOvr>
+</p:sld>
+</file>
+
+<file path=ppt/slides/slide8.xml><?xml version="1.0" encoding="utf-8"?>
 <p:sld xmlns:a="http://schemas.openxmlformats.org/drawingml/2006/main" xmlns:r="http://schemas.openxmlformats.org/officeDocument/2006/relationships" xmlns:p="http://schemas.openxmlformats.org/presentationml/2006/main">
   <p:cSld name="Slide 7">
     <p:bg>
@@ -10114,45 +11016,6 @@
       </p:sp>
       <p:sp>
         <p:nvSpPr>
-          <p:cNvPr id="6" name="Text 3"/>
-          <p:cNvSpPr/>
-          <p:nvPr/>
-        </p:nvSpPr>
-        <p:spPr>
-          <a:xfrm>
-            <a:off x="731520" y="5641848"/>
-            <a:ext cx="7315200" cy="320040"/>
-          </a:xfrm>
-          <a:prstGeom prst="rect">
-            <a:avLst/>
-          </a:prstGeom>
-          <a:noFill/>
-          <a:ln/>
-        </p:spPr>
-        <p:txBody>
-          <a:bodyPr wrap="square" lIns="0" tIns="0" rIns="0" bIns="0" rtlCol="0" anchor="ctr"/>
-          <a:lstStyle/>
-          <a:p>
-            <a:pPr marL="0" indent="0" algn="ctr">
-              <a:buNone/>
-            </a:pPr>
-            <a:r>
-              <a:rPr lang="en-US" sz="1100" i="1" dirty="0">
-                <a:solidFill>
-                  <a:srgbClr val="6B7B85"/>
-                </a:solidFill>
-                <a:latin typeface="Calibri" pitchFamily="34" charset="0"/>
-                <a:ea typeface="Calibri" pitchFamily="34" charset="-122"/>
-                <a:cs typeface="Calibri" pitchFamily="34" charset="-120"/>
-              </a:rPr>
-              <a:t>One-axis sweeps around the baseline config</a:t>
-            </a:r>
-            <a:endParaRPr lang="en-US" sz="1100" dirty="0"/>
-          </a:p>
-        </p:txBody>
-      </p:sp>
-      <p:sp>
-        <p:nvSpPr>
           <p:cNvPr id="7" name="Text 4"/>
           <p:cNvSpPr/>
           <p:nvPr/>
@@ -10230,7 +11093,18 @@
                 <a:ea typeface="Calibri" pitchFamily="34" charset="-122"/>
                 <a:cs typeface="Calibri" pitchFamily="34" charset="-120"/>
               </a:rPr>
-              <a:t>Large LR (1e-3) destabilises the recurrent path.</a:t>
+              <a:t>Large LR (1e-3) </a:t>
+            </a:r>
+            <a:r>
+              <a:rPr lang="en-US" sz="1400" dirty="0" smtClean="0">
+                <a:solidFill>
+                  <a:srgbClr val="22303A"/>
+                </a:solidFill>
+                <a:latin typeface="Calibri" pitchFamily="34" charset="0"/>
+                <a:ea typeface="Calibri" pitchFamily="34" charset="-122"/>
+                <a:cs typeface="Calibri" pitchFamily="34" charset="-120"/>
+              </a:rPr>
+              <a:t>destabilizes the recurrent part of the model.</a:t>
             </a:r>
             <a:endParaRPr lang="en-US" sz="1400" dirty="0"/>
           </a:p>
@@ -10251,7 +11125,39 @@
                 <a:ea typeface="Calibri" pitchFamily="34" charset="-122"/>
                 <a:cs typeface="Calibri" pitchFamily="34" charset="-120"/>
               </a:rPr>
-              <a:t>Temporal modelling adds little once convolution is present.</a:t>
+              <a:t>Temporal modelling adds little once convolution is present</a:t>
+            </a:r>
+            <a:r>
+              <a:rPr lang="en-US" sz="1400" dirty="0" smtClean="0">
+                <a:solidFill>
+                  <a:srgbClr val="22303A"/>
+                </a:solidFill>
+                <a:latin typeface="Calibri" pitchFamily="34" charset="0"/>
+                <a:ea typeface="Calibri" pitchFamily="34" charset="-122"/>
+                <a:cs typeface="Calibri" pitchFamily="34" charset="-120"/>
+              </a:rPr>
+              <a:t>.</a:t>
+            </a:r>
+          </a:p>
+          <a:p>
+            <a:pPr marL="342900" indent="-342900">
+              <a:spcAft>
+                <a:spcPts val="900"/>
+              </a:spcAft>
+              <a:buSzPct val="100000"/>
+              <a:buFontTx/>
+              <a:buChar char="•"/>
+            </a:pPr>
+            <a:r>
+              <a:rPr lang="en-US" sz="1400" dirty="0">
+                <a:solidFill>
+                  <a:srgbClr val="22303A"/>
+                </a:solidFill>
+                <a:latin typeface="Calibri" pitchFamily="34" charset="0"/>
+                <a:ea typeface="Calibri" pitchFamily="34" charset="-122"/>
+                <a:cs typeface="Calibri" pitchFamily="34" charset="-120"/>
+              </a:rPr>
+              <a:t>RNN 0.66 vs CRNN 0.86</a:t>
             </a:r>
             <a:endParaRPr lang="en-US" sz="1400" dirty="0"/>
           </a:p>
@@ -10259,11 +11165,8 @@
             <a:endParaRPr lang="en-US" sz="1400" dirty="0"/>
           </a:p>
           <a:p>
-            <a:endParaRPr lang="en-US" sz="1400" dirty="0"/>
-          </a:p>
-          <a:p>
-            <a:r>
-              <a:rPr lang="en-US" sz="950" b="1" dirty="0">
+            <a:r>
+              <a:rPr lang="en-US" sz="1050" b="1" dirty="0">
                 <a:solidFill>
                   <a:srgbClr val="0E9594"/>
                 </a:solidFill>
@@ -10271,14 +11174,14 @@
               <a:t>Baseline </a:t>
             </a:r>
             <a:r>
-              <a:rPr lang="en-US" sz="950" b="1" dirty="0" err="1">
+              <a:rPr lang="en-US" sz="1050" b="1" dirty="0" err="1">
                 <a:solidFill>
                   <a:srgbClr val="0E9594"/>
                 </a:solidFill>
               </a:rPr>
               <a:t>config</a:t>
             </a:r>
-            <a:endParaRPr lang="en-US" sz="950" b="1" dirty="0">
+            <a:endParaRPr lang="en-US" sz="1050" b="1" dirty="0">
               <a:solidFill>
                 <a:srgbClr val="0E9594"/>
               </a:solidFill>
@@ -10286,7 +11189,7 @@
           </a:p>
           <a:p>
             <a:r>
-              <a:rPr lang="en-US" sz="900" dirty="0">
+              <a:rPr lang="en-US" sz="1050" dirty="0">
                 <a:solidFill>
                   <a:srgbClr val="5C6B73"/>
                 </a:solidFill>
@@ -10294,7 +11197,7 @@
               <a:t>CNN depth / </a:t>
             </a:r>
             <a:r>
-              <a:rPr lang="en-US" sz="900" dirty="0" err="1">
+              <a:rPr lang="en-US" sz="1050" dirty="0" err="1">
                 <a:solidFill>
                   <a:srgbClr val="5C6B73"/>
                 </a:solidFill>
@@ -10302,7 +11205,7 @@
               <a:t>ch</a:t>
             </a:r>
             <a:r>
-              <a:rPr lang="en-US" sz="900" dirty="0">
+              <a:rPr lang="en-US" sz="1050" dirty="0">
                 <a:solidFill>
                   <a:srgbClr val="5C6B73"/>
                 </a:solidFill>
@@ -10310,7 +11213,7 @@
               <a:t>: </a:t>
             </a:r>
             <a:r>
-              <a:rPr lang="en-US" sz="900" dirty="0">
+              <a:rPr lang="en-US" sz="1050" dirty="0">
                 <a:solidFill>
                   <a:srgbClr val="22303A"/>
                 </a:solidFill>
@@ -10318,14 +11221,14 @@
               <a:t>3 blocks / 32 </a:t>
             </a:r>
             <a:r>
-              <a:rPr lang="en-US" sz="900" dirty="0" err="1">
+              <a:rPr lang="en-US" sz="1050" dirty="0" err="1">
                 <a:solidFill>
                   <a:srgbClr val="22303A"/>
                 </a:solidFill>
               </a:rPr>
               <a:t>ch</a:t>
             </a:r>
-            <a:endParaRPr lang="en-US" sz="900" dirty="0">
+            <a:endParaRPr lang="en-US" sz="1050" dirty="0">
               <a:solidFill>
                 <a:srgbClr val="22303A"/>
               </a:solidFill>
@@ -10333,7 +11236,7 @@
           </a:p>
           <a:p>
             <a:r>
-              <a:rPr lang="en-US" sz="900" dirty="0" err="1">
+              <a:rPr lang="en-US" sz="1050" dirty="0" err="1">
                 <a:solidFill>
                   <a:srgbClr val="5C6B73"/>
                 </a:solidFill>
@@ -10341,7 +11244,7 @@
               <a:t>BiLSTM</a:t>
             </a:r>
             <a:r>
-              <a:rPr lang="en-US" sz="900" dirty="0">
+              <a:rPr lang="en-US" sz="1050" dirty="0">
                 <a:solidFill>
                   <a:srgbClr val="5C6B73"/>
                 </a:solidFill>
@@ -10349,7 +11252,7 @@
               <a:t> layers / h: </a:t>
             </a:r>
             <a:r>
-              <a:rPr lang="en-US" sz="900" dirty="0">
+              <a:rPr lang="en-US" sz="1050" dirty="0">
                 <a:solidFill>
                   <a:srgbClr val="22303A"/>
                 </a:solidFill>
@@ -10359,7 +11262,7 @@
           </a:p>
           <a:p>
             <a:r>
-              <a:rPr lang="en-US" sz="900" dirty="0">
+              <a:rPr lang="en-US" sz="1050" dirty="0">
                 <a:solidFill>
                   <a:srgbClr val="5C6B73"/>
                 </a:solidFill>
@@ -10367,7 +11270,7 @@
               <a:t>Learning rate: </a:t>
             </a:r>
             <a:r>
-              <a:rPr lang="en-US" sz="900" dirty="0">
+              <a:rPr lang="en-US" sz="1050" dirty="0">
                 <a:solidFill>
                   <a:srgbClr val="22303A"/>
                 </a:solidFill>
@@ -10377,7 +11280,7 @@
           </a:p>
           <a:p>
             <a:r>
-              <a:rPr lang="en-US" sz="900" dirty="0">
+              <a:rPr lang="en-US" sz="1050" dirty="0">
                 <a:solidFill>
                   <a:srgbClr val="5C6B73"/>
                 </a:solidFill>
@@ -10385,7 +11288,7 @@
               <a:t>Dropout / </a:t>
             </a:r>
             <a:r>
-              <a:rPr lang="en-US" sz="900" dirty="0" err="1">
+              <a:rPr lang="en-US" sz="1050" dirty="0" err="1">
                 <a:solidFill>
                   <a:srgbClr val="5C6B73"/>
                 </a:solidFill>
@@ -10393,7 +11296,7 @@
               <a:t>wd</a:t>
             </a:r>
             <a:r>
-              <a:rPr lang="en-US" sz="900" dirty="0">
+              <a:rPr lang="en-US" sz="1050" dirty="0">
                 <a:solidFill>
                   <a:srgbClr val="5C6B73"/>
                 </a:solidFill>
@@ -10401,7 +11304,7 @@
               <a:t>: </a:t>
             </a:r>
             <a:r>
-              <a:rPr lang="en-US" sz="900" dirty="0">
+              <a:rPr lang="en-US" sz="1050" dirty="0">
                 <a:solidFill>
                   <a:srgbClr val="22303A"/>
                 </a:solidFill>
@@ -10411,7 +11314,7 @@
           </a:p>
           <a:p>
             <a:r>
-              <a:rPr lang="en-US" sz="900" b="1" dirty="0">
+              <a:rPr lang="en-US" sz="1050" b="1" dirty="0">
                 <a:solidFill>
                   <a:srgbClr val="0E9594"/>
                 </a:solidFill>
@@ -10420,7 +11323,7 @@
             </a:r>
           </a:p>
           <a:p>
-            <a:endParaRPr lang="en-US" sz="900" b="1" dirty="0">
+            <a:endParaRPr lang="en-US" sz="1050" b="1" dirty="0">
               <a:solidFill>
                 <a:srgbClr val="0E9594"/>
               </a:solidFill>
@@ -10428,7 +11331,7 @@
           </a:p>
           <a:p>
             <a:r>
-              <a:rPr lang="en-US" sz="950" b="1" dirty="0">
+              <a:rPr lang="en-US" sz="1050" b="1" dirty="0">
                 <a:solidFill>
                   <a:srgbClr val="C9971B"/>
                 </a:solidFill>
@@ -10436,7 +11339,7 @@
               <a:t>Best </a:t>
             </a:r>
             <a:r>
-              <a:rPr lang="en-US" sz="950" b="1" dirty="0" err="1">
+              <a:rPr lang="en-US" sz="1050" b="1" dirty="0" err="1">
                 <a:solidFill>
                   <a:srgbClr val="C9971B"/>
                 </a:solidFill>
@@ -10444,7 +11347,7 @@
               <a:t>config</a:t>
             </a:r>
             <a:r>
-              <a:rPr lang="en-US" sz="950" b="1" dirty="0">
+              <a:rPr lang="en-US" sz="1050" b="1" dirty="0">
                 <a:solidFill>
                   <a:srgbClr val="C9971B"/>
                 </a:solidFill>
@@ -10454,7 +11357,7 @@
           </a:p>
           <a:p>
             <a:r>
-              <a:rPr lang="en-US" sz="900" dirty="0" smtClean="0">
+              <a:rPr lang="en-US" sz="1050" dirty="0" smtClean="0">
                 <a:solidFill>
                   <a:srgbClr val="5C6B73"/>
                 </a:solidFill>
@@ -10462,7 +11365,7 @@
               <a:t>Note</a:t>
             </a:r>
             <a:r>
-              <a:rPr lang="en-US" sz="900" dirty="0">
+              <a:rPr lang="en-US" sz="1050" dirty="0">
                 <a:solidFill>
                   <a:srgbClr val="5C6B73"/>
                 </a:solidFill>
@@ -10470,7 +11373,7 @@
               <a:t>: </a:t>
             </a:r>
             <a:r>
-              <a:rPr lang="en-US" sz="900" dirty="0">
+              <a:rPr lang="en-US" sz="1050" dirty="0">
                 <a:solidFill>
                   <a:srgbClr val="22303A"/>
                 </a:solidFill>
@@ -10478,14 +11381,14 @@
               <a:t>Baseline is </a:t>
             </a:r>
             <a:r>
-              <a:rPr lang="en-US" sz="900" dirty="0" smtClean="0">
+              <a:rPr lang="en-US" sz="1050" dirty="0" smtClean="0">
                 <a:solidFill>
                   <a:srgbClr val="22303A"/>
                 </a:solidFill>
               </a:rPr>
               <a:t>the optimum</a:t>
             </a:r>
-            <a:endParaRPr lang="en-US" sz="900" dirty="0">
+            <a:endParaRPr lang="en-US" sz="1050" dirty="0">
               <a:solidFill>
                 <a:srgbClr val="22303A"/>
               </a:solidFill>
@@ -10493,7 +11396,7 @@
           </a:p>
           <a:p>
             <a:r>
-              <a:rPr lang="en-US" sz="900" b="1" dirty="0">
+              <a:rPr lang="en-US" sz="1050" b="1" dirty="0">
                 <a:solidFill>
                   <a:srgbClr val="C9971B"/>
                 </a:solidFill>
@@ -10597,533 +11500,8 @@
         </p:blipFill>
         <p:spPr>
           <a:xfrm>
-            <a:off x="731520" y="1691640"/>
-            <a:ext cx="7315200" cy="3931920"/>
-          </a:xfrm>
-          <a:prstGeom prst="rect">
-            <a:avLst/>
-          </a:prstGeom>
-        </p:spPr>
-      </p:pic>
-    </p:spTree>
-  </p:cSld>
-  <p:clrMapOvr>
-    <a:masterClrMapping/>
-  </p:clrMapOvr>
-</p:sld>
-</file>
-
-<file path=ppt/slides/slide8.xml><?xml version="1.0" encoding="utf-8"?>
-<p:sld xmlns:a="http://schemas.openxmlformats.org/drawingml/2006/main" xmlns:r="http://schemas.openxmlformats.org/officeDocument/2006/relationships" xmlns:p="http://schemas.openxmlformats.org/presentationml/2006/main">
-  <p:cSld name="Slide 8">
-    <p:bg>
-      <p:bgPr>
-        <a:solidFill>
-          <a:srgbClr val="FFFFFF"/>
-        </a:solidFill>
-        <a:effectLst/>
-      </p:bgPr>
-    </p:bg>
-    <p:spTree>
-      <p:nvGrpSpPr>
-        <p:cNvPr id="1" name=""/>
-        <p:cNvGrpSpPr/>
-        <p:nvPr/>
-      </p:nvGrpSpPr>
-      <p:grpSpPr>
-        <a:xfrm>
-          <a:off x="0" y="0"/>
-          <a:ext cx="0" cy="0"/>
-          <a:chOff x="0" y="0"/>
-          <a:chExt cx="0" cy="0"/>
-        </a:xfrm>
-      </p:grpSpPr>
-      <p:sp>
-        <p:nvSpPr>
-          <p:cNvPr id="2" name="Shape 0"/>
-          <p:cNvSpPr/>
-          <p:nvPr/>
-        </p:nvSpPr>
-        <p:spPr>
-          <a:xfrm>
-            <a:off x="548640" y="566928"/>
-            <a:ext cx="146304" cy="457200"/>
-          </a:xfrm>
-          <a:prstGeom prst="rect">
-            <a:avLst/>
-          </a:prstGeom>
-          <a:solidFill>
-            <a:srgbClr val="0E9594"/>
-          </a:solidFill>
-          <a:ln/>
-        </p:spPr>
-        <p:txBody>
-          <a:bodyPr/>
-          <a:lstStyle/>
-          <a:p>
-            <a:endParaRPr/>
-          </a:p>
-        </p:txBody>
-      </p:sp>
-      <p:sp>
-        <p:nvSpPr>
-          <p:cNvPr id="3" name="Text 1"/>
-          <p:cNvSpPr/>
-          <p:nvPr/>
-        </p:nvSpPr>
-        <p:spPr>
-          <a:xfrm>
-            <a:off x="822960" y="310896"/>
-            <a:ext cx="10515600" cy="292608"/>
-          </a:xfrm>
-          <a:prstGeom prst="rect">
-            <a:avLst/>
-          </a:prstGeom>
-          <a:noFill/>
-          <a:ln/>
-        </p:spPr>
-        <p:txBody>
-          <a:bodyPr wrap="square" lIns="0" tIns="0" rIns="0" bIns="0" rtlCol="0" anchor="ctr"/>
-          <a:lstStyle/>
-          <a:p>
-            <a:pPr marL="0" indent="0">
-              <a:buNone/>
-            </a:pPr>
-            <a:r>
-              <a:rPr lang="en-US" sz="1200" b="1" kern="0" spc="200" dirty="0">
-                <a:solidFill>
-                  <a:srgbClr val="0E9594"/>
-                </a:solidFill>
-                <a:latin typeface="Trebuchet MS" pitchFamily="34" charset="0"/>
-                <a:ea typeface="Trebuchet MS" pitchFamily="34" charset="-122"/>
-                <a:cs typeface="Trebuchet MS" pitchFamily="34" charset="-120"/>
-              </a:rPr>
-              <a:t>ARCHITECTURE 3 · RNN</a:t>
-            </a:r>
-            <a:endParaRPr lang="en-US" sz="1200" dirty="0"/>
-          </a:p>
-        </p:txBody>
-      </p:sp>
-      <p:sp>
-        <p:nvSpPr>
-          <p:cNvPr id="4" name="Text 2"/>
-          <p:cNvSpPr/>
-          <p:nvPr/>
-        </p:nvSpPr>
-        <p:spPr>
-          <a:xfrm>
-            <a:off x="822960" y="566928"/>
-            <a:ext cx="10789920" cy="640080"/>
-          </a:xfrm>
-          <a:prstGeom prst="rect">
-            <a:avLst/>
-          </a:prstGeom>
-          <a:noFill/>
-          <a:ln/>
-        </p:spPr>
-        <p:txBody>
-          <a:bodyPr wrap="square" lIns="0" tIns="0" rIns="0" bIns="0" rtlCol="0" anchor="ctr"/>
-          <a:lstStyle/>
-          <a:p>
-            <a:pPr marL="0" indent="0">
-              <a:buNone/>
-            </a:pPr>
-            <a:r>
-              <a:rPr lang="en-US" sz="2800" b="1" dirty="0">
-                <a:solidFill>
-                  <a:srgbClr val="22303A"/>
-                </a:solidFill>
-                <a:latin typeface="Trebuchet MS" pitchFamily="34" charset="0"/>
-                <a:ea typeface="Trebuchet MS" pitchFamily="34" charset="-122"/>
-                <a:cs typeface="Trebuchet MS" pitchFamily="34" charset="-120"/>
-              </a:rPr>
-              <a:t>Pure BiLSTM is weak — convolution is what matters</a:t>
-            </a:r>
-            <a:endParaRPr lang="en-US" sz="2800" dirty="0"/>
-          </a:p>
-        </p:txBody>
-      </p:sp>
-      <p:sp>
-        <p:nvSpPr>
-          <p:cNvPr id="6" name="Text 3"/>
-          <p:cNvSpPr/>
-          <p:nvPr/>
-        </p:nvSpPr>
-        <p:spPr>
-          <a:xfrm>
-            <a:off x="731520" y="5641848"/>
-            <a:ext cx="7315200" cy="320040"/>
-          </a:xfrm>
-          <a:prstGeom prst="rect">
-            <a:avLst/>
-          </a:prstGeom>
-          <a:noFill/>
-          <a:ln/>
-        </p:spPr>
-        <p:txBody>
-          <a:bodyPr wrap="square" lIns="0" tIns="0" rIns="0" bIns="0" rtlCol="0" anchor="ctr"/>
-          <a:lstStyle/>
-          <a:p>
-            <a:pPr marL="0" indent="0" algn="ctr">
-              <a:buNone/>
-            </a:pPr>
-            <a:r>
-              <a:rPr lang="en-US" sz="1100" i="1" dirty="0">
-                <a:solidFill>
-                  <a:srgbClr val="6B7B85"/>
-                </a:solidFill>
-                <a:latin typeface="Calibri" pitchFamily="34" charset="0"/>
-                <a:ea typeface="Calibri" pitchFamily="34" charset="-122"/>
-                <a:cs typeface="Calibri" pitchFamily="34" charset="-120"/>
-              </a:rPr>
-              <a:t>One-axis sweeps around the baseline config</a:t>
-            </a:r>
-            <a:endParaRPr lang="en-US" sz="1100" dirty="0"/>
-          </a:p>
-        </p:txBody>
-      </p:sp>
-      <p:sp>
-        <p:nvSpPr>
-          <p:cNvPr id="7" name="Text 4"/>
-          <p:cNvSpPr/>
-          <p:nvPr/>
-        </p:nvSpPr>
-        <p:spPr>
-          <a:xfrm>
-            <a:off x="8321040" y="1691640"/>
-            <a:ext cx="3413455" cy="4206240"/>
-          </a:xfrm>
-          <a:prstGeom prst="rect">
-            <a:avLst/>
-          </a:prstGeom>
-          <a:noFill/>
-          <a:ln/>
-        </p:spPr>
-        <p:txBody>
-          <a:bodyPr wrap="square" rtlCol="0" anchor="t"/>
-          <a:lstStyle/>
-          <a:p>
-            <a:pPr marL="342900" indent="-342900">
-              <a:spcAft>
-                <a:spcPts val="900"/>
-              </a:spcAft>
-              <a:buSzPct val="100000"/>
-              <a:buChar char="•"/>
-            </a:pPr>
-            <a:r>
-              <a:rPr lang="en-US" sz="1400" dirty="0">
-                <a:solidFill>
-                  <a:srgbClr val="22303A"/>
-                </a:solidFill>
-                <a:latin typeface="Calibri" pitchFamily="34" charset="0"/>
-                <a:ea typeface="Calibri" pitchFamily="34" charset="-122"/>
-                <a:cs typeface="Calibri" pitchFamily="34" charset="-120"/>
-              </a:rPr>
-              <a:t>Pure BiLSTM tops out at AUC ≈ 0.66 — barely above the MLP.</a:t>
-            </a:r>
-            <a:endParaRPr lang="en-US" sz="1400" dirty="0"/>
-          </a:p>
-          <a:p>
-            <a:pPr marL="342900" indent="-342900">
-              <a:spcAft>
-                <a:spcPts val="900"/>
-              </a:spcAft>
-              <a:buSzPct val="100000"/>
-              <a:buChar char="•"/>
-            </a:pPr>
-            <a:r>
-              <a:rPr lang="en-US" sz="1400" dirty="0">
-                <a:solidFill>
-                  <a:srgbClr val="22303A"/>
-                </a:solidFill>
-                <a:latin typeface="Calibri" pitchFamily="34" charset="0"/>
-                <a:ea typeface="Calibri" pitchFamily="34" charset="-122"/>
-                <a:cs typeface="Calibri" pitchFamily="34" charset="-120"/>
-              </a:rPr>
-              <a:t>More layers / wider hidden does not help: it is bottlenecked by representation, not temporal capacity.</a:t>
-            </a:r>
-            <a:endParaRPr lang="en-US" sz="1400" dirty="0"/>
-          </a:p>
-          <a:p>
-            <a:pPr marL="342900" indent="-342900">
-              <a:spcAft>
-                <a:spcPts val="900"/>
-              </a:spcAft>
-              <a:buSzPct val="100000"/>
-              <a:buChar char="•"/>
-            </a:pPr>
-            <a:r>
-              <a:rPr lang="en-US" sz="1400" dirty="0">
-                <a:solidFill>
-                  <a:srgbClr val="22303A"/>
-                </a:solidFill>
-                <a:latin typeface="Calibri" pitchFamily="34" charset="0"/>
-                <a:ea typeface="Calibri" pitchFamily="34" charset="-122"/>
-                <a:cs typeface="Calibri" pitchFamily="34" charset="-120"/>
-              </a:rPr>
-              <a:t>Key insight: RNN 0.66 vs CRNN 0.86 — the discriminative work is convolutional, not recurrent.</a:t>
-            </a:r>
-            <a:endParaRPr lang="en-US" sz="1400" dirty="0"/>
-          </a:p>
-          <a:p>
-            <a:endParaRPr lang="en-US" sz="1400" dirty="0"/>
-          </a:p>
-          <a:p>
-            <a:endParaRPr lang="en-US" sz="1400" dirty="0"/>
-          </a:p>
-          <a:p>
-            <a:r>
-              <a:rPr lang="en-US" sz="950" b="1">
-                <a:solidFill>
-                  <a:srgbClr val="0E9594"/>
-                </a:solidFill>
-              </a:rPr>
-              <a:t>Baseline config</a:t>
-            </a:r>
-          </a:p>
-          <a:p>
-            <a:r>
-              <a:rPr lang="en-US" sz="900">
-                <a:solidFill>
-                  <a:srgbClr val="5C6B73"/>
-                </a:solidFill>
-              </a:rPr>
-              <a:t>BiLSTM layers / h: </a:t>
-            </a:r>
-            <a:r>
-              <a:rPr lang="en-US" sz="900">
-                <a:solidFill>
-                  <a:srgbClr val="22303A"/>
-                </a:solidFill>
-              </a:rPr>
-              <a:t>2 / 128</a:t>
-            </a:r>
-          </a:p>
-          <a:p>
-            <a:r>
-              <a:rPr lang="en-US" sz="900">
-                <a:solidFill>
-                  <a:srgbClr val="5C6B73"/>
-                </a:solidFill>
-              </a:rPr>
-              <a:t>Learning rate: </a:t>
-            </a:r>
-            <a:r>
-              <a:rPr lang="en-US" sz="900">
-                <a:solidFill>
-                  <a:srgbClr val="22303A"/>
-                </a:solidFill>
-              </a:rPr>
-              <a:t>5e-4</a:t>
-            </a:r>
-          </a:p>
-          <a:p>
-            <a:r>
-              <a:rPr lang="en-US" sz="900">
-                <a:solidFill>
-                  <a:srgbClr val="5C6B73"/>
-                </a:solidFill>
-              </a:rPr>
-              <a:t>Dropout / wd: </a:t>
-            </a:r>
-            <a:r>
-              <a:rPr lang="en-US" sz="900">
-                <a:solidFill>
-                  <a:srgbClr val="22303A"/>
-                </a:solidFill>
-              </a:rPr>
-              <a:t>0.5 / 1e-4</a:t>
-            </a:r>
-          </a:p>
-          <a:p>
-            <a:r>
-              <a:rPr lang="en-US" sz="900" b="1">
-                <a:solidFill>
-                  <a:srgbClr val="0E9594"/>
-                </a:solidFill>
-              </a:rPr>
-              <a:t>AUC 0.592  |  fake-recall 12%</a:t>
-            </a:r>
-          </a:p>
-          <a:p>
-            <a:endParaRPr lang="en-US" sz="900" b="1">
-              <a:solidFill>
-                <a:srgbClr val="0E9594"/>
-              </a:solidFill>
-            </a:endParaRPr>
-          </a:p>
-          <a:p>
-            <a:r>
-              <a:rPr lang="en-US" sz="950" b="1">
-                <a:solidFill>
-                  <a:srgbClr val="C9971B"/>
-                </a:solidFill>
-              </a:rPr>
-              <a:t>Best config</a:t>
-            </a:r>
-          </a:p>
-          <a:p>
-            <a:r>
-              <a:rPr lang="en-US" sz="900">
-                <a:solidFill>
-                  <a:srgbClr val="5C6B73"/>
-                </a:solidFill>
-              </a:rPr>
-              <a:t>BiLSTM layers / h: </a:t>
-            </a:r>
-            <a:r>
-              <a:rPr lang="en-US" sz="900">
-                <a:solidFill>
-                  <a:srgbClr val="22303A"/>
-                </a:solidFill>
-              </a:rPr>
-              <a:t>1 / 128  ← fewer layers</a:t>
-            </a:r>
-          </a:p>
-          <a:p>
-            <a:r>
-              <a:rPr lang="en-US" sz="900">
-                <a:solidFill>
-                  <a:srgbClr val="5C6B73"/>
-                </a:solidFill>
-              </a:rPr>
-              <a:t>Learning rate: </a:t>
-            </a:r>
-            <a:r>
-              <a:rPr lang="en-US" sz="900">
-                <a:solidFill>
-                  <a:srgbClr val="22303A"/>
-                </a:solidFill>
-              </a:rPr>
-              <a:t>5e-4</a:t>
-            </a:r>
-          </a:p>
-          <a:p>
-            <a:r>
-              <a:rPr lang="en-US" sz="900">
-                <a:solidFill>
-                  <a:srgbClr val="5C6B73"/>
-                </a:solidFill>
-              </a:rPr>
-              <a:t>Dropout / wd: </a:t>
-            </a:r>
-            <a:r>
-              <a:rPr lang="en-US" sz="900">
-                <a:solidFill>
-                  <a:srgbClr val="22303A"/>
-                </a:solidFill>
-              </a:rPr>
-              <a:t>0.5 / 1e-4</a:t>
-            </a:r>
-          </a:p>
-          <a:p>
-            <a:r>
-              <a:rPr lang="en-US" sz="900" b="1">
-                <a:solidFill>
-                  <a:srgbClr val="C9971B"/>
-                </a:solidFill>
-              </a:rPr>
-              <a:t>AUC 0.660  |  fake-recall 17%</a:t>
-            </a:r>
-          </a:p>
-        </p:txBody>
-      </p:sp>
-      <p:sp>
-        <p:nvSpPr>
-          <p:cNvPr id="8" name="Text 5"/>
-          <p:cNvSpPr/>
-          <p:nvPr/>
-        </p:nvSpPr>
-        <p:spPr>
-          <a:xfrm>
-            <a:off x="548640" y="6437376"/>
-            <a:ext cx="7315200" cy="274320"/>
-          </a:xfrm>
-          <a:prstGeom prst="rect">
-            <a:avLst/>
-          </a:prstGeom>
-          <a:noFill/>
-          <a:ln/>
-        </p:spPr>
-        <p:txBody>
-          <a:bodyPr wrap="square" lIns="0" tIns="0" rIns="0" bIns="0" rtlCol="0" anchor="ctr"/>
-          <a:lstStyle/>
-          <a:p>
-            <a:pPr marL="0" indent="0">
-              <a:buNone/>
-            </a:pPr>
-            <a:r>
-              <a:rPr lang="en-US" sz="900" dirty="0">
-                <a:solidFill>
-                  <a:srgbClr val="6B7B85"/>
-                </a:solidFill>
-                <a:latin typeface="Calibri" pitchFamily="34" charset="0"/>
-                <a:ea typeface="Calibri" pitchFamily="34" charset="-122"/>
-                <a:cs typeface="Calibri" pitchFamily="34" charset="-120"/>
-              </a:rPr>
-              <a:t>Audio Deepfake Detection — DL project</a:t>
-            </a:r>
-            <a:endParaRPr lang="en-US" sz="900" dirty="0"/>
-          </a:p>
-        </p:txBody>
-      </p:sp>
-      <p:sp>
-        <p:nvSpPr>
-          <p:cNvPr id="9" name="Text 6"/>
-          <p:cNvSpPr/>
-          <p:nvPr/>
-        </p:nvSpPr>
-        <p:spPr>
-          <a:xfrm>
-            <a:off x="11430000" y="6437376"/>
-            <a:ext cx="548640" cy="274320"/>
-          </a:xfrm>
-          <a:prstGeom prst="rect">
-            <a:avLst/>
-          </a:prstGeom>
-          <a:noFill/>
-          <a:ln/>
-        </p:spPr>
-        <p:txBody>
-          <a:bodyPr wrap="square" lIns="0" tIns="0" rIns="0" bIns="0" rtlCol="0" anchor="ctr"/>
-          <a:lstStyle/>
-          <a:p>
-            <a:pPr marL="0" indent="0" algn="r">
-              <a:buNone/>
-            </a:pPr>
-            <a:r>
-              <a:rPr lang="en-US" sz="900" dirty="0">
-                <a:solidFill>
-                  <a:srgbClr val="6B7B85"/>
-                </a:solidFill>
-                <a:latin typeface="Calibri" pitchFamily="34" charset="0"/>
-                <a:ea typeface="Calibri" pitchFamily="34" charset="-122"/>
-                <a:cs typeface="Calibri" pitchFamily="34" charset="-120"/>
-              </a:rPr>
-              <a:t>8</a:t>
-            </a:r>
-            <a:endParaRPr lang="en-US" sz="900" dirty="0"/>
-          </a:p>
-        </p:txBody>
-      </p:sp>
-      <p:pic>
-        <p:nvPicPr>
-          <p:cNvPr id="10" name="Picture 9" descr="fig_rnn_hparam.png"/>
-          <p:cNvPicPr>
-            <a:picLocks noChangeAspect="1"/>
-          </p:cNvPicPr>
-          <p:nvPr/>
-        </p:nvPicPr>
-        <p:blipFill>
-          <a:blip r:embed="rId3"/>
-          <a:stretch>
-            <a:fillRect/>
-          </a:stretch>
-        </p:blipFill>
-        <p:spPr>
-          <a:xfrm>
-            <a:off x="731520" y="1691640"/>
-            <a:ext cx="7315200" cy="3931920"/>
+            <a:off x="319628" y="1463040"/>
+            <a:ext cx="7794642" cy="4189620"/>
           </a:xfrm>
           <a:prstGeom prst="rect">
             <a:avLst/>

--- a/presentation.pptx
+++ b/presentation.pptx
@@ -5,25 +5,26 @@
     <p:sldMasterId id="2147483648" r:id="rId1"/>
   </p:sldMasterIdLst>
   <p:notesMasterIdLst>
-    <p:notesMasterId r:id="rId18"/>
+    <p:notesMasterId r:id="rId19"/>
   </p:notesMasterIdLst>
   <p:sldIdLst>
     <p:sldId id="256" r:id="rId2"/>
     <p:sldId id="257" r:id="rId3"/>
     <p:sldId id="258" r:id="rId4"/>
     <p:sldId id="259" r:id="rId5"/>
-    <p:sldId id="260" r:id="rId6"/>
-    <p:sldId id="261" r:id="rId7"/>
-    <p:sldId id="263" r:id="rId8"/>
-    <p:sldId id="262" r:id="rId9"/>
-    <p:sldId id="264" r:id="rId10"/>
-    <p:sldId id="265" r:id="rId11"/>
-    <p:sldId id="266" r:id="rId12"/>
-    <p:sldId id="271" r:id="rId13"/>
-    <p:sldId id="267" r:id="rId14"/>
-    <p:sldId id="268" r:id="rId15"/>
-    <p:sldId id="269" r:id="rId16"/>
-    <p:sldId id="270" r:id="rId17"/>
+    <p:sldId id="273" r:id="rId6"/>
+    <p:sldId id="260" r:id="rId7"/>
+    <p:sldId id="261" r:id="rId8"/>
+    <p:sldId id="263" r:id="rId9"/>
+    <p:sldId id="262" r:id="rId10"/>
+    <p:sldId id="272" r:id="rId11"/>
+    <p:sldId id="264" r:id="rId12"/>
+    <p:sldId id="265" r:id="rId13"/>
+    <p:sldId id="266" r:id="rId14"/>
+    <p:sldId id="271" r:id="rId15"/>
+    <p:sldId id="268" r:id="rId16"/>
+    <p:sldId id="269" r:id="rId17"/>
+    <p:sldId id="270" r:id="rId18"/>
   </p:sldIdLst>
   <p:sldSz cx="12192000" cy="6858000"/>
   <p:notesSz cx="6858000" cy="12192000"/>
@@ -401,7 +402,7 @@
           <a:p>
             <a:fld id="{F7021451-1387-4CA6-816F-3879F97B5CBC}" type="slidenum">
               <a:rPr lang="en-US"/>
-              <a:t>10</a:t>
+              <a:t>11</a:t>
             </a:fld>
             <a:endParaRPr lang="en-US"/>
           </a:p>
@@ -485,7 +486,7 @@
           <a:p>
             <a:fld id="{F7021451-1387-4CA6-816F-3879F97B5CBC}" type="slidenum">
               <a:rPr lang="en-US"/>
-              <a:t>11</a:t>
+              <a:t>12</a:t>
             </a:fld>
             <a:endParaRPr lang="en-US"/>
           </a:p>
@@ -653,7 +654,7 @@
           <a:p>
             <a:fld id="{F7021451-1387-4CA6-816F-3879F97B5CBC}" type="slidenum">
               <a:rPr lang="en-US"/>
-              <a:t>14</a:t>
+              <a:t>15</a:t>
             </a:fld>
             <a:endParaRPr lang="en-US"/>
           </a:p>
@@ -737,7 +738,7 @@
           <a:p>
             <a:fld id="{F7021451-1387-4CA6-816F-3879F97B5CBC}" type="slidenum">
               <a:rPr lang="en-US"/>
-              <a:t>15</a:t>
+              <a:t>16</a:t>
             </a:fld>
             <a:endParaRPr lang="en-US"/>
           </a:p>
@@ -821,7 +822,7 @@
           <a:p>
             <a:fld id="{F7021451-1387-4CA6-816F-3879F97B5CBC}" type="slidenum">
               <a:rPr lang="en-US"/>
-              <a:t>16</a:t>
+              <a:t>17</a:t>
             </a:fld>
             <a:endParaRPr lang="en-US"/>
           </a:p>
@@ -1157,7 +1158,7 @@
           <a:p>
             <a:fld id="{F7021451-1387-4CA6-816F-3879F97B5CBC}" type="slidenum">
               <a:rPr lang="en-US"/>
-              <a:t>5</a:t>
+              <a:t>6</a:t>
             </a:fld>
             <a:endParaRPr lang="en-US"/>
           </a:p>
@@ -1241,7 +1242,7 @@
           <a:p>
             <a:fld id="{F7021451-1387-4CA6-816F-3879F97B5CBC}" type="slidenum">
               <a:rPr lang="en-US"/>
-              <a:t>6</a:t>
+              <a:t>7</a:t>
             </a:fld>
             <a:endParaRPr lang="en-US"/>
           </a:p>
@@ -1325,7 +1326,7 @@
           <a:p>
             <a:fld id="{F7021451-1387-4CA6-816F-3879F97B5CBC}" type="slidenum">
               <a:rPr lang="en-US"/>
-              <a:t>7</a:t>
+              <a:t>8</a:t>
             </a:fld>
             <a:endParaRPr lang="en-US"/>
           </a:p>
@@ -1409,7 +1410,7 @@
           <a:p>
             <a:fld id="{F7021451-1387-4CA6-816F-3879F97B5CBC}" type="slidenum">
               <a:rPr lang="en-US"/>
-              <a:t>8</a:t>
+              <a:t>9</a:t>
             </a:fld>
             <a:endParaRPr lang="en-US"/>
           </a:p>
@@ -1493,7 +1494,7 @@
           <a:p>
             <a:fld id="{F7021451-1387-4CA6-816F-3879F97B5CBC}" type="slidenum">
               <a:rPr lang="en-US"/>
-              <a:t>9</a:t>
+              <a:t>10</a:t>
             </a:fld>
             <a:endParaRPr lang="en-US"/>
           </a:p>
@@ -1502,7 +1503,7 @@
     </p:spTree>
     <p:extLst>
       <p:ext uri="{BB962C8B-B14F-4D97-AF65-F5344CB8AC3E}">
-        <p14:creationId xmlns:p14="http://schemas.microsoft.com/office/powerpoint/2010/main" val="1024086991"/>
+        <p14:creationId xmlns:p14="http://schemas.microsoft.com/office/powerpoint/2010/main" val="2834873423"/>
       </p:ext>
     </p:extLst>
   </p:cSld>
@@ -1542,6 +1543,125 @@
 </p:sldLayout>
 </file>
 
+<file path=ppt/slideLayouts/slideLayout2.xml><?xml version="1.0" encoding="utf-8"?>
+<p:sldLayout xmlns:a="http://schemas.openxmlformats.org/drawingml/2006/main" xmlns:r="http://schemas.openxmlformats.org/officeDocument/2006/relationships" xmlns:p="http://schemas.openxmlformats.org/presentationml/2006/main" type="blank">
+  <p:cSld name="Blank">
+    <p:spTree>
+      <p:nvGrpSpPr>
+        <p:cNvPr id="1" name=""/>
+        <p:cNvGrpSpPr/>
+        <p:nvPr/>
+      </p:nvGrpSpPr>
+      <p:grpSpPr>
+        <a:xfrm>
+          <a:off x="0" y="0"/>
+          <a:ext cx="0" cy="0"/>
+          <a:chOff x="0" y="0"/>
+          <a:chExt cx="0" cy="0"/>
+        </a:xfrm>
+      </p:grpSpPr>
+      <p:sp>
+        <p:nvSpPr>
+          <p:cNvPr id="2" name="Date Placeholder 1"/>
+          <p:cNvSpPr>
+            <a:spLocks noGrp="1"/>
+          </p:cNvSpPr>
+          <p:nvPr>
+            <p:ph type="dt" sz="half" idx="10"/>
+          </p:nvPr>
+        </p:nvSpPr>
+        <p:spPr>
+          <a:xfrm>
+            <a:off x="457200" y="6356350"/>
+            <a:ext cx="2133600" cy="365125"/>
+          </a:xfrm>
+          <a:prstGeom prst="rect">
+            <a:avLst/>
+          </a:prstGeom>
+        </p:spPr>
+        <p:txBody>
+          <a:bodyPr/>
+          <a:lstStyle/>
+          <a:p>
+            <a:fld id="{5BCAD085-E8A6-8845-BD4E-CB4CCA059FC4}" type="datetimeFigureOut">
+              <a:rPr lang="en-US" smtClean="0"/>
+              <a:t>6/23/2026</a:t>
+            </a:fld>
+            <a:endParaRPr lang="en-US"/>
+          </a:p>
+        </p:txBody>
+      </p:sp>
+      <p:sp>
+        <p:nvSpPr>
+          <p:cNvPr id="3" name="Footer Placeholder 2"/>
+          <p:cNvSpPr>
+            <a:spLocks noGrp="1"/>
+          </p:cNvSpPr>
+          <p:nvPr>
+            <p:ph type="ftr" sz="quarter" idx="11"/>
+          </p:nvPr>
+        </p:nvSpPr>
+        <p:spPr>
+          <a:xfrm>
+            <a:off x="3124200" y="6356350"/>
+            <a:ext cx="2895600" cy="365125"/>
+          </a:xfrm>
+          <a:prstGeom prst="rect">
+            <a:avLst/>
+          </a:prstGeom>
+        </p:spPr>
+        <p:txBody>
+          <a:bodyPr/>
+          <a:lstStyle/>
+          <a:p>
+            <a:endParaRPr lang="en-US"/>
+          </a:p>
+        </p:txBody>
+      </p:sp>
+      <p:sp>
+        <p:nvSpPr>
+          <p:cNvPr id="4" name="Slide Number Placeholder 3"/>
+          <p:cNvSpPr>
+            <a:spLocks noGrp="1"/>
+          </p:cNvSpPr>
+          <p:nvPr>
+            <p:ph type="sldNum" sz="quarter" idx="12"/>
+          </p:nvPr>
+        </p:nvSpPr>
+        <p:spPr>
+          <a:xfrm>
+            <a:off x="6553200" y="6356350"/>
+            <a:ext cx="2133600" cy="365125"/>
+          </a:xfrm>
+          <a:prstGeom prst="rect">
+            <a:avLst/>
+          </a:prstGeom>
+        </p:spPr>
+        <p:txBody>
+          <a:bodyPr/>
+          <a:lstStyle/>
+          <a:p>
+            <a:fld id="{C1FF6DA9-008F-8B48-92A6-B652298478BF}" type="slidenum">
+              <a:rPr lang="en-US" smtClean="0"/>
+              <a:t>‹#›</a:t>
+            </a:fld>
+            <a:endParaRPr lang="en-US"/>
+          </a:p>
+        </p:txBody>
+      </p:sp>
+    </p:spTree>
+    <p:extLst>
+      <p:ext uri="{BB962C8B-B14F-4D97-AF65-F5344CB8AC3E}">
+        <p14:creationId xmlns:p14="http://schemas.microsoft.com/office/powerpoint/2010/main" val="63907043"/>
+      </p:ext>
+    </p:extLst>
+  </p:cSld>
+  <p:clrMapOvr>
+    <a:masterClrMapping/>
+  </p:clrMapOvr>
+</p:sldLayout>
+</file>
+
 <file path=ppt/slideMasters/slideMaster1.xml><?xml version="1.0" encoding="utf-8"?>
 <p:sldMaster xmlns:a="http://schemas.openxmlformats.org/drawingml/2006/main" xmlns:r="http://schemas.openxmlformats.org/officeDocument/2006/relationships" xmlns:p="http://schemas.openxmlformats.org/presentationml/2006/main">
   <p:cSld>
@@ -1569,6 +1689,7 @@
   <p:clrMap bg1="lt1" tx1="dk1" bg2="lt2" tx2="dk2" accent1="accent1" accent2="accent2" accent3="accent3" accent4="accent4" accent5="accent5" accent6="accent6" hlink="hlink" folHlink="folHlink"/>
   <p:sldLayoutIdLst>
     <p:sldLayoutId id="2147483649" r:id="rId1"/>
+    <p:sldLayoutId id="2147483650" r:id="rId2"/>
   </p:sldLayoutIdLst>
   <p:hf sldNum="0" hdr="0" ftr="0" dt="0"/>
   <p:txStyles>
@@ -2041,15 +2162,7 @@
                   <a:schemeClr val="bg1"/>
                 </a:solidFill>
               </a:rPr>
-              <a:t>Learning </a:t>
-            </a:r>
-            <a:r>
-              <a:rPr lang="en-US" dirty="0">
-                <a:solidFill>
-                  <a:schemeClr val="bg1"/>
-                </a:solidFill>
-              </a:rPr>
-              <a:t>P</a:t>
+              <a:t>Learning P</a:t>
             </a:r>
             <a:r>
               <a:rPr lang="en-US" dirty="0" smtClean="0">
@@ -2151,6 +2264,934 @@
 </file>
 
 <file path=ppt/slides/slide10.xml><?xml version="1.0" encoding="utf-8"?>
+<p:sld xmlns:a="http://schemas.openxmlformats.org/drawingml/2006/main" xmlns:r="http://schemas.openxmlformats.org/officeDocument/2006/relationships" xmlns:p="http://schemas.openxmlformats.org/presentationml/2006/main">
+  <p:cSld>
+    <p:spTree>
+      <p:nvGrpSpPr>
+        <p:cNvPr id="1" name=""/>
+        <p:cNvGrpSpPr/>
+        <p:nvPr/>
+      </p:nvGrpSpPr>
+      <p:grpSpPr>
+        <a:xfrm>
+          <a:off x="0" y="0"/>
+          <a:ext cx="0" cy="0"/>
+          <a:chOff x="0" y="0"/>
+          <a:chExt cx="0" cy="0"/>
+        </a:xfrm>
+      </p:grpSpPr>
+      <p:sp>
+        <p:nvSpPr>
+          <p:cNvPr id="2" name="Shape 0"/>
+          <p:cNvSpPr/>
+          <p:nvPr/>
+        </p:nvSpPr>
+        <p:spPr>
+          <a:xfrm>
+            <a:off x="548640" y="566928"/>
+            <a:ext cx="146304" cy="457200"/>
+          </a:xfrm>
+          <a:prstGeom prst="rect">
+            <a:avLst/>
+          </a:prstGeom>
+          <a:solidFill>
+            <a:srgbClr val="0E9594"/>
+          </a:solidFill>
+          <a:ln/>
+        </p:spPr>
+        <p:txBody>
+          <a:bodyPr/>
+          <a:lstStyle/>
+          <a:p>
+            <a:endParaRPr/>
+          </a:p>
+        </p:txBody>
+      </p:sp>
+      <p:sp>
+        <p:nvSpPr>
+          <p:cNvPr id="3" name="Text 1"/>
+          <p:cNvSpPr/>
+          <p:nvPr/>
+        </p:nvSpPr>
+        <p:spPr>
+          <a:xfrm>
+            <a:off x="822960" y="310896"/>
+            <a:ext cx="10515600" cy="292608"/>
+          </a:xfrm>
+          <a:prstGeom prst="rect">
+            <a:avLst/>
+          </a:prstGeom>
+          <a:noFill/>
+          <a:ln/>
+        </p:spPr>
+        <p:txBody>
+          <a:bodyPr wrap="square" lIns="0" tIns="0" rIns="0" bIns="0" rtlCol="0" anchor="ctr"/>
+          <a:lstStyle/>
+          <a:p>
+            <a:pPr marL="0" indent="0">
+              <a:buNone/>
+            </a:pPr>
+            <a:r>
+              <a:rPr lang="en-US" sz="1200" b="1" kern="0" spc="200" dirty="0">
+                <a:solidFill>
+                  <a:srgbClr val="0E9594"/>
+                </a:solidFill>
+                <a:latin typeface="Trebuchet MS" pitchFamily="34" charset="0"/>
+                <a:ea typeface="Trebuchet MS" pitchFamily="34" charset="-122"/>
+                <a:cs typeface="Trebuchet MS" pitchFamily="34" charset="-120"/>
+              </a:rPr>
+              <a:t>ARCHITECTURE 4 · WAVLM</a:t>
+            </a:r>
+            <a:endParaRPr lang="en-US" sz="1200" dirty="0"/>
+          </a:p>
+        </p:txBody>
+      </p:sp>
+      <p:sp>
+        <p:nvSpPr>
+          <p:cNvPr id="4" name="Text 2"/>
+          <p:cNvSpPr/>
+          <p:nvPr/>
+        </p:nvSpPr>
+        <p:spPr>
+          <a:xfrm>
+            <a:off x="822960" y="566928"/>
+            <a:ext cx="10789920" cy="640080"/>
+          </a:xfrm>
+          <a:prstGeom prst="rect">
+            <a:avLst/>
+          </a:prstGeom>
+          <a:noFill/>
+          <a:ln/>
+        </p:spPr>
+        <p:txBody>
+          <a:bodyPr wrap="square" lIns="0" tIns="0" rIns="0" bIns="0" rtlCol="0" anchor="ctr"/>
+          <a:lstStyle/>
+          <a:p>
+            <a:pPr marL="0" indent="0">
+              <a:buNone/>
+            </a:pPr>
+            <a:r>
+              <a:rPr lang="en-US" sz="2800" b="1" dirty="0" smtClean="0"/>
+              <a:t>WAVLM Based Classifier Network</a:t>
+            </a:r>
+            <a:endParaRPr lang="en-US" sz="2800" b="1" dirty="0"/>
+          </a:p>
+        </p:txBody>
+      </p:sp>
+      <p:sp>
+        <p:nvSpPr>
+          <p:cNvPr id="7" name="Text 4"/>
+          <p:cNvSpPr/>
+          <p:nvPr/>
+        </p:nvSpPr>
+        <p:spPr>
+          <a:xfrm>
+            <a:off x="548640" y="6437376"/>
+            <a:ext cx="7315200" cy="274320"/>
+          </a:xfrm>
+          <a:prstGeom prst="rect">
+            <a:avLst/>
+          </a:prstGeom>
+          <a:noFill/>
+          <a:ln/>
+        </p:spPr>
+        <p:txBody>
+          <a:bodyPr wrap="square" lIns="0" tIns="0" rIns="0" bIns="0" rtlCol="0" anchor="ctr"/>
+          <a:lstStyle/>
+          <a:p>
+            <a:pPr marL="0" indent="0">
+              <a:buNone/>
+            </a:pPr>
+            <a:r>
+              <a:rPr lang="en-US" sz="900" dirty="0">
+                <a:solidFill>
+                  <a:srgbClr val="6B7B85"/>
+                </a:solidFill>
+                <a:latin typeface="Calibri" pitchFamily="34" charset="0"/>
+                <a:ea typeface="Calibri" pitchFamily="34" charset="-122"/>
+                <a:cs typeface="Calibri" pitchFamily="34" charset="-120"/>
+              </a:rPr>
+              <a:t>Audio Deepfake Detection — DL project</a:t>
+            </a:r>
+            <a:endParaRPr lang="en-US" sz="900" dirty="0"/>
+          </a:p>
+        </p:txBody>
+      </p:sp>
+      <p:sp>
+        <p:nvSpPr>
+          <p:cNvPr id="8" name="Text 5"/>
+          <p:cNvSpPr/>
+          <p:nvPr/>
+        </p:nvSpPr>
+        <p:spPr>
+          <a:xfrm>
+            <a:off x="11430000" y="6437376"/>
+            <a:ext cx="548640" cy="274320"/>
+          </a:xfrm>
+          <a:prstGeom prst="rect">
+            <a:avLst/>
+          </a:prstGeom>
+          <a:noFill/>
+          <a:ln/>
+        </p:spPr>
+        <p:txBody>
+          <a:bodyPr wrap="square" lIns="0" tIns="0" rIns="0" bIns="0" rtlCol="0" anchor="ctr"/>
+          <a:lstStyle/>
+          <a:p>
+            <a:pPr marL="0" indent="0" algn="r">
+              <a:buNone/>
+            </a:pPr>
+            <a:r>
+              <a:rPr lang="en-US" sz="900" dirty="0">
+                <a:solidFill>
+                  <a:srgbClr val="6B7B85"/>
+                </a:solidFill>
+                <a:latin typeface="Calibri" pitchFamily="34" charset="0"/>
+                <a:ea typeface="Calibri" pitchFamily="34" charset="-122"/>
+                <a:cs typeface="Calibri" pitchFamily="34" charset="-120"/>
+              </a:rPr>
+              <a:t>9</a:t>
+            </a:r>
+            <a:endParaRPr lang="en-US" sz="900" dirty="0"/>
+          </a:p>
+        </p:txBody>
+      </p:sp>
+      <p:pic>
+        <p:nvPicPr>
+          <p:cNvPr id="13" name="Picture 12"/>
+          <p:cNvPicPr>
+            <a:picLocks noChangeAspect="1"/>
+          </p:cNvPicPr>
+          <p:nvPr/>
+        </p:nvPicPr>
+        <p:blipFill>
+          <a:blip r:embed="rId3">
+            <a:extLst>
+              <a:ext uri="{28A0092B-C50C-407E-A947-70E740481C1C}">
+                <a14:useLocalDpi xmlns:a14="http://schemas.microsoft.com/office/drawing/2010/main" val="0"/>
+              </a:ext>
+            </a:extLst>
+          </a:blip>
+          <a:stretch>
+            <a:fillRect/>
+          </a:stretch>
+        </p:blipFill>
+        <p:spPr>
+          <a:xfrm>
+            <a:off x="1051560" y="1463040"/>
+            <a:ext cx="10058400" cy="4993755"/>
+          </a:xfrm>
+          <a:prstGeom prst="rect">
+            <a:avLst/>
+          </a:prstGeom>
+        </p:spPr>
+      </p:pic>
+    </p:spTree>
+    <p:extLst>
+      <p:ext uri="{BB962C8B-B14F-4D97-AF65-F5344CB8AC3E}">
+        <p14:creationId xmlns:p14="http://schemas.microsoft.com/office/powerpoint/2010/main" val="3509793040"/>
+      </p:ext>
+    </p:extLst>
+  </p:cSld>
+  <p:clrMapOvr>
+    <a:masterClrMapping/>
+  </p:clrMapOvr>
+</p:sld>
+</file>
+
+<file path=ppt/slides/slide11.xml><?xml version="1.0" encoding="utf-8"?>
+<p:sld xmlns:a="http://schemas.openxmlformats.org/drawingml/2006/main" xmlns:r="http://schemas.openxmlformats.org/officeDocument/2006/relationships" xmlns:p="http://schemas.openxmlformats.org/presentationml/2006/main">
+  <p:cSld name="Slide 9">
+    <p:bg>
+      <p:bgPr>
+        <a:solidFill>
+          <a:srgbClr val="FFFFFF"/>
+        </a:solidFill>
+        <a:effectLst/>
+      </p:bgPr>
+    </p:bg>
+    <p:spTree>
+      <p:nvGrpSpPr>
+        <p:cNvPr id="1" name=""/>
+        <p:cNvGrpSpPr/>
+        <p:nvPr/>
+      </p:nvGrpSpPr>
+      <p:grpSpPr>
+        <a:xfrm>
+          <a:off x="0" y="0"/>
+          <a:ext cx="0" cy="0"/>
+          <a:chOff x="0" y="0"/>
+          <a:chExt cx="0" cy="0"/>
+        </a:xfrm>
+      </p:grpSpPr>
+      <p:sp>
+        <p:nvSpPr>
+          <p:cNvPr id="2" name="Shape 0"/>
+          <p:cNvSpPr/>
+          <p:nvPr/>
+        </p:nvSpPr>
+        <p:spPr>
+          <a:xfrm>
+            <a:off x="548640" y="566928"/>
+            <a:ext cx="146304" cy="457200"/>
+          </a:xfrm>
+          <a:prstGeom prst="rect">
+            <a:avLst/>
+          </a:prstGeom>
+          <a:solidFill>
+            <a:srgbClr val="0E9594"/>
+          </a:solidFill>
+          <a:ln/>
+        </p:spPr>
+        <p:txBody>
+          <a:bodyPr/>
+          <a:lstStyle/>
+          <a:p>
+            <a:endParaRPr/>
+          </a:p>
+        </p:txBody>
+      </p:sp>
+      <p:sp>
+        <p:nvSpPr>
+          <p:cNvPr id="3" name="Text 1"/>
+          <p:cNvSpPr/>
+          <p:nvPr/>
+        </p:nvSpPr>
+        <p:spPr>
+          <a:xfrm>
+            <a:off x="822960" y="310896"/>
+            <a:ext cx="10515600" cy="292608"/>
+          </a:xfrm>
+          <a:prstGeom prst="rect">
+            <a:avLst/>
+          </a:prstGeom>
+          <a:noFill/>
+          <a:ln/>
+        </p:spPr>
+        <p:txBody>
+          <a:bodyPr wrap="square" lIns="0" tIns="0" rIns="0" bIns="0" rtlCol="0" anchor="ctr"/>
+          <a:lstStyle/>
+          <a:p>
+            <a:pPr marL="0" indent="0">
+              <a:buNone/>
+            </a:pPr>
+            <a:r>
+              <a:rPr lang="en-US" sz="1200" b="1" kern="0" spc="200" dirty="0">
+                <a:solidFill>
+                  <a:srgbClr val="0E9594"/>
+                </a:solidFill>
+                <a:latin typeface="Trebuchet MS" pitchFamily="34" charset="0"/>
+                <a:ea typeface="Trebuchet MS" pitchFamily="34" charset="-122"/>
+                <a:cs typeface="Trebuchet MS" pitchFamily="34" charset="-120"/>
+              </a:rPr>
+              <a:t>ARCHITECTURE 4 · WAVLM</a:t>
+            </a:r>
+            <a:endParaRPr lang="en-US" sz="1200" dirty="0"/>
+          </a:p>
+        </p:txBody>
+      </p:sp>
+      <p:sp>
+        <p:nvSpPr>
+          <p:cNvPr id="4" name="Text 2"/>
+          <p:cNvSpPr/>
+          <p:nvPr/>
+        </p:nvSpPr>
+        <p:spPr>
+          <a:xfrm>
+            <a:off x="822960" y="566928"/>
+            <a:ext cx="10789920" cy="640080"/>
+          </a:xfrm>
+          <a:prstGeom prst="rect">
+            <a:avLst/>
+          </a:prstGeom>
+          <a:noFill/>
+          <a:ln/>
+        </p:spPr>
+        <p:txBody>
+          <a:bodyPr wrap="square" lIns="0" tIns="0" rIns="0" bIns="0" rtlCol="0" anchor="ctr"/>
+          <a:lstStyle/>
+          <a:p>
+            <a:pPr marL="0" indent="0">
+              <a:buNone/>
+            </a:pPr>
+            <a:r>
+              <a:rPr lang="en-US" sz="2800" b="1" dirty="0" smtClean="0"/>
+              <a:t>Pre-trained </a:t>
+            </a:r>
+            <a:r>
+              <a:rPr lang="en-US" sz="2800" b="1" dirty="0" err="1" smtClean="0"/>
+              <a:t>WavLM</a:t>
+            </a:r>
+            <a:r>
+              <a:rPr lang="en-US" sz="2800" b="1" dirty="0" smtClean="0"/>
+              <a:t> Transformer Layer weight distribution</a:t>
+            </a:r>
+            <a:endParaRPr lang="en-US" sz="2800" b="1" dirty="0"/>
+          </a:p>
+        </p:txBody>
+      </p:sp>
+      <p:sp>
+        <p:nvSpPr>
+          <p:cNvPr id="6" name="Text 3"/>
+          <p:cNvSpPr/>
+          <p:nvPr/>
+        </p:nvSpPr>
+        <p:spPr>
+          <a:xfrm>
+            <a:off x="7955280" y="1691640"/>
+            <a:ext cx="3779215" cy="4206240"/>
+          </a:xfrm>
+          <a:prstGeom prst="rect">
+            <a:avLst/>
+          </a:prstGeom>
+          <a:noFill/>
+          <a:ln/>
+        </p:spPr>
+        <p:txBody>
+          <a:bodyPr wrap="square" rtlCol="0" anchor="t"/>
+          <a:lstStyle/>
+          <a:p>
+            <a:pPr marL="342900" indent="-342900">
+              <a:spcAft>
+                <a:spcPts val="900"/>
+              </a:spcAft>
+              <a:buSzPct val="100000"/>
+              <a:buChar char="•"/>
+            </a:pPr>
+            <a:r>
+              <a:rPr lang="en-US" sz="1400" dirty="0">
+                <a:solidFill>
+                  <a:srgbClr val="22303A"/>
+                </a:solidFill>
+                <a:latin typeface="Calibri" pitchFamily="34" charset="0"/>
+                <a:ea typeface="Calibri" pitchFamily="34" charset="-122"/>
+                <a:cs typeface="Calibri" pitchFamily="34" charset="-120"/>
+              </a:rPr>
+              <a:t>Frozen </a:t>
+            </a:r>
+            <a:r>
+              <a:rPr lang="en-US" sz="1400" dirty="0" smtClean="0">
+                <a:solidFill>
+                  <a:srgbClr val="22303A"/>
+                </a:solidFill>
+                <a:latin typeface="Calibri" pitchFamily="34" charset="0"/>
+                <a:ea typeface="Calibri" pitchFamily="34" charset="-122"/>
+                <a:cs typeface="Calibri" pitchFamily="34" charset="-120"/>
+              </a:rPr>
+              <a:t>backbone </a:t>
+            </a:r>
+            <a:r>
+              <a:rPr lang="en-US" sz="1400" dirty="0">
+                <a:solidFill>
+                  <a:srgbClr val="22303A"/>
+                </a:solidFill>
+                <a:latin typeface="Calibri" pitchFamily="34" charset="0"/>
+                <a:ea typeface="Calibri" pitchFamily="34" charset="-122"/>
+                <a:cs typeface="Calibri" pitchFamily="34" charset="-120"/>
+              </a:rPr>
+              <a:t>= weighted sum over hidden layers + linear head.</a:t>
+            </a:r>
+            <a:endParaRPr lang="en-US" sz="1400" dirty="0"/>
+          </a:p>
+          <a:p>
+            <a:pPr marL="342900" indent="-342900">
+              <a:spcAft>
+                <a:spcPts val="900"/>
+              </a:spcAft>
+              <a:buSzPct val="100000"/>
+              <a:buChar char="•"/>
+            </a:pPr>
+            <a:r>
+              <a:rPr lang="en-US" sz="1400" dirty="0">
+                <a:solidFill>
+                  <a:srgbClr val="22303A"/>
+                </a:solidFill>
+                <a:latin typeface="Calibri" pitchFamily="34" charset="0"/>
+                <a:ea typeface="Calibri" pitchFamily="34" charset="-122"/>
+                <a:cs typeface="Calibri" pitchFamily="34" charset="-120"/>
+              </a:rPr>
+              <a:t>~81% of weight on layer 3 of </a:t>
+            </a:r>
+            <a:r>
+              <a:rPr lang="en-US" sz="1400" dirty="0" smtClean="0">
+                <a:solidFill>
+                  <a:srgbClr val="22303A"/>
+                </a:solidFill>
+                <a:latin typeface="Calibri" pitchFamily="34" charset="0"/>
+                <a:ea typeface="Calibri" pitchFamily="34" charset="-122"/>
+                <a:cs typeface="Calibri" pitchFamily="34" charset="-120"/>
+              </a:rPr>
+              <a:t>12, </a:t>
+            </a:r>
+            <a:r>
+              <a:rPr lang="en-US" sz="1400" dirty="0">
+                <a:solidFill>
+                  <a:srgbClr val="22303A"/>
+                </a:solidFill>
+                <a:latin typeface="Calibri" pitchFamily="34" charset="0"/>
+                <a:ea typeface="Calibri" pitchFamily="34" charset="-122"/>
+                <a:cs typeface="Calibri" pitchFamily="34" charset="-120"/>
+              </a:rPr>
+              <a:t>the top layer is nearly ignored.</a:t>
+            </a:r>
+            <a:endParaRPr lang="en-US" sz="1400" dirty="0"/>
+          </a:p>
+          <a:p>
+            <a:pPr marL="342900" indent="-342900">
+              <a:spcAft>
+                <a:spcPts val="900"/>
+              </a:spcAft>
+              <a:buSzPct val="100000"/>
+              <a:buChar char="•"/>
+            </a:pPr>
+            <a:r>
+              <a:rPr lang="en-US" sz="1400" dirty="0">
+                <a:solidFill>
+                  <a:srgbClr val="22303A"/>
+                </a:solidFill>
+                <a:latin typeface="Calibri" pitchFamily="34" charset="0"/>
+                <a:ea typeface="Calibri" pitchFamily="34" charset="-122"/>
+                <a:cs typeface="Calibri" pitchFamily="34" charset="-120"/>
+              </a:rPr>
+              <a:t>A 13-layer variant (incl. CNN embedding) agrees — same block.</a:t>
+            </a:r>
+            <a:endParaRPr lang="en-US" sz="1400" dirty="0"/>
+          </a:p>
+          <a:p>
+            <a:pPr marL="342900" indent="-342900">
+              <a:spcAft>
+                <a:spcPts val="900"/>
+              </a:spcAft>
+              <a:buSzPct val="100000"/>
+              <a:buChar char="•"/>
+            </a:pPr>
+            <a:r>
+              <a:rPr lang="en-US" sz="1400" dirty="0">
+                <a:solidFill>
+                  <a:srgbClr val="22303A"/>
+                </a:solidFill>
+                <a:latin typeface="Calibri" pitchFamily="34" charset="0"/>
+                <a:ea typeface="Calibri" pitchFamily="34" charset="-122"/>
+                <a:cs typeface="Calibri" pitchFamily="34" charset="-120"/>
+              </a:rPr>
+              <a:t>Upper layers specialise for content; mid layers keep the acoustic artefacts.</a:t>
+            </a:r>
+            <a:endParaRPr lang="en-US" sz="1400" dirty="0"/>
+          </a:p>
+          <a:p>
+            <a:endParaRPr lang="en-US" sz="1400" dirty="0"/>
+          </a:p>
+          <a:p>
+            <a:endParaRPr lang="en-US" sz="1400" dirty="0"/>
+          </a:p>
+          <a:p>
+            <a:r>
+              <a:rPr lang="en-US" sz="950" b="1" dirty="0">
+                <a:solidFill>
+                  <a:srgbClr val="0E9594"/>
+                </a:solidFill>
+              </a:rPr>
+              <a:t>Frozen </a:t>
+            </a:r>
+            <a:r>
+              <a:rPr lang="en-US" sz="950" b="1" dirty="0" smtClean="0">
+                <a:solidFill>
+                  <a:srgbClr val="0E9594"/>
+                </a:solidFill>
+              </a:rPr>
+              <a:t>backbone </a:t>
+            </a:r>
+            <a:r>
+              <a:rPr lang="en-US" sz="950" b="1" dirty="0" err="1">
+                <a:solidFill>
+                  <a:srgbClr val="0E9594"/>
+                </a:solidFill>
+              </a:rPr>
+              <a:t>config</a:t>
+            </a:r>
+            <a:endParaRPr lang="en-US" sz="950" b="1" dirty="0">
+              <a:solidFill>
+                <a:srgbClr val="0E9594"/>
+              </a:solidFill>
+            </a:endParaRPr>
+          </a:p>
+          <a:p>
+            <a:r>
+              <a:rPr lang="en-US" sz="900" dirty="0">
+                <a:solidFill>
+                  <a:srgbClr val="5C6B73"/>
+                </a:solidFill>
+              </a:rPr>
+              <a:t>Aggregation: </a:t>
+            </a:r>
+            <a:r>
+              <a:rPr lang="en-US" sz="900" dirty="0" err="1">
+                <a:solidFill>
+                  <a:srgbClr val="22303A"/>
+                </a:solidFill>
+              </a:rPr>
+              <a:t>Softmax</a:t>
+            </a:r>
+            <a:r>
+              <a:rPr lang="en-US" sz="900" dirty="0">
+                <a:solidFill>
+                  <a:srgbClr val="22303A"/>
+                </a:solidFill>
+              </a:rPr>
+              <a:t>-weighted sum, 12 layers</a:t>
+            </a:r>
+          </a:p>
+          <a:p>
+            <a:r>
+              <a:rPr lang="en-US" sz="900" dirty="0">
+                <a:solidFill>
+                  <a:srgbClr val="5C6B73"/>
+                </a:solidFill>
+              </a:rPr>
+              <a:t>Dominant layer: </a:t>
+            </a:r>
+            <a:r>
+              <a:rPr lang="en-US" sz="900" dirty="0">
+                <a:solidFill>
+                  <a:srgbClr val="22303A"/>
+                </a:solidFill>
+              </a:rPr>
+              <a:t>Layer 3 of 12  (~81% weight)</a:t>
+            </a:r>
+          </a:p>
+          <a:p>
+            <a:r>
+              <a:rPr lang="en-US" sz="900" dirty="0">
+                <a:solidFill>
+                  <a:srgbClr val="5C6B73"/>
+                </a:solidFill>
+              </a:rPr>
+              <a:t>Trainable </a:t>
+            </a:r>
+            <a:r>
+              <a:rPr lang="en-US" sz="900" dirty="0" err="1">
+                <a:solidFill>
+                  <a:srgbClr val="5C6B73"/>
+                </a:solidFill>
+              </a:rPr>
+              <a:t>params</a:t>
+            </a:r>
+            <a:r>
+              <a:rPr lang="en-US" sz="900" dirty="0">
+                <a:solidFill>
+                  <a:srgbClr val="5C6B73"/>
+                </a:solidFill>
+              </a:rPr>
+              <a:t>: </a:t>
+            </a:r>
+            <a:r>
+              <a:rPr lang="en-US" sz="900" dirty="0">
+                <a:solidFill>
+                  <a:srgbClr val="22303A"/>
+                </a:solidFill>
+              </a:rPr>
+              <a:t>~5K  (head only)</a:t>
+            </a:r>
+          </a:p>
+          <a:p>
+            <a:r>
+              <a:rPr lang="en-US" sz="900" b="1" dirty="0">
+                <a:solidFill>
+                  <a:srgbClr val="0E9594"/>
+                </a:solidFill>
+              </a:rPr>
+              <a:t>AUC 0.918  |  fake-recall 57%</a:t>
+            </a:r>
+          </a:p>
+          <a:p>
+            <a:endParaRPr lang="en-US" sz="900" b="1" dirty="0">
+              <a:solidFill>
+                <a:srgbClr val="0E9594"/>
+              </a:solidFill>
+            </a:endParaRPr>
+          </a:p>
+          <a:p>
+            <a:r>
+              <a:rPr lang="en-US" sz="950" b="1" dirty="0">
+                <a:solidFill>
+                  <a:srgbClr val="C9971B"/>
+                </a:solidFill>
+              </a:rPr>
+              <a:t>Fine-tune best </a:t>
+            </a:r>
+            <a:r>
+              <a:rPr lang="en-US" sz="950" b="1" dirty="0" err="1">
+                <a:solidFill>
+                  <a:srgbClr val="C9971B"/>
+                </a:solidFill>
+              </a:rPr>
+              <a:t>config</a:t>
+            </a:r>
+            <a:endParaRPr lang="en-US" sz="950" b="1" dirty="0">
+              <a:solidFill>
+                <a:srgbClr val="C9971B"/>
+              </a:solidFill>
+            </a:endParaRPr>
+          </a:p>
+          <a:p>
+            <a:r>
+              <a:rPr lang="en-US" sz="900" dirty="0">
+                <a:solidFill>
+                  <a:srgbClr val="5C6B73"/>
+                </a:solidFill>
+              </a:rPr>
+              <a:t>Unfrozen layers: </a:t>
+            </a:r>
+            <a:r>
+              <a:rPr lang="en-US" sz="900" dirty="0">
+                <a:solidFill>
+                  <a:srgbClr val="22303A"/>
+                </a:solidFill>
+              </a:rPr>
+              <a:t>Top 2 transformer blocks</a:t>
+            </a:r>
+          </a:p>
+          <a:p>
+            <a:r>
+              <a:rPr lang="en-US" sz="900" dirty="0" err="1">
+                <a:solidFill>
+                  <a:srgbClr val="5C6B73"/>
+                </a:solidFill>
+              </a:rPr>
+              <a:t>lr</a:t>
+            </a:r>
+            <a:r>
+              <a:rPr lang="en-US" sz="900" dirty="0">
+                <a:solidFill>
+                  <a:srgbClr val="5C6B73"/>
+                </a:solidFill>
+              </a:rPr>
+              <a:t> backbone / head: </a:t>
+            </a:r>
+            <a:r>
+              <a:rPr lang="en-US" sz="900" dirty="0">
+                <a:solidFill>
+                  <a:srgbClr val="22303A"/>
+                </a:solidFill>
+              </a:rPr>
+              <a:t>1e-5 / 1e-3</a:t>
+            </a:r>
+          </a:p>
+          <a:p>
+            <a:r>
+              <a:rPr lang="en-US" sz="900" dirty="0">
+                <a:solidFill>
+                  <a:srgbClr val="5C6B73"/>
+                </a:solidFill>
+              </a:rPr>
+              <a:t>Batch / </a:t>
+            </a:r>
+            <a:r>
+              <a:rPr lang="en-US" sz="900" dirty="0" err="1">
+                <a:solidFill>
+                  <a:srgbClr val="5C6B73"/>
+                </a:solidFill>
+              </a:rPr>
+              <a:t>wd</a:t>
+            </a:r>
+            <a:r>
+              <a:rPr lang="en-US" sz="900" dirty="0">
+                <a:solidFill>
+                  <a:srgbClr val="5C6B73"/>
+                </a:solidFill>
+              </a:rPr>
+              <a:t>: </a:t>
+            </a:r>
+            <a:r>
+              <a:rPr lang="en-US" sz="900" dirty="0">
+                <a:solidFill>
+                  <a:srgbClr val="22303A"/>
+                </a:solidFill>
+              </a:rPr>
+              <a:t>32 / 0.01</a:t>
+            </a:r>
+          </a:p>
+          <a:p>
+            <a:r>
+              <a:rPr lang="en-US" sz="900" b="1" dirty="0">
+                <a:solidFill>
+                  <a:srgbClr val="C9971B"/>
+                </a:solidFill>
+              </a:rPr>
+              <a:t>AUC 0.865  |  fake-recall 45%  (domain shift)</a:t>
+            </a:r>
+          </a:p>
+        </p:txBody>
+      </p:sp>
+      <p:sp>
+        <p:nvSpPr>
+          <p:cNvPr id="7" name="Text 4"/>
+          <p:cNvSpPr/>
+          <p:nvPr/>
+        </p:nvSpPr>
+        <p:spPr>
+          <a:xfrm>
+            <a:off x="548640" y="6437376"/>
+            <a:ext cx="7315200" cy="274320"/>
+          </a:xfrm>
+          <a:prstGeom prst="rect">
+            <a:avLst/>
+          </a:prstGeom>
+          <a:noFill/>
+          <a:ln/>
+        </p:spPr>
+        <p:txBody>
+          <a:bodyPr wrap="square" lIns="0" tIns="0" rIns="0" bIns="0" rtlCol="0" anchor="ctr"/>
+          <a:lstStyle/>
+          <a:p>
+            <a:pPr marL="0" indent="0">
+              <a:buNone/>
+            </a:pPr>
+            <a:r>
+              <a:rPr lang="en-US" sz="900" dirty="0">
+                <a:solidFill>
+                  <a:srgbClr val="6B7B85"/>
+                </a:solidFill>
+                <a:latin typeface="Calibri" pitchFamily="34" charset="0"/>
+                <a:ea typeface="Calibri" pitchFamily="34" charset="-122"/>
+                <a:cs typeface="Calibri" pitchFamily="34" charset="-120"/>
+              </a:rPr>
+              <a:t>Audio Deepfake Detection — DL project</a:t>
+            </a:r>
+            <a:endParaRPr lang="en-US" sz="900" dirty="0"/>
+          </a:p>
+        </p:txBody>
+      </p:sp>
+      <p:sp>
+        <p:nvSpPr>
+          <p:cNvPr id="8" name="Text 5"/>
+          <p:cNvSpPr/>
+          <p:nvPr/>
+        </p:nvSpPr>
+        <p:spPr>
+          <a:xfrm>
+            <a:off x="11430000" y="6437376"/>
+            <a:ext cx="548640" cy="274320"/>
+          </a:xfrm>
+          <a:prstGeom prst="rect">
+            <a:avLst/>
+          </a:prstGeom>
+          <a:noFill/>
+          <a:ln/>
+        </p:spPr>
+        <p:txBody>
+          <a:bodyPr wrap="square" lIns="0" tIns="0" rIns="0" bIns="0" rtlCol="0" anchor="ctr"/>
+          <a:lstStyle/>
+          <a:p>
+            <a:pPr marL="0" indent="0" algn="r">
+              <a:buNone/>
+            </a:pPr>
+            <a:r>
+              <a:rPr lang="en-US" sz="900" dirty="0">
+                <a:solidFill>
+                  <a:srgbClr val="6B7B85"/>
+                </a:solidFill>
+                <a:latin typeface="Calibri" pitchFamily="34" charset="0"/>
+                <a:ea typeface="Calibri" pitchFamily="34" charset="-122"/>
+                <a:cs typeface="Calibri" pitchFamily="34" charset="-120"/>
+              </a:rPr>
+              <a:t>9</a:t>
+            </a:r>
+            <a:endParaRPr lang="en-US" sz="900" dirty="0"/>
+          </a:p>
+        </p:txBody>
+      </p:sp>
+      <p:pic>
+        <p:nvPicPr>
+          <p:cNvPr id="9" name="Picture 8" descr="fig_wavlm_layers.png"/>
+          <p:cNvPicPr>
+            <a:picLocks noChangeAspect="1"/>
+          </p:cNvPicPr>
+          <p:nvPr/>
+        </p:nvPicPr>
+        <p:blipFill>
+          <a:blip r:embed="rId3"/>
+          <a:stretch>
+            <a:fillRect/>
+          </a:stretch>
+        </p:blipFill>
+        <p:spPr>
+          <a:xfrm>
+            <a:off x="731520" y="1828800"/>
+            <a:ext cx="6949440" cy="3474720"/>
+          </a:xfrm>
+          <a:prstGeom prst="rect">
+            <a:avLst/>
+          </a:prstGeom>
+        </p:spPr>
+      </p:pic>
+      <p:sp>
+        <p:nvSpPr>
+          <p:cNvPr id="5" name="TextBox 4"/>
+          <p:cNvSpPr txBox="1"/>
+          <p:nvPr/>
+        </p:nvSpPr>
+        <p:spPr>
+          <a:xfrm>
+            <a:off x="2669058" y="1691640"/>
+            <a:ext cx="3657601" cy="437429"/>
+          </a:xfrm>
+          <a:prstGeom prst="rect">
+            <a:avLst/>
+          </a:prstGeom>
+          <a:solidFill>
+            <a:schemeClr val="bg1"/>
+          </a:solidFill>
+        </p:spPr>
+        <p:txBody>
+          <a:bodyPr wrap="square" rtlCol="0">
+            <a:spAutoFit/>
+          </a:bodyPr>
+          <a:lstStyle/>
+          <a:p>
+            <a:endParaRPr lang="en-US" dirty="0"/>
+          </a:p>
+        </p:txBody>
+      </p:sp>
+      <p:sp>
+        <p:nvSpPr>
+          <p:cNvPr id="10" name="TextBox 9"/>
+          <p:cNvSpPr txBox="1"/>
+          <p:nvPr/>
+        </p:nvSpPr>
+        <p:spPr>
+          <a:xfrm>
+            <a:off x="2380735" y="1764982"/>
+            <a:ext cx="3945924" cy="369332"/>
+          </a:xfrm>
+          <a:prstGeom prst="rect">
+            <a:avLst/>
+          </a:prstGeom>
+          <a:noFill/>
+        </p:spPr>
+        <p:txBody>
+          <a:bodyPr wrap="square" rtlCol="0">
+            <a:spAutoFit/>
+          </a:bodyPr>
+          <a:lstStyle/>
+          <a:p>
+            <a:r>
+              <a:rPr lang="en-US" b="1" dirty="0" smtClean="0"/>
+              <a:t>Frozen Backbone Layer Importance</a:t>
+            </a:r>
+            <a:endParaRPr lang="en-US" b="1" dirty="0"/>
+          </a:p>
+        </p:txBody>
+      </p:sp>
+    </p:spTree>
+  </p:cSld>
+  <p:clrMapOvr>
+    <a:masterClrMapping/>
+  </p:clrMapOvr>
+</p:sld>
+</file>
+
+<file path=ppt/slides/slide12.xml><?xml version="1.0" encoding="utf-8"?>
 <p:sld xmlns:a="http://schemas.openxmlformats.org/drawingml/2006/main" xmlns:r="http://schemas.openxmlformats.org/officeDocument/2006/relationships" xmlns:p="http://schemas.openxmlformats.org/presentationml/2006/main">
   <p:cSld name="Slide 10">
     <p:bg>
@@ -2288,8 +3329,8 @@
         </p:nvSpPr>
         <p:spPr>
           <a:xfrm>
-            <a:off x="1005840" y="1225296"/>
-            <a:ext cx="6858000" cy="274320"/>
+            <a:off x="2519408" y="1157583"/>
+            <a:ext cx="1350181" cy="274320"/>
           </a:xfrm>
           <a:prstGeom prst="rect">
             <a:avLst/>
@@ -2338,8 +3379,8 @@
         </p:nvSpPr>
         <p:spPr>
           <a:xfrm>
-            <a:off x="1005840" y="3749040"/>
-            <a:ext cx="6858000" cy="274320"/>
+            <a:off x="8169880" y="1157583"/>
+            <a:ext cx="1267803" cy="274320"/>
           </a:xfrm>
           <a:prstGeom prst="rect">
             <a:avLst/>
@@ -2377,8 +3418,8 @@
         </p:nvSpPr>
         <p:spPr>
           <a:xfrm>
-            <a:off x="8229600" y="1737360"/>
-            <a:ext cx="3474720" cy="4023360"/>
+            <a:off x="389919" y="5415911"/>
+            <a:ext cx="11314401" cy="778943"/>
           </a:xfrm>
           <a:prstGeom prst="rect">
             <a:avLst/>
@@ -2398,6 +3439,17 @@
               <a:buChar char="•"/>
             </a:pPr>
             <a:r>
+              <a:rPr lang="en-US" sz="1350" dirty="0" smtClean="0">
+                <a:solidFill>
+                  <a:srgbClr val="22303A"/>
+                </a:solidFill>
+                <a:latin typeface="Calibri" pitchFamily="34" charset="0"/>
+                <a:ea typeface="Calibri" pitchFamily="34" charset="-122"/>
+                <a:cs typeface="Calibri" pitchFamily="34" charset="-120"/>
+              </a:rPr>
+              <a:t>UMAP: ITW </a:t>
+            </a:r>
+            <a:r>
               <a:rPr lang="en-US" sz="1350" dirty="0">
                 <a:solidFill>
                   <a:srgbClr val="22303A"/>
@@ -2406,28 +3458,18 @@
                 <a:ea typeface="Calibri" pitchFamily="34" charset="-122"/>
                 <a:cs typeface="Calibri" pitchFamily="34" charset="-120"/>
               </a:rPr>
-              <a:t>UMAP: FoR clusters separate cleanly, but ITW points spread across the boundary — the domain shift made visual.</a:t>
-            </a:r>
-            <a:endParaRPr lang="en-US" sz="1350" dirty="0"/>
-          </a:p>
-          <a:p>
-            <a:pPr marL="342900" indent="-342900">
-              <a:spcAft>
-                <a:spcPts val="1000"/>
-              </a:spcAft>
-              <a:buSzPct val="100000"/>
-              <a:buChar char="•"/>
-            </a:pPr>
-            <a:r>
-              <a:rPr lang="en-US" sz="1350" dirty="0">
-                <a:solidFill>
-                  <a:srgbClr val="22303A"/>
-                </a:solidFill>
-                <a:latin typeface="Calibri" pitchFamily="34" charset="0"/>
-                <a:ea typeface="Calibri" pitchFamily="34" charset="-122"/>
-                <a:cs typeface="Calibri" pitchFamily="34" charset="-120"/>
-              </a:rPr>
-              <a:t>Score histograms: real/fake well separated on FoR; on ITW the fake mass leaks toward low scores — i.e. missed fakes.</a:t>
+              <a:t>points spread across the </a:t>
+            </a:r>
+            <a:r>
+              <a:rPr lang="en-US" sz="1350" dirty="0" smtClean="0">
+                <a:solidFill>
+                  <a:srgbClr val="22303A"/>
+                </a:solidFill>
+                <a:latin typeface="Calibri" pitchFamily="34" charset="0"/>
+                <a:ea typeface="Calibri" pitchFamily="34" charset="-122"/>
+                <a:cs typeface="Calibri" pitchFamily="34" charset="-120"/>
+              </a:rPr>
+              <a:t>boundary.</a:t>
             </a:r>
             <a:endParaRPr lang="en-US" sz="1350" dirty="0"/>
           </a:p>
@@ -2437,6 +3479,17 @@
               <a:buChar char="•"/>
             </a:pPr>
             <a:r>
+              <a:rPr lang="en-US" sz="1350" dirty="0" smtClean="0">
+                <a:solidFill>
+                  <a:srgbClr val="22303A"/>
+                </a:solidFill>
+                <a:latin typeface="Calibri" pitchFamily="34" charset="0"/>
+                <a:ea typeface="Calibri" pitchFamily="34" charset="-122"/>
+                <a:cs typeface="Calibri" pitchFamily="34" charset="-120"/>
+              </a:rPr>
+              <a:t>This </a:t>
+            </a:r>
+            <a:r>
               <a:rPr lang="en-US" sz="1350" dirty="0">
                 <a:solidFill>
                   <a:srgbClr val="22303A"/>
@@ -2445,7 +3498,7 @@
                 <a:ea typeface="Calibri" pitchFamily="34" charset="-122"/>
                 <a:cs typeface="Calibri" pitchFamily="34" charset="-120"/>
               </a:rPr>
-              <a:t>This is exactly why an in-domain threshold under-detects ITW fakes.</a:t>
+              <a:t>is exactly why an in-domain threshold under-detects ITW fakes.</a:t>
             </a:r>
             <a:endParaRPr lang="en-US" sz="1350" dirty="0"/>
           </a:p>
@@ -2545,8 +3598,8 @@
         </p:blipFill>
         <p:spPr>
           <a:xfrm>
-            <a:off x="1005840" y="1482605"/>
-            <a:ext cx="2743200" cy="2240280"/>
+            <a:off x="822960" y="1394337"/>
+            <a:ext cx="4743078" cy="3873514"/>
           </a:xfrm>
           <a:prstGeom prst="rect">
             <a:avLst/>
@@ -2555,7 +3608,7 @@
       </p:pic>
       <p:pic>
         <p:nvPicPr>
-          <p:cNvPr id="18" name="Picture 17" descr="image.png"/>
+          <p:cNvPr id="19" name="Picture 18" descr="image.png"/>
           <p:cNvPicPr>
             <a:picLocks noChangeAspect="1"/>
           </p:cNvPicPr>
@@ -2569,56 +3622,8 @@
         </p:blipFill>
         <p:spPr>
           <a:xfrm>
-            <a:off x="4023360" y="1802645"/>
-            <a:ext cx="3840480" cy="1554480"/>
-          </a:xfrm>
-          <a:prstGeom prst="rect">
-            <a:avLst/>
-          </a:prstGeom>
-        </p:spPr>
-      </p:pic>
-      <p:pic>
-        <p:nvPicPr>
-          <p:cNvPr id="19" name="Picture 18" descr="image.png"/>
-          <p:cNvPicPr>
-            <a:picLocks noChangeAspect="1"/>
-          </p:cNvPicPr>
-          <p:nvPr/>
-        </p:nvPicPr>
-        <p:blipFill>
-          <a:blip r:embed="rId5"/>
-          <a:stretch>
-            <a:fillRect/>
-          </a:stretch>
-        </p:blipFill>
-        <p:spPr>
-          <a:xfrm>
-            <a:off x="1005840" y="3977640"/>
-            <a:ext cx="2743200" cy="2240280"/>
-          </a:xfrm>
-          <a:prstGeom prst="rect">
-            <a:avLst/>
-          </a:prstGeom>
-        </p:spPr>
-      </p:pic>
-      <p:pic>
-        <p:nvPicPr>
-          <p:cNvPr id="20" name="Picture 19" descr="image.png"/>
-          <p:cNvPicPr>
-            <a:picLocks noChangeAspect="1"/>
-          </p:cNvPicPr>
-          <p:nvPr/>
-        </p:nvPicPr>
-        <p:blipFill>
-          <a:blip r:embed="rId6"/>
-          <a:stretch>
-            <a:fillRect/>
-          </a:stretch>
-        </p:blipFill>
-        <p:spPr>
-          <a:xfrm>
-            <a:off x="4023360" y="4297680"/>
-            <a:ext cx="3840480" cy="1554480"/>
+            <a:off x="6434985" y="1394337"/>
+            <a:ext cx="4743078" cy="3873514"/>
           </a:xfrm>
           <a:prstGeom prst="rect">
             <a:avLst/>
@@ -2633,7 +3638,7 @@
 </p:sld>
 </file>
 
-<file path=ppt/slides/slide11.xml><?xml version="1.0" encoding="utf-8"?>
+<file path=ppt/slides/slide13.xml><?xml version="1.0" encoding="utf-8"?>
 <p:sld xmlns:a="http://schemas.openxmlformats.org/drawingml/2006/main" xmlns:r="http://schemas.openxmlformats.org/officeDocument/2006/relationships" xmlns:p="http://schemas.openxmlformats.org/presentationml/2006/main">
   <p:cSld name="Slide 11">
     <p:bg>
@@ -2803,7 +3808,7 @@
               <a:t>By AUC: </a:t>
             </a:r>
             <a:r>
-              <a:rPr lang="en-US" sz="1400" dirty="0" err="1">
+              <a:rPr lang="en-US" sz="1400" dirty="0" err="1" smtClean="0">
                 <a:solidFill>
                   <a:srgbClr val="22303A"/>
                 </a:solidFill>
@@ -2814,6 +3819,17 @@
               <a:t>WavLM</a:t>
             </a:r>
             <a:r>
+              <a:rPr lang="en-US" sz="1400" dirty="0" smtClean="0">
+                <a:solidFill>
+                  <a:srgbClr val="22303A"/>
+                </a:solidFill>
+                <a:latin typeface="Calibri" pitchFamily="34" charset="0"/>
+                <a:ea typeface="Calibri" pitchFamily="34" charset="-122"/>
+                <a:cs typeface="Calibri" pitchFamily="34" charset="-120"/>
+              </a:rPr>
+              <a:t> (pre-trained) (</a:t>
+            </a:r>
+            <a:r>
               <a:rPr lang="en-US" sz="1400" dirty="0">
                 <a:solidFill>
                   <a:srgbClr val="22303A"/>
@@ -2822,29 +3838,7 @@
                 <a:ea typeface="Calibri" pitchFamily="34" charset="-122"/>
                 <a:cs typeface="Calibri" pitchFamily="34" charset="-120"/>
               </a:rPr>
-              <a:t> </a:t>
-            </a:r>
-            <a:r>
-              <a:rPr lang="en-US" sz="1400" dirty="0" smtClean="0">
-                <a:solidFill>
-                  <a:srgbClr val="22303A"/>
-                </a:solidFill>
-                <a:latin typeface="Calibri" pitchFamily="34" charset="0"/>
-                <a:ea typeface="Calibri" pitchFamily="34" charset="-122"/>
-                <a:cs typeface="Calibri" pitchFamily="34" charset="-120"/>
-              </a:rPr>
-              <a:t>backbone </a:t>
-            </a:r>
-            <a:r>
-              <a:rPr lang="en-US" sz="1400" dirty="0">
-                <a:solidFill>
-                  <a:srgbClr val="22303A"/>
-                </a:solidFill>
-                <a:latin typeface="Calibri" pitchFamily="34" charset="0"/>
-                <a:ea typeface="Calibri" pitchFamily="34" charset="-122"/>
-                <a:cs typeface="Calibri" pitchFamily="34" charset="-120"/>
-              </a:rPr>
-              <a:t>(0.92) &gt; CNN (0.87) ≈ CRNN (0.86) &gt; WavLM ft (0.86) &gt; MLP (0.79) &gt; RNN (0.66).</a:t>
+              <a:t>0.92) &gt; CNN (0.87) ≈ CRNN (0.86) &gt; WavLM ft (0.86) &gt; MLP (0.79) &gt; RNN (0.66).</a:t>
             </a:r>
             <a:endParaRPr lang="en-US" sz="1400" dirty="0"/>
           </a:p>
@@ -2865,9 +3859,19 @@
                 <a:ea typeface="Calibri" pitchFamily="34" charset="-122"/>
                 <a:cs typeface="Calibri" pitchFamily="34" charset="-120"/>
               </a:rPr>
-              <a:t>Representation learning drives the ranking.</a:t>
-            </a:r>
-            <a:endParaRPr lang="en-US" sz="1400" dirty="0"/>
+              <a:t>Representation learning drives the ranking</a:t>
+            </a:r>
+            <a:r>
+              <a:rPr lang="en-US" sz="1400" dirty="0" smtClean="0">
+                <a:solidFill>
+                  <a:srgbClr val="22303A"/>
+                </a:solidFill>
+                <a:latin typeface="Calibri" pitchFamily="34" charset="0"/>
+                <a:ea typeface="Calibri" pitchFamily="34" charset="-122"/>
+                <a:cs typeface="Calibri" pitchFamily="34" charset="-120"/>
+              </a:rPr>
+              <a:t>.</a:t>
+            </a:r>
           </a:p>
           <a:p>
             <a:pPr marL="342900" indent="-342900">
@@ -2878,6 +3882,37 @@
               <a:buChar char="•"/>
             </a:pPr>
             <a:r>
+              <a:rPr lang="en-US" sz="1400" dirty="0" smtClean="0">
+                <a:solidFill>
+                  <a:srgbClr val="22303A"/>
+                </a:solidFill>
+                <a:latin typeface="Calibri" pitchFamily="34" charset="0"/>
+                <a:cs typeface="Calibri" pitchFamily="34" charset="-120"/>
+              </a:rPr>
+              <a:t>Fine tuning is constrained by the training data.</a:t>
+            </a:r>
+            <a:endParaRPr lang="en-US" sz="1400" dirty="0"/>
+          </a:p>
+          <a:p>
+            <a:pPr marL="342900" indent="-342900">
+              <a:spcAft>
+                <a:spcPts val="900"/>
+              </a:spcAft>
+              <a:buSzPct val="100000"/>
+              <a:buChar char="•"/>
+            </a:pPr>
+            <a:r>
+              <a:rPr lang="en-US" sz="1400" dirty="0" smtClean="0">
+                <a:solidFill>
+                  <a:srgbClr val="22303A"/>
+                </a:solidFill>
+                <a:latin typeface="Calibri" pitchFamily="34" charset="0"/>
+                <a:ea typeface="Calibri" pitchFamily="34" charset="-122"/>
+                <a:cs typeface="Calibri" pitchFamily="34" charset="-120"/>
+              </a:rPr>
+              <a:t>Both </a:t>
+            </a:r>
+            <a:r>
               <a:rPr lang="en-US" sz="1400" dirty="0">
                 <a:solidFill>
                   <a:srgbClr val="22303A"/>
@@ -2886,7 +3921,7 @@
                 <a:ea typeface="Calibri" pitchFamily="34" charset="-122"/>
                 <a:cs typeface="Calibri" pitchFamily="34" charset="-120"/>
               </a:rPr>
-              <a:t>But AUC is only half the </a:t>
+              <a:t>AUC </a:t>
             </a:r>
             <a:r>
               <a:rPr lang="en-US" sz="1400" dirty="0" smtClean="0">
@@ -2897,18 +3932,18 @@
                 <a:ea typeface="Calibri" pitchFamily="34" charset="-122"/>
                 <a:cs typeface="Calibri" pitchFamily="34" charset="-120"/>
               </a:rPr>
-              <a:t>story </a:t>
-            </a:r>
-            <a:r>
-              <a:rPr lang="en-US" sz="1400" dirty="0">
-                <a:solidFill>
-                  <a:srgbClr val="22303A"/>
-                </a:solidFill>
-                <a:latin typeface="Calibri" pitchFamily="34" charset="0"/>
-                <a:ea typeface="Calibri" pitchFamily="34" charset="-122"/>
-                <a:cs typeface="Calibri" pitchFamily="34" charset="-120"/>
-              </a:rPr>
-              <a:t>see fake recall next.</a:t>
+              <a:t>and fake class recall must </a:t>
+            </a:r>
+            <a:r>
+              <a:rPr lang="en-US" sz="1400" dirty="0" smtClean="0">
+                <a:solidFill>
+                  <a:srgbClr val="22303A"/>
+                </a:solidFill>
+                <a:latin typeface="Calibri" pitchFamily="34" charset="0"/>
+                <a:ea typeface="Calibri" pitchFamily="34" charset="-122"/>
+                <a:cs typeface="Calibri" pitchFamily="34" charset="-120"/>
+              </a:rPr>
+              <a:t>be considered.</a:t>
             </a:r>
             <a:endParaRPr lang="en-US" sz="1400" dirty="0"/>
           </a:p>
@@ -3024,7 +4059,7 @@
 </p:sld>
 </file>
 
-<file path=ppt/slides/slide12.xml><?xml version="1.0" encoding="utf-8"?>
+<file path=ppt/slides/slide14.xml><?xml version="1.0" encoding="utf-8"?>
 <p:sld xmlns:a="http://schemas.openxmlformats.org/drawingml/2006/main" xmlns:r="http://schemas.openxmlformats.org/officeDocument/2006/relationships" xmlns:p="http://schemas.openxmlformats.org/presentationml/2006/main">
   <p:cSld>
     <p:spTree>
@@ -3110,7 +4145,7 @@
         <p:spPr>
           <a:xfrm>
             <a:off x="822960" y="566928"/>
-            <a:ext cx="10789920" cy="640080"/>
+            <a:ext cx="10789920" cy="523220"/>
           </a:xfrm>
           <a:prstGeom prst="rect">
             <a:avLst/>
@@ -3124,13 +4159,42 @@
           <a:lstStyle/>
           <a:p>
             <a:r>
-              <a:rPr sz="2800" b="1">
-                <a:solidFill>
-                  <a:srgbClr val="22303A"/>
-                </a:solidFill>
-              </a:rPr>
-              <a:t>Ranking quality vs calibration -- and where each model errors fall</a:t>
-            </a:r>
+              <a:rPr sz="2800" b="1" dirty="0">
+                <a:solidFill>
+                  <a:srgbClr val="22303A"/>
+                </a:solidFill>
+              </a:rPr>
+              <a:t>Ranking quality vs </a:t>
+            </a:r>
+            <a:r>
+              <a:rPr sz="2800" b="1" dirty="0" smtClean="0">
+                <a:solidFill>
+                  <a:srgbClr val="22303A"/>
+                </a:solidFill>
+              </a:rPr>
+              <a:t>calibration </a:t>
+            </a:r>
+            <a:r>
+              <a:rPr sz="2800" b="1" dirty="0">
+                <a:solidFill>
+                  <a:srgbClr val="22303A"/>
+                </a:solidFill>
+              </a:rPr>
+              <a:t>and where each model errors </a:t>
+            </a:r>
+            <a:r>
+              <a:rPr lang="en-US" sz="2800" b="1" dirty="0" smtClean="0">
+                <a:solidFill>
+                  <a:srgbClr val="22303A"/>
+                </a:solidFill>
+              </a:rPr>
+              <a:t>land</a:t>
+            </a:r>
+            <a:endParaRPr sz="2800" b="1" dirty="0">
+              <a:solidFill>
+                <a:srgbClr val="22303A"/>
+              </a:solidFill>
+            </a:endParaRPr>
           </a:p>
         </p:txBody>
       </p:sp>
@@ -3305,1176 +4369,7 @@
 </p:sld>
 </file>
 
-<file path=ppt/slides/slide13.xml><?xml version="1.0" encoding="utf-8"?>
-<p:sld xmlns:a="http://schemas.openxmlformats.org/drawingml/2006/main" xmlns:r="http://schemas.openxmlformats.org/officeDocument/2006/relationships" xmlns:p="http://schemas.openxmlformats.org/presentationml/2006/main">
-  <p:cSld name="Slide 12">
-    <p:bg>
-      <p:bgPr>
-        <a:solidFill>
-          <a:srgbClr val="FFFFFF"/>
-        </a:solidFill>
-        <a:effectLst/>
-      </p:bgPr>
-    </p:bg>
-    <p:spTree>
-      <p:nvGrpSpPr>
-        <p:cNvPr id="1" name=""/>
-        <p:cNvGrpSpPr/>
-        <p:nvPr/>
-      </p:nvGrpSpPr>
-      <p:grpSpPr>
-        <a:xfrm>
-          <a:off x="0" y="0"/>
-          <a:ext cx="0" cy="0"/>
-          <a:chOff x="0" y="0"/>
-          <a:chExt cx="0" cy="0"/>
-        </a:xfrm>
-      </p:grpSpPr>
-      <p:sp>
-        <p:nvSpPr>
-          <p:cNvPr id="2" name="Shape 0"/>
-          <p:cNvSpPr/>
-          <p:nvPr/>
-        </p:nvSpPr>
-        <p:spPr>
-          <a:xfrm>
-            <a:off x="548640" y="566928"/>
-            <a:ext cx="146304" cy="457200"/>
-          </a:xfrm>
-          <a:prstGeom prst="rect">
-            <a:avLst/>
-          </a:prstGeom>
-          <a:solidFill>
-            <a:srgbClr val="0E9594"/>
-          </a:solidFill>
-          <a:ln/>
-        </p:spPr>
-        <p:txBody>
-          <a:bodyPr/>
-          <a:lstStyle/>
-          <a:p>
-            <a:endParaRPr/>
-          </a:p>
-        </p:txBody>
-      </p:sp>
-      <p:sp>
-        <p:nvSpPr>
-          <p:cNvPr id="3" name="Text 1"/>
-          <p:cNvSpPr/>
-          <p:nvPr/>
-        </p:nvSpPr>
-        <p:spPr>
-          <a:xfrm>
-            <a:off x="822960" y="310896"/>
-            <a:ext cx="10515600" cy="292608"/>
-          </a:xfrm>
-          <a:prstGeom prst="rect">
-            <a:avLst/>
-          </a:prstGeom>
-          <a:noFill/>
-          <a:ln/>
-        </p:spPr>
-        <p:txBody>
-          <a:bodyPr wrap="square" lIns="0" tIns="0" rIns="0" bIns="0" rtlCol="0" anchor="ctr"/>
-          <a:lstStyle/>
-          <a:p>
-            <a:pPr marL="0" indent="0">
-              <a:buNone/>
-            </a:pPr>
-            <a:r>
-              <a:rPr lang="en-US" sz="1200" b="1" kern="0" spc="200" dirty="0">
-                <a:solidFill>
-                  <a:srgbClr val="0E9594"/>
-                </a:solidFill>
-                <a:latin typeface="Trebuchet MS" pitchFamily="34" charset="0"/>
-                <a:ea typeface="Trebuchet MS" pitchFamily="34" charset="-122"/>
-                <a:cs typeface="Trebuchet MS" pitchFamily="34" charset="-120"/>
-              </a:rPr>
-              <a:t>RESULTS · KEY LESSON</a:t>
-            </a:r>
-            <a:endParaRPr lang="en-US" sz="1200" dirty="0"/>
-          </a:p>
-        </p:txBody>
-      </p:sp>
-      <p:sp>
-        <p:nvSpPr>
-          <p:cNvPr id="4" name="Text 2"/>
-          <p:cNvSpPr/>
-          <p:nvPr/>
-        </p:nvSpPr>
-        <p:spPr>
-          <a:xfrm>
-            <a:off x="822960" y="566928"/>
-            <a:ext cx="10789920" cy="640080"/>
-          </a:xfrm>
-          <a:prstGeom prst="rect">
-            <a:avLst/>
-          </a:prstGeom>
-          <a:noFill/>
-          <a:ln/>
-        </p:spPr>
-        <p:txBody>
-          <a:bodyPr wrap="square" lIns="0" tIns="0" rIns="0" bIns="0" rtlCol="0" anchor="ctr"/>
-          <a:lstStyle/>
-          <a:p>
-            <a:pPr marL="0" indent="0">
-              <a:buNone/>
-            </a:pPr>
-            <a:r>
-              <a:rPr lang="en-US" sz="2800" b="1" dirty="0">
-                <a:solidFill>
-                  <a:srgbClr val="22303A"/>
-                </a:solidFill>
-                <a:latin typeface="Trebuchet MS" pitchFamily="34" charset="0"/>
-                <a:ea typeface="Trebuchet MS" pitchFamily="34" charset="-122"/>
-                <a:cs typeface="Trebuchet MS" pitchFamily="34" charset="-120"/>
-              </a:rPr>
-              <a:t>High AUC = good </a:t>
-            </a:r>
-            <a:r>
-              <a:rPr lang="en-US" sz="2800" b="1" dirty="0" smtClean="0">
-                <a:solidFill>
-                  <a:srgbClr val="22303A"/>
-                </a:solidFill>
-                <a:latin typeface="Trebuchet MS" pitchFamily="34" charset="0"/>
-                <a:ea typeface="Trebuchet MS" pitchFamily="34" charset="-122"/>
-                <a:cs typeface="Trebuchet MS" pitchFamily="34" charset="-120"/>
-              </a:rPr>
-              <a:t>ranking </a:t>
-            </a:r>
-            <a:r>
-              <a:rPr lang="en-US" sz="2800" b="1" dirty="0">
-                <a:solidFill>
-                  <a:srgbClr val="22303A"/>
-                </a:solidFill>
-                <a:latin typeface="Trebuchet MS" pitchFamily="34" charset="0"/>
-                <a:ea typeface="Trebuchet MS" pitchFamily="34" charset="-122"/>
-                <a:cs typeface="Trebuchet MS" pitchFamily="34" charset="-120"/>
-              </a:rPr>
-              <a:t>but the default threshold may need calibration</a:t>
-            </a:r>
-            <a:endParaRPr lang="en-US" sz="2800" dirty="0"/>
-          </a:p>
-        </p:txBody>
-      </p:sp>
-      <p:sp>
-        <p:nvSpPr>
-          <p:cNvPr id="5" name="Text 3"/>
-          <p:cNvSpPr/>
-          <p:nvPr/>
-        </p:nvSpPr>
-        <p:spPr>
-          <a:xfrm>
-            <a:off x="822960" y="1554480"/>
-            <a:ext cx="10515600" cy="731520"/>
-          </a:xfrm>
-          <a:prstGeom prst="rect">
-            <a:avLst/>
-          </a:prstGeom>
-          <a:noFill/>
-          <a:ln/>
-        </p:spPr>
-        <p:txBody>
-          <a:bodyPr wrap="square" lIns="0" tIns="0" rIns="0" bIns="0" rtlCol="0" anchor="t"/>
-          <a:lstStyle/>
-          <a:p>
-            <a:pPr marL="0" indent="0">
-              <a:buNone/>
-            </a:pPr>
-            <a:r>
-              <a:rPr lang="en-US" sz="1600" dirty="0">
-                <a:solidFill>
-                  <a:srgbClr val="22303A"/>
-                </a:solidFill>
-                <a:latin typeface="Calibri" pitchFamily="34" charset="0"/>
-                <a:ea typeface="Calibri" pitchFamily="34" charset="-122"/>
-                <a:cs typeface="Calibri" pitchFamily="34" charset="-120"/>
-              </a:rPr>
-              <a:t>AUC measures ranking quality (threshold-free). Low fake-recall at the default 0.5 threshold is a calibration problem, not a modelling </a:t>
-            </a:r>
-            <a:r>
-              <a:rPr lang="en-US" sz="1600" dirty="0" smtClean="0">
-                <a:solidFill>
-                  <a:srgbClr val="22303A"/>
-                </a:solidFill>
-                <a:latin typeface="Calibri" pitchFamily="34" charset="0"/>
-                <a:ea typeface="Calibri" pitchFamily="34" charset="-122"/>
-                <a:cs typeface="Calibri" pitchFamily="34" charset="-120"/>
-              </a:rPr>
-              <a:t>failure, </a:t>
-            </a:r>
-            <a:r>
-              <a:rPr lang="en-US" sz="1600" dirty="0">
-                <a:solidFill>
-                  <a:srgbClr val="22303A"/>
-                </a:solidFill>
-                <a:latin typeface="Calibri" pitchFamily="34" charset="0"/>
-                <a:ea typeface="Calibri" pitchFamily="34" charset="-122"/>
-                <a:cs typeface="Calibri" pitchFamily="34" charset="-120"/>
-              </a:rPr>
-              <a:t>it can be fixed by tuning the threshold. </a:t>
-            </a:r>
-            <a:endParaRPr lang="en-US" sz="1600" dirty="0"/>
-          </a:p>
-        </p:txBody>
-      </p:sp>
-      <p:sp>
-        <p:nvSpPr>
-          <p:cNvPr id="21" name="Text 19"/>
-          <p:cNvSpPr/>
-          <p:nvPr/>
-        </p:nvSpPr>
-        <p:spPr>
-          <a:xfrm>
-            <a:off x="822960" y="4617720"/>
-            <a:ext cx="10515600" cy="365760"/>
-          </a:xfrm>
-          <a:prstGeom prst="rect">
-            <a:avLst/>
-          </a:prstGeom>
-          <a:noFill/>
-          <a:ln/>
-        </p:spPr>
-        <p:txBody>
-          <a:bodyPr wrap="square" lIns="0" tIns="0" rIns="0" bIns="0" rtlCol="0" anchor="ctr"/>
-          <a:lstStyle/>
-          <a:p>
-            <a:pPr marL="0" indent="0">
-              <a:buNone/>
-            </a:pPr>
-            <a:r>
-              <a:rPr lang="en-US" sz="1200" i="1" dirty="0">
-                <a:solidFill>
-                  <a:srgbClr val="6B7B85"/>
-                </a:solidFill>
-                <a:latin typeface="Calibri" pitchFamily="34" charset="0"/>
-                <a:ea typeface="Calibri" pitchFamily="34" charset="-122"/>
-                <a:cs typeface="Calibri" pitchFamily="34" charset="-120"/>
-              </a:rPr>
-              <a:t>Fraction of fake clips actually caught (ITW fake-class recall)</a:t>
-            </a:r>
-            <a:endParaRPr lang="en-US" sz="1200" dirty="0"/>
-          </a:p>
-        </p:txBody>
-      </p:sp>
-      <p:sp>
-        <p:nvSpPr>
-          <p:cNvPr id="22" name="Text 20"/>
-          <p:cNvSpPr/>
-          <p:nvPr/>
-        </p:nvSpPr>
-        <p:spPr>
-          <a:xfrm>
-            <a:off x="822960" y="5212080"/>
-            <a:ext cx="10515600" cy="457200"/>
-          </a:xfrm>
-          <a:prstGeom prst="rect">
-            <a:avLst/>
-          </a:prstGeom>
-          <a:noFill/>
-          <a:ln/>
-        </p:spPr>
-        <p:txBody>
-          <a:bodyPr wrap="square" lIns="0" tIns="0" rIns="0" bIns="0" rtlCol="0" anchor="ctr"/>
-          <a:lstStyle/>
-          <a:p>
-            <a:pPr marL="0" indent="0">
-              <a:buNone/>
-            </a:pPr>
-            <a:r>
-              <a:rPr lang="en-US" sz="1500" b="1" dirty="0" smtClean="0">
-                <a:solidFill>
-                  <a:srgbClr val="22303A"/>
-                </a:solidFill>
-                <a:latin typeface="Trebuchet MS" pitchFamily="34" charset="0"/>
-                <a:ea typeface="Trebuchet MS" pitchFamily="34" charset="-122"/>
-                <a:cs typeface="Trebuchet MS" pitchFamily="34" charset="-120"/>
-              </a:rPr>
-              <a:t>CNN </a:t>
-            </a:r>
-            <a:r>
-              <a:rPr lang="en-US" sz="1500" b="1" dirty="0">
-                <a:solidFill>
-                  <a:srgbClr val="22303A"/>
-                </a:solidFill>
-                <a:latin typeface="Trebuchet MS" pitchFamily="34" charset="0"/>
-                <a:ea typeface="Trebuchet MS" pitchFamily="34" charset="-122"/>
-                <a:cs typeface="Trebuchet MS" pitchFamily="34" charset="-120"/>
-              </a:rPr>
-              <a:t>and </a:t>
-            </a:r>
-            <a:r>
-              <a:rPr lang="en-US" sz="1500" b="1" dirty="0" err="1">
-                <a:solidFill>
-                  <a:srgbClr val="22303A"/>
-                </a:solidFill>
-                <a:latin typeface="Trebuchet MS" pitchFamily="34" charset="0"/>
-                <a:ea typeface="Trebuchet MS" pitchFamily="34" charset="-122"/>
-                <a:cs typeface="Trebuchet MS" pitchFamily="34" charset="-120"/>
-              </a:rPr>
-              <a:t>WavLM</a:t>
-            </a:r>
-            <a:r>
-              <a:rPr lang="en-US" sz="1500" b="1" dirty="0">
-                <a:solidFill>
-                  <a:srgbClr val="22303A"/>
-                </a:solidFill>
-                <a:latin typeface="Trebuchet MS" pitchFamily="34" charset="0"/>
-                <a:ea typeface="Trebuchet MS" pitchFamily="34" charset="-122"/>
-                <a:cs typeface="Trebuchet MS" pitchFamily="34" charset="-120"/>
-              </a:rPr>
-              <a:t> </a:t>
-            </a:r>
-            <a:r>
-              <a:rPr lang="en-US" sz="1500" b="1" dirty="0" smtClean="0">
-                <a:solidFill>
-                  <a:srgbClr val="22303A"/>
-                </a:solidFill>
-                <a:latin typeface="Trebuchet MS" pitchFamily="34" charset="0"/>
-                <a:ea typeface="Trebuchet MS" pitchFamily="34" charset="-122"/>
-                <a:cs typeface="Trebuchet MS" pitchFamily="34" charset="-120"/>
-              </a:rPr>
-              <a:t>backbone </a:t>
-            </a:r>
-            <a:r>
-              <a:rPr lang="en-US" sz="1500" b="1" dirty="0">
-                <a:solidFill>
-                  <a:srgbClr val="22303A"/>
-                </a:solidFill>
-                <a:latin typeface="Trebuchet MS" pitchFamily="34" charset="0"/>
-                <a:ea typeface="Trebuchet MS" pitchFamily="34" charset="-122"/>
-                <a:cs typeface="Trebuchet MS" pitchFamily="34" charset="-120"/>
-              </a:rPr>
-              <a:t>combine high AUC with good out-of-the-box calibration. WavLM fine-tune has high AUC but collapses at threshold 0.5 under domain shift </a:t>
-            </a:r>
-            <a:r>
-              <a:rPr lang="en-US" sz="1500" b="1" dirty="0" smtClean="0">
-                <a:solidFill>
-                  <a:srgbClr val="22303A"/>
-                </a:solidFill>
-                <a:latin typeface="Trebuchet MS" pitchFamily="34" charset="0"/>
-                <a:ea typeface="Trebuchet MS" pitchFamily="34" charset="-122"/>
-                <a:cs typeface="Trebuchet MS" pitchFamily="34" charset="-120"/>
-              </a:rPr>
-              <a:t>.</a:t>
-            </a:r>
-            <a:r>
-              <a:rPr lang="en-US" sz="1500" b="1" dirty="0">
-                <a:solidFill>
-                  <a:srgbClr val="22303A"/>
-                </a:solidFill>
-                <a:latin typeface="Trebuchet MS" pitchFamily="34" charset="0"/>
-                <a:ea typeface="Trebuchet MS" pitchFamily="34" charset="-122"/>
-                <a:cs typeface="Trebuchet MS" pitchFamily="34" charset="-120"/>
-              </a:rPr>
-              <a:t>T</a:t>
-            </a:r>
-            <a:r>
-              <a:rPr lang="en-US" sz="1500" b="1" dirty="0" smtClean="0">
-                <a:solidFill>
-                  <a:srgbClr val="22303A"/>
-                </a:solidFill>
-                <a:latin typeface="Trebuchet MS" pitchFamily="34" charset="0"/>
-                <a:ea typeface="Trebuchet MS" pitchFamily="34" charset="-122"/>
-                <a:cs typeface="Trebuchet MS" pitchFamily="34" charset="-120"/>
-              </a:rPr>
-              <a:t>hreshold </a:t>
-            </a:r>
-            <a:r>
-              <a:rPr lang="en-US" sz="1500" b="1" dirty="0">
-                <a:solidFill>
-                  <a:srgbClr val="22303A"/>
-                </a:solidFill>
-                <a:latin typeface="Trebuchet MS" pitchFamily="34" charset="0"/>
-                <a:ea typeface="Trebuchet MS" pitchFamily="34" charset="-122"/>
-                <a:cs typeface="Trebuchet MS" pitchFamily="34" charset="-120"/>
-              </a:rPr>
-              <a:t>tuning would recover much of its fake-recall.</a:t>
-            </a:r>
-            <a:endParaRPr lang="en-US" sz="1500" dirty="0"/>
-          </a:p>
-        </p:txBody>
-      </p:sp>
-      <p:sp>
-        <p:nvSpPr>
-          <p:cNvPr id="23" name="Text 21"/>
-          <p:cNvSpPr/>
-          <p:nvPr/>
-        </p:nvSpPr>
-        <p:spPr>
-          <a:xfrm>
-            <a:off x="548640" y="6437376"/>
-            <a:ext cx="7315200" cy="274320"/>
-          </a:xfrm>
-          <a:prstGeom prst="rect">
-            <a:avLst/>
-          </a:prstGeom>
-          <a:noFill/>
-          <a:ln/>
-        </p:spPr>
-        <p:txBody>
-          <a:bodyPr wrap="square" lIns="0" tIns="0" rIns="0" bIns="0" rtlCol="0" anchor="ctr"/>
-          <a:lstStyle/>
-          <a:p>
-            <a:pPr marL="0" indent="0">
-              <a:buNone/>
-            </a:pPr>
-            <a:r>
-              <a:rPr lang="en-US" sz="900" dirty="0">
-                <a:solidFill>
-                  <a:srgbClr val="6B7B85"/>
-                </a:solidFill>
-                <a:latin typeface="Calibri" pitchFamily="34" charset="0"/>
-                <a:ea typeface="Calibri" pitchFamily="34" charset="-122"/>
-                <a:cs typeface="Calibri" pitchFamily="34" charset="-120"/>
-              </a:rPr>
-              <a:t>Audio Deepfake Detection — DL project</a:t>
-            </a:r>
-            <a:endParaRPr lang="en-US" sz="900" dirty="0"/>
-          </a:p>
-        </p:txBody>
-      </p:sp>
-      <p:sp>
-        <p:nvSpPr>
-          <p:cNvPr id="24" name="Text 22"/>
-          <p:cNvSpPr/>
-          <p:nvPr/>
-        </p:nvSpPr>
-        <p:spPr>
-          <a:xfrm>
-            <a:off x="11430000" y="6437376"/>
-            <a:ext cx="548640" cy="274320"/>
-          </a:xfrm>
-          <a:prstGeom prst="rect">
-            <a:avLst/>
-          </a:prstGeom>
-          <a:noFill/>
-          <a:ln/>
-        </p:spPr>
-        <p:txBody>
-          <a:bodyPr wrap="square" lIns="0" tIns="0" rIns="0" bIns="0" rtlCol="0" anchor="ctr"/>
-          <a:lstStyle/>
-          <a:p>
-            <a:pPr marL="0" indent="0" algn="r">
-              <a:buNone/>
-            </a:pPr>
-            <a:r>
-              <a:rPr lang="en-US" sz="900" dirty="0">
-                <a:solidFill>
-                  <a:srgbClr val="6B7B85"/>
-                </a:solidFill>
-                <a:latin typeface="Calibri" pitchFamily="34" charset="0"/>
-                <a:ea typeface="Calibri" pitchFamily="34" charset="-122"/>
-                <a:cs typeface="Calibri" pitchFamily="34" charset="-120"/>
-              </a:rPr>
-              <a:t>12</a:t>
-            </a:r>
-            <a:endParaRPr lang="en-US" sz="900" dirty="0"/>
-          </a:p>
-        </p:txBody>
-      </p:sp>
-      <p:sp>
-        <p:nvSpPr>
-          <p:cNvPr id="25" name="Rectangle 24"/>
-          <p:cNvSpPr/>
-          <p:nvPr/>
-        </p:nvSpPr>
-        <p:spPr>
-          <a:xfrm>
-            <a:off x="822960" y="2651760"/>
-            <a:ext cx="1700000" cy="1828800"/>
-          </a:xfrm>
-          <a:prstGeom prst="rect">
-            <a:avLst/>
-          </a:prstGeom>
-          <a:solidFill>
-            <a:srgbClr val="F4F7F8"/>
-          </a:solidFill>
-          <a:ln>
-            <a:noFill/>
-          </a:ln>
-        </p:spPr>
-        <p:style>
-          <a:lnRef idx="1">
-            <a:schemeClr val="accent1"/>
-          </a:lnRef>
-          <a:fillRef idx="3">
-            <a:schemeClr val="accent1"/>
-          </a:fillRef>
-          <a:effectRef idx="2">
-            <a:schemeClr val="accent1"/>
-          </a:effectRef>
-          <a:fontRef idx="minor">
-            <a:schemeClr val="lt1"/>
-          </a:fontRef>
-        </p:style>
-        <p:txBody>
-          <a:bodyPr rtlCol="0" anchor="ctr"/>
-          <a:lstStyle/>
-          <a:p>
-            <a:pPr algn="ctr"/>
-            <a:endParaRPr/>
-          </a:p>
-        </p:txBody>
-      </p:sp>
-      <p:sp>
-        <p:nvSpPr>
-          <p:cNvPr id="26" name="TextBox 25"/>
-          <p:cNvSpPr txBox="1"/>
-          <p:nvPr/>
-        </p:nvSpPr>
-        <p:spPr>
-          <a:xfrm>
-            <a:off x="822960" y="2880360"/>
-            <a:ext cx="1700000" cy="822960"/>
-          </a:xfrm>
-          <a:prstGeom prst="rect">
-            <a:avLst/>
-          </a:prstGeom>
-          <a:noFill/>
-        </p:spPr>
-        <p:txBody>
-          <a:bodyPr wrap="none">
-            <a:spAutoFit/>
-          </a:bodyPr>
-          <a:lstStyle/>
-          <a:p>
-            <a:pPr algn="ctr"/>
-            <a:r>
-              <a:rPr sz="3600" b="1">
-                <a:solidFill>
-                  <a:srgbClr val="0E9594"/>
-                </a:solidFill>
-              </a:rPr>
-              <a:t>72%</a:t>
-            </a:r>
-          </a:p>
-        </p:txBody>
-      </p:sp>
-      <p:sp>
-        <p:nvSpPr>
-          <p:cNvPr id="27" name="TextBox 26"/>
-          <p:cNvSpPr txBox="1"/>
-          <p:nvPr/>
-        </p:nvSpPr>
-        <p:spPr>
-          <a:xfrm>
-            <a:off x="822960" y="3794760"/>
-            <a:ext cx="1700000" cy="548640"/>
-          </a:xfrm>
-          <a:prstGeom prst="rect">
-            <a:avLst/>
-          </a:prstGeom>
-          <a:noFill/>
-        </p:spPr>
-        <p:txBody>
-          <a:bodyPr wrap="none">
-            <a:spAutoFit/>
-          </a:bodyPr>
-          <a:lstStyle/>
-          <a:p>
-            <a:pPr algn="ctr"/>
-            <a:r>
-              <a:rPr sz="1300" b="0">
-                <a:solidFill>
-                  <a:srgbClr val="6B7B85"/>
-                </a:solidFill>
-              </a:rPr>
-              <a:t>CNN</a:t>
-            </a:r>
-          </a:p>
-        </p:txBody>
-      </p:sp>
-      <p:sp>
-        <p:nvSpPr>
-          <p:cNvPr id="28" name="Rectangle 27"/>
-          <p:cNvSpPr/>
-          <p:nvPr/>
-        </p:nvSpPr>
-        <p:spPr>
-          <a:xfrm>
-            <a:off x="2586080" y="2651760"/>
-            <a:ext cx="1700000" cy="1828800"/>
-          </a:xfrm>
-          <a:prstGeom prst="rect">
-            <a:avLst/>
-          </a:prstGeom>
-          <a:solidFill>
-            <a:srgbClr val="F4F7F8"/>
-          </a:solidFill>
-          <a:ln>
-            <a:noFill/>
-          </a:ln>
-        </p:spPr>
-        <p:style>
-          <a:lnRef idx="1">
-            <a:schemeClr val="accent1"/>
-          </a:lnRef>
-          <a:fillRef idx="3">
-            <a:schemeClr val="accent1"/>
-          </a:fillRef>
-          <a:effectRef idx="2">
-            <a:schemeClr val="accent1"/>
-          </a:effectRef>
-          <a:fontRef idx="minor">
-            <a:schemeClr val="lt1"/>
-          </a:fontRef>
-        </p:style>
-        <p:txBody>
-          <a:bodyPr rtlCol="0" anchor="ctr"/>
-          <a:lstStyle/>
-          <a:p>
-            <a:pPr algn="ctr"/>
-            <a:endParaRPr/>
-          </a:p>
-        </p:txBody>
-      </p:sp>
-      <p:sp>
-        <p:nvSpPr>
-          <p:cNvPr id="29" name="TextBox 28"/>
-          <p:cNvSpPr txBox="1"/>
-          <p:nvPr/>
-        </p:nvSpPr>
-        <p:spPr>
-          <a:xfrm>
-            <a:off x="2586080" y="2880360"/>
-            <a:ext cx="1700000" cy="822960"/>
-          </a:xfrm>
-          <a:prstGeom prst="rect">
-            <a:avLst/>
-          </a:prstGeom>
-          <a:noFill/>
-        </p:spPr>
-        <p:txBody>
-          <a:bodyPr wrap="none">
-            <a:spAutoFit/>
-          </a:bodyPr>
-          <a:lstStyle/>
-          <a:p>
-            <a:pPr algn="ctr"/>
-            <a:r>
-              <a:rPr sz="3600" b="1">
-                <a:solidFill>
-                  <a:srgbClr val="8E7CC3"/>
-                </a:solidFill>
-              </a:rPr>
-              <a:t>57%</a:t>
-            </a:r>
-          </a:p>
-        </p:txBody>
-      </p:sp>
-      <p:sp>
-        <p:nvSpPr>
-          <p:cNvPr id="30" name="TextBox 29"/>
-          <p:cNvSpPr txBox="1"/>
-          <p:nvPr/>
-        </p:nvSpPr>
-        <p:spPr>
-          <a:xfrm>
-            <a:off x="2738869" y="3794760"/>
-            <a:ext cx="1394421" cy="292388"/>
-          </a:xfrm>
-          <a:prstGeom prst="rect">
-            <a:avLst/>
-          </a:prstGeom>
-          <a:noFill/>
-        </p:spPr>
-        <p:txBody>
-          <a:bodyPr wrap="none">
-            <a:spAutoFit/>
-          </a:bodyPr>
-          <a:lstStyle/>
-          <a:p>
-            <a:pPr algn="ctr"/>
-            <a:r>
-              <a:rPr sz="1300" b="0" dirty="0" err="1">
-                <a:solidFill>
-                  <a:srgbClr val="6B7B85"/>
-                </a:solidFill>
-              </a:rPr>
-              <a:t>WavLM</a:t>
-            </a:r>
-            <a:r>
-              <a:rPr sz="1300" b="0" dirty="0">
-                <a:solidFill>
-                  <a:srgbClr val="6B7B85"/>
-                </a:solidFill>
-              </a:rPr>
-              <a:t> </a:t>
-            </a:r>
-            <a:r>
-              <a:rPr lang="en-US" sz="1300" b="0" dirty="0" smtClean="0">
-                <a:solidFill>
-                  <a:srgbClr val="6B7B85"/>
-                </a:solidFill>
-              </a:rPr>
-              <a:t>backbone</a:t>
-            </a:r>
-            <a:endParaRPr sz="1300" b="0" dirty="0">
-              <a:solidFill>
-                <a:srgbClr val="6B7B85"/>
-              </a:solidFill>
-            </a:endParaRPr>
-          </a:p>
-        </p:txBody>
-      </p:sp>
-      <p:sp>
-        <p:nvSpPr>
-          <p:cNvPr id="31" name="Rectangle 30"/>
-          <p:cNvSpPr/>
-          <p:nvPr/>
-        </p:nvSpPr>
-        <p:spPr>
-          <a:xfrm>
-            <a:off x="4349200" y="2651760"/>
-            <a:ext cx="1700000" cy="1828800"/>
-          </a:xfrm>
-          <a:prstGeom prst="rect">
-            <a:avLst/>
-          </a:prstGeom>
-          <a:solidFill>
-            <a:srgbClr val="F4F7F8"/>
-          </a:solidFill>
-          <a:ln>
-            <a:noFill/>
-          </a:ln>
-        </p:spPr>
-        <p:style>
-          <a:lnRef idx="1">
-            <a:schemeClr val="accent1"/>
-          </a:lnRef>
-          <a:fillRef idx="3">
-            <a:schemeClr val="accent1"/>
-          </a:fillRef>
-          <a:effectRef idx="2">
-            <a:schemeClr val="accent1"/>
-          </a:effectRef>
-          <a:fontRef idx="minor">
-            <a:schemeClr val="lt1"/>
-          </a:fontRef>
-        </p:style>
-        <p:txBody>
-          <a:bodyPr rtlCol="0" anchor="ctr"/>
-          <a:lstStyle/>
-          <a:p>
-            <a:pPr algn="ctr"/>
-            <a:endParaRPr/>
-          </a:p>
-        </p:txBody>
-      </p:sp>
-      <p:sp>
-        <p:nvSpPr>
-          <p:cNvPr id="32" name="TextBox 31"/>
-          <p:cNvSpPr txBox="1"/>
-          <p:nvPr/>
-        </p:nvSpPr>
-        <p:spPr>
-          <a:xfrm>
-            <a:off x="4349200" y="2880360"/>
-            <a:ext cx="1700000" cy="822960"/>
-          </a:xfrm>
-          <a:prstGeom prst="rect">
-            <a:avLst/>
-          </a:prstGeom>
-          <a:noFill/>
-        </p:spPr>
-        <p:txBody>
-          <a:bodyPr wrap="none">
-            <a:spAutoFit/>
-          </a:bodyPr>
-          <a:lstStyle/>
-          <a:p>
-            <a:pPr algn="ctr"/>
-            <a:r>
-              <a:rPr sz="3600" b="1">
-                <a:solidFill>
-                  <a:srgbClr val="3E7CB1"/>
-                </a:solidFill>
-              </a:rPr>
-              <a:t>54%</a:t>
-            </a:r>
-          </a:p>
-        </p:txBody>
-      </p:sp>
-      <p:sp>
-        <p:nvSpPr>
-          <p:cNvPr id="33" name="TextBox 32"/>
-          <p:cNvSpPr txBox="1"/>
-          <p:nvPr/>
-        </p:nvSpPr>
-        <p:spPr>
-          <a:xfrm>
-            <a:off x="4349200" y="3794760"/>
-            <a:ext cx="1700000" cy="548640"/>
-          </a:xfrm>
-          <a:prstGeom prst="rect">
-            <a:avLst/>
-          </a:prstGeom>
-          <a:noFill/>
-        </p:spPr>
-        <p:txBody>
-          <a:bodyPr wrap="none">
-            <a:spAutoFit/>
-          </a:bodyPr>
-          <a:lstStyle/>
-          <a:p>
-            <a:pPr algn="ctr"/>
-            <a:r>
-              <a:rPr sz="1300" b="0">
-                <a:solidFill>
-                  <a:srgbClr val="6B7B85"/>
-                </a:solidFill>
-              </a:rPr>
-              <a:t>CRNN</a:t>
-            </a:r>
-          </a:p>
-        </p:txBody>
-      </p:sp>
-      <p:sp>
-        <p:nvSpPr>
-          <p:cNvPr id="34" name="Rectangle 33"/>
-          <p:cNvSpPr/>
-          <p:nvPr/>
-        </p:nvSpPr>
-        <p:spPr>
-          <a:xfrm>
-            <a:off x="6112320" y="2651760"/>
-            <a:ext cx="1700000" cy="1828800"/>
-          </a:xfrm>
-          <a:prstGeom prst="rect">
-            <a:avLst/>
-          </a:prstGeom>
-          <a:solidFill>
-            <a:srgbClr val="F4F7F8"/>
-          </a:solidFill>
-          <a:ln>
-            <a:noFill/>
-          </a:ln>
-        </p:spPr>
-        <p:style>
-          <a:lnRef idx="1">
-            <a:schemeClr val="accent1"/>
-          </a:lnRef>
-          <a:fillRef idx="3">
-            <a:schemeClr val="accent1"/>
-          </a:fillRef>
-          <a:effectRef idx="2">
-            <a:schemeClr val="accent1"/>
-          </a:effectRef>
-          <a:fontRef idx="minor">
-            <a:schemeClr val="lt1"/>
-          </a:fontRef>
-        </p:style>
-        <p:txBody>
-          <a:bodyPr rtlCol="0" anchor="ctr"/>
-          <a:lstStyle/>
-          <a:p>
-            <a:pPr algn="ctr"/>
-            <a:endParaRPr/>
-          </a:p>
-        </p:txBody>
-      </p:sp>
-      <p:sp>
-        <p:nvSpPr>
-          <p:cNvPr id="35" name="TextBox 34"/>
-          <p:cNvSpPr txBox="1"/>
-          <p:nvPr/>
-        </p:nvSpPr>
-        <p:spPr>
-          <a:xfrm>
-            <a:off x="6112320" y="2880360"/>
-            <a:ext cx="1700000" cy="822960"/>
-          </a:xfrm>
-          <a:prstGeom prst="rect">
-            <a:avLst/>
-          </a:prstGeom>
-          <a:noFill/>
-        </p:spPr>
-        <p:txBody>
-          <a:bodyPr wrap="none">
-            <a:spAutoFit/>
-          </a:bodyPr>
-          <a:lstStyle/>
-          <a:p>
-            <a:pPr algn="ctr"/>
-            <a:r>
-              <a:rPr sz="3600" b="1">
-                <a:solidFill>
-                  <a:srgbClr val="C9971B"/>
-                </a:solidFill>
-              </a:rPr>
-              <a:t>45%</a:t>
-            </a:r>
-          </a:p>
-        </p:txBody>
-      </p:sp>
-      <p:sp>
-        <p:nvSpPr>
-          <p:cNvPr id="36" name="TextBox 35"/>
-          <p:cNvSpPr txBox="1"/>
-          <p:nvPr/>
-        </p:nvSpPr>
-        <p:spPr>
-          <a:xfrm>
-            <a:off x="6112320" y="3794760"/>
-            <a:ext cx="1700000" cy="548640"/>
-          </a:xfrm>
-          <a:prstGeom prst="rect">
-            <a:avLst/>
-          </a:prstGeom>
-          <a:noFill/>
-        </p:spPr>
-        <p:txBody>
-          <a:bodyPr wrap="none">
-            <a:spAutoFit/>
-          </a:bodyPr>
-          <a:lstStyle/>
-          <a:p>
-            <a:pPr algn="ctr"/>
-            <a:r>
-              <a:rPr sz="1300" b="0">
-                <a:solidFill>
-                  <a:srgbClr val="6B7B85"/>
-                </a:solidFill>
-              </a:rPr>
-              <a:t>WavLM ft</a:t>
-            </a:r>
-          </a:p>
-        </p:txBody>
-      </p:sp>
-      <p:sp>
-        <p:nvSpPr>
-          <p:cNvPr id="37" name="Rectangle 36"/>
-          <p:cNvSpPr/>
-          <p:nvPr/>
-        </p:nvSpPr>
-        <p:spPr>
-          <a:xfrm>
-            <a:off x="7875440" y="2651760"/>
-            <a:ext cx="1700000" cy="1828800"/>
-          </a:xfrm>
-          <a:prstGeom prst="rect">
-            <a:avLst/>
-          </a:prstGeom>
-          <a:solidFill>
-            <a:srgbClr val="F4F7F8"/>
-          </a:solidFill>
-          <a:ln>
-            <a:noFill/>
-          </a:ln>
-        </p:spPr>
-        <p:style>
-          <a:lnRef idx="1">
-            <a:schemeClr val="accent1"/>
-          </a:lnRef>
-          <a:fillRef idx="3">
-            <a:schemeClr val="accent1"/>
-          </a:fillRef>
-          <a:effectRef idx="2">
-            <a:schemeClr val="accent1"/>
-          </a:effectRef>
-          <a:fontRef idx="minor">
-            <a:schemeClr val="lt1"/>
-          </a:fontRef>
-        </p:style>
-        <p:txBody>
-          <a:bodyPr rtlCol="0" anchor="ctr"/>
-          <a:lstStyle/>
-          <a:p>
-            <a:pPr algn="ctr"/>
-            <a:endParaRPr/>
-          </a:p>
-        </p:txBody>
-      </p:sp>
-      <p:sp>
-        <p:nvSpPr>
-          <p:cNvPr id="38" name="TextBox 37"/>
-          <p:cNvSpPr txBox="1"/>
-          <p:nvPr/>
-        </p:nvSpPr>
-        <p:spPr>
-          <a:xfrm>
-            <a:off x="7875440" y="2880360"/>
-            <a:ext cx="1700000" cy="822960"/>
-          </a:xfrm>
-          <a:prstGeom prst="rect">
-            <a:avLst/>
-          </a:prstGeom>
-          <a:noFill/>
-        </p:spPr>
-        <p:txBody>
-          <a:bodyPr wrap="none">
-            <a:spAutoFit/>
-          </a:bodyPr>
-          <a:lstStyle/>
-          <a:p>
-            <a:pPr algn="ctr"/>
-            <a:r>
-              <a:rPr sz="3600" b="1">
-                <a:solidFill>
-                  <a:srgbClr val="E8674F"/>
-                </a:solidFill>
-              </a:rPr>
-              <a:t>17%</a:t>
-            </a:r>
-          </a:p>
-        </p:txBody>
-      </p:sp>
-      <p:sp>
-        <p:nvSpPr>
-          <p:cNvPr id="39" name="TextBox 38"/>
-          <p:cNvSpPr txBox="1"/>
-          <p:nvPr/>
-        </p:nvSpPr>
-        <p:spPr>
-          <a:xfrm>
-            <a:off x="7875440" y="3794760"/>
-            <a:ext cx="1700000" cy="548640"/>
-          </a:xfrm>
-          <a:prstGeom prst="rect">
-            <a:avLst/>
-          </a:prstGeom>
-          <a:noFill/>
-        </p:spPr>
-        <p:txBody>
-          <a:bodyPr wrap="none">
-            <a:spAutoFit/>
-          </a:bodyPr>
-          <a:lstStyle/>
-          <a:p>
-            <a:pPr algn="ctr"/>
-            <a:r>
-              <a:rPr sz="1300" b="0">
-                <a:solidFill>
-                  <a:srgbClr val="6B7B85"/>
-                </a:solidFill>
-              </a:rPr>
-              <a:t>MLP</a:t>
-            </a:r>
-          </a:p>
-        </p:txBody>
-      </p:sp>
-      <p:sp>
-        <p:nvSpPr>
-          <p:cNvPr id="40" name="Rectangle 39"/>
-          <p:cNvSpPr/>
-          <p:nvPr/>
-        </p:nvSpPr>
-        <p:spPr>
-          <a:xfrm>
-            <a:off x="9638560" y="2651760"/>
-            <a:ext cx="1700000" cy="1828800"/>
-          </a:xfrm>
-          <a:prstGeom prst="rect">
-            <a:avLst/>
-          </a:prstGeom>
-          <a:solidFill>
-            <a:srgbClr val="F4F7F8"/>
-          </a:solidFill>
-          <a:ln>
-            <a:noFill/>
-          </a:ln>
-        </p:spPr>
-        <p:style>
-          <a:lnRef idx="1">
-            <a:schemeClr val="accent1"/>
-          </a:lnRef>
-          <a:fillRef idx="3">
-            <a:schemeClr val="accent1"/>
-          </a:fillRef>
-          <a:effectRef idx="2">
-            <a:schemeClr val="accent1"/>
-          </a:effectRef>
-          <a:fontRef idx="minor">
-            <a:schemeClr val="lt1"/>
-          </a:fontRef>
-        </p:style>
-        <p:txBody>
-          <a:bodyPr rtlCol="0" anchor="ctr"/>
-          <a:lstStyle/>
-          <a:p>
-            <a:pPr algn="ctr"/>
-            <a:endParaRPr/>
-          </a:p>
-        </p:txBody>
-      </p:sp>
-      <p:sp>
-        <p:nvSpPr>
-          <p:cNvPr id="41" name="TextBox 40"/>
-          <p:cNvSpPr txBox="1"/>
-          <p:nvPr/>
-        </p:nvSpPr>
-        <p:spPr>
-          <a:xfrm>
-            <a:off x="9638560" y="2880360"/>
-            <a:ext cx="1700000" cy="822960"/>
-          </a:xfrm>
-          <a:prstGeom prst="rect">
-            <a:avLst/>
-          </a:prstGeom>
-          <a:noFill/>
-        </p:spPr>
-        <p:txBody>
-          <a:bodyPr wrap="none">
-            <a:spAutoFit/>
-          </a:bodyPr>
-          <a:lstStyle/>
-          <a:p>
-            <a:pPr algn="ctr"/>
-            <a:r>
-              <a:rPr sz="3600" b="1">
-                <a:solidFill>
-                  <a:srgbClr val="E8674F"/>
-                </a:solidFill>
-              </a:rPr>
-              <a:t>17%</a:t>
-            </a:r>
-          </a:p>
-        </p:txBody>
-      </p:sp>
-      <p:sp>
-        <p:nvSpPr>
-          <p:cNvPr id="42" name="TextBox 41"/>
-          <p:cNvSpPr txBox="1"/>
-          <p:nvPr/>
-        </p:nvSpPr>
-        <p:spPr>
-          <a:xfrm>
-            <a:off x="9638560" y="3794760"/>
-            <a:ext cx="1700000" cy="548640"/>
-          </a:xfrm>
-          <a:prstGeom prst="rect">
-            <a:avLst/>
-          </a:prstGeom>
-          <a:noFill/>
-        </p:spPr>
-        <p:txBody>
-          <a:bodyPr wrap="none">
-            <a:spAutoFit/>
-          </a:bodyPr>
-          <a:lstStyle/>
-          <a:p>
-            <a:pPr algn="ctr"/>
-            <a:r>
-              <a:rPr sz="1300" b="0">
-                <a:solidFill>
-                  <a:srgbClr val="6B7B85"/>
-                </a:solidFill>
-              </a:rPr>
-              <a:t>RNN</a:t>
-            </a:r>
-          </a:p>
-        </p:txBody>
-      </p:sp>
-    </p:spTree>
-  </p:cSld>
-  <p:clrMapOvr>
-    <a:masterClrMapping/>
-  </p:clrMapOvr>
-</p:sld>
-</file>
-
-<file path=ppt/slides/slide14.xml><?xml version="1.0" encoding="utf-8"?>
+<file path=ppt/slides/slide15.xml><?xml version="1.0" encoding="utf-8"?>
 <p:sld xmlns:a="http://schemas.openxmlformats.org/drawingml/2006/main" xmlns:r="http://schemas.openxmlformats.org/officeDocument/2006/relationships" xmlns:p="http://schemas.openxmlformats.org/presentationml/2006/main">
   <p:cSld name="Slide 13">
     <p:bg>
@@ -4586,11 +4481,8 @@
           <a:bodyPr wrap="square" lIns="0" tIns="0" rIns="0" bIns="0" rtlCol="0" anchor="ctr"/>
           <a:lstStyle/>
           <a:p>
-            <a:pPr marL="0" indent="0">
-              <a:buNone/>
-            </a:pPr>
-            <a:r>
-              <a:rPr lang="en-US" sz="2800" b="1" dirty="0">
+            <a:r>
+              <a:rPr lang="en-US" sz="2800" b="1" dirty="0" smtClean="0">
                 <a:solidFill>
                   <a:srgbClr val="22303A"/>
                 </a:solidFill>
@@ -4598,7 +4490,33 @@
                 <a:ea typeface="Trebuchet MS" pitchFamily="34" charset="-122"/>
                 <a:cs typeface="Trebuchet MS" pitchFamily="34" charset="-120"/>
               </a:rPr>
-              <a:t>Generalisation gap: fine-tuning overfits the source</a:t>
+              <a:t>Architecture</a:t>
+            </a:r>
+            <a:r>
+              <a:rPr lang="en-US" sz="2800" dirty="0" smtClean="0"/>
+              <a:t> </a:t>
+            </a:r>
+            <a:r>
+              <a:rPr lang="en-US" sz="2800" b="1" dirty="0" err="1" smtClean="0">
+                <a:solidFill>
+                  <a:srgbClr val="22303A"/>
+                </a:solidFill>
+                <a:latin typeface="Trebuchet MS" pitchFamily="34" charset="0"/>
+                <a:ea typeface="Trebuchet MS" pitchFamily="34" charset="-122"/>
+                <a:cs typeface="Trebuchet MS" pitchFamily="34" charset="-120"/>
+              </a:rPr>
+              <a:t>Generalisation</a:t>
+            </a:r>
+            <a:r>
+              <a:rPr lang="en-US" sz="2800" b="1" dirty="0" smtClean="0">
+                <a:solidFill>
+                  <a:srgbClr val="22303A"/>
+                </a:solidFill>
+                <a:latin typeface="Trebuchet MS" pitchFamily="34" charset="0"/>
+                <a:ea typeface="Trebuchet MS" pitchFamily="34" charset="-122"/>
+                <a:cs typeface="Trebuchet MS" pitchFamily="34" charset="-120"/>
+              </a:rPr>
+              <a:t> gap</a:t>
             </a:r>
             <a:endParaRPr lang="en-US" sz="2800" dirty="0"/>
           </a:p>
@@ -4684,7 +4602,29 @@
                 <a:ea typeface="Calibri" pitchFamily="34" charset="-122"/>
                 <a:cs typeface="Calibri" pitchFamily="34" charset="-120"/>
               </a:rPr>
-              <a:t>transfers best — smallest gap, highest ITW.</a:t>
+              <a:t>transfers best </a:t>
+            </a:r>
+            <a:r>
+              <a:rPr lang="en-US" sz="1400" dirty="0" smtClean="0">
+                <a:solidFill>
+                  <a:srgbClr val="22303A"/>
+                </a:solidFill>
+                <a:latin typeface="Calibri" pitchFamily="34" charset="0"/>
+                <a:ea typeface="Calibri" pitchFamily="34" charset="-122"/>
+                <a:cs typeface="Calibri" pitchFamily="34" charset="-120"/>
+              </a:rPr>
+              <a:t>smallest </a:t>
+            </a:r>
+            <a:r>
+              <a:rPr lang="en-US" sz="1400" dirty="0">
+                <a:solidFill>
+                  <a:srgbClr val="22303A"/>
+                </a:solidFill>
+                <a:latin typeface="Calibri" pitchFamily="34" charset="0"/>
+                <a:ea typeface="Calibri" pitchFamily="34" charset="-122"/>
+                <a:cs typeface="Calibri" pitchFamily="34" charset="-120"/>
+              </a:rPr>
+              <a:t>gap, highest ITW.</a:t>
             </a:r>
             <a:endParaRPr lang="en-US" sz="1400" dirty="0"/>
           </a:p>
@@ -4705,7 +4645,29 @@
                 <a:ea typeface="Calibri" pitchFamily="34" charset="-122"/>
                 <a:cs typeface="Calibri" pitchFamily="34" charset="-120"/>
               </a:rPr>
-              <a:t>Under domain shift, freezing the backbone can beat fine-tuning.</a:t>
+              <a:t>Under </a:t>
+            </a:r>
+            <a:r>
+              <a:rPr lang="en-US" sz="1400" dirty="0" smtClean="0">
+                <a:solidFill>
+                  <a:srgbClr val="22303A"/>
+                </a:solidFill>
+                <a:latin typeface="Calibri" pitchFamily="34" charset="0"/>
+                <a:ea typeface="Calibri" pitchFamily="34" charset="-122"/>
+                <a:cs typeface="Calibri" pitchFamily="34" charset="-120"/>
+              </a:rPr>
+              <a:t>these circumstances, </a:t>
+            </a:r>
+            <a:r>
+              <a:rPr lang="en-US" sz="1400" dirty="0">
+                <a:solidFill>
+                  <a:srgbClr val="22303A"/>
+                </a:solidFill>
+                <a:latin typeface="Calibri" pitchFamily="34" charset="0"/>
+                <a:ea typeface="Calibri" pitchFamily="34" charset="-122"/>
+                <a:cs typeface="Calibri" pitchFamily="34" charset="-120"/>
+              </a:rPr>
+              <a:t>freezing the backbone can beat fine-tuning.</a:t>
             </a:r>
             <a:endParaRPr lang="en-US" sz="1400" dirty="0"/>
           </a:p>
@@ -4821,7 +4783,7 @@
 </p:sld>
 </file>
 
-<file path=ppt/slides/slide15.xml><?xml version="1.0" encoding="utf-8"?>
+<file path=ppt/slides/slide16.xml><?xml version="1.0" encoding="utf-8"?>
 <p:sld xmlns:a="http://schemas.openxmlformats.org/drawingml/2006/main" xmlns:r="http://schemas.openxmlformats.org/officeDocument/2006/relationships" xmlns:p="http://schemas.openxmlformats.org/presentationml/2006/main">
   <p:cSld name="Slide 14">
     <p:bg>
@@ -4937,7 +4899,7 @@
               <a:buNone/>
             </a:pPr>
             <a:r>
-              <a:rPr lang="en-US" sz="2800" b="1" dirty="0">
+              <a:rPr lang="en-US" sz="2800" b="1" dirty="0" smtClean="0">
                 <a:solidFill>
                   <a:srgbClr val="22303A"/>
                 </a:solidFill>
@@ -4945,7 +4907,7 @@
                 <a:ea typeface="Trebuchet MS" pitchFamily="34" charset="-122"/>
                 <a:cs typeface="Trebuchet MS" pitchFamily="34" charset="-120"/>
               </a:rPr>
-              <a:t>Augmentation now; a degradation study next</a:t>
+              <a:t>Augmentation</a:t>
             </a:r>
             <a:endParaRPr lang="en-US" sz="2800" dirty="0"/>
           </a:p>
@@ -5354,7 +5316,7 @@
 </p:sld>
 </file>
 
-<file path=ppt/slides/slide16.xml><?xml version="1.0" encoding="utf-8"?>
+<file path=ppt/slides/slide17.xml><?xml version="1.0" encoding="utf-8"?>
 <p:sld xmlns:a="http://schemas.openxmlformats.org/drawingml/2006/main" xmlns:r="http://schemas.openxmlformats.org/officeDocument/2006/relationships" xmlns:p="http://schemas.openxmlformats.org/presentationml/2006/main">
   <p:cSld name="Slide 15">
     <p:bg>
@@ -5495,6 +5457,17 @@
               <a:buChar char="•"/>
             </a:pPr>
             <a:r>
+              <a:rPr lang="en-US" sz="1600" dirty="0" smtClean="0">
+                <a:solidFill>
+                  <a:srgbClr val="EAF1F5"/>
+                </a:solidFill>
+                <a:latin typeface="Calibri" pitchFamily="34" charset="0"/>
+                <a:ea typeface="Calibri" pitchFamily="34" charset="-122"/>
+                <a:cs typeface="Calibri" pitchFamily="34" charset="-120"/>
+              </a:rPr>
+              <a:t>MLP/RNN </a:t>
+            </a:r>
+            <a:r>
               <a:rPr lang="en-US" sz="1600" dirty="0">
                 <a:solidFill>
                   <a:srgbClr val="EAF1F5"/>
@@ -5503,7 +5476,7 @@
                 <a:ea typeface="Calibri" pitchFamily="34" charset="-122"/>
                 <a:cs typeface="Calibri" pitchFamily="34" charset="-120"/>
               </a:rPr>
-              <a:t>Read AUC together with fake recall — MLP/RNN catch only ~17% of fakes despite passable accuracy.</a:t>
+              <a:t>catch only ~17% of fakes despite passable accuracy.</a:t>
             </a:r>
             <a:endParaRPr lang="en-US" sz="1600" dirty="0"/>
           </a:p>
@@ -7778,14 +7751,6 @@
               </a:rPr>
               <a:t>).  </a:t>
             </a:r>
-            <a:endParaRPr lang="en-US" sz="1300" i="1" dirty="0" smtClean="0">
-              <a:solidFill>
-                <a:srgbClr val="6B7B85"/>
-              </a:solidFill>
-              <a:latin typeface="Calibri" pitchFamily="34" charset="0"/>
-              <a:ea typeface="Calibri" pitchFamily="34" charset="-122"/>
-              <a:cs typeface="Calibri" pitchFamily="34" charset="-120"/>
-            </a:endParaRPr>
           </a:p>
           <a:p>
             <a:pPr marL="0" indent="0">
@@ -8223,14 +8188,6 @@
               </a:rPr>
               <a:t>(4.634 samples).</a:t>
             </a:r>
-            <a:endParaRPr lang="en-US" sz="1250" dirty="0" smtClean="0">
-              <a:solidFill>
-                <a:srgbClr val="3A4750"/>
-              </a:solidFill>
-              <a:latin typeface="Calibri" pitchFamily="34" charset="0"/>
-              <a:ea typeface="Calibri" pitchFamily="34" charset="-122"/>
-              <a:cs typeface="Calibri" pitchFamily="34" charset="-120"/>
-            </a:endParaRPr>
           </a:p>
           <a:p>
             <a:pPr marL="0" indent="0">
@@ -8898,6 +8855,835 @@
 </file>
 
 <file path=ppt/slides/slide5.xml><?xml version="1.0" encoding="utf-8"?>
+<p:sld xmlns:a="http://schemas.openxmlformats.org/drawingml/2006/main" xmlns:r="http://schemas.openxmlformats.org/officeDocument/2006/relationships" xmlns:p="http://schemas.openxmlformats.org/presentationml/2006/main">
+  <p:cSld>
+    <p:spTree>
+      <p:nvGrpSpPr>
+        <p:cNvPr id="1" name=""/>
+        <p:cNvGrpSpPr/>
+        <p:nvPr/>
+      </p:nvGrpSpPr>
+      <p:grpSpPr>
+        <a:xfrm>
+          <a:off x="0" y="0"/>
+          <a:ext cx="0" cy="0"/>
+          <a:chOff x="0" y="0"/>
+          <a:chExt cx="0" cy="0"/>
+        </a:xfrm>
+      </p:grpSpPr>
+      <p:sp>
+        <p:nvSpPr>
+          <p:cNvPr id="2" name="Rectangle 1"/>
+          <p:cNvSpPr/>
+          <p:nvPr/>
+        </p:nvSpPr>
+        <p:spPr>
+          <a:xfrm>
+            <a:off x="0" y="0"/>
+            <a:ext cx="548640" cy="6858000"/>
+          </a:xfrm>
+          <a:prstGeom prst="rect">
+            <a:avLst/>
+          </a:prstGeom>
+          <a:solidFill>
+            <a:srgbClr val="22303A"/>
+          </a:solidFill>
+          <a:ln>
+            <a:noFill/>
+          </a:ln>
+        </p:spPr>
+        <p:style>
+          <a:lnRef idx="1">
+            <a:schemeClr val="accent1"/>
+          </a:lnRef>
+          <a:fillRef idx="3">
+            <a:schemeClr val="accent1"/>
+          </a:fillRef>
+          <a:effectRef idx="2">
+            <a:schemeClr val="accent1"/>
+          </a:effectRef>
+          <a:fontRef idx="minor">
+            <a:schemeClr val="lt1"/>
+          </a:fontRef>
+        </p:style>
+        <p:txBody>
+          <a:bodyPr rtlCol="0" anchor="ctr"/>
+          <a:lstStyle/>
+          <a:p>
+            <a:pPr algn="ctr"/>
+            <a:endParaRPr/>
+          </a:p>
+        </p:txBody>
+      </p:sp>
+      <p:sp>
+        <p:nvSpPr>
+          <p:cNvPr id="3" name="Rectangle 2"/>
+          <p:cNvSpPr/>
+          <p:nvPr/>
+        </p:nvSpPr>
+        <p:spPr>
+          <a:xfrm>
+            <a:off x="548640" y="0"/>
+            <a:ext cx="45720" cy="6858000"/>
+          </a:xfrm>
+          <a:prstGeom prst="rect">
+            <a:avLst/>
+          </a:prstGeom>
+          <a:solidFill>
+            <a:srgbClr val="0E9594"/>
+          </a:solidFill>
+          <a:ln>
+            <a:noFill/>
+          </a:ln>
+        </p:spPr>
+        <p:style>
+          <a:lnRef idx="1">
+            <a:schemeClr val="accent1"/>
+          </a:lnRef>
+          <a:fillRef idx="3">
+            <a:schemeClr val="accent1"/>
+          </a:fillRef>
+          <a:effectRef idx="2">
+            <a:schemeClr val="accent1"/>
+          </a:effectRef>
+          <a:fontRef idx="minor">
+            <a:schemeClr val="lt1"/>
+          </a:fontRef>
+        </p:style>
+        <p:txBody>
+          <a:bodyPr rtlCol="0" anchor="ctr"/>
+          <a:lstStyle/>
+          <a:p>
+            <a:pPr algn="ctr"/>
+            <a:endParaRPr/>
+          </a:p>
+        </p:txBody>
+      </p:sp>
+      <p:sp>
+        <p:nvSpPr>
+          <p:cNvPr id="4" name="TextBox 3"/>
+          <p:cNvSpPr txBox="1"/>
+          <p:nvPr/>
+        </p:nvSpPr>
+        <p:spPr>
+          <a:xfrm>
+            <a:off x="685800" y="310896"/>
+            <a:ext cx="10515600" cy="275000"/>
+          </a:xfrm>
+          <a:prstGeom prst="rect">
+            <a:avLst/>
+          </a:prstGeom>
+          <a:noFill/>
+        </p:spPr>
+        <p:txBody>
+          <a:bodyPr wrap="square">
+            <a:spAutoFit/>
+          </a:bodyPr>
+          <a:lstStyle/>
+          <a:p>
+            <a:pPr algn="l"/>
+            <a:r>
+              <a:rPr sz="1100" b="1">
+                <a:solidFill>
+                  <a:srgbClr val="0E9594"/>
+                </a:solidFill>
+              </a:rPr>
+              <a:t>ARCHITECTURE · SUMMARY TABLE</a:t>
+            </a:r>
+          </a:p>
+        </p:txBody>
+      </p:sp>
+      <p:sp>
+        <p:nvSpPr>
+          <p:cNvPr id="5" name="TextBox 4"/>
+          <p:cNvSpPr txBox="1"/>
+          <p:nvPr/>
+        </p:nvSpPr>
+        <p:spPr>
+          <a:xfrm>
+            <a:off x="685800" y="548000"/>
+            <a:ext cx="11406200" cy="400110"/>
+          </a:xfrm>
+          <a:prstGeom prst="rect">
+            <a:avLst/>
+          </a:prstGeom>
+          <a:noFill/>
+        </p:spPr>
+        <p:txBody>
+          <a:bodyPr wrap="square">
+            <a:spAutoFit/>
+          </a:bodyPr>
+          <a:lstStyle/>
+          <a:p>
+            <a:pPr algn="l"/>
+            <a:r>
+              <a:rPr sz="2000" b="1" dirty="0">
+                <a:solidFill>
+                  <a:srgbClr val="22303A"/>
+                </a:solidFill>
+              </a:rPr>
+              <a:t>Baseline </a:t>
+            </a:r>
+            <a:r>
+              <a:rPr sz="2000" b="1" dirty="0" smtClean="0">
+                <a:solidFill>
+                  <a:srgbClr val="22303A"/>
+                </a:solidFill>
+              </a:rPr>
+              <a:t>configurations</a:t>
+            </a:r>
+            <a:endParaRPr sz="2000" b="1" dirty="0">
+              <a:solidFill>
+                <a:srgbClr val="22303A"/>
+              </a:solidFill>
+            </a:endParaRPr>
+          </a:p>
+        </p:txBody>
+      </p:sp>
+      <p:sp>
+        <p:nvSpPr>
+          <p:cNvPr id="7" name="TextBox 6"/>
+          <p:cNvSpPr txBox="1"/>
+          <p:nvPr/>
+        </p:nvSpPr>
+        <p:spPr>
+          <a:xfrm>
+            <a:off x="3402210" y="5655382"/>
+            <a:ext cx="5592256" cy="246221"/>
+          </a:xfrm>
+          <a:prstGeom prst="rect">
+            <a:avLst/>
+          </a:prstGeom>
+          <a:noFill/>
+        </p:spPr>
+        <p:txBody>
+          <a:bodyPr wrap="square">
+            <a:spAutoFit/>
+          </a:bodyPr>
+          <a:lstStyle/>
+          <a:p>
+            <a:pPr algn="ctr"/>
+            <a:r>
+              <a:rPr sz="1000" b="0" dirty="0">
+                <a:solidFill>
+                  <a:srgbClr val="22303A"/>
+                </a:solidFill>
+              </a:rPr>
+              <a:t>The MLP, CNN, RNN, and C-RNN Baseline Network Architectures</a:t>
+            </a:r>
+          </a:p>
+        </p:txBody>
+      </p:sp>
+      <p:graphicFrame>
+        <p:nvGraphicFramePr>
+          <p:cNvPr id="8" name="Table 7"/>
+          <p:cNvGraphicFramePr>
+            <a:graphicFrameLocks noGrp="1"/>
+          </p:cNvGraphicFramePr>
+          <p:nvPr>
+            <p:extLst>
+              <p:ext uri="{D42A27DB-BD31-4B8C-83A1-F6EECF244321}">
+                <p14:modId xmlns:p14="http://schemas.microsoft.com/office/powerpoint/2010/main" val="618637030"/>
+              </p:ext>
+            </p:extLst>
+          </p:nvPr>
+        </p:nvGraphicFramePr>
+        <p:xfrm>
+          <a:off x="770238" y="1134214"/>
+          <a:ext cx="10856200" cy="4206771"/>
+        </p:xfrm>
+        <a:graphic>
+          <a:graphicData uri="http://schemas.openxmlformats.org/drawingml/2006/table">
+            <a:tbl>
+              <a:tblPr firstRow="1" bandRow="1">
+                <a:tableStyleId>{5C22544A-7EE6-4342-B048-85BDC9FD1C3A}</a:tableStyleId>
+              </a:tblPr>
+              <a:tblGrid>
+                <a:gridCol w="2491946"/>
+                <a:gridCol w="8364254"/>
+              </a:tblGrid>
+              <a:tr h="530897">
+                <a:tc>
+                  <a:txBody>
+                    <a:bodyPr/>
+                    <a:lstStyle/>
+                    <a:p>
+                      <a:endParaRPr dirty="0"/>
+                    </a:p>
+                    <a:p>
+                      <a:pPr algn="ctr"/>
+                      <a:r>
+                        <a:rPr lang="en-US" sz="1200" b="1" dirty="0">
+                          <a:solidFill>
+                            <a:srgbClr val="FFFFFF"/>
+                          </a:solidFill>
+                          <a:latin typeface="Times New Roman"/>
+                        </a:rPr>
+                        <a:t>Models</a:t>
+                      </a:r>
+                    </a:p>
+                  </a:txBody>
+                  <a:tcPr>
+                    <a:solidFill>
+                      <a:srgbClr val="22303A"/>
+                    </a:solidFill>
+                  </a:tcPr>
+                </a:tc>
+                <a:tc>
+                  <a:txBody>
+                    <a:bodyPr/>
+                    <a:lstStyle/>
+                    <a:p>
+                      <a:endParaRPr dirty="0"/>
+                    </a:p>
+                    <a:p>
+                      <a:pPr algn="ctr"/>
+                      <a:r>
+                        <a:rPr lang="en-US" sz="1200" b="1" dirty="0">
+                          <a:solidFill>
+                            <a:srgbClr val="FFFFFF"/>
+                          </a:solidFill>
+                          <a:latin typeface="Times New Roman"/>
+                        </a:rPr>
+                        <a:t>Configuration</a:t>
+                      </a:r>
+                    </a:p>
+                  </a:txBody>
+                  <a:tcPr>
+                    <a:solidFill>
+                      <a:srgbClr val="22303A"/>
+                    </a:solidFill>
+                  </a:tcPr>
+                </a:tc>
+              </a:tr>
+              <a:tr h="654436">
+                <a:tc>
+                  <a:txBody>
+                    <a:bodyPr/>
+                    <a:lstStyle/>
+                    <a:p>
+                      <a:endParaRPr/>
+                    </a:p>
+                    <a:p>
+                      <a:pPr algn="ctr"/>
+                      <a:r>
+                        <a:rPr lang="en-US" sz="1100" b="1" dirty="0">
+                          <a:solidFill>
+                            <a:srgbClr val="22303A"/>
+                          </a:solidFill>
+                          <a:latin typeface="Times New Roman"/>
+                        </a:rPr>
+                        <a:t>MLP baseline</a:t>
+                      </a:r>
+                    </a:p>
+                  </a:txBody>
+                  <a:tcPr anchor="ctr">
+                    <a:solidFill>
+                      <a:srgbClr val="FFFFFF"/>
+                    </a:solidFill>
+                  </a:tcPr>
+                </a:tc>
+                <a:tc>
+                  <a:txBody>
+                    <a:bodyPr/>
+                    <a:lstStyle/>
+                    <a:p>
+                      <a:pPr algn="ctr"/>
+                      <a:r>
+                        <a:rPr lang="en-US" sz="1050" b="1" dirty="0">
+                          <a:solidFill>
+                            <a:srgbClr val="22303A"/>
+                          </a:solidFill>
+                          <a:latin typeface="Times New Roman"/>
+                        </a:rPr>
+                        <a:t>3 ×</a:t>
+                      </a:r>
+                      <a:r>
+                        <a:rPr lang="en-US" sz="1050" b="0" dirty="0">
+                          <a:solidFill>
+                            <a:srgbClr val="22303A"/>
+                          </a:solidFill>
+                          <a:latin typeface="Times New Roman"/>
+                        </a:rPr>
+                        <a:t> {Linear(256/128/64)  –  BN  –  ReLU  –  Dropout(0.5)}</a:t>
+                      </a:r>
+                    </a:p>
+                    <a:p>
+                      <a:pPr algn="ctr"/>
+                      <a:r>
+                        <a:rPr lang="en-US" sz="1050" b="1" dirty="0">
+                          <a:solidFill>
+                            <a:srgbClr val="22303A"/>
+                          </a:solidFill>
+                          <a:latin typeface="Times New Roman"/>
+                        </a:rPr>
+                        <a:t>1 ×</a:t>
+                      </a:r>
+                      <a:r>
+                        <a:rPr lang="en-US" sz="1050" b="0" dirty="0">
+                          <a:solidFill>
+                            <a:srgbClr val="22303A"/>
+                          </a:solidFill>
+                          <a:latin typeface="Times New Roman"/>
+                        </a:rPr>
+                        <a:t> {Linear(1)  –  Sigmoid}</a:t>
+                      </a:r>
+                    </a:p>
+                  </a:txBody>
+                  <a:tcPr marL="100000" marR="100000" marT="55000" marB="55000" anchor="ctr">
+                    <a:solidFill>
+                      <a:srgbClr val="FFFFFF"/>
+                    </a:solidFill>
+                  </a:tcPr>
+                </a:tc>
+              </a:tr>
+              <a:tr h="914533">
+                <a:tc>
+                  <a:txBody>
+                    <a:bodyPr/>
+                    <a:lstStyle/>
+                    <a:p>
+                      <a:endParaRPr/>
+                    </a:p>
+                    <a:p>
+                      <a:pPr algn="ctr"/>
+                      <a:r>
+                        <a:rPr lang="en-US" sz="1100" b="1" dirty="0">
+                          <a:solidFill>
+                            <a:srgbClr val="22303A"/>
+                          </a:solidFill>
+                          <a:latin typeface="Times New Roman"/>
+                        </a:rPr>
+                        <a:t>CNN baseline</a:t>
+                      </a:r>
+                    </a:p>
+                  </a:txBody>
+                  <a:tcPr anchor="ctr">
+                    <a:solidFill>
+                      <a:srgbClr val="FFFFFF"/>
+                    </a:solidFill>
+                  </a:tcPr>
+                </a:tc>
+                <a:tc>
+                  <a:txBody>
+                    <a:bodyPr/>
+                    <a:lstStyle/>
+                    <a:p>
+                      <a:pPr algn="ctr"/>
+                      <a:r>
+                        <a:rPr lang="en-US" sz="1050" b="1" dirty="0">
+                          <a:solidFill>
+                            <a:srgbClr val="22303A"/>
+                          </a:solidFill>
+                          <a:latin typeface="Times New Roman"/>
+                        </a:rPr>
+                        <a:t>3 ×</a:t>
+                      </a:r>
+                      <a:r>
+                        <a:rPr lang="en-US" sz="1050" b="0" dirty="0">
+                          <a:solidFill>
+                            <a:srgbClr val="22303A"/>
+                          </a:solidFill>
+                          <a:latin typeface="Times New Roman"/>
+                        </a:rPr>
+                        <a:t> {Conv(32/64/128, k=3, p=1)  –  ReLU  –  AvgPool2d(k=2)  –  Dropout(0.5)}</a:t>
+                      </a:r>
+                    </a:p>
+                    <a:p>
+                      <a:pPr algn="ctr"/>
+                      <a:r>
+                        <a:rPr lang="en-US" sz="1050" b="1" dirty="0">
+                          <a:solidFill>
+                            <a:srgbClr val="22303A"/>
+                          </a:solidFill>
+                          <a:latin typeface="Times New Roman"/>
+                        </a:rPr>
+                        <a:t>1 ×</a:t>
+                      </a:r>
+                      <a:r>
+                        <a:rPr lang="en-US" sz="1050" b="0" dirty="0">
+                          <a:solidFill>
+                            <a:srgbClr val="22303A"/>
+                          </a:solidFill>
+                          <a:latin typeface="Times New Roman"/>
+                        </a:rPr>
+                        <a:t> {Linear(128→256)  –  ReLU  –  Dropout(0.5)}</a:t>
+                      </a:r>
+                    </a:p>
+                    <a:p>
+                      <a:pPr algn="ctr"/>
+                      <a:r>
+                        <a:rPr lang="en-US" sz="1050" b="1" dirty="0">
+                          <a:solidFill>
+                            <a:srgbClr val="22303A"/>
+                          </a:solidFill>
+                          <a:latin typeface="Times New Roman"/>
+                        </a:rPr>
+                        <a:t>1 ×</a:t>
+                      </a:r>
+                      <a:r>
+                        <a:rPr lang="en-US" sz="1050" b="0" dirty="0">
+                          <a:solidFill>
+                            <a:srgbClr val="22303A"/>
+                          </a:solidFill>
+                          <a:latin typeface="Times New Roman"/>
+                        </a:rPr>
+                        <a:t> {Linear(256→1)}</a:t>
+                      </a:r>
+                    </a:p>
+                  </a:txBody>
+                  <a:tcPr marL="100000" marR="100000" marT="55000" marB="55000" anchor="ctr">
+                    <a:solidFill>
+                      <a:srgbClr val="FFFFFF"/>
+                    </a:solidFill>
+                  </a:tcPr>
+                </a:tc>
+              </a:tr>
+              <a:tr h="914533">
+                <a:tc>
+                  <a:txBody>
+                    <a:bodyPr/>
+                    <a:lstStyle/>
+                    <a:p>
+                      <a:endParaRPr/>
+                    </a:p>
+                    <a:p>
+                      <a:pPr algn="ctr"/>
+                      <a:r>
+                        <a:rPr lang="en-US" sz="1100" b="1" dirty="0">
+                          <a:solidFill>
+                            <a:srgbClr val="22303A"/>
+                          </a:solidFill>
+                          <a:latin typeface="Times New Roman"/>
+                        </a:rPr>
+                        <a:t>RNN baseline</a:t>
+                      </a:r>
+                    </a:p>
+                  </a:txBody>
+                  <a:tcPr anchor="ctr">
+                    <a:solidFill>
+                      <a:srgbClr val="FFFFFF"/>
+                    </a:solidFill>
+                  </a:tcPr>
+                </a:tc>
+                <a:tc>
+                  <a:txBody>
+                    <a:bodyPr/>
+                    <a:lstStyle/>
+                    <a:p>
+                      <a:pPr algn="ctr"/>
+                      <a:r>
+                        <a:rPr lang="en-US" sz="1050" b="1" dirty="0">
+                          <a:solidFill>
+                            <a:srgbClr val="22303A"/>
+                          </a:solidFill>
+                          <a:latin typeface="Times New Roman"/>
+                        </a:rPr>
+                        <a:t>2 ×</a:t>
+                      </a:r>
+                      <a:r>
+                        <a:rPr lang="en-US" sz="1050" b="0" dirty="0">
+                          <a:solidFill>
+                            <a:srgbClr val="22303A"/>
+                          </a:solidFill>
+                          <a:latin typeface="Times New Roman"/>
+                        </a:rPr>
+                        <a:t> {BiLSTM(128/64, bidirectional)  –  ReLU  –  Dropout(0.5)}</a:t>
+                      </a:r>
+                    </a:p>
+                    <a:p>
+                      <a:pPr algn="ctr"/>
+                      <a:r>
+                        <a:rPr lang="en-US" sz="1050" b="1" dirty="0">
+                          <a:solidFill>
+                            <a:srgbClr val="22303A"/>
+                          </a:solidFill>
+                          <a:latin typeface="Times New Roman"/>
+                        </a:rPr>
+                        <a:t>1 ×</a:t>
+                      </a:r>
+                      <a:r>
+                        <a:rPr lang="en-US" sz="1050" b="0" dirty="0">
+                          <a:solidFill>
+                            <a:srgbClr val="22303A"/>
+                          </a:solidFill>
+                          <a:latin typeface="Times New Roman"/>
+                        </a:rPr>
+                        <a:t> {Linear(128→256)  –  ReLU  –  Dropout(0.5)}</a:t>
+                      </a:r>
+                    </a:p>
+                    <a:p>
+                      <a:pPr algn="ctr"/>
+                      <a:r>
+                        <a:rPr lang="en-US" sz="1050" b="1" dirty="0">
+                          <a:solidFill>
+                            <a:srgbClr val="22303A"/>
+                          </a:solidFill>
+                          <a:latin typeface="Times New Roman"/>
+                        </a:rPr>
+                        <a:t>1 ×</a:t>
+                      </a:r>
+                      <a:r>
+                        <a:rPr lang="en-US" sz="1050" b="0" dirty="0">
+                          <a:solidFill>
+                            <a:srgbClr val="22303A"/>
+                          </a:solidFill>
+                          <a:latin typeface="Times New Roman"/>
+                        </a:rPr>
+                        <a:t> {Linear(256→1)}</a:t>
+                      </a:r>
+                    </a:p>
+                  </a:txBody>
+                  <a:tcPr marL="100000" marR="100000" marT="55000" marB="55000" anchor="ctr">
+                    <a:solidFill>
+                      <a:srgbClr val="FFFFFF"/>
+                    </a:solidFill>
+                  </a:tcPr>
+                </a:tc>
+              </a:tr>
+              <a:tr h="1174629">
+                <a:tc>
+                  <a:txBody>
+                    <a:bodyPr/>
+                    <a:lstStyle/>
+                    <a:p>
+                      <a:endParaRPr/>
+                    </a:p>
+                    <a:p>
+                      <a:pPr algn="ctr"/>
+                      <a:r>
+                        <a:rPr lang="en-US" sz="1100" b="1" dirty="0">
+                          <a:solidFill>
+                            <a:srgbClr val="22303A"/>
+                          </a:solidFill>
+                          <a:latin typeface="Times New Roman"/>
+                        </a:rPr>
+                        <a:t>C-RNN baseline</a:t>
+                      </a:r>
+                    </a:p>
+                  </a:txBody>
+                  <a:tcPr anchor="ctr">
+                    <a:solidFill>
+                      <a:srgbClr val="FFFFFF"/>
+                    </a:solidFill>
+                  </a:tcPr>
+                </a:tc>
+                <a:tc>
+                  <a:txBody>
+                    <a:bodyPr/>
+                    <a:lstStyle/>
+                    <a:p>
+                      <a:pPr algn="ctr"/>
+                      <a:r>
+                        <a:rPr lang="en-US" sz="1050" b="1" dirty="0">
+                          <a:solidFill>
+                            <a:srgbClr val="22303A"/>
+                          </a:solidFill>
+                          <a:latin typeface="Times New Roman"/>
+                        </a:rPr>
+                        <a:t>3 ×</a:t>
+                      </a:r>
+                      <a:r>
+                        <a:rPr lang="en-US" sz="1050" b="0" dirty="0">
+                          <a:solidFill>
+                            <a:srgbClr val="22303A"/>
+                          </a:solidFill>
+                          <a:latin typeface="Times New Roman"/>
+                        </a:rPr>
+                        <a:t> {Conv(32/64/128, k=3, p=1)  –  ReLU  –  AvgPool2d(k=2)  –  Dropout(0.5)}</a:t>
+                      </a:r>
+                    </a:p>
+                    <a:p>
+                      <a:pPr algn="ctr"/>
+                      <a:r>
+                        <a:rPr lang="en-US" sz="1050" b="1" dirty="0">
+                          <a:solidFill>
+                            <a:srgbClr val="22303A"/>
+                          </a:solidFill>
+                          <a:latin typeface="Times New Roman"/>
+                        </a:rPr>
+                        <a:t>2 ×</a:t>
+                      </a:r>
+                      <a:r>
+                        <a:rPr lang="en-US" sz="1050" b="0" dirty="0">
+                          <a:solidFill>
+                            <a:srgbClr val="22303A"/>
+                          </a:solidFill>
+                          <a:latin typeface="Times New Roman"/>
+                        </a:rPr>
+                        <a:t> {BiLSTM(128/64, bidirectional)  –  ReLU  –  Dropout(0.5)}</a:t>
+                      </a:r>
+                    </a:p>
+                    <a:p>
+                      <a:pPr algn="ctr"/>
+                      <a:r>
+                        <a:rPr lang="en-US" sz="1050" b="1" dirty="0">
+                          <a:solidFill>
+                            <a:srgbClr val="22303A"/>
+                          </a:solidFill>
+                          <a:latin typeface="Times New Roman"/>
+                        </a:rPr>
+                        <a:t>1 ×</a:t>
+                      </a:r>
+                      <a:r>
+                        <a:rPr lang="en-US" sz="1050" b="0" dirty="0">
+                          <a:solidFill>
+                            <a:srgbClr val="22303A"/>
+                          </a:solidFill>
+                          <a:latin typeface="Times New Roman"/>
+                        </a:rPr>
+                        <a:t> {Linear(128→256)  –  ReLU  –  Dropout(0.5)}</a:t>
+                      </a:r>
+                    </a:p>
+                    <a:p>
+                      <a:pPr algn="ctr"/>
+                      <a:r>
+                        <a:rPr lang="en-US" sz="1050" b="1" dirty="0">
+                          <a:solidFill>
+                            <a:srgbClr val="22303A"/>
+                          </a:solidFill>
+                          <a:latin typeface="Times New Roman"/>
+                        </a:rPr>
+                        <a:t>1 ×</a:t>
+                      </a:r>
+                      <a:r>
+                        <a:rPr lang="en-US" sz="1050" b="0" dirty="0">
+                          <a:solidFill>
+                            <a:srgbClr val="22303A"/>
+                          </a:solidFill>
+                          <a:latin typeface="Times New Roman"/>
+                        </a:rPr>
+                        <a:t> {Linear(256→1)}</a:t>
+                      </a:r>
+                    </a:p>
+                  </a:txBody>
+                  <a:tcPr marL="100000" marR="100000" marT="55000" marB="55000" anchor="ctr">
+                    <a:solidFill>
+                      <a:srgbClr val="FFFFFF"/>
+                    </a:solidFill>
+                  </a:tcPr>
+                </a:tc>
+              </a:tr>
+            </a:tbl>
+          </a:graphicData>
+        </a:graphic>
+      </p:graphicFrame>
+      <p:sp>
+        <p:nvSpPr>
+          <p:cNvPr id="9" name="TextBox 8"/>
+          <p:cNvSpPr txBox="1"/>
+          <p:nvPr/>
+        </p:nvSpPr>
+        <p:spPr>
+          <a:xfrm>
+            <a:off x="685800" y="6940000"/>
+            <a:ext cx="11406200" cy="260000"/>
+          </a:xfrm>
+          <a:prstGeom prst="rect">
+            <a:avLst/>
+          </a:prstGeom>
+          <a:noFill/>
+        </p:spPr>
+        <p:txBody>
+          <a:bodyPr wrap="square">
+            <a:spAutoFit/>
+          </a:bodyPr>
+          <a:lstStyle/>
+          <a:p>
+            <a:pPr algn="ctr"/>
+            <a:r>
+              <a:rPr sz="800" b="0">
+                <a:solidFill>
+                  <a:srgbClr val="5C6B73"/>
+                </a:solidFill>
+              </a:rPr>
+              <a:t>AP = AvgPool2d(k=2, s=2)   ·   BN = BatchNorm1d   ·   BiLSTM hidden halves each layer (128→64)   ·   bidirectional output = 2 × hidden</a:t>
+            </a:r>
+          </a:p>
+        </p:txBody>
+      </p:sp>
+      <p:sp>
+        <p:nvSpPr>
+          <p:cNvPr id="10" name="TextBox 9"/>
+          <p:cNvSpPr txBox="1"/>
+          <p:nvPr/>
+        </p:nvSpPr>
+        <p:spPr>
+          <a:xfrm>
+            <a:off x="685800" y="6578000"/>
+            <a:ext cx="7000000" cy="250000"/>
+          </a:xfrm>
+          <a:prstGeom prst="rect">
+            <a:avLst/>
+          </a:prstGeom>
+          <a:noFill/>
+        </p:spPr>
+        <p:txBody>
+          <a:bodyPr wrap="square">
+            <a:spAutoFit/>
+          </a:bodyPr>
+          <a:lstStyle/>
+          <a:p>
+            <a:pPr algn="l"/>
+            <a:r>
+              <a:rPr sz="900" b="0">
+                <a:solidFill>
+                  <a:srgbClr val="6B7B85"/>
+                </a:solidFill>
+              </a:rPr>
+              <a:t>Audio Deepfake Detection — DL project</a:t>
+            </a:r>
+          </a:p>
+        </p:txBody>
+      </p:sp>
+      <p:sp>
+        <p:nvSpPr>
+          <p:cNvPr id="11" name="TextBox 10"/>
+          <p:cNvSpPr txBox="1"/>
+          <p:nvPr/>
+        </p:nvSpPr>
+        <p:spPr>
+          <a:xfrm>
+            <a:off x="11542000" y="6578000"/>
+            <a:ext cx="548640" cy="250000"/>
+          </a:xfrm>
+          <a:prstGeom prst="rect">
+            <a:avLst/>
+          </a:prstGeom>
+          <a:noFill/>
+        </p:spPr>
+        <p:txBody>
+          <a:bodyPr wrap="square">
+            <a:spAutoFit/>
+          </a:bodyPr>
+          <a:lstStyle/>
+          <a:p>
+            <a:pPr algn="r"/>
+            <a:r>
+              <a:rPr sz="900" b="0">
+                <a:solidFill>
+                  <a:srgbClr val="6B7B85"/>
+                </a:solidFill>
+              </a:rPr>
+              <a:t>5</a:t>
+            </a:r>
+          </a:p>
+        </p:txBody>
+      </p:sp>
+    </p:spTree>
+    <p:extLst>
+      <p:ext uri="{BB962C8B-B14F-4D97-AF65-F5344CB8AC3E}">
+        <p14:creationId xmlns:p14="http://schemas.microsoft.com/office/powerpoint/2010/main" val="3246663384"/>
+      </p:ext>
+    </p:extLst>
+  </p:cSld>
+  <p:clrMapOvr>
+    <a:masterClrMapping/>
+  </p:clrMapOvr>
+</p:sld>
+</file>
+
+<file path=ppt/slides/slide6.xml><?xml version="1.0" encoding="utf-8"?>
 <p:sld xmlns:a="http://schemas.openxmlformats.org/drawingml/2006/main" xmlns:r="http://schemas.openxmlformats.org/officeDocument/2006/relationships" xmlns:p="http://schemas.openxmlformats.org/presentationml/2006/main">
   <p:cSld name="Slide 5">
     <p:bg>
@@ -9522,7 +10308,7 @@
 </p:sld>
 </file>
 
-<file path=ppt/slides/slide6.xml><?xml version="1.0" encoding="utf-8"?>
+<file path=ppt/slides/slide7.xml><?xml version="1.0" encoding="utf-8"?>
 <p:sld xmlns:a="http://schemas.openxmlformats.org/drawingml/2006/main" xmlns:r="http://schemas.openxmlformats.org/officeDocument/2006/relationships" xmlns:p="http://schemas.openxmlformats.org/presentationml/2006/main">
   <p:cSld name="Slide 6">
     <p:bg>
@@ -9700,18 +10486,7 @@
                 <a:ea typeface="Calibri" pitchFamily="34" charset="-122"/>
                 <a:cs typeface="Calibri" pitchFamily="34" charset="-120"/>
               </a:rPr>
-              <a:t>Best AUC ≈ 0.87 / acc ≈ 0.83, and the best fake recall </a:t>
-            </a:r>
-            <a:r>
-              <a:rPr lang="en-US" sz="1400" dirty="0">
-                <a:solidFill>
-                  <a:srgbClr val="22303A"/>
-                </a:solidFill>
-                <a:latin typeface="Calibri" pitchFamily="34" charset="0"/>
-                <a:ea typeface="Calibri" pitchFamily="34" charset="-122"/>
-                <a:cs typeface="Calibri" pitchFamily="34" charset="-120"/>
-              </a:rPr>
-              <a:t>≈ 72</a:t>
+              <a:t>Best AUC ≈ 0.87 / acc ≈ 0.83, and the best fake recall ≈ 72</a:t>
             </a:r>
             <a:r>
               <a:rPr lang="en-US" sz="1400" dirty="0" smtClean="0">
@@ -10243,7 +11018,7 @@
 </p:sld>
 </file>
 
-<file path=ppt/slides/slide7.xml><?xml version="1.0" encoding="utf-8"?>
+<file path=ppt/slides/slide8.xml><?xml version="1.0" encoding="utf-8"?>
 <p:sld xmlns:a="http://schemas.openxmlformats.org/drawingml/2006/main" xmlns:r="http://schemas.openxmlformats.org/officeDocument/2006/relationships" xmlns:p="http://schemas.openxmlformats.org/presentationml/2006/main">
   <p:cSld name="Slide 8">
     <p:bg>
@@ -10884,7 +11659,7 @@
 </p:sld>
 </file>
 
-<file path=ppt/slides/slide8.xml><?xml version="1.0" encoding="utf-8"?>
+<file path=ppt/slides/slide9.xml><?xml version="1.0" encoding="utf-8"?>
 <p:sld xmlns:a="http://schemas.openxmlformats.org/drawingml/2006/main" xmlns:r="http://schemas.openxmlformats.org/officeDocument/2006/relationships" xmlns:p="http://schemas.openxmlformats.org/presentationml/2006/main">
   <p:cSld name="Slide 7">
     <p:bg>
@@ -11502,639 +12277,6 @@
           <a:xfrm>
             <a:off x="319628" y="1463040"/>
             <a:ext cx="7794642" cy="4189620"/>
-          </a:xfrm>
-          <a:prstGeom prst="rect">
-            <a:avLst/>
-          </a:prstGeom>
-        </p:spPr>
-      </p:pic>
-    </p:spTree>
-  </p:cSld>
-  <p:clrMapOvr>
-    <a:masterClrMapping/>
-  </p:clrMapOvr>
-</p:sld>
-</file>
-
-<file path=ppt/slides/slide9.xml><?xml version="1.0" encoding="utf-8"?>
-<p:sld xmlns:a="http://schemas.openxmlformats.org/drawingml/2006/main" xmlns:r="http://schemas.openxmlformats.org/officeDocument/2006/relationships" xmlns:p="http://schemas.openxmlformats.org/presentationml/2006/main">
-  <p:cSld name="Slide 9">
-    <p:bg>
-      <p:bgPr>
-        <a:solidFill>
-          <a:srgbClr val="FFFFFF"/>
-        </a:solidFill>
-        <a:effectLst/>
-      </p:bgPr>
-    </p:bg>
-    <p:spTree>
-      <p:nvGrpSpPr>
-        <p:cNvPr id="1" name=""/>
-        <p:cNvGrpSpPr/>
-        <p:nvPr/>
-      </p:nvGrpSpPr>
-      <p:grpSpPr>
-        <a:xfrm>
-          <a:off x="0" y="0"/>
-          <a:ext cx="0" cy="0"/>
-          <a:chOff x="0" y="0"/>
-          <a:chExt cx="0" cy="0"/>
-        </a:xfrm>
-      </p:grpSpPr>
-      <p:sp>
-        <p:nvSpPr>
-          <p:cNvPr id="2" name="Shape 0"/>
-          <p:cNvSpPr/>
-          <p:nvPr/>
-        </p:nvSpPr>
-        <p:spPr>
-          <a:xfrm>
-            <a:off x="548640" y="566928"/>
-            <a:ext cx="146304" cy="457200"/>
-          </a:xfrm>
-          <a:prstGeom prst="rect">
-            <a:avLst/>
-          </a:prstGeom>
-          <a:solidFill>
-            <a:srgbClr val="0E9594"/>
-          </a:solidFill>
-          <a:ln/>
-        </p:spPr>
-        <p:txBody>
-          <a:bodyPr/>
-          <a:lstStyle/>
-          <a:p>
-            <a:endParaRPr/>
-          </a:p>
-        </p:txBody>
-      </p:sp>
-      <p:sp>
-        <p:nvSpPr>
-          <p:cNvPr id="3" name="Text 1"/>
-          <p:cNvSpPr/>
-          <p:nvPr/>
-        </p:nvSpPr>
-        <p:spPr>
-          <a:xfrm>
-            <a:off x="822960" y="310896"/>
-            <a:ext cx="10515600" cy="292608"/>
-          </a:xfrm>
-          <a:prstGeom prst="rect">
-            <a:avLst/>
-          </a:prstGeom>
-          <a:noFill/>
-          <a:ln/>
-        </p:spPr>
-        <p:txBody>
-          <a:bodyPr wrap="square" lIns="0" tIns="0" rIns="0" bIns="0" rtlCol="0" anchor="ctr"/>
-          <a:lstStyle/>
-          <a:p>
-            <a:pPr marL="0" indent="0">
-              <a:buNone/>
-            </a:pPr>
-            <a:r>
-              <a:rPr lang="en-US" sz="1200" b="1" kern="0" spc="200" dirty="0">
-                <a:solidFill>
-                  <a:srgbClr val="0E9594"/>
-                </a:solidFill>
-                <a:latin typeface="Trebuchet MS" pitchFamily="34" charset="0"/>
-                <a:ea typeface="Trebuchet MS" pitchFamily="34" charset="-122"/>
-                <a:cs typeface="Trebuchet MS" pitchFamily="34" charset="-120"/>
-              </a:rPr>
-              <a:t>ARCHITECTURE 4 · WAVLM</a:t>
-            </a:r>
-            <a:endParaRPr lang="en-US" sz="1200" dirty="0"/>
-          </a:p>
-        </p:txBody>
-      </p:sp>
-      <p:sp>
-        <p:nvSpPr>
-          <p:cNvPr id="4" name="Text 2"/>
-          <p:cNvSpPr/>
-          <p:nvPr/>
-        </p:nvSpPr>
-        <p:spPr>
-          <a:xfrm>
-            <a:off x="822960" y="566928"/>
-            <a:ext cx="10789920" cy="640080"/>
-          </a:xfrm>
-          <a:prstGeom prst="rect">
-            <a:avLst/>
-          </a:prstGeom>
-          <a:noFill/>
-          <a:ln/>
-        </p:spPr>
-        <p:txBody>
-          <a:bodyPr wrap="square" lIns="0" tIns="0" rIns="0" bIns="0" rtlCol="0" anchor="ctr"/>
-          <a:lstStyle/>
-          <a:p>
-            <a:pPr marL="0" indent="0">
-              <a:buNone/>
-            </a:pPr>
-            <a:r>
-              <a:rPr lang="en-US" sz="2800" b="1" dirty="0">
-                <a:solidFill>
-                  <a:srgbClr val="22303A"/>
-                </a:solidFill>
-                <a:latin typeface="Trebuchet MS" pitchFamily="34" charset="0"/>
-                <a:ea typeface="Trebuchet MS" pitchFamily="34" charset="-122"/>
-                <a:cs typeface="Trebuchet MS" pitchFamily="34" charset="-120"/>
-              </a:rPr>
-              <a:t>The spoofing cue lives in an early-to-mid layer</a:t>
-            </a:r>
-            <a:endParaRPr lang="en-US" sz="2800" dirty="0"/>
-          </a:p>
-        </p:txBody>
-      </p:sp>
-      <p:sp>
-        <p:nvSpPr>
-          <p:cNvPr id="6" name="Text 3"/>
-          <p:cNvSpPr/>
-          <p:nvPr/>
-        </p:nvSpPr>
-        <p:spPr>
-          <a:xfrm>
-            <a:off x="7955280" y="1691640"/>
-            <a:ext cx="3779215" cy="4206240"/>
-          </a:xfrm>
-          <a:prstGeom prst="rect">
-            <a:avLst/>
-          </a:prstGeom>
-          <a:noFill/>
-          <a:ln/>
-        </p:spPr>
-        <p:txBody>
-          <a:bodyPr wrap="square" rtlCol="0" anchor="t"/>
-          <a:lstStyle/>
-          <a:p>
-            <a:pPr marL="342900" indent="-342900">
-              <a:spcAft>
-                <a:spcPts val="900"/>
-              </a:spcAft>
-              <a:buSzPct val="100000"/>
-              <a:buChar char="•"/>
-            </a:pPr>
-            <a:r>
-              <a:rPr lang="en-US" sz="1400" dirty="0">
-                <a:solidFill>
-                  <a:srgbClr val="22303A"/>
-                </a:solidFill>
-                <a:latin typeface="Calibri" pitchFamily="34" charset="0"/>
-                <a:ea typeface="Calibri" pitchFamily="34" charset="-122"/>
-                <a:cs typeface="Calibri" pitchFamily="34" charset="-120"/>
-              </a:rPr>
-              <a:t>Frozen </a:t>
-            </a:r>
-            <a:r>
-              <a:rPr lang="en-US" sz="1400" dirty="0" smtClean="0">
-                <a:solidFill>
-                  <a:srgbClr val="22303A"/>
-                </a:solidFill>
-                <a:latin typeface="Calibri" pitchFamily="34" charset="0"/>
-                <a:ea typeface="Calibri" pitchFamily="34" charset="-122"/>
-                <a:cs typeface="Calibri" pitchFamily="34" charset="-120"/>
-              </a:rPr>
-              <a:t>backbone </a:t>
-            </a:r>
-            <a:r>
-              <a:rPr lang="en-US" sz="1400" dirty="0">
-                <a:solidFill>
-                  <a:srgbClr val="22303A"/>
-                </a:solidFill>
-                <a:latin typeface="Calibri" pitchFamily="34" charset="0"/>
-                <a:ea typeface="Calibri" pitchFamily="34" charset="-122"/>
-                <a:cs typeface="Calibri" pitchFamily="34" charset="-120"/>
-              </a:rPr>
-              <a:t>= weighted sum over hidden layers + linear head.</a:t>
-            </a:r>
-            <a:endParaRPr lang="en-US" sz="1400" dirty="0"/>
-          </a:p>
-          <a:p>
-            <a:pPr marL="342900" indent="-342900">
-              <a:spcAft>
-                <a:spcPts val="900"/>
-              </a:spcAft>
-              <a:buSzPct val="100000"/>
-              <a:buChar char="•"/>
-            </a:pPr>
-            <a:r>
-              <a:rPr lang="en-US" sz="1400" dirty="0">
-                <a:solidFill>
-                  <a:srgbClr val="22303A"/>
-                </a:solidFill>
-                <a:latin typeface="Calibri" pitchFamily="34" charset="0"/>
-                <a:ea typeface="Calibri" pitchFamily="34" charset="-122"/>
-                <a:cs typeface="Calibri" pitchFamily="34" charset="-120"/>
-              </a:rPr>
-              <a:t>~81% of weight on layer 3 of </a:t>
-            </a:r>
-            <a:r>
-              <a:rPr lang="en-US" sz="1400" dirty="0" smtClean="0">
-                <a:solidFill>
-                  <a:srgbClr val="22303A"/>
-                </a:solidFill>
-                <a:latin typeface="Calibri" pitchFamily="34" charset="0"/>
-                <a:ea typeface="Calibri" pitchFamily="34" charset="-122"/>
-                <a:cs typeface="Calibri" pitchFamily="34" charset="-120"/>
-              </a:rPr>
-              <a:t>12, </a:t>
-            </a:r>
-            <a:r>
-              <a:rPr lang="en-US" sz="1400" dirty="0">
-                <a:solidFill>
-                  <a:srgbClr val="22303A"/>
-                </a:solidFill>
-                <a:latin typeface="Calibri" pitchFamily="34" charset="0"/>
-                <a:ea typeface="Calibri" pitchFamily="34" charset="-122"/>
-                <a:cs typeface="Calibri" pitchFamily="34" charset="-120"/>
-              </a:rPr>
-              <a:t>the top layer is nearly ignored.</a:t>
-            </a:r>
-            <a:endParaRPr lang="en-US" sz="1400" dirty="0"/>
-          </a:p>
-          <a:p>
-            <a:pPr marL="342900" indent="-342900">
-              <a:spcAft>
-                <a:spcPts val="900"/>
-              </a:spcAft>
-              <a:buSzPct val="100000"/>
-              <a:buChar char="•"/>
-            </a:pPr>
-            <a:r>
-              <a:rPr lang="en-US" sz="1400" dirty="0">
-                <a:solidFill>
-                  <a:srgbClr val="22303A"/>
-                </a:solidFill>
-                <a:latin typeface="Calibri" pitchFamily="34" charset="0"/>
-                <a:ea typeface="Calibri" pitchFamily="34" charset="-122"/>
-                <a:cs typeface="Calibri" pitchFamily="34" charset="-120"/>
-              </a:rPr>
-              <a:t>A 13-layer variant (incl. CNN embedding) agrees — same block.</a:t>
-            </a:r>
-            <a:endParaRPr lang="en-US" sz="1400" dirty="0"/>
-          </a:p>
-          <a:p>
-            <a:pPr marL="342900" indent="-342900">
-              <a:spcAft>
-                <a:spcPts val="900"/>
-              </a:spcAft>
-              <a:buSzPct val="100000"/>
-              <a:buChar char="•"/>
-            </a:pPr>
-            <a:r>
-              <a:rPr lang="en-US" sz="1400" dirty="0">
-                <a:solidFill>
-                  <a:srgbClr val="22303A"/>
-                </a:solidFill>
-                <a:latin typeface="Calibri" pitchFamily="34" charset="0"/>
-                <a:ea typeface="Calibri" pitchFamily="34" charset="-122"/>
-                <a:cs typeface="Calibri" pitchFamily="34" charset="-120"/>
-              </a:rPr>
-              <a:t>Upper layers specialise for content; mid layers keep the acoustic artefacts.</a:t>
-            </a:r>
-            <a:endParaRPr lang="en-US" sz="1400" dirty="0"/>
-          </a:p>
-          <a:p>
-            <a:endParaRPr lang="en-US" sz="1400" dirty="0"/>
-          </a:p>
-          <a:p>
-            <a:endParaRPr lang="en-US" sz="1400" dirty="0"/>
-          </a:p>
-          <a:p>
-            <a:r>
-              <a:rPr lang="en-US" sz="950" b="1" dirty="0">
-                <a:solidFill>
-                  <a:srgbClr val="0E9594"/>
-                </a:solidFill>
-              </a:rPr>
-              <a:t>Frozen </a:t>
-            </a:r>
-            <a:r>
-              <a:rPr lang="en-US" sz="950" b="1" dirty="0" smtClean="0">
-                <a:solidFill>
-                  <a:srgbClr val="0E9594"/>
-                </a:solidFill>
-              </a:rPr>
-              <a:t>backbone </a:t>
-            </a:r>
-            <a:r>
-              <a:rPr lang="en-US" sz="950" b="1" dirty="0" err="1">
-                <a:solidFill>
-                  <a:srgbClr val="0E9594"/>
-                </a:solidFill>
-              </a:rPr>
-              <a:t>config</a:t>
-            </a:r>
-            <a:endParaRPr lang="en-US" sz="950" b="1" dirty="0">
-              <a:solidFill>
-                <a:srgbClr val="0E9594"/>
-              </a:solidFill>
-            </a:endParaRPr>
-          </a:p>
-          <a:p>
-            <a:r>
-              <a:rPr lang="en-US" sz="900" dirty="0">
-                <a:solidFill>
-                  <a:srgbClr val="5C6B73"/>
-                </a:solidFill>
-              </a:rPr>
-              <a:t>Aggregation: </a:t>
-            </a:r>
-            <a:r>
-              <a:rPr lang="en-US" sz="900" dirty="0" err="1">
-                <a:solidFill>
-                  <a:srgbClr val="22303A"/>
-                </a:solidFill>
-              </a:rPr>
-              <a:t>Softmax</a:t>
-            </a:r>
-            <a:r>
-              <a:rPr lang="en-US" sz="900" dirty="0">
-                <a:solidFill>
-                  <a:srgbClr val="22303A"/>
-                </a:solidFill>
-              </a:rPr>
-              <a:t>-weighted sum, 12 layers</a:t>
-            </a:r>
-          </a:p>
-          <a:p>
-            <a:r>
-              <a:rPr lang="en-US" sz="900" dirty="0">
-                <a:solidFill>
-                  <a:srgbClr val="5C6B73"/>
-                </a:solidFill>
-              </a:rPr>
-              <a:t>Dominant layer: </a:t>
-            </a:r>
-            <a:r>
-              <a:rPr lang="en-US" sz="900" dirty="0">
-                <a:solidFill>
-                  <a:srgbClr val="22303A"/>
-                </a:solidFill>
-              </a:rPr>
-              <a:t>Layer 3 of 12  (~81% weight)</a:t>
-            </a:r>
-          </a:p>
-          <a:p>
-            <a:r>
-              <a:rPr lang="en-US" sz="900" dirty="0">
-                <a:solidFill>
-                  <a:srgbClr val="5C6B73"/>
-                </a:solidFill>
-              </a:rPr>
-              <a:t>Trainable </a:t>
-            </a:r>
-            <a:r>
-              <a:rPr lang="en-US" sz="900" dirty="0" err="1">
-                <a:solidFill>
-                  <a:srgbClr val="5C6B73"/>
-                </a:solidFill>
-              </a:rPr>
-              <a:t>params</a:t>
-            </a:r>
-            <a:r>
-              <a:rPr lang="en-US" sz="900" dirty="0">
-                <a:solidFill>
-                  <a:srgbClr val="5C6B73"/>
-                </a:solidFill>
-              </a:rPr>
-              <a:t>: </a:t>
-            </a:r>
-            <a:r>
-              <a:rPr lang="en-US" sz="900" dirty="0">
-                <a:solidFill>
-                  <a:srgbClr val="22303A"/>
-                </a:solidFill>
-              </a:rPr>
-              <a:t>~5K  (head only)</a:t>
-            </a:r>
-          </a:p>
-          <a:p>
-            <a:r>
-              <a:rPr lang="en-US" sz="900" b="1" dirty="0">
-                <a:solidFill>
-                  <a:srgbClr val="0E9594"/>
-                </a:solidFill>
-              </a:rPr>
-              <a:t>AUC 0.918  |  fake-recall 57%</a:t>
-            </a:r>
-          </a:p>
-          <a:p>
-            <a:endParaRPr lang="en-US" sz="900" b="1" dirty="0">
-              <a:solidFill>
-                <a:srgbClr val="0E9594"/>
-              </a:solidFill>
-            </a:endParaRPr>
-          </a:p>
-          <a:p>
-            <a:r>
-              <a:rPr lang="en-US" sz="950" b="1" dirty="0">
-                <a:solidFill>
-                  <a:srgbClr val="C9971B"/>
-                </a:solidFill>
-              </a:rPr>
-              <a:t>Fine-tune best </a:t>
-            </a:r>
-            <a:r>
-              <a:rPr lang="en-US" sz="950" b="1" dirty="0" err="1">
-                <a:solidFill>
-                  <a:srgbClr val="C9971B"/>
-                </a:solidFill>
-              </a:rPr>
-              <a:t>config</a:t>
-            </a:r>
-            <a:endParaRPr lang="en-US" sz="950" b="1" dirty="0">
-              <a:solidFill>
-                <a:srgbClr val="C9971B"/>
-              </a:solidFill>
-            </a:endParaRPr>
-          </a:p>
-          <a:p>
-            <a:r>
-              <a:rPr lang="en-US" sz="900" dirty="0">
-                <a:solidFill>
-                  <a:srgbClr val="5C6B73"/>
-                </a:solidFill>
-              </a:rPr>
-              <a:t>Unfrozen layers: </a:t>
-            </a:r>
-            <a:r>
-              <a:rPr lang="en-US" sz="900" dirty="0">
-                <a:solidFill>
-                  <a:srgbClr val="22303A"/>
-                </a:solidFill>
-              </a:rPr>
-              <a:t>Top 2 transformer blocks</a:t>
-            </a:r>
-          </a:p>
-          <a:p>
-            <a:r>
-              <a:rPr lang="en-US" sz="900" dirty="0" err="1">
-                <a:solidFill>
-                  <a:srgbClr val="5C6B73"/>
-                </a:solidFill>
-              </a:rPr>
-              <a:t>lr</a:t>
-            </a:r>
-            <a:r>
-              <a:rPr lang="en-US" sz="900" dirty="0">
-                <a:solidFill>
-                  <a:srgbClr val="5C6B73"/>
-                </a:solidFill>
-              </a:rPr>
-              <a:t> backbone / head: </a:t>
-            </a:r>
-            <a:r>
-              <a:rPr lang="en-US" sz="900" dirty="0">
-                <a:solidFill>
-                  <a:srgbClr val="22303A"/>
-                </a:solidFill>
-              </a:rPr>
-              <a:t>1e-5 / 1e-3</a:t>
-            </a:r>
-          </a:p>
-          <a:p>
-            <a:r>
-              <a:rPr lang="en-US" sz="900" dirty="0">
-                <a:solidFill>
-                  <a:srgbClr val="5C6B73"/>
-                </a:solidFill>
-              </a:rPr>
-              <a:t>Batch / </a:t>
-            </a:r>
-            <a:r>
-              <a:rPr lang="en-US" sz="900" dirty="0" err="1">
-                <a:solidFill>
-                  <a:srgbClr val="5C6B73"/>
-                </a:solidFill>
-              </a:rPr>
-              <a:t>wd</a:t>
-            </a:r>
-            <a:r>
-              <a:rPr lang="en-US" sz="900" dirty="0">
-                <a:solidFill>
-                  <a:srgbClr val="5C6B73"/>
-                </a:solidFill>
-              </a:rPr>
-              <a:t>: </a:t>
-            </a:r>
-            <a:r>
-              <a:rPr lang="en-US" sz="900" dirty="0">
-                <a:solidFill>
-                  <a:srgbClr val="22303A"/>
-                </a:solidFill>
-              </a:rPr>
-              <a:t>32 / 0.01</a:t>
-            </a:r>
-          </a:p>
-          <a:p>
-            <a:r>
-              <a:rPr lang="en-US" sz="900" b="1" dirty="0">
-                <a:solidFill>
-                  <a:srgbClr val="C9971B"/>
-                </a:solidFill>
-              </a:rPr>
-              <a:t>AUC 0.865  |  fake-recall 45%  (domain shift)</a:t>
-            </a:r>
-          </a:p>
-        </p:txBody>
-      </p:sp>
-      <p:sp>
-        <p:nvSpPr>
-          <p:cNvPr id="7" name="Text 4"/>
-          <p:cNvSpPr/>
-          <p:nvPr/>
-        </p:nvSpPr>
-        <p:spPr>
-          <a:xfrm>
-            <a:off x="548640" y="6437376"/>
-            <a:ext cx="7315200" cy="274320"/>
-          </a:xfrm>
-          <a:prstGeom prst="rect">
-            <a:avLst/>
-          </a:prstGeom>
-          <a:noFill/>
-          <a:ln/>
-        </p:spPr>
-        <p:txBody>
-          <a:bodyPr wrap="square" lIns="0" tIns="0" rIns="0" bIns="0" rtlCol="0" anchor="ctr"/>
-          <a:lstStyle/>
-          <a:p>
-            <a:pPr marL="0" indent="0">
-              <a:buNone/>
-            </a:pPr>
-            <a:r>
-              <a:rPr lang="en-US" sz="900" dirty="0">
-                <a:solidFill>
-                  <a:srgbClr val="6B7B85"/>
-                </a:solidFill>
-                <a:latin typeface="Calibri" pitchFamily="34" charset="0"/>
-                <a:ea typeface="Calibri" pitchFamily="34" charset="-122"/>
-                <a:cs typeface="Calibri" pitchFamily="34" charset="-120"/>
-              </a:rPr>
-              <a:t>Audio Deepfake Detection — DL project</a:t>
-            </a:r>
-            <a:endParaRPr lang="en-US" sz="900" dirty="0"/>
-          </a:p>
-        </p:txBody>
-      </p:sp>
-      <p:sp>
-        <p:nvSpPr>
-          <p:cNvPr id="8" name="Text 5"/>
-          <p:cNvSpPr/>
-          <p:nvPr/>
-        </p:nvSpPr>
-        <p:spPr>
-          <a:xfrm>
-            <a:off x="11430000" y="6437376"/>
-            <a:ext cx="548640" cy="274320"/>
-          </a:xfrm>
-          <a:prstGeom prst="rect">
-            <a:avLst/>
-          </a:prstGeom>
-          <a:noFill/>
-          <a:ln/>
-        </p:spPr>
-        <p:txBody>
-          <a:bodyPr wrap="square" lIns="0" tIns="0" rIns="0" bIns="0" rtlCol="0" anchor="ctr"/>
-          <a:lstStyle/>
-          <a:p>
-            <a:pPr marL="0" indent="0" algn="r">
-              <a:buNone/>
-            </a:pPr>
-            <a:r>
-              <a:rPr lang="en-US" sz="900" dirty="0">
-                <a:solidFill>
-                  <a:srgbClr val="6B7B85"/>
-                </a:solidFill>
-                <a:latin typeface="Calibri" pitchFamily="34" charset="0"/>
-                <a:ea typeface="Calibri" pitchFamily="34" charset="-122"/>
-                <a:cs typeface="Calibri" pitchFamily="34" charset="-120"/>
-              </a:rPr>
-              <a:t>9</a:t>
-            </a:r>
-            <a:endParaRPr lang="en-US" sz="900" dirty="0"/>
-          </a:p>
-        </p:txBody>
-      </p:sp>
-      <p:pic>
-        <p:nvPicPr>
-          <p:cNvPr id="9" name="Picture 8" descr="fig_wavlm_layers.png"/>
-          <p:cNvPicPr>
-            <a:picLocks noChangeAspect="1"/>
-          </p:cNvPicPr>
-          <p:nvPr/>
-        </p:nvPicPr>
-        <p:blipFill>
-          <a:blip r:embed="rId3"/>
-          <a:stretch>
-            <a:fillRect/>
-          </a:stretch>
-        </p:blipFill>
-        <p:spPr>
-          <a:xfrm>
-            <a:off x="731520" y="1828800"/>
-            <a:ext cx="6949440" cy="3474720"/>
           </a:xfrm>
           <a:prstGeom prst="rect">
             <a:avLst/>
